--- a/ВКР/ВКР.pptx
+++ b/ВКР/ВКР.pptx
@@ -25,6 +25,11 @@
     <p:embeddedFont>
       <p:font typeface="Abadi" panose="020B0604020104020204" pitchFamily="34" charset="0"/>
       <p:regular r:id="rId13"/>
+    </p:embeddedFont>
+    <p:embeddedFont>
+      <p:font typeface="Fira Code" panose="020B0809050000020004" pitchFamily="49" charset="0"/>
+      <p:regular r:id="rId14"/>
+      <p:bold r:id="rId15"/>
     </p:embeddedFont>
   </p:embeddedFontLst>
   <p:defaultTextStyle>
@@ -276,6 +281,6171 @@
     </p:extLst>
   </p:cmAuthor>
 </p:cmAuthorLst>
+</file>
+
+<file path=ppt/charts/chart1.xml><?xml version="1.0" encoding="utf-8"?>
+<c:chartSpace xmlns:c="http://schemas.openxmlformats.org/drawingml/2006/chart" xmlns:a="http://schemas.openxmlformats.org/drawingml/2006/main" xmlns:r="http://schemas.openxmlformats.org/officeDocument/2006/relationships" xmlns:c16r2="http://schemas.microsoft.com/office/drawing/2015/06/chart">
+  <c:date1904 val="0"/>
+  <c:lang val="ru-RU"/>
+  <c:roundedCorners val="0"/>
+  <mc:AlternateContent xmlns:mc="http://schemas.openxmlformats.org/markup-compatibility/2006">
+    <mc:Choice xmlns:c14="http://schemas.microsoft.com/office/drawing/2007/8/2/chart" Requires="c14">
+      <c14:style val="101"/>
+    </mc:Choice>
+    <mc:Fallback>
+      <c:style val="1"/>
+    </mc:Fallback>
+  </mc:AlternateContent>
+  <c:chart>
+    <c:title>
+      <c:tx>
+        <c:rich>
+          <a:bodyPr rot="0" spcFirstLastPara="1" vertOverflow="ellipsis" vert="horz" wrap="square" anchor="ctr" anchorCtr="1"/>
+          <a:lstStyle/>
+          <a:p>
+            <a:pPr>
+              <a:defRPr sz="1400" b="0" i="0" u="none" strike="noStrike" kern="1200" spc="0" baseline="0">
+                <a:solidFill>
+                  <a:schemeClr val="tx1">
+                    <a:lumMod val="65000"/>
+                    <a:lumOff val="35000"/>
+                  </a:schemeClr>
+                </a:solidFill>
+                <a:latin typeface="+mn-lt"/>
+                <a:ea typeface="+mn-ea"/>
+                <a:cs typeface="+mn-cs"/>
+              </a:defRPr>
+            </a:pPr>
+            <a:r>
+              <a:rPr lang="ru-RU" sz="1800" b="0" i="0" dirty="0">
+                <a:effectLst/>
+              </a:rPr>
+              <a:t>Во сколько раз разработанные алгоритмы быстрее наивного</a:t>
+            </a:r>
+            <a:endParaRPr lang="ru-RU" dirty="0">
+              <a:effectLst/>
+            </a:endParaRPr>
+          </a:p>
+        </c:rich>
+      </c:tx>
+      <c:overlay val="0"/>
+      <c:spPr>
+        <a:noFill/>
+        <a:ln>
+          <a:noFill/>
+        </a:ln>
+        <a:effectLst/>
+      </c:spPr>
+      <c:txPr>
+        <a:bodyPr rot="0" spcFirstLastPara="1" vertOverflow="ellipsis" vert="horz" wrap="square" anchor="ctr" anchorCtr="1"/>
+        <a:lstStyle/>
+        <a:p>
+          <a:pPr>
+            <a:defRPr sz="1400" b="0" i="0" u="none" strike="noStrike" kern="1200" spc="0" baseline="0">
+              <a:solidFill>
+                <a:schemeClr val="tx1">
+                  <a:lumMod val="65000"/>
+                  <a:lumOff val="35000"/>
+                </a:schemeClr>
+              </a:solidFill>
+              <a:latin typeface="+mn-lt"/>
+              <a:ea typeface="+mn-ea"/>
+              <a:cs typeface="+mn-cs"/>
+            </a:defRPr>
+          </a:pPr>
+          <a:endParaRPr lang="ru-RU"/>
+        </a:p>
+      </c:txPr>
+    </c:title>
+    <c:autoTitleDeleted val="0"/>
+    <c:plotArea>
+      <c:layout/>
+      <c:barChart>
+        <c:barDir val="col"/>
+        <c:grouping val="clustered"/>
+        <c:varyColors val="0"/>
+        <c:ser>
+          <c:idx val="1"/>
+          <c:order val="0"/>
+          <c:tx>
+            <c:strRef>
+              <c:f>SUM!$D$17</c:f>
+              <c:strCache>
+                <c:ptCount val="1"/>
+                <c:pt idx="0">
+                  <c:v>Мин</c:v>
+                </c:pt>
+              </c:strCache>
+            </c:strRef>
+          </c:tx>
+          <c:spPr>
+            <a:solidFill>
+              <a:srgbClr val="009999"/>
+            </a:solidFill>
+            <a:ln>
+              <a:noFill/>
+            </a:ln>
+            <a:effectLst/>
+          </c:spPr>
+          <c:invertIfNegative val="0"/>
+          <c:dLbls>
+            <c:numFmt formatCode="#,##0.0" sourceLinked="0"/>
+            <c:spPr>
+              <a:noFill/>
+              <a:ln>
+                <a:noFill/>
+              </a:ln>
+              <a:effectLst/>
+            </c:spPr>
+            <c:txPr>
+              <a:bodyPr rot="-5400000" spcFirstLastPara="1" vertOverflow="ellipsis" wrap="square" lIns="38100" tIns="19050" rIns="38100" bIns="19050" anchor="ctr" anchorCtr="1">
+                <a:spAutoFit/>
+              </a:bodyPr>
+              <a:lstStyle/>
+              <a:p>
+                <a:pPr>
+                  <a:defRPr sz="900" b="0" i="0" u="none" strike="noStrike" kern="1200" baseline="0">
+                    <a:solidFill>
+                      <a:schemeClr val="tx1">
+                        <a:lumMod val="75000"/>
+                        <a:lumOff val="25000"/>
+                      </a:schemeClr>
+                    </a:solidFill>
+                    <a:latin typeface="+mn-lt"/>
+                    <a:ea typeface="+mn-ea"/>
+                    <a:cs typeface="+mn-cs"/>
+                  </a:defRPr>
+                </a:pPr>
+                <a:endParaRPr lang="ru-RU"/>
+              </a:p>
+            </c:txPr>
+            <c:dLblPos val="outEnd"/>
+            <c:showLegendKey val="0"/>
+            <c:showVal val="1"/>
+            <c:showCatName val="0"/>
+            <c:showSerName val="0"/>
+            <c:showPercent val="0"/>
+            <c:showBubbleSize val="0"/>
+            <c:showLeaderLines val="0"/>
+            <c:extLst>
+              <c:ext xmlns:c15="http://schemas.microsoft.com/office/drawing/2012/chart" uri="{CE6537A1-D6FC-4f65-9D91-7224C49458BB}">
+                <c15:showLeaderLines val="1"/>
+                <c15:leaderLines>
+                  <c:spPr>
+                    <a:ln w="9525" cap="flat" cmpd="sng" algn="ctr">
+                      <a:solidFill>
+                        <a:schemeClr val="tx1">
+                          <a:lumMod val="35000"/>
+                          <a:lumOff val="65000"/>
+                        </a:schemeClr>
+                      </a:solidFill>
+                      <a:round/>
+                    </a:ln>
+                    <a:effectLst/>
+                  </c:spPr>
+                </c15:leaderLines>
+              </c:ext>
+            </c:extLst>
+          </c:dLbls>
+          <c:cat>
+            <c:strRef>
+              <c:f>(SUM!$A$68,SUM!$A$70:$A$73)</c:f>
+              <c:strCache>
+                <c:ptCount val="5"/>
+                <c:pt idx="0">
+                  <c:v>Скалярное</c:v>
+                </c:pt>
+                <c:pt idx="1">
+                  <c:v>Скалярное опт.</c:v>
+                </c:pt>
+                <c:pt idx="2">
+                  <c:v>SSE</c:v>
+                </c:pt>
+                <c:pt idx="3">
+                  <c:v>SSE 2</c:v>
+                </c:pt>
+                <c:pt idx="4">
+                  <c:v>AVX</c:v>
+                </c:pt>
+              </c:strCache>
+              <c:extLst/>
+            </c:strRef>
+          </c:cat>
+          <c:val>
+            <c:numRef>
+              <c:f>(SUM!$D$68,SUM!$D$70:$D$73)</c:f>
+              <c:numCache>
+                <c:formatCode>0.00</c:formatCode>
+                <c:ptCount val="5"/>
+                <c:pt idx="0">
+                  <c:v>25.969579278467741</c:v>
+                </c:pt>
+                <c:pt idx="1">
+                  <c:v>26.077018891426199</c:v>
+                </c:pt>
+                <c:pt idx="2">
+                  <c:v>2.7575089024889334</c:v>
+                </c:pt>
+                <c:pt idx="3">
+                  <c:v>34.216986088140864</c:v>
+                </c:pt>
+                <c:pt idx="4">
+                  <c:v>85.826354319180084</c:v>
+                </c:pt>
+              </c:numCache>
+              <c:extLst/>
+            </c:numRef>
+          </c:val>
+          <c:extLst>
+            <c:ext xmlns:c16="http://schemas.microsoft.com/office/drawing/2014/chart" uri="{C3380CC4-5D6E-409C-BE32-E72D297353CC}">
+              <c16:uniqueId val="{00000000-CC12-428A-8F7E-F82A54E336EF}"/>
+            </c:ext>
+          </c:extLst>
+        </c:ser>
+        <c:ser>
+          <c:idx val="3"/>
+          <c:order val="1"/>
+          <c:tx>
+            <c:strRef>
+              <c:f>SUM!$F$17</c:f>
+              <c:strCache>
+                <c:ptCount val="1"/>
+                <c:pt idx="0">
+                  <c:v>0,01%</c:v>
+                </c:pt>
+              </c:strCache>
+            </c:strRef>
+          </c:tx>
+          <c:spPr>
+            <a:solidFill>
+              <a:srgbClr val="6666FF"/>
+            </a:solidFill>
+            <a:ln>
+              <a:noFill/>
+            </a:ln>
+            <a:effectLst/>
+          </c:spPr>
+          <c:invertIfNegative val="0"/>
+          <c:dLbls>
+            <c:numFmt formatCode="#,##0.0" sourceLinked="0"/>
+            <c:spPr>
+              <a:noFill/>
+              <a:ln>
+                <a:noFill/>
+              </a:ln>
+              <a:effectLst/>
+            </c:spPr>
+            <c:txPr>
+              <a:bodyPr rot="-5400000" spcFirstLastPara="1" vertOverflow="ellipsis" wrap="square" lIns="38100" tIns="19050" rIns="38100" bIns="19050" anchor="ctr" anchorCtr="1">
+                <a:spAutoFit/>
+              </a:bodyPr>
+              <a:lstStyle/>
+              <a:p>
+                <a:pPr>
+                  <a:defRPr sz="900" b="0" i="0" u="none" strike="noStrike" kern="1200" baseline="0">
+                    <a:solidFill>
+                      <a:schemeClr val="tx1">
+                        <a:lumMod val="75000"/>
+                        <a:lumOff val="25000"/>
+                      </a:schemeClr>
+                    </a:solidFill>
+                    <a:latin typeface="+mn-lt"/>
+                    <a:ea typeface="+mn-ea"/>
+                    <a:cs typeface="+mn-cs"/>
+                  </a:defRPr>
+                </a:pPr>
+                <a:endParaRPr lang="ru-RU"/>
+              </a:p>
+            </c:txPr>
+            <c:dLblPos val="outEnd"/>
+            <c:showLegendKey val="0"/>
+            <c:showVal val="1"/>
+            <c:showCatName val="0"/>
+            <c:showSerName val="0"/>
+            <c:showPercent val="0"/>
+            <c:showBubbleSize val="0"/>
+            <c:showLeaderLines val="0"/>
+            <c:extLst>
+              <c:ext xmlns:c15="http://schemas.microsoft.com/office/drawing/2012/chart" uri="{CE6537A1-D6FC-4f65-9D91-7224C49458BB}">
+                <c15:showLeaderLines val="1"/>
+                <c15:leaderLines>
+                  <c:spPr>
+                    <a:ln w="9525" cap="flat" cmpd="sng" algn="ctr">
+                      <a:solidFill>
+                        <a:schemeClr val="tx1">
+                          <a:lumMod val="35000"/>
+                          <a:lumOff val="65000"/>
+                        </a:schemeClr>
+                      </a:solidFill>
+                      <a:round/>
+                    </a:ln>
+                    <a:effectLst/>
+                  </c:spPr>
+                </c15:leaderLines>
+              </c:ext>
+            </c:extLst>
+          </c:dLbls>
+          <c:cat>
+            <c:strRef>
+              <c:f>(SUM!$A$68,SUM!$A$70:$A$73)</c:f>
+              <c:strCache>
+                <c:ptCount val="5"/>
+                <c:pt idx="0">
+                  <c:v>Скалярное</c:v>
+                </c:pt>
+                <c:pt idx="1">
+                  <c:v>Скалярное опт.</c:v>
+                </c:pt>
+                <c:pt idx="2">
+                  <c:v>SSE</c:v>
+                </c:pt>
+                <c:pt idx="3">
+                  <c:v>SSE 2</c:v>
+                </c:pt>
+                <c:pt idx="4">
+                  <c:v>AVX</c:v>
+                </c:pt>
+              </c:strCache>
+              <c:extLst/>
+            </c:strRef>
+          </c:cat>
+          <c:val>
+            <c:numRef>
+              <c:f>(SUM!$F$68,SUM!$F$70:$F$73)</c:f>
+              <c:numCache>
+                <c:formatCode>0.00</c:formatCode>
+                <c:ptCount val="5"/>
+                <c:pt idx="0">
+                  <c:v>25.967757712192419</c:v>
+                </c:pt>
+                <c:pt idx="1">
+                  <c:v>26.076875543829804</c:v>
+                </c:pt>
+                <c:pt idx="2">
+                  <c:v>2.7448663066482033</c:v>
+                </c:pt>
+                <c:pt idx="3">
+                  <c:v>34.216693970539893</c:v>
+                </c:pt>
+                <c:pt idx="4">
+                  <c:v>85.822509326259052</c:v>
+                </c:pt>
+              </c:numCache>
+              <c:extLst/>
+            </c:numRef>
+          </c:val>
+          <c:extLst>
+            <c:ext xmlns:c16="http://schemas.microsoft.com/office/drawing/2014/chart" uri="{C3380CC4-5D6E-409C-BE32-E72D297353CC}">
+              <c16:uniqueId val="{00000001-CC12-428A-8F7E-F82A54E336EF}"/>
+            </c:ext>
+          </c:extLst>
+        </c:ser>
+        <c:ser>
+          <c:idx val="6"/>
+          <c:order val="4"/>
+          <c:tx>
+            <c:strRef>
+              <c:f>SUM!$I$17</c:f>
+              <c:strCache>
+                <c:ptCount val="1"/>
+                <c:pt idx="0">
+                  <c:v>50%</c:v>
+                </c:pt>
+              </c:strCache>
+            </c:strRef>
+          </c:tx>
+          <c:spPr>
+            <a:solidFill>
+              <a:srgbClr val="00B0F0"/>
+            </a:solidFill>
+            <a:ln>
+              <a:noFill/>
+            </a:ln>
+            <a:effectLst/>
+          </c:spPr>
+          <c:invertIfNegative val="0"/>
+          <c:dLbls>
+            <c:numFmt formatCode="#,##0.0" sourceLinked="0"/>
+            <c:spPr>
+              <a:noFill/>
+              <a:ln>
+                <a:noFill/>
+              </a:ln>
+              <a:effectLst/>
+            </c:spPr>
+            <c:txPr>
+              <a:bodyPr rot="-5400000" spcFirstLastPara="1" vertOverflow="ellipsis" wrap="square" lIns="38100" tIns="19050" rIns="38100" bIns="19050" anchor="ctr" anchorCtr="1">
+                <a:spAutoFit/>
+              </a:bodyPr>
+              <a:lstStyle/>
+              <a:p>
+                <a:pPr>
+                  <a:defRPr sz="900" b="0" i="0" u="none" strike="noStrike" kern="1200" baseline="0">
+                    <a:solidFill>
+                      <a:schemeClr val="tx1">
+                        <a:lumMod val="75000"/>
+                        <a:lumOff val="25000"/>
+                      </a:schemeClr>
+                    </a:solidFill>
+                    <a:latin typeface="+mn-lt"/>
+                    <a:ea typeface="+mn-ea"/>
+                    <a:cs typeface="+mn-cs"/>
+                  </a:defRPr>
+                </a:pPr>
+                <a:endParaRPr lang="ru-RU"/>
+              </a:p>
+            </c:txPr>
+            <c:dLblPos val="outEnd"/>
+            <c:showLegendKey val="0"/>
+            <c:showVal val="1"/>
+            <c:showCatName val="0"/>
+            <c:showSerName val="0"/>
+            <c:showPercent val="0"/>
+            <c:showBubbleSize val="0"/>
+            <c:showLeaderLines val="0"/>
+            <c:extLst>
+              <c:ext xmlns:c15="http://schemas.microsoft.com/office/drawing/2012/chart" uri="{CE6537A1-D6FC-4f65-9D91-7224C49458BB}">
+                <c15:showLeaderLines val="1"/>
+                <c15:leaderLines>
+                  <c:spPr>
+                    <a:ln w="9525" cap="flat" cmpd="sng" algn="ctr">
+                      <a:solidFill>
+                        <a:schemeClr val="tx1">
+                          <a:lumMod val="35000"/>
+                          <a:lumOff val="65000"/>
+                        </a:schemeClr>
+                      </a:solidFill>
+                      <a:round/>
+                    </a:ln>
+                    <a:effectLst/>
+                  </c:spPr>
+                </c15:leaderLines>
+              </c:ext>
+            </c:extLst>
+          </c:dLbls>
+          <c:cat>
+            <c:strRef>
+              <c:f>(SUM!$A$68,SUM!$A$70:$A$73)</c:f>
+              <c:strCache>
+                <c:ptCount val="5"/>
+                <c:pt idx="0">
+                  <c:v>Скалярное</c:v>
+                </c:pt>
+                <c:pt idx="1">
+                  <c:v>Скалярное опт.</c:v>
+                </c:pt>
+                <c:pt idx="2">
+                  <c:v>SSE</c:v>
+                </c:pt>
+                <c:pt idx="3">
+                  <c:v>SSE 2</c:v>
+                </c:pt>
+                <c:pt idx="4">
+                  <c:v>AVX</c:v>
+                </c:pt>
+              </c:strCache>
+              <c:extLst/>
+            </c:strRef>
+          </c:cat>
+          <c:val>
+            <c:numRef>
+              <c:f>(SUM!$I$68,SUM!$I$70:$I$73)</c:f>
+              <c:numCache>
+                <c:formatCode>0.00</c:formatCode>
+                <c:ptCount val="5"/>
+                <c:pt idx="0">
+                  <c:v>26.178361200390018</c:v>
+                </c:pt>
+                <c:pt idx="1">
+                  <c:v>26.376295336787564</c:v>
+                </c:pt>
+                <c:pt idx="2">
+                  <c:v>2.4833746255608022</c:v>
+                </c:pt>
+                <c:pt idx="3">
+                  <c:v>34.683785956249643</c:v>
+                </c:pt>
+                <c:pt idx="4">
+                  <c:v>86.407252008486893</c:v>
+                </c:pt>
+              </c:numCache>
+              <c:extLst/>
+            </c:numRef>
+          </c:val>
+          <c:extLst>
+            <c:ext xmlns:c16="http://schemas.microsoft.com/office/drawing/2014/chart" uri="{C3380CC4-5D6E-409C-BE32-E72D297353CC}">
+              <c16:uniqueId val="{00000002-CC12-428A-8F7E-F82A54E336EF}"/>
+            </c:ext>
+          </c:extLst>
+        </c:ser>
+        <c:ser>
+          <c:idx val="0"/>
+          <c:order val="5"/>
+          <c:tx>
+            <c:strRef>
+              <c:f>SUM!$B$18</c:f>
+              <c:strCache>
+                <c:ptCount val="1"/>
+                <c:pt idx="0">
+                  <c:v>СрВр</c:v>
+                </c:pt>
+              </c:strCache>
+            </c:strRef>
+          </c:tx>
+          <c:spPr>
+            <a:solidFill>
+              <a:srgbClr val="FF9933"/>
+            </a:solidFill>
+            <a:ln>
+              <a:noFill/>
+            </a:ln>
+            <a:effectLst/>
+          </c:spPr>
+          <c:invertIfNegative val="0"/>
+          <c:dLbls>
+            <c:numFmt formatCode="#,##0.0" sourceLinked="0"/>
+            <c:spPr>
+              <a:noFill/>
+              <a:ln>
+                <a:noFill/>
+              </a:ln>
+              <a:effectLst/>
+            </c:spPr>
+            <c:txPr>
+              <a:bodyPr rot="-5400000" spcFirstLastPara="1" vertOverflow="ellipsis" wrap="square" lIns="38100" tIns="19050" rIns="38100" bIns="19050" anchor="ctr" anchorCtr="1">
+                <a:spAutoFit/>
+              </a:bodyPr>
+              <a:lstStyle/>
+              <a:p>
+                <a:pPr>
+                  <a:defRPr sz="900" b="0" i="0" u="none" strike="noStrike" kern="1200" baseline="0">
+                    <a:solidFill>
+                      <a:schemeClr val="tx1">
+                        <a:lumMod val="75000"/>
+                        <a:lumOff val="25000"/>
+                      </a:schemeClr>
+                    </a:solidFill>
+                    <a:latin typeface="+mn-lt"/>
+                    <a:ea typeface="+mn-ea"/>
+                    <a:cs typeface="+mn-cs"/>
+                  </a:defRPr>
+                </a:pPr>
+                <a:endParaRPr lang="ru-RU"/>
+              </a:p>
+            </c:txPr>
+            <c:dLblPos val="outEnd"/>
+            <c:showLegendKey val="0"/>
+            <c:showVal val="1"/>
+            <c:showCatName val="0"/>
+            <c:showSerName val="0"/>
+            <c:showPercent val="0"/>
+            <c:showBubbleSize val="0"/>
+            <c:showLeaderLines val="0"/>
+            <c:extLst>
+              <c:ext xmlns:c15="http://schemas.microsoft.com/office/drawing/2012/chart" uri="{CE6537A1-D6FC-4f65-9D91-7224C49458BB}">
+                <c15:showLeaderLines val="1"/>
+                <c15:leaderLines>
+                  <c:spPr>
+                    <a:ln w="9525" cap="flat" cmpd="sng" algn="ctr">
+                      <a:solidFill>
+                        <a:schemeClr val="tx1">
+                          <a:lumMod val="35000"/>
+                          <a:lumOff val="65000"/>
+                        </a:schemeClr>
+                      </a:solidFill>
+                      <a:round/>
+                    </a:ln>
+                    <a:effectLst/>
+                  </c:spPr>
+                </c15:leaderLines>
+              </c:ext>
+            </c:extLst>
+          </c:dLbls>
+          <c:cat>
+            <c:strRef>
+              <c:f>(SUM!$A$68,SUM!$A$70:$A$73)</c:f>
+              <c:strCache>
+                <c:ptCount val="5"/>
+                <c:pt idx="0">
+                  <c:v>Скалярное</c:v>
+                </c:pt>
+                <c:pt idx="1">
+                  <c:v>Скалярное опт.</c:v>
+                </c:pt>
+                <c:pt idx="2">
+                  <c:v>SSE</c:v>
+                </c:pt>
+                <c:pt idx="3">
+                  <c:v>SSE 2</c:v>
+                </c:pt>
+                <c:pt idx="4">
+                  <c:v>AVX</c:v>
+                </c:pt>
+              </c:strCache>
+              <c:extLst/>
+            </c:strRef>
+          </c:cat>
+          <c:val>
+            <c:numRef>
+              <c:f>(SUM!$B$68,SUM!$B$70:$B$73)</c:f>
+              <c:numCache>
+                <c:formatCode>0.00</c:formatCode>
+                <c:ptCount val="5"/>
+                <c:pt idx="0">
+                  <c:v>25.258067244487243</c:v>
+                </c:pt>
+                <c:pt idx="1">
+                  <c:v>25.79873597856346</c:v>
+                </c:pt>
+                <c:pt idx="2">
+                  <c:v>2.4847919595690411</c:v>
+                </c:pt>
+                <c:pt idx="3">
+                  <c:v>33.897676162051837</c:v>
+                </c:pt>
+                <c:pt idx="4">
+                  <c:v>84.165209313153596</c:v>
+                </c:pt>
+              </c:numCache>
+              <c:extLst/>
+            </c:numRef>
+          </c:val>
+          <c:extLst>
+            <c:ext xmlns:c16="http://schemas.microsoft.com/office/drawing/2014/chart" uri="{C3380CC4-5D6E-409C-BE32-E72D297353CC}">
+              <c16:uniqueId val="{00000003-CC12-428A-8F7E-F82A54E336EF}"/>
+            </c:ext>
+          </c:extLst>
+        </c:ser>
+        <c:ser>
+          <c:idx val="9"/>
+          <c:order val="8"/>
+          <c:tx>
+            <c:strRef>
+              <c:f>SUM!$L$17</c:f>
+              <c:strCache>
+                <c:ptCount val="1"/>
+                <c:pt idx="0">
+                  <c:v>99,99%</c:v>
+                </c:pt>
+              </c:strCache>
+            </c:strRef>
+          </c:tx>
+          <c:spPr>
+            <a:solidFill>
+              <a:srgbClr val="D60093"/>
+            </a:solidFill>
+            <a:ln>
+              <a:noFill/>
+            </a:ln>
+            <a:effectLst/>
+          </c:spPr>
+          <c:invertIfNegative val="0"/>
+          <c:dLbls>
+            <c:numFmt formatCode="#,##0.0" sourceLinked="0"/>
+            <c:spPr>
+              <a:noFill/>
+              <a:ln>
+                <a:noFill/>
+              </a:ln>
+              <a:effectLst/>
+            </c:spPr>
+            <c:txPr>
+              <a:bodyPr rot="-5400000" spcFirstLastPara="1" vertOverflow="ellipsis" wrap="square" lIns="38100" tIns="19050" rIns="38100" bIns="19050" anchor="ctr" anchorCtr="1">
+                <a:spAutoFit/>
+              </a:bodyPr>
+              <a:lstStyle/>
+              <a:p>
+                <a:pPr>
+                  <a:defRPr sz="900" b="0" i="0" u="none" strike="noStrike" kern="1200" baseline="0">
+                    <a:solidFill>
+                      <a:schemeClr val="tx1">
+                        <a:lumMod val="75000"/>
+                        <a:lumOff val="25000"/>
+                      </a:schemeClr>
+                    </a:solidFill>
+                    <a:latin typeface="+mn-lt"/>
+                    <a:ea typeface="+mn-ea"/>
+                    <a:cs typeface="+mn-cs"/>
+                  </a:defRPr>
+                </a:pPr>
+                <a:endParaRPr lang="ru-RU"/>
+              </a:p>
+            </c:txPr>
+            <c:dLblPos val="outEnd"/>
+            <c:showLegendKey val="0"/>
+            <c:showVal val="1"/>
+            <c:showCatName val="0"/>
+            <c:showSerName val="0"/>
+            <c:showPercent val="0"/>
+            <c:showBubbleSize val="0"/>
+            <c:showLeaderLines val="0"/>
+            <c:extLst>
+              <c:ext xmlns:c15="http://schemas.microsoft.com/office/drawing/2012/chart" uri="{CE6537A1-D6FC-4f65-9D91-7224C49458BB}">
+                <c15:showLeaderLines val="1"/>
+                <c15:leaderLines>
+                  <c:spPr>
+                    <a:ln w="9525" cap="flat" cmpd="sng" algn="ctr">
+                      <a:solidFill>
+                        <a:schemeClr val="tx1">
+                          <a:lumMod val="35000"/>
+                          <a:lumOff val="65000"/>
+                        </a:schemeClr>
+                      </a:solidFill>
+                      <a:round/>
+                    </a:ln>
+                    <a:effectLst/>
+                  </c:spPr>
+                </c15:leaderLines>
+              </c:ext>
+            </c:extLst>
+          </c:dLbls>
+          <c:cat>
+            <c:strRef>
+              <c:f>(SUM!$A$68,SUM!$A$70:$A$73)</c:f>
+              <c:strCache>
+                <c:ptCount val="5"/>
+                <c:pt idx="0">
+                  <c:v>Скалярное</c:v>
+                </c:pt>
+                <c:pt idx="1">
+                  <c:v>Скалярное опт.</c:v>
+                </c:pt>
+                <c:pt idx="2">
+                  <c:v>SSE</c:v>
+                </c:pt>
+                <c:pt idx="3">
+                  <c:v>SSE 2</c:v>
+                </c:pt>
+                <c:pt idx="4">
+                  <c:v>AVX</c:v>
+                </c:pt>
+              </c:strCache>
+              <c:extLst/>
+            </c:strRef>
+          </c:cat>
+          <c:val>
+            <c:numRef>
+              <c:f>(SUM!$L$68,SUM!$L$70:$L$73)</c:f>
+              <c:numCache>
+                <c:formatCode>0.00</c:formatCode>
+                <c:ptCount val="5"/>
+                <c:pt idx="0">
+                  <c:v>18.953710276981326</c:v>
+                </c:pt>
+                <c:pt idx="1">
+                  <c:v>20.861250648153007</c:v>
+                </c:pt>
+                <c:pt idx="2">
+                  <c:v>2.5198152151839812</c:v>
+                </c:pt>
+                <c:pt idx="3">
+                  <c:v>25.205078363376778</c:v>
+                </c:pt>
+                <c:pt idx="4">
+                  <c:v>58.422526883004032</c:v>
+                </c:pt>
+              </c:numCache>
+              <c:extLst/>
+            </c:numRef>
+          </c:val>
+          <c:extLst>
+            <c:ext xmlns:c16="http://schemas.microsoft.com/office/drawing/2014/chart" uri="{C3380CC4-5D6E-409C-BE32-E72D297353CC}">
+              <c16:uniqueId val="{00000004-CC12-428A-8F7E-F82A54E336EF}"/>
+            </c:ext>
+          </c:extLst>
+        </c:ser>
+        <c:ser>
+          <c:idx val="2"/>
+          <c:order val="9"/>
+          <c:tx>
+            <c:strRef>
+              <c:f>SUM!$E$17</c:f>
+              <c:strCache>
+                <c:ptCount val="1"/>
+                <c:pt idx="0">
+                  <c:v>Макс</c:v>
+                </c:pt>
+              </c:strCache>
+            </c:strRef>
+          </c:tx>
+          <c:spPr>
+            <a:solidFill>
+              <a:srgbClr val="669900"/>
+            </a:solidFill>
+            <a:ln>
+              <a:noFill/>
+            </a:ln>
+            <a:effectLst/>
+          </c:spPr>
+          <c:invertIfNegative val="0"/>
+          <c:dLbls>
+            <c:numFmt formatCode="#,##0.0" sourceLinked="0"/>
+            <c:spPr>
+              <a:noFill/>
+              <a:ln>
+                <a:noFill/>
+              </a:ln>
+              <a:effectLst/>
+            </c:spPr>
+            <c:txPr>
+              <a:bodyPr rot="-5400000" spcFirstLastPara="1" vertOverflow="ellipsis" wrap="square" lIns="38100" tIns="19050" rIns="38100" bIns="19050" anchor="ctr" anchorCtr="1">
+                <a:spAutoFit/>
+              </a:bodyPr>
+              <a:lstStyle/>
+              <a:p>
+                <a:pPr>
+                  <a:defRPr sz="900" b="0" i="0" u="none" strike="noStrike" kern="1200" baseline="0">
+                    <a:solidFill>
+                      <a:schemeClr val="tx1">
+                        <a:lumMod val="75000"/>
+                        <a:lumOff val="25000"/>
+                      </a:schemeClr>
+                    </a:solidFill>
+                    <a:latin typeface="+mn-lt"/>
+                    <a:ea typeface="+mn-ea"/>
+                    <a:cs typeface="+mn-cs"/>
+                  </a:defRPr>
+                </a:pPr>
+                <a:endParaRPr lang="ru-RU"/>
+              </a:p>
+            </c:txPr>
+            <c:dLblPos val="outEnd"/>
+            <c:showLegendKey val="0"/>
+            <c:showVal val="1"/>
+            <c:showCatName val="0"/>
+            <c:showSerName val="0"/>
+            <c:showPercent val="0"/>
+            <c:showBubbleSize val="0"/>
+            <c:showLeaderLines val="0"/>
+            <c:extLst>
+              <c:ext xmlns:c15="http://schemas.microsoft.com/office/drawing/2012/chart" uri="{CE6537A1-D6FC-4f65-9D91-7224C49458BB}">
+                <c15:showLeaderLines val="1"/>
+                <c15:leaderLines>
+                  <c:spPr>
+                    <a:ln w="9525" cap="flat" cmpd="sng" algn="ctr">
+                      <a:solidFill>
+                        <a:schemeClr val="tx1">
+                          <a:lumMod val="35000"/>
+                          <a:lumOff val="65000"/>
+                        </a:schemeClr>
+                      </a:solidFill>
+                      <a:round/>
+                    </a:ln>
+                    <a:effectLst/>
+                  </c:spPr>
+                </c15:leaderLines>
+              </c:ext>
+            </c:extLst>
+          </c:dLbls>
+          <c:cat>
+            <c:strRef>
+              <c:f>(SUM!$A$68,SUM!$A$70:$A$73)</c:f>
+              <c:strCache>
+                <c:ptCount val="5"/>
+                <c:pt idx="0">
+                  <c:v>Скалярное</c:v>
+                </c:pt>
+                <c:pt idx="1">
+                  <c:v>Скалярное опт.</c:v>
+                </c:pt>
+                <c:pt idx="2">
+                  <c:v>SSE</c:v>
+                </c:pt>
+                <c:pt idx="3">
+                  <c:v>SSE 2</c:v>
+                </c:pt>
+                <c:pt idx="4">
+                  <c:v>AVX</c:v>
+                </c:pt>
+              </c:strCache>
+              <c:extLst/>
+            </c:strRef>
+          </c:cat>
+          <c:val>
+            <c:numRef>
+              <c:f>(SUM!$E$68,SUM!$E$70:$E$73)</c:f>
+              <c:numCache>
+                <c:formatCode>0.00</c:formatCode>
+                <c:ptCount val="5"/>
+                <c:pt idx="0">
+                  <c:v>18.918665053062742</c:v>
+                </c:pt>
+                <c:pt idx="1">
+                  <c:v>20.731250255029178</c:v>
+                </c:pt>
+                <c:pt idx="2">
+                  <c:v>2.5195489653975378</c:v>
+                </c:pt>
+                <c:pt idx="3">
+                  <c:v>25.157438011413578</c:v>
+                </c:pt>
+                <c:pt idx="4">
+                  <c:v>58.392753498261648</c:v>
+                </c:pt>
+              </c:numCache>
+              <c:extLst/>
+            </c:numRef>
+          </c:val>
+          <c:extLst>
+            <c:ext xmlns:c16="http://schemas.microsoft.com/office/drawing/2014/chart" uri="{C3380CC4-5D6E-409C-BE32-E72D297353CC}">
+              <c16:uniqueId val="{00000005-CC12-428A-8F7E-F82A54E336EF}"/>
+            </c:ext>
+          </c:extLst>
+        </c:ser>
+        <c:dLbls>
+          <c:dLblPos val="outEnd"/>
+          <c:showLegendKey val="0"/>
+          <c:showVal val="1"/>
+          <c:showCatName val="0"/>
+          <c:showSerName val="0"/>
+          <c:showPercent val="0"/>
+          <c:showBubbleSize val="0"/>
+        </c:dLbls>
+        <c:gapWidth val="219"/>
+        <c:overlap val="-27"/>
+        <c:axId val="1072405744"/>
+        <c:axId val="1072406992"/>
+        <c:extLst>
+          <c:ext xmlns:c15="http://schemas.microsoft.com/office/drawing/2012/chart" uri="{02D57815-91ED-43cb-92C2-25804820EDAC}">
+            <c15:filteredBarSeries>
+              <c15:ser>
+                <c:idx val="4"/>
+                <c:order val="2"/>
+                <c:tx>
+                  <c:strRef>
+                    <c:extLst>
+                      <c:ext uri="{02D57815-91ED-43cb-92C2-25804820EDAC}">
+                        <c15:formulaRef>
+                          <c15:sqref>SUM!$G$17</c15:sqref>
+                        </c15:formulaRef>
+                      </c:ext>
+                    </c:extLst>
+                    <c:strCache>
+                      <c:ptCount val="1"/>
+                      <c:pt idx="0">
+                        <c:v>0,1%</c:v>
+                      </c:pt>
+                    </c:strCache>
+                  </c:strRef>
+                </c:tx>
+                <c:spPr>
+                  <a:solidFill>
+                    <a:schemeClr val="dk1">
+                      <a:tint val="30000"/>
+                    </a:schemeClr>
+                  </a:solidFill>
+                  <a:ln>
+                    <a:noFill/>
+                  </a:ln>
+                  <a:effectLst/>
+                </c:spPr>
+                <c:invertIfNegative val="0"/>
+                <c:dLbls>
+                  <c:numFmt formatCode="#,##0.0" sourceLinked="0"/>
+                  <c:spPr>
+                    <a:noFill/>
+                    <a:ln>
+                      <a:noFill/>
+                    </a:ln>
+                    <a:effectLst/>
+                  </c:spPr>
+                  <c:txPr>
+                    <a:bodyPr rot="-5400000" spcFirstLastPara="1" vertOverflow="ellipsis" wrap="square" lIns="38100" tIns="19050" rIns="38100" bIns="19050" anchor="ctr" anchorCtr="1">
+                      <a:spAutoFit/>
+                    </a:bodyPr>
+                    <a:lstStyle/>
+                    <a:p>
+                      <a:pPr>
+                        <a:defRPr sz="900" b="0" i="0" u="none" strike="noStrike" kern="1200" baseline="0">
+                          <a:solidFill>
+                            <a:schemeClr val="tx1">
+                              <a:lumMod val="75000"/>
+                              <a:lumOff val="25000"/>
+                            </a:schemeClr>
+                          </a:solidFill>
+                          <a:latin typeface="+mn-lt"/>
+                          <a:ea typeface="+mn-ea"/>
+                          <a:cs typeface="+mn-cs"/>
+                        </a:defRPr>
+                      </a:pPr>
+                      <a:endParaRPr lang="ru-RU"/>
+                    </a:p>
+                  </c:txPr>
+                  <c:dLblPos val="outEnd"/>
+                  <c:showLegendKey val="0"/>
+                  <c:showVal val="1"/>
+                  <c:showCatName val="0"/>
+                  <c:showSerName val="0"/>
+                  <c:showPercent val="0"/>
+                  <c:showBubbleSize val="0"/>
+                  <c:showLeaderLines val="0"/>
+                  <c:extLst>
+                    <c:ext uri="{CE6537A1-D6FC-4f65-9D91-7224C49458BB}">
+                      <c15:showLeaderLines val="1"/>
+                      <c15:leaderLines>
+                        <c:spPr>
+                          <a:ln w="9525" cap="flat" cmpd="sng" algn="ctr">
+                            <a:solidFill>
+                              <a:schemeClr val="tx1">
+                                <a:lumMod val="35000"/>
+                                <a:lumOff val="65000"/>
+                              </a:schemeClr>
+                            </a:solidFill>
+                            <a:round/>
+                          </a:ln>
+                          <a:effectLst/>
+                        </c:spPr>
+                      </c15:leaderLines>
+                    </c:ext>
+                  </c:extLst>
+                </c:dLbls>
+                <c:cat>
+                  <c:strRef>
+                    <c:extLst>
+                      <c:ext uri="{02D57815-91ED-43cb-92C2-25804820EDAC}">
+                        <c15:formulaRef>
+                          <c15:sqref>(SUM!$A$68,SUM!$A$70:$A$73)</c15:sqref>
+                        </c15:formulaRef>
+                      </c:ext>
+                    </c:extLst>
+                    <c:strCache>
+                      <c:ptCount val="5"/>
+                      <c:pt idx="0">
+                        <c:v>Скалярное</c:v>
+                      </c:pt>
+                      <c:pt idx="1">
+                        <c:v>Скалярное опт.</c:v>
+                      </c:pt>
+                      <c:pt idx="2">
+                        <c:v>SSE</c:v>
+                      </c:pt>
+                      <c:pt idx="3">
+                        <c:v>SSE 2</c:v>
+                      </c:pt>
+                      <c:pt idx="4">
+                        <c:v>AVX</c:v>
+                      </c:pt>
+                    </c:strCache>
+                  </c:strRef>
+                </c:cat>
+                <c:val>
+                  <c:numRef>
+                    <c:extLst>
+                      <c:ext uri="{02D57815-91ED-43cb-92C2-25804820EDAC}">
+                        <c15:formulaRef>
+                          <c15:sqref>(SUM!$G$68,SUM!$G$70:$G$73)</c15:sqref>
+                        </c15:formulaRef>
+                      </c:ext>
+                    </c:extLst>
+                    <c:numCache>
+                      <c:formatCode>0.00</c:formatCode>
+                      <c:ptCount val="5"/>
+                      <c:pt idx="0">
+                        <c:v>25.951375279411682</c:v>
+                      </c:pt>
+                      <c:pt idx="1">
+                        <c:v>26.075586103107863</c:v>
+                      </c:pt>
+                      <c:pt idx="2">
+                        <c:v>2.6361428861734808</c:v>
+                      </c:pt>
+                      <c:pt idx="3">
+                        <c:v>34.214066393277946</c:v>
+                      </c:pt>
+                      <c:pt idx="4">
+                        <c:v>85.787936416733714</c:v>
+                      </c:pt>
+                    </c:numCache>
+                  </c:numRef>
+                </c:val>
+                <c:extLst>
+                  <c:ext xmlns:c16="http://schemas.microsoft.com/office/drawing/2014/chart" uri="{C3380CC4-5D6E-409C-BE32-E72D297353CC}">
+                    <c16:uniqueId val="{00000006-CC12-428A-8F7E-F82A54E336EF}"/>
+                  </c:ext>
+                </c:extLst>
+              </c15:ser>
+            </c15:filteredBarSeries>
+            <c15:filteredBarSeries>
+              <c15:ser>
+                <c:idx val="5"/>
+                <c:order val="3"/>
+                <c:tx>
+                  <c:strRef>
+                    <c:extLst xmlns:c15="http://schemas.microsoft.com/office/drawing/2012/chart">
+                      <c:ext xmlns:c15="http://schemas.microsoft.com/office/drawing/2012/chart" uri="{02D57815-91ED-43cb-92C2-25804820EDAC}">
+                        <c15:formulaRef>
+                          <c15:sqref>SUM!$H$17</c15:sqref>
+                        </c15:formulaRef>
+                      </c:ext>
+                    </c:extLst>
+                    <c:strCache>
+                      <c:ptCount val="1"/>
+                      <c:pt idx="0">
+                        <c:v>1%</c:v>
+                      </c:pt>
+                    </c:strCache>
+                  </c:strRef>
+                </c:tx>
+                <c:spPr>
+                  <a:solidFill>
+                    <a:schemeClr val="dk1">
+                      <a:tint val="60000"/>
+                    </a:schemeClr>
+                  </a:solidFill>
+                  <a:ln>
+                    <a:noFill/>
+                  </a:ln>
+                  <a:effectLst/>
+                </c:spPr>
+                <c:invertIfNegative val="0"/>
+                <c:dLbls>
+                  <c:numFmt formatCode="#,##0.0" sourceLinked="0"/>
+                  <c:spPr>
+                    <a:noFill/>
+                    <a:ln>
+                      <a:noFill/>
+                    </a:ln>
+                    <a:effectLst/>
+                  </c:spPr>
+                  <c:txPr>
+                    <a:bodyPr rot="-5400000" spcFirstLastPara="1" vertOverflow="ellipsis" wrap="square" lIns="38100" tIns="19050" rIns="38100" bIns="19050" anchor="ctr" anchorCtr="1">
+                      <a:spAutoFit/>
+                    </a:bodyPr>
+                    <a:lstStyle/>
+                    <a:p>
+                      <a:pPr>
+                        <a:defRPr sz="900" b="0" i="0" u="none" strike="noStrike" kern="1200" baseline="0">
+                          <a:solidFill>
+                            <a:schemeClr val="tx1">
+                              <a:lumMod val="75000"/>
+                              <a:lumOff val="25000"/>
+                            </a:schemeClr>
+                          </a:solidFill>
+                          <a:latin typeface="+mn-lt"/>
+                          <a:ea typeface="+mn-ea"/>
+                          <a:cs typeface="+mn-cs"/>
+                        </a:defRPr>
+                      </a:pPr>
+                      <a:endParaRPr lang="ru-RU"/>
+                    </a:p>
+                  </c:txPr>
+                  <c:dLblPos val="outEnd"/>
+                  <c:showLegendKey val="0"/>
+                  <c:showVal val="1"/>
+                  <c:showCatName val="0"/>
+                  <c:showSerName val="0"/>
+                  <c:showPercent val="0"/>
+                  <c:showBubbleSize val="0"/>
+                  <c:showLeaderLines val="0"/>
+                  <c:extLst xmlns:c15="http://schemas.microsoft.com/office/drawing/2012/chart">
+                    <c:ext xmlns:c15="http://schemas.microsoft.com/office/drawing/2012/chart" uri="{CE6537A1-D6FC-4f65-9D91-7224C49458BB}">
+                      <c15:showLeaderLines val="1"/>
+                      <c15:leaderLines>
+                        <c:spPr>
+                          <a:ln w="9525" cap="flat" cmpd="sng" algn="ctr">
+                            <a:solidFill>
+                              <a:schemeClr val="tx1">
+                                <a:lumMod val="35000"/>
+                                <a:lumOff val="65000"/>
+                              </a:schemeClr>
+                            </a:solidFill>
+                            <a:round/>
+                          </a:ln>
+                          <a:effectLst/>
+                        </c:spPr>
+                      </c15:leaderLines>
+                    </c:ext>
+                  </c:extLst>
+                </c:dLbls>
+                <c:cat>
+                  <c:strRef>
+                    <c:extLst xmlns:c15="http://schemas.microsoft.com/office/drawing/2012/chart">
+                      <c:ext xmlns:c15="http://schemas.microsoft.com/office/drawing/2012/chart" uri="{02D57815-91ED-43cb-92C2-25804820EDAC}">
+                        <c15:formulaRef>
+                          <c15:sqref>(SUM!$A$68,SUM!$A$70:$A$73)</c15:sqref>
+                        </c15:formulaRef>
+                      </c:ext>
+                    </c:extLst>
+                    <c:strCache>
+                      <c:ptCount val="5"/>
+                      <c:pt idx="0">
+                        <c:v>Скалярное</c:v>
+                      </c:pt>
+                      <c:pt idx="1">
+                        <c:v>Скалярное опт.</c:v>
+                      </c:pt>
+                      <c:pt idx="2">
+                        <c:v>SSE</c:v>
+                      </c:pt>
+                      <c:pt idx="3">
+                        <c:v>SSE 2</c:v>
+                      </c:pt>
+                      <c:pt idx="4">
+                        <c:v>AVX</c:v>
+                      </c:pt>
+                    </c:strCache>
+                  </c:strRef>
+                </c:cat>
+                <c:val>
+                  <c:numRef>
+                    <c:extLst xmlns:c15="http://schemas.microsoft.com/office/drawing/2012/chart">
+                      <c:ext xmlns:c15="http://schemas.microsoft.com/office/drawing/2012/chart" uri="{02D57815-91ED-43cb-92C2-25804820EDAC}">
+                        <c15:formulaRef>
+                          <c15:sqref>(SUM!$H$68,SUM!$H$70:$H$73)</c15:sqref>
+                        </c15:formulaRef>
+                      </c:ext>
+                    </c:extLst>
+                    <c:numCache>
+                      <c:formatCode>0.00</c:formatCode>
+                      <c:ptCount val="5"/>
+                      <c:pt idx="0">
+                        <c:v>25.957883947643186</c:v>
+                      </c:pt>
+                      <c:pt idx="1">
+                        <c:v>26.061442523247734</c:v>
+                      </c:pt>
+                      <c:pt idx="2">
+                        <c:v>2.5579527031129596</c:v>
+                      </c:pt>
+                      <c:pt idx="3">
+                        <c:v>34.242135624431818</c:v>
+                      </c:pt>
+                      <c:pt idx="4">
+                        <c:v>85.851980434147762</c:v>
+                      </c:pt>
+                    </c:numCache>
+                  </c:numRef>
+                </c:val>
+                <c:extLst xmlns:c15="http://schemas.microsoft.com/office/drawing/2012/chart">
+                  <c:ext xmlns:c16="http://schemas.microsoft.com/office/drawing/2014/chart" uri="{C3380CC4-5D6E-409C-BE32-E72D297353CC}">
+                    <c16:uniqueId val="{00000007-CC12-428A-8F7E-F82A54E336EF}"/>
+                  </c:ext>
+                </c:extLst>
+              </c15:ser>
+            </c15:filteredBarSeries>
+            <c15:filteredBarSeries>
+              <c15:ser>
+                <c:idx val="7"/>
+                <c:order val="6"/>
+                <c:tx>
+                  <c:strRef>
+                    <c:extLst xmlns:c15="http://schemas.microsoft.com/office/drawing/2012/chart">
+                      <c:ext xmlns:c15="http://schemas.microsoft.com/office/drawing/2012/chart" uri="{02D57815-91ED-43cb-92C2-25804820EDAC}">
+                        <c15:formulaRef>
+                          <c15:sqref>SUM!$J$17</c15:sqref>
+                        </c15:formulaRef>
+                      </c:ext>
+                    </c:extLst>
+                    <c:strCache>
+                      <c:ptCount val="1"/>
+                      <c:pt idx="0">
+                        <c:v>99%</c:v>
+                      </c:pt>
+                    </c:strCache>
+                  </c:strRef>
+                </c:tx>
+                <c:spPr>
+                  <a:solidFill>
+                    <a:schemeClr val="dk1">
+                      <a:tint val="88500"/>
+                    </a:schemeClr>
+                  </a:solidFill>
+                  <a:ln>
+                    <a:noFill/>
+                  </a:ln>
+                  <a:effectLst/>
+                </c:spPr>
+                <c:invertIfNegative val="0"/>
+                <c:dLbls>
+                  <c:numFmt formatCode="#,##0.0" sourceLinked="0"/>
+                  <c:spPr>
+                    <a:noFill/>
+                    <a:ln>
+                      <a:noFill/>
+                    </a:ln>
+                    <a:effectLst/>
+                  </c:spPr>
+                  <c:txPr>
+                    <a:bodyPr rot="-5400000" spcFirstLastPara="1" vertOverflow="ellipsis" wrap="square" lIns="38100" tIns="19050" rIns="38100" bIns="19050" anchor="ctr" anchorCtr="1">
+                      <a:spAutoFit/>
+                    </a:bodyPr>
+                    <a:lstStyle/>
+                    <a:p>
+                      <a:pPr>
+                        <a:defRPr sz="900" b="0" i="0" u="none" strike="noStrike" kern="1200" baseline="0">
+                          <a:solidFill>
+                            <a:schemeClr val="tx1">
+                              <a:lumMod val="75000"/>
+                              <a:lumOff val="25000"/>
+                            </a:schemeClr>
+                          </a:solidFill>
+                          <a:latin typeface="+mn-lt"/>
+                          <a:ea typeface="+mn-ea"/>
+                          <a:cs typeface="+mn-cs"/>
+                        </a:defRPr>
+                      </a:pPr>
+                      <a:endParaRPr lang="ru-RU"/>
+                    </a:p>
+                  </c:txPr>
+                  <c:dLblPos val="outEnd"/>
+                  <c:showLegendKey val="0"/>
+                  <c:showVal val="1"/>
+                  <c:showCatName val="0"/>
+                  <c:showSerName val="0"/>
+                  <c:showPercent val="0"/>
+                  <c:showBubbleSize val="0"/>
+                  <c:showLeaderLines val="0"/>
+                  <c:extLst xmlns:c15="http://schemas.microsoft.com/office/drawing/2012/chart">
+                    <c:ext xmlns:c15="http://schemas.microsoft.com/office/drawing/2012/chart" uri="{CE6537A1-D6FC-4f65-9D91-7224C49458BB}">
+                      <c15:showLeaderLines val="1"/>
+                      <c15:leaderLines>
+                        <c:spPr>
+                          <a:ln w="9525" cap="flat" cmpd="sng" algn="ctr">
+                            <a:solidFill>
+                              <a:schemeClr val="tx1">
+                                <a:lumMod val="35000"/>
+                                <a:lumOff val="65000"/>
+                              </a:schemeClr>
+                            </a:solidFill>
+                            <a:round/>
+                          </a:ln>
+                          <a:effectLst/>
+                        </c:spPr>
+                      </c15:leaderLines>
+                    </c:ext>
+                  </c:extLst>
+                </c:dLbls>
+                <c:cat>
+                  <c:strRef>
+                    <c:extLst xmlns:c15="http://schemas.microsoft.com/office/drawing/2012/chart">
+                      <c:ext xmlns:c15="http://schemas.microsoft.com/office/drawing/2012/chart" uri="{02D57815-91ED-43cb-92C2-25804820EDAC}">
+                        <c15:formulaRef>
+                          <c15:sqref>(SUM!$A$68,SUM!$A$70:$A$73)</c15:sqref>
+                        </c15:formulaRef>
+                      </c:ext>
+                    </c:extLst>
+                    <c:strCache>
+                      <c:ptCount val="5"/>
+                      <c:pt idx="0">
+                        <c:v>Скалярное</c:v>
+                      </c:pt>
+                      <c:pt idx="1">
+                        <c:v>Скалярное опт.</c:v>
+                      </c:pt>
+                      <c:pt idx="2">
+                        <c:v>SSE</c:v>
+                      </c:pt>
+                      <c:pt idx="3">
+                        <c:v>SSE 2</c:v>
+                      </c:pt>
+                      <c:pt idx="4">
+                        <c:v>AVX</c:v>
+                      </c:pt>
+                    </c:strCache>
+                  </c:strRef>
+                </c:cat>
+                <c:val>
+                  <c:numRef>
+                    <c:extLst xmlns:c15="http://schemas.microsoft.com/office/drawing/2012/chart">
+                      <c:ext xmlns:c15="http://schemas.microsoft.com/office/drawing/2012/chart" uri="{02D57815-91ED-43cb-92C2-25804820EDAC}">
+                        <c15:formulaRef>
+                          <c15:sqref>(SUM!$J$68,SUM!$J$70:$J$73)</c15:sqref>
+                        </c15:formulaRef>
+                      </c:ext>
+                    </c:extLst>
+                    <c:numCache>
+                      <c:formatCode>0.00</c:formatCode>
+                      <c:ptCount val="5"/>
+                      <c:pt idx="0">
+                        <c:v>19.628086094069818</c:v>
+                      </c:pt>
+                      <c:pt idx="1">
+                        <c:v>22.569934474585065</c:v>
+                      </c:pt>
+                      <c:pt idx="2">
+                        <c:v>2.4761601288318675</c:v>
+                      </c:pt>
+                      <c:pt idx="3">
+                        <c:v>29.071317527680296</c:v>
+                      </c:pt>
+                      <c:pt idx="4">
+                        <c:v>69.488313202155283</c:v>
+                      </c:pt>
+                    </c:numCache>
+                  </c:numRef>
+                </c:val>
+                <c:extLst xmlns:c15="http://schemas.microsoft.com/office/drawing/2012/chart">
+                  <c:ext xmlns:c16="http://schemas.microsoft.com/office/drawing/2014/chart" uri="{C3380CC4-5D6E-409C-BE32-E72D297353CC}">
+                    <c16:uniqueId val="{00000008-CC12-428A-8F7E-F82A54E336EF}"/>
+                  </c:ext>
+                </c:extLst>
+              </c15:ser>
+            </c15:filteredBarSeries>
+            <c15:filteredBarSeries>
+              <c15:ser>
+                <c:idx val="8"/>
+                <c:order val="7"/>
+                <c:tx>
+                  <c:strRef>
+                    <c:extLst xmlns:c15="http://schemas.microsoft.com/office/drawing/2012/chart">
+                      <c:ext xmlns:c15="http://schemas.microsoft.com/office/drawing/2012/chart" uri="{02D57815-91ED-43cb-92C2-25804820EDAC}">
+                        <c15:formulaRef>
+                          <c15:sqref>SUM!$K$17</c15:sqref>
+                        </c15:formulaRef>
+                      </c:ext>
+                    </c:extLst>
+                    <c:strCache>
+                      <c:ptCount val="1"/>
+                      <c:pt idx="0">
+                        <c:v>99,9%</c:v>
+                      </c:pt>
+                    </c:strCache>
+                  </c:strRef>
+                </c:tx>
+                <c:spPr>
+                  <a:solidFill>
+                    <a:schemeClr val="dk1">
+                      <a:tint val="55000"/>
+                    </a:schemeClr>
+                  </a:solidFill>
+                  <a:ln>
+                    <a:noFill/>
+                  </a:ln>
+                  <a:effectLst/>
+                </c:spPr>
+                <c:invertIfNegative val="0"/>
+                <c:dLbls>
+                  <c:numFmt formatCode="#,##0.0" sourceLinked="0"/>
+                  <c:spPr>
+                    <a:noFill/>
+                    <a:ln>
+                      <a:noFill/>
+                    </a:ln>
+                    <a:effectLst/>
+                  </c:spPr>
+                  <c:txPr>
+                    <a:bodyPr rot="-5400000" spcFirstLastPara="1" vertOverflow="ellipsis" wrap="square" lIns="38100" tIns="19050" rIns="38100" bIns="19050" anchor="ctr" anchorCtr="1">
+                      <a:spAutoFit/>
+                    </a:bodyPr>
+                    <a:lstStyle/>
+                    <a:p>
+                      <a:pPr>
+                        <a:defRPr sz="900" b="0" i="0" u="none" strike="noStrike" kern="1200" baseline="0">
+                          <a:solidFill>
+                            <a:schemeClr val="tx1">
+                              <a:lumMod val="75000"/>
+                              <a:lumOff val="25000"/>
+                            </a:schemeClr>
+                          </a:solidFill>
+                          <a:latin typeface="+mn-lt"/>
+                          <a:ea typeface="+mn-ea"/>
+                          <a:cs typeface="+mn-cs"/>
+                        </a:defRPr>
+                      </a:pPr>
+                      <a:endParaRPr lang="ru-RU"/>
+                    </a:p>
+                  </c:txPr>
+                  <c:dLblPos val="outEnd"/>
+                  <c:showLegendKey val="0"/>
+                  <c:showVal val="1"/>
+                  <c:showCatName val="0"/>
+                  <c:showSerName val="0"/>
+                  <c:showPercent val="0"/>
+                  <c:showBubbleSize val="0"/>
+                  <c:showLeaderLines val="0"/>
+                  <c:extLst xmlns:c15="http://schemas.microsoft.com/office/drawing/2012/chart">
+                    <c:ext xmlns:c15="http://schemas.microsoft.com/office/drawing/2012/chart" uri="{CE6537A1-D6FC-4f65-9D91-7224C49458BB}">
+                      <c15:showLeaderLines val="1"/>
+                      <c15:leaderLines>
+                        <c:spPr>
+                          <a:ln w="9525" cap="flat" cmpd="sng" algn="ctr">
+                            <a:solidFill>
+                              <a:schemeClr val="tx1">
+                                <a:lumMod val="35000"/>
+                                <a:lumOff val="65000"/>
+                              </a:schemeClr>
+                            </a:solidFill>
+                            <a:round/>
+                          </a:ln>
+                          <a:effectLst/>
+                        </c:spPr>
+                      </c15:leaderLines>
+                    </c:ext>
+                  </c:extLst>
+                </c:dLbls>
+                <c:cat>
+                  <c:strRef>
+                    <c:extLst xmlns:c15="http://schemas.microsoft.com/office/drawing/2012/chart">
+                      <c:ext xmlns:c15="http://schemas.microsoft.com/office/drawing/2012/chart" uri="{02D57815-91ED-43cb-92C2-25804820EDAC}">
+                        <c15:formulaRef>
+                          <c15:sqref>(SUM!$A$68,SUM!$A$70:$A$73)</c15:sqref>
+                        </c15:formulaRef>
+                      </c:ext>
+                    </c:extLst>
+                    <c:strCache>
+                      <c:ptCount val="5"/>
+                      <c:pt idx="0">
+                        <c:v>Скалярное</c:v>
+                      </c:pt>
+                      <c:pt idx="1">
+                        <c:v>Скалярное опт.</c:v>
+                      </c:pt>
+                      <c:pt idx="2">
+                        <c:v>SSE</c:v>
+                      </c:pt>
+                      <c:pt idx="3">
+                        <c:v>SSE 2</c:v>
+                      </c:pt>
+                      <c:pt idx="4">
+                        <c:v>AVX</c:v>
+                      </c:pt>
+                    </c:strCache>
+                  </c:strRef>
+                </c:cat>
+                <c:val>
+                  <c:numRef>
+                    <c:extLst xmlns:c15="http://schemas.microsoft.com/office/drawing/2012/chart">
+                      <c:ext xmlns:c15="http://schemas.microsoft.com/office/drawing/2012/chart" uri="{02D57815-91ED-43cb-92C2-25804820EDAC}">
+                        <c15:formulaRef>
+                          <c15:sqref>(SUM!$K$68,SUM!$K$70:$K$73)</c15:sqref>
+                        </c15:formulaRef>
+                      </c:ext>
+                    </c:extLst>
+                    <c:numCache>
+                      <c:formatCode>0.00</c:formatCode>
+                      <c:ptCount val="5"/>
+                      <c:pt idx="0">
+                        <c:v>19.279036441074034</c:v>
+                      </c:pt>
+                      <c:pt idx="1">
+                        <c:v>22.125068654675996</c:v>
+                      </c:pt>
+                      <c:pt idx="2">
+                        <c:v>2.5222431339617377</c:v>
+                      </c:pt>
+                      <c:pt idx="3">
+                        <c:v>25.647497896726691</c:v>
+                      </c:pt>
+                      <c:pt idx="4">
+                        <c:v>58.695143398903092</c:v>
+                      </c:pt>
+                    </c:numCache>
+                  </c:numRef>
+                </c:val>
+                <c:extLst xmlns:c15="http://schemas.microsoft.com/office/drawing/2012/chart">
+                  <c:ext xmlns:c16="http://schemas.microsoft.com/office/drawing/2014/chart" uri="{C3380CC4-5D6E-409C-BE32-E72D297353CC}">
+                    <c16:uniqueId val="{00000009-CC12-428A-8F7E-F82A54E336EF}"/>
+                  </c:ext>
+                </c:extLst>
+              </c15:ser>
+            </c15:filteredBarSeries>
+          </c:ext>
+        </c:extLst>
+      </c:barChart>
+      <c:catAx>
+        <c:axId val="1072405744"/>
+        <c:scaling>
+          <c:orientation val="minMax"/>
+        </c:scaling>
+        <c:delete val="0"/>
+        <c:axPos val="b"/>
+        <c:title>
+          <c:tx>
+            <c:rich>
+              <a:bodyPr rot="0" spcFirstLastPara="1" vertOverflow="ellipsis" vert="horz" wrap="square" anchor="ctr" anchorCtr="1"/>
+              <a:lstStyle/>
+              <a:p>
+                <a:pPr>
+                  <a:defRPr sz="1000" b="0" i="0" u="none" strike="noStrike" kern="1200" baseline="0">
+                    <a:solidFill>
+                      <a:schemeClr val="tx1">
+                        <a:lumMod val="65000"/>
+                        <a:lumOff val="35000"/>
+                      </a:schemeClr>
+                    </a:solidFill>
+                    <a:latin typeface="+mn-lt"/>
+                    <a:ea typeface="+mn-ea"/>
+                    <a:cs typeface="+mn-cs"/>
+                  </a:defRPr>
+                </a:pPr>
+                <a:r>
+                  <a:rPr lang="ru-RU"/>
+                  <a:t>Название алгоритма</a:t>
+                </a:r>
+              </a:p>
+            </c:rich>
+          </c:tx>
+          <c:overlay val="0"/>
+          <c:spPr>
+            <a:noFill/>
+            <a:ln>
+              <a:noFill/>
+            </a:ln>
+            <a:effectLst/>
+          </c:spPr>
+          <c:txPr>
+            <a:bodyPr rot="0" spcFirstLastPara="1" vertOverflow="ellipsis" vert="horz" wrap="square" anchor="ctr" anchorCtr="1"/>
+            <a:lstStyle/>
+            <a:p>
+              <a:pPr>
+                <a:defRPr sz="1000" b="0" i="0" u="none" strike="noStrike" kern="1200" baseline="0">
+                  <a:solidFill>
+                    <a:schemeClr val="tx1">
+                      <a:lumMod val="65000"/>
+                      <a:lumOff val="35000"/>
+                    </a:schemeClr>
+                  </a:solidFill>
+                  <a:latin typeface="+mn-lt"/>
+                  <a:ea typeface="+mn-ea"/>
+                  <a:cs typeface="+mn-cs"/>
+                </a:defRPr>
+              </a:pPr>
+              <a:endParaRPr lang="ru-RU"/>
+            </a:p>
+          </c:txPr>
+        </c:title>
+        <c:numFmt formatCode="General" sourceLinked="1"/>
+        <c:majorTickMark val="none"/>
+        <c:minorTickMark val="none"/>
+        <c:tickLblPos val="nextTo"/>
+        <c:spPr>
+          <a:noFill/>
+          <a:ln w="9525" cap="flat" cmpd="sng" algn="ctr">
+            <a:solidFill>
+              <a:schemeClr val="tx1">
+                <a:lumMod val="15000"/>
+                <a:lumOff val="85000"/>
+              </a:schemeClr>
+            </a:solidFill>
+            <a:round/>
+          </a:ln>
+          <a:effectLst/>
+        </c:spPr>
+        <c:txPr>
+          <a:bodyPr rot="-60000000" spcFirstLastPara="1" vertOverflow="ellipsis" vert="horz" wrap="square" anchor="ctr" anchorCtr="1"/>
+          <a:lstStyle/>
+          <a:p>
+            <a:pPr>
+              <a:defRPr sz="900" b="0" i="0" u="none" strike="noStrike" kern="1200" baseline="0">
+                <a:solidFill>
+                  <a:schemeClr val="tx1">
+                    <a:lumMod val="65000"/>
+                    <a:lumOff val="35000"/>
+                  </a:schemeClr>
+                </a:solidFill>
+                <a:latin typeface="+mn-lt"/>
+                <a:ea typeface="+mn-ea"/>
+                <a:cs typeface="+mn-cs"/>
+              </a:defRPr>
+            </a:pPr>
+            <a:endParaRPr lang="ru-RU"/>
+          </a:p>
+        </c:txPr>
+        <c:crossAx val="1072406992"/>
+        <c:crosses val="autoZero"/>
+        <c:auto val="1"/>
+        <c:lblAlgn val="ctr"/>
+        <c:lblOffset val="100"/>
+        <c:noMultiLvlLbl val="0"/>
+      </c:catAx>
+      <c:valAx>
+        <c:axId val="1072406992"/>
+        <c:scaling>
+          <c:orientation val="minMax"/>
+        </c:scaling>
+        <c:delete val="0"/>
+        <c:axPos val="l"/>
+        <c:majorGridlines>
+          <c:spPr>
+            <a:ln w="9525" cap="flat" cmpd="sng" algn="ctr">
+              <a:solidFill>
+                <a:schemeClr val="tx1">
+                  <a:lumMod val="15000"/>
+                  <a:lumOff val="85000"/>
+                </a:schemeClr>
+              </a:solidFill>
+              <a:round/>
+            </a:ln>
+            <a:effectLst/>
+          </c:spPr>
+        </c:majorGridlines>
+        <c:title>
+          <c:tx>
+            <c:rich>
+              <a:bodyPr rot="-5400000" spcFirstLastPara="1" vertOverflow="ellipsis" vert="horz" wrap="square" anchor="ctr" anchorCtr="1"/>
+              <a:lstStyle/>
+              <a:p>
+                <a:pPr>
+                  <a:defRPr sz="1000" b="0" i="0" u="none" strike="noStrike" kern="1200" baseline="0">
+                    <a:solidFill>
+                      <a:schemeClr val="tx1">
+                        <a:lumMod val="65000"/>
+                        <a:lumOff val="35000"/>
+                      </a:schemeClr>
+                    </a:solidFill>
+                    <a:latin typeface="+mn-lt"/>
+                    <a:ea typeface="+mn-ea"/>
+                    <a:cs typeface="+mn-cs"/>
+                  </a:defRPr>
+                </a:pPr>
+                <a:r>
+                  <a:rPr lang="ru-RU" dirty="0"/>
+                  <a:t>Множитель, во сколько раз</a:t>
+                </a:r>
+              </a:p>
+            </c:rich>
+          </c:tx>
+          <c:overlay val="0"/>
+          <c:spPr>
+            <a:noFill/>
+            <a:ln>
+              <a:noFill/>
+            </a:ln>
+            <a:effectLst/>
+          </c:spPr>
+          <c:txPr>
+            <a:bodyPr rot="-5400000" spcFirstLastPara="1" vertOverflow="ellipsis" vert="horz" wrap="square" anchor="ctr" anchorCtr="1"/>
+            <a:lstStyle/>
+            <a:p>
+              <a:pPr>
+                <a:defRPr sz="1000" b="0" i="0" u="none" strike="noStrike" kern="1200" baseline="0">
+                  <a:solidFill>
+                    <a:schemeClr val="tx1">
+                      <a:lumMod val="65000"/>
+                      <a:lumOff val="35000"/>
+                    </a:schemeClr>
+                  </a:solidFill>
+                  <a:latin typeface="+mn-lt"/>
+                  <a:ea typeface="+mn-ea"/>
+                  <a:cs typeface="+mn-cs"/>
+                </a:defRPr>
+              </a:pPr>
+              <a:endParaRPr lang="ru-RU"/>
+            </a:p>
+          </c:txPr>
+        </c:title>
+        <c:numFmt formatCode="0.0" sourceLinked="0"/>
+        <c:majorTickMark val="none"/>
+        <c:minorTickMark val="none"/>
+        <c:tickLblPos val="nextTo"/>
+        <c:spPr>
+          <a:noFill/>
+          <a:ln>
+            <a:noFill/>
+          </a:ln>
+          <a:effectLst/>
+        </c:spPr>
+        <c:txPr>
+          <a:bodyPr rot="-60000000" spcFirstLastPara="1" vertOverflow="ellipsis" vert="horz" wrap="square" anchor="ctr" anchorCtr="1"/>
+          <a:lstStyle/>
+          <a:p>
+            <a:pPr>
+              <a:defRPr sz="900" b="0" i="0" u="none" strike="noStrike" kern="1200" baseline="0">
+                <a:solidFill>
+                  <a:schemeClr val="tx1">
+                    <a:lumMod val="65000"/>
+                    <a:lumOff val="35000"/>
+                  </a:schemeClr>
+                </a:solidFill>
+                <a:latin typeface="+mn-lt"/>
+                <a:ea typeface="+mn-ea"/>
+                <a:cs typeface="+mn-cs"/>
+              </a:defRPr>
+            </a:pPr>
+            <a:endParaRPr lang="ru-RU"/>
+          </a:p>
+        </c:txPr>
+        <c:crossAx val="1072405744"/>
+        <c:crosses val="autoZero"/>
+        <c:crossBetween val="between"/>
+      </c:valAx>
+      <c:spPr>
+        <a:noFill/>
+        <a:ln>
+          <a:noFill/>
+        </a:ln>
+        <a:effectLst/>
+      </c:spPr>
+    </c:plotArea>
+    <c:legend>
+      <c:legendPos val="t"/>
+      <c:overlay val="0"/>
+      <c:spPr>
+        <a:noFill/>
+        <a:ln>
+          <a:noFill/>
+        </a:ln>
+        <a:effectLst/>
+      </c:spPr>
+      <c:txPr>
+        <a:bodyPr rot="0" spcFirstLastPara="1" vertOverflow="ellipsis" vert="horz" wrap="square" anchor="ctr" anchorCtr="1"/>
+        <a:lstStyle/>
+        <a:p>
+          <a:pPr>
+            <a:defRPr sz="900" b="0" i="0" u="none" strike="noStrike" kern="1200" baseline="0">
+              <a:solidFill>
+                <a:schemeClr val="tx1">
+                  <a:lumMod val="65000"/>
+                  <a:lumOff val="35000"/>
+                </a:schemeClr>
+              </a:solidFill>
+              <a:latin typeface="+mn-lt"/>
+              <a:ea typeface="+mn-ea"/>
+              <a:cs typeface="+mn-cs"/>
+            </a:defRPr>
+          </a:pPr>
+          <a:endParaRPr lang="ru-RU"/>
+        </a:p>
+      </c:txPr>
+    </c:legend>
+    <c:plotVisOnly val="1"/>
+    <c:dispBlanksAs val="gap"/>
+    <c:extLst>
+      <c:ext xmlns:c16r3="http://schemas.microsoft.com/office/drawing/2017/03/chart" uri="{56B9EC1D-385E-4148-901F-78D8002777C0}">
+        <c16r3:dataDisplayOptions16>
+          <c16r3:dispNaAsBlank val="1"/>
+        </c16r3:dataDisplayOptions16>
+      </c:ext>
+    </c:extLst>
+    <c:showDLblsOverMax val="0"/>
+  </c:chart>
+  <c:spPr>
+    <a:noFill/>
+    <a:ln>
+      <a:noFill/>
+    </a:ln>
+    <a:effectLst/>
+  </c:spPr>
+  <c:txPr>
+    <a:bodyPr/>
+    <a:lstStyle/>
+    <a:p>
+      <a:pPr>
+        <a:defRPr/>
+      </a:pPr>
+      <a:endParaRPr lang="ru-RU"/>
+    </a:p>
+  </c:txPr>
+  <c:externalData r:id="rId3">
+    <c:autoUpdate val="0"/>
+  </c:externalData>
+</c:chartSpace>
+</file>
+
+<file path=ppt/charts/chart2.xml><?xml version="1.0" encoding="utf-8"?>
+<c:chartSpace xmlns:c="http://schemas.openxmlformats.org/drawingml/2006/chart" xmlns:a="http://schemas.openxmlformats.org/drawingml/2006/main" xmlns:r="http://schemas.openxmlformats.org/officeDocument/2006/relationships" xmlns:c16r2="http://schemas.microsoft.com/office/drawing/2015/06/chart">
+  <c:date1904 val="0"/>
+  <c:lang val="ru-RU"/>
+  <c:roundedCorners val="0"/>
+  <mc:AlternateContent xmlns:mc="http://schemas.openxmlformats.org/markup-compatibility/2006">
+    <mc:Choice xmlns:c14="http://schemas.microsoft.com/office/drawing/2007/8/2/chart" Requires="c14">
+      <c14:style val="102"/>
+    </mc:Choice>
+    <mc:Fallback>
+      <c:style val="2"/>
+    </mc:Fallback>
+  </mc:AlternateContent>
+  <c:chart>
+    <c:title>
+      <c:tx>
+        <c:rich>
+          <a:bodyPr rot="0" spcFirstLastPara="1" vertOverflow="ellipsis" vert="horz" wrap="square" anchor="ctr" anchorCtr="1"/>
+          <a:lstStyle/>
+          <a:p>
+            <a:pPr>
+              <a:defRPr sz="1400" b="0" i="0" u="none" strike="noStrike" kern="1200" spc="0" baseline="0">
+                <a:solidFill>
+                  <a:schemeClr val="tx1">
+                    <a:lumMod val="65000"/>
+                    <a:lumOff val="35000"/>
+                  </a:schemeClr>
+                </a:solidFill>
+                <a:latin typeface="+mn-lt"/>
+                <a:ea typeface="+mn-ea"/>
+                <a:cs typeface="+mn-cs"/>
+              </a:defRPr>
+            </a:pPr>
+            <a:r>
+              <a:rPr lang="ru-RU" sz="1800" b="0" i="0" baseline="0" dirty="0">
+                <a:effectLst/>
+              </a:rPr>
+              <a:t>Во сколько раз разработанные алгоритмы быстрее наивного</a:t>
+            </a:r>
+            <a:endParaRPr lang="ru-RU" dirty="0">
+              <a:effectLst/>
+            </a:endParaRPr>
+          </a:p>
+        </c:rich>
+      </c:tx>
+      <c:overlay val="0"/>
+      <c:spPr>
+        <a:noFill/>
+        <a:ln>
+          <a:noFill/>
+        </a:ln>
+        <a:effectLst/>
+      </c:spPr>
+      <c:txPr>
+        <a:bodyPr rot="0" spcFirstLastPara="1" vertOverflow="ellipsis" vert="horz" wrap="square" anchor="ctr" anchorCtr="1"/>
+        <a:lstStyle/>
+        <a:p>
+          <a:pPr>
+            <a:defRPr sz="1400" b="0" i="0" u="none" strike="noStrike" kern="1200" spc="0" baseline="0">
+              <a:solidFill>
+                <a:schemeClr val="tx1">
+                  <a:lumMod val="65000"/>
+                  <a:lumOff val="35000"/>
+                </a:schemeClr>
+              </a:solidFill>
+              <a:latin typeface="+mn-lt"/>
+              <a:ea typeface="+mn-ea"/>
+              <a:cs typeface="+mn-cs"/>
+            </a:defRPr>
+          </a:pPr>
+          <a:endParaRPr lang="ru-RU"/>
+        </a:p>
+      </c:txPr>
+    </c:title>
+    <c:autoTitleDeleted val="0"/>
+    <c:plotArea>
+      <c:layout/>
+      <c:barChart>
+        <c:barDir val="col"/>
+        <c:grouping val="clustered"/>
+        <c:varyColors val="0"/>
+        <c:ser>
+          <c:idx val="2"/>
+          <c:order val="0"/>
+          <c:tx>
+            <c:strRef>
+              <c:f>B_S_RULES!$D$1</c:f>
+              <c:strCache>
+                <c:ptCount val="1"/>
+                <c:pt idx="0">
+                  <c:v>Мин</c:v>
+                </c:pt>
+              </c:strCache>
+            </c:strRef>
+          </c:tx>
+          <c:spPr>
+            <a:solidFill>
+              <a:srgbClr val="669900"/>
+            </a:solidFill>
+            <a:ln>
+              <a:noFill/>
+            </a:ln>
+            <a:effectLst/>
+          </c:spPr>
+          <c:invertIfNegative val="0"/>
+          <c:dLbls>
+            <c:numFmt formatCode="#,##0.0" sourceLinked="0"/>
+            <c:spPr>
+              <a:noFill/>
+              <a:ln>
+                <a:noFill/>
+              </a:ln>
+              <a:effectLst/>
+            </c:spPr>
+            <c:txPr>
+              <a:bodyPr rot="-5400000" spcFirstLastPara="1" vertOverflow="ellipsis" wrap="square" lIns="38100" tIns="19050" rIns="38100" bIns="19050" anchor="ctr" anchorCtr="1">
+                <a:spAutoFit/>
+              </a:bodyPr>
+              <a:lstStyle/>
+              <a:p>
+                <a:pPr>
+                  <a:defRPr sz="900" b="0" i="0" u="none" strike="noStrike" kern="1200" baseline="0">
+                    <a:solidFill>
+                      <a:schemeClr val="tx1">
+                        <a:lumMod val="75000"/>
+                        <a:lumOff val="25000"/>
+                      </a:schemeClr>
+                    </a:solidFill>
+                    <a:latin typeface="+mn-lt"/>
+                    <a:ea typeface="+mn-ea"/>
+                    <a:cs typeface="+mn-cs"/>
+                  </a:defRPr>
+                </a:pPr>
+                <a:endParaRPr lang="ru-RU"/>
+              </a:p>
+            </c:txPr>
+            <c:dLblPos val="outEnd"/>
+            <c:showLegendKey val="0"/>
+            <c:showVal val="1"/>
+            <c:showCatName val="0"/>
+            <c:showSerName val="0"/>
+            <c:showPercent val="0"/>
+            <c:showBubbleSize val="0"/>
+            <c:showLeaderLines val="0"/>
+            <c:extLst>
+              <c:ext xmlns:c15="http://schemas.microsoft.com/office/drawing/2012/chart" uri="{CE6537A1-D6FC-4f65-9D91-7224C49458BB}">
+                <c15:showLeaderLines val="1"/>
+                <c15:leaderLines>
+                  <c:spPr>
+                    <a:ln w="9525" cap="flat" cmpd="sng" algn="ctr">
+                      <a:solidFill>
+                        <a:schemeClr val="tx1">
+                          <a:lumMod val="35000"/>
+                          <a:lumOff val="65000"/>
+                        </a:schemeClr>
+                      </a:solidFill>
+                      <a:round/>
+                    </a:ln>
+                    <a:effectLst/>
+                  </c:spPr>
+                </c15:leaderLines>
+              </c:ext>
+            </c:extLst>
+          </c:dLbls>
+          <c:cat>
+            <c:strRef>
+              <c:f>B_S_RULES!$A$50:$A$53</c:f>
+              <c:strCache>
+                <c:ptCount val="4"/>
+                <c:pt idx="0">
+                  <c:v>опт.</c:v>
+                </c:pt>
+                <c:pt idx="1">
+                  <c:v>bitset</c:v>
+                </c:pt>
+                <c:pt idx="2">
+                  <c:v>буфер.</c:v>
+                </c:pt>
+                <c:pt idx="3">
+                  <c:v>bitset буф.</c:v>
+                </c:pt>
+              </c:strCache>
+              <c:extLst/>
+            </c:strRef>
+          </c:cat>
+          <c:val>
+            <c:numRef>
+              <c:f>B_S_RULES!$D$50:$D$53</c:f>
+              <c:numCache>
+                <c:formatCode>0.000</c:formatCode>
+                <c:ptCount val="4"/>
+                <c:pt idx="0">
+                  <c:v>2.3918686292334774</c:v>
+                </c:pt>
+                <c:pt idx="1">
+                  <c:v>3.0112255582341056</c:v>
+                </c:pt>
+                <c:pt idx="2">
+                  <c:v>26.865522485335646</c:v>
+                </c:pt>
+                <c:pt idx="3">
+                  <c:v>26.116578669482575</c:v>
+                </c:pt>
+              </c:numCache>
+              <c:extLst/>
+            </c:numRef>
+          </c:val>
+          <c:extLst>
+            <c:ext xmlns:c16="http://schemas.microsoft.com/office/drawing/2014/chart" uri="{C3380CC4-5D6E-409C-BE32-E72D297353CC}">
+              <c16:uniqueId val="{00000000-B7EB-46FB-8364-CD5332838AE1}"/>
+            </c:ext>
+          </c:extLst>
+        </c:ser>
+        <c:ser>
+          <c:idx val="4"/>
+          <c:order val="1"/>
+          <c:tx>
+            <c:strRef>
+              <c:f>B_S_RULES!$F$1</c:f>
+              <c:strCache>
+                <c:ptCount val="1"/>
+                <c:pt idx="0">
+                  <c:v>0.01%</c:v>
+                </c:pt>
+              </c:strCache>
+            </c:strRef>
+          </c:tx>
+          <c:spPr>
+            <a:solidFill>
+              <a:srgbClr val="D60093"/>
+            </a:solidFill>
+            <a:ln>
+              <a:noFill/>
+            </a:ln>
+            <a:effectLst/>
+          </c:spPr>
+          <c:invertIfNegative val="0"/>
+          <c:dLbls>
+            <c:numFmt formatCode="#,##0.0" sourceLinked="0"/>
+            <c:spPr>
+              <a:noFill/>
+              <a:ln>
+                <a:noFill/>
+              </a:ln>
+              <a:effectLst/>
+            </c:spPr>
+            <c:txPr>
+              <a:bodyPr rot="-5400000" spcFirstLastPara="1" vertOverflow="ellipsis" wrap="square" lIns="38100" tIns="19050" rIns="38100" bIns="19050" anchor="ctr" anchorCtr="1">
+                <a:spAutoFit/>
+              </a:bodyPr>
+              <a:lstStyle/>
+              <a:p>
+                <a:pPr>
+                  <a:defRPr sz="900" b="0" i="0" u="none" strike="noStrike" kern="1200" baseline="0">
+                    <a:solidFill>
+                      <a:schemeClr val="tx1">
+                        <a:lumMod val="75000"/>
+                        <a:lumOff val="25000"/>
+                      </a:schemeClr>
+                    </a:solidFill>
+                    <a:latin typeface="+mn-lt"/>
+                    <a:ea typeface="+mn-ea"/>
+                    <a:cs typeface="+mn-cs"/>
+                  </a:defRPr>
+                </a:pPr>
+                <a:endParaRPr lang="ru-RU"/>
+              </a:p>
+            </c:txPr>
+            <c:dLblPos val="outEnd"/>
+            <c:showLegendKey val="0"/>
+            <c:showVal val="1"/>
+            <c:showCatName val="0"/>
+            <c:showSerName val="0"/>
+            <c:showPercent val="0"/>
+            <c:showBubbleSize val="0"/>
+            <c:showLeaderLines val="0"/>
+            <c:extLst>
+              <c:ext xmlns:c15="http://schemas.microsoft.com/office/drawing/2012/chart" uri="{CE6537A1-D6FC-4f65-9D91-7224C49458BB}">
+                <c15:showLeaderLines val="1"/>
+                <c15:leaderLines>
+                  <c:spPr>
+                    <a:ln w="9525" cap="flat" cmpd="sng" algn="ctr">
+                      <a:solidFill>
+                        <a:schemeClr val="tx1">
+                          <a:lumMod val="35000"/>
+                          <a:lumOff val="65000"/>
+                        </a:schemeClr>
+                      </a:solidFill>
+                      <a:round/>
+                    </a:ln>
+                    <a:effectLst/>
+                  </c:spPr>
+                </c15:leaderLines>
+              </c:ext>
+            </c:extLst>
+          </c:dLbls>
+          <c:cat>
+            <c:strRef>
+              <c:f>B_S_RULES!$A$50:$A$53</c:f>
+              <c:strCache>
+                <c:ptCount val="4"/>
+                <c:pt idx="0">
+                  <c:v>опт.</c:v>
+                </c:pt>
+                <c:pt idx="1">
+                  <c:v>bitset</c:v>
+                </c:pt>
+                <c:pt idx="2">
+                  <c:v>буфер.</c:v>
+                </c:pt>
+                <c:pt idx="3">
+                  <c:v>bitset буф.</c:v>
+                </c:pt>
+              </c:strCache>
+              <c:extLst/>
+            </c:strRef>
+          </c:cat>
+          <c:val>
+            <c:numRef>
+              <c:f>B_S_RULES!$F$50:$F$53</c:f>
+              <c:numCache>
+                <c:formatCode>0.000</c:formatCode>
+                <c:ptCount val="4"/>
+                <c:pt idx="0">
+                  <c:v>2.3916010904661547</c:v>
+                </c:pt>
+                <c:pt idx="1">
+                  <c:v>3.011540147051663</c:v>
+                </c:pt>
+                <c:pt idx="2">
+                  <c:v>26.849576731061429</c:v>
+                </c:pt>
+                <c:pt idx="3">
+                  <c:v>26.085196119780683</c:v>
+                </c:pt>
+              </c:numCache>
+              <c:extLst/>
+            </c:numRef>
+          </c:val>
+          <c:extLst>
+            <c:ext xmlns:c16="http://schemas.microsoft.com/office/drawing/2014/chart" uri="{C3380CC4-5D6E-409C-BE32-E72D297353CC}">
+              <c16:uniqueId val="{00000001-B7EB-46FB-8364-CD5332838AE1}"/>
+            </c:ext>
+          </c:extLst>
+        </c:ser>
+        <c:ser>
+          <c:idx val="6"/>
+          <c:order val="4"/>
+          <c:tx>
+            <c:strRef>
+              <c:f>B_S_RULES!$H$1</c:f>
+              <c:strCache>
+                <c:ptCount val="1"/>
+                <c:pt idx="0">
+                  <c:v>1%</c:v>
+                </c:pt>
+              </c:strCache>
+            </c:strRef>
+          </c:tx>
+          <c:spPr>
+            <a:solidFill>
+              <a:srgbClr val="FF9933"/>
+            </a:solidFill>
+            <a:ln>
+              <a:noFill/>
+            </a:ln>
+            <a:effectLst/>
+          </c:spPr>
+          <c:invertIfNegative val="0"/>
+          <c:dLbls>
+            <c:numFmt formatCode="#,##0.0" sourceLinked="0"/>
+            <c:spPr>
+              <a:noFill/>
+              <a:ln>
+                <a:noFill/>
+              </a:ln>
+              <a:effectLst/>
+            </c:spPr>
+            <c:txPr>
+              <a:bodyPr rot="-5400000" spcFirstLastPara="1" vertOverflow="ellipsis" wrap="square" lIns="38100" tIns="19050" rIns="38100" bIns="19050" anchor="ctr" anchorCtr="1">
+                <a:spAutoFit/>
+              </a:bodyPr>
+              <a:lstStyle/>
+              <a:p>
+                <a:pPr>
+                  <a:defRPr sz="900" b="0" i="0" u="none" strike="noStrike" kern="1200" baseline="0">
+                    <a:solidFill>
+                      <a:schemeClr val="tx1">
+                        <a:lumMod val="75000"/>
+                        <a:lumOff val="25000"/>
+                      </a:schemeClr>
+                    </a:solidFill>
+                    <a:latin typeface="+mn-lt"/>
+                    <a:ea typeface="+mn-ea"/>
+                    <a:cs typeface="+mn-cs"/>
+                  </a:defRPr>
+                </a:pPr>
+                <a:endParaRPr lang="ru-RU"/>
+              </a:p>
+            </c:txPr>
+            <c:dLblPos val="outEnd"/>
+            <c:showLegendKey val="0"/>
+            <c:showVal val="1"/>
+            <c:showCatName val="0"/>
+            <c:showSerName val="0"/>
+            <c:showPercent val="0"/>
+            <c:showBubbleSize val="0"/>
+            <c:showLeaderLines val="0"/>
+            <c:extLst>
+              <c:ext xmlns:c15="http://schemas.microsoft.com/office/drawing/2012/chart" uri="{CE6537A1-D6FC-4f65-9D91-7224C49458BB}">
+                <c15:showLeaderLines val="1"/>
+                <c15:leaderLines>
+                  <c:spPr>
+                    <a:ln w="9525" cap="flat" cmpd="sng" algn="ctr">
+                      <a:solidFill>
+                        <a:schemeClr val="tx1">
+                          <a:lumMod val="35000"/>
+                          <a:lumOff val="65000"/>
+                        </a:schemeClr>
+                      </a:solidFill>
+                      <a:round/>
+                    </a:ln>
+                    <a:effectLst/>
+                  </c:spPr>
+                </c15:leaderLines>
+              </c:ext>
+            </c:extLst>
+          </c:dLbls>
+          <c:cat>
+            <c:strRef>
+              <c:f>B_S_RULES!$A$50:$A$53</c:f>
+              <c:strCache>
+                <c:ptCount val="4"/>
+                <c:pt idx="0">
+                  <c:v>опт.</c:v>
+                </c:pt>
+                <c:pt idx="1">
+                  <c:v>bitset</c:v>
+                </c:pt>
+                <c:pt idx="2">
+                  <c:v>буфер.</c:v>
+                </c:pt>
+                <c:pt idx="3">
+                  <c:v>bitset буф.</c:v>
+                </c:pt>
+              </c:strCache>
+              <c:extLst/>
+            </c:strRef>
+          </c:cat>
+          <c:val>
+            <c:numRef>
+              <c:f>B_S_RULES!$H$50:$H$53</c:f>
+              <c:numCache>
+                <c:formatCode>0.000</c:formatCode>
+                <c:ptCount val="4"/>
+                <c:pt idx="0">
+                  <c:v>2.3899133916531934</c:v>
+                </c:pt>
+                <c:pt idx="1">
+                  <c:v>3.0132719140454083</c:v>
+                </c:pt>
+                <c:pt idx="2">
+                  <c:v>26.802157837837839</c:v>
+                </c:pt>
+                <c:pt idx="3">
+                  <c:v>26.003771764212296</c:v>
+                </c:pt>
+              </c:numCache>
+              <c:extLst/>
+            </c:numRef>
+          </c:val>
+          <c:extLst>
+            <c:ext xmlns:c16="http://schemas.microsoft.com/office/drawing/2014/chart" uri="{C3380CC4-5D6E-409C-BE32-E72D297353CC}">
+              <c16:uniqueId val="{00000002-B7EB-46FB-8364-CD5332838AE1}"/>
+            </c:ext>
+          </c:extLst>
+        </c:ser>
+        <c:ser>
+          <c:idx val="7"/>
+          <c:order val="5"/>
+          <c:tx>
+            <c:strRef>
+              <c:f>B_S_RULES!$I$1</c:f>
+              <c:strCache>
+                <c:ptCount val="1"/>
+                <c:pt idx="0">
+                  <c:v>50%</c:v>
+                </c:pt>
+              </c:strCache>
+            </c:strRef>
+          </c:tx>
+          <c:spPr>
+            <a:solidFill>
+              <a:srgbClr val="6666FF"/>
+            </a:solidFill>
+            <a:ln>
+              <a:noFill/>
+            </a:ln>
+            <a:effectLst/>
+          </c:spPr>
+          <c:invertIfNegative val="0"/>
+          <c:dLbls>
+            <c:numFmt formatCode="#,##0.0" sourceLinked="0"/>
+            <c:spPr>
+              <a:noFill/>
+              <a:ln>
+                <a:noFill/>
+              </a:ln>
+              <a:effectLst/>
+            </c:spPr>
+            <c:txPr>
+              <a:bodyPr rot="-5400000" spcFirstLastPara="1" vertOverflow="ellipsis" wrap="square" lIns="38100" tIns="19050" rIns="38100" bIns="19050" anchor="ctr" anchorCtr="1">
+                <a:spAutoFit/>
+              </a:bodyPr>
+              <a:lstStyle/>
+              <a:p>
+                <a:pPr>
+                  <a:defRPr sz="900" b="0" i="0" u="none" strike="noStrike" kern="1200" baseline="0">
+                    <a:solidFill>
+                      <a:schemeClr val="tx1">
+                        <a:lumMod val="75000"/>
+                        <a:lumOff val="25000"/>
+                      </a:schemeClr>
+                    </a:solidFill>
+                    <a:latin typeface="+mn-lt"/>
+                    <a:ea typeface="+mn-ea"/>
+                    <a:cs typeface="+mn-cs"/>
+                  </a:defRPr>
+                </a:pPr>
+                <a:endParaRPr lang="ru-RU"/>
+              </a:p>
+            </c:txPr>
+            <c:dLblPos val="outEnd"/>
+            <c:showLegendKey val="0"/>
+            <c:showVal val="1"/>
+            <c:showCatName val="0"/>
+            <c:showSerName val="0"/>
+            <c:showPercent val="0"/>
+            <c:showBubbleSize val="0"/>
+            <c:showLeaderLines val="0"/>
+            <c:extLst>
+              <c:ext xmlns:c15="http://schemas.microsoft.com/office/drawing/2012/chart" uri="{CE6537A1-D6FC-4f65-9D91-7224C49458BB}">
+                <c15:showLeaderLines val="1"/>
+                <c15:leaderLines>
+                  <c:spPr>
+                    <a:ln w="9525" cap="flat" cmpd="sng" algn="ctr">
+                      <a:solidFill>
+                        <a:schemeClr val="tx1">
+                          <a:lumMod val="35000"/>
+                          <a:lumOff val="65000"/>
+                        </a:schemeClr>
+                      </a:solidFill>
+                      <a:round/>
+                    </a:ln>
+                    <a:effectLst/>
+                  </c:spPr>
+                </c15:leaderLines>
+              </c:ext>
+            </c:extLst>
+          </c:dLbls>
+          <c:cat>
+            <c:strRef>
+              <c:f>B_S_RULES!$A$50:$A$53</c:f>
+              <c:strCache>
+                <c:ptCount val="4"/>
+                <c:pt idx="0">
+                  <c:v>опт.</c:v>
+                </c:pt>
+                <c:pt idx="1">
+                  <c:v>bitset</c:v>
+                </c:pt>
+                <c:pt idx="2">
+                  <c:v>буфер.</c:v>
+                </c:pt>
+                <c:pt idx="3">
+                  <c:v>bitset буф.</c:v>
+                </c:pt>
+              </c:strCache>
+              <c:extLst/>
+            </c:strRef>
+          </c:cat>
+          <c:val>
+            <c:numRef>
+              <c:f>B_S_RULES!$I$50:$I$53</c:f>
+              <c:numCache>
+                <c:formatCode>0.000</c:formatCode>
+                <c:ptCount val="4"/>
+                <c:pt idx="0">
+                  <c:v>2.3583104731126228</c:v>
+                </c:pt>
+                <c:pt idx="1">
+                  <c:v>3.0004302925989679</c:v>
+                </c:pt>
+                <c:pt idx="2">
+                  <c:v>26.110671936758891</c:v>
+                </c:pt>
+                <c:pt idx="3">
+                  <c:v>25.137993190466659</c:v>
+                </c:pt>
+              </c:numCache>
+              <c:extLst/>
+            </c:numRef>
+          </c:val>
+          <c:extLst>
+            <c:ext xmlns:c16="http://schemas.microsoft.com/office/drawing/2014/chart" uri="{C3380CC4-5D6E-409C-BE32-E72D297353CC}">
+              <c16:uniqueId val="{00000003-B7EB-46FB-8364-CD5332838AE1}"/>
+            </c:ext>
+          </c:extLst>
+        </c:ser>
+        <c:ser>
+          <c:idx val="0"/>
+          <c:order val="6"/>
+          <c:tx>
+            <c:strRef>
+              <c:f>B_S_RULES!$B$1</c:f>
+              <c:strCache>
+                <c:ptCount val="1"/>
+                <c:pt idx="0">
+                  <c:v>Среднее</c:v>
+                </c:pt>
+              </c:strCache>
+            </c:strRef>
+          </c:tx>
+          <c:spPr>
+            <a:solidFill>
+              <a:srgbClr val="009999"/>
+            </a:solidFill>
+            <a:ln>
+              <a:noFill/>
+            </a:ln>
+            <a:effectLst/>
+          </c:spPr>
+          <c:invertIfNegative val="0"/>
+          <c:dLbls>
+            <c:numFmt formatCode="#,##0.0" sourceLinked="0"/>
+            <c:spPr>
+              <a:noFill/>
+              <a:ln>
+                <a:noFill/>
+              </a:ln>
+              <a:effectLst/>
+            </c:spPr>
+            <c:txPr>
+              <a:bodyPr rot="-5400000" spcFirstLastPara="1" vertOverflow="ellipsis" wrap="square" lIns="38100" tIns="19050" rIns="38100" bIns="19050" anchor="ctr" anchorCtr="1">
+                <a:spAutoFit/>
+              </a:bodyPr>
+              <a:lstStyle/>
+              <a:p>
+                <a:pPr>
+                  <a:defRPr sz="900" b="0" i="0" u="none" strike="noStrike" kern="1200" baseline="0">
+                    <a:solidFill>
+                      <a:schemeClr val="tx1">
+                        <a:lumMod val="75000"/>
+                        <a:lumOff val="25000"/>
+                      </a:schemeClr>
+                    </a:solidFill>
+                    <a:latin typeface="+mn-lt"/>
+                    <a:ea typeface="+mn-ea"/>
+                    <a:cs typeface="+mn-cs"/>
+                  </a:defRPr>
+                </a:pPr>
+                <a:endParaRPr lang="ru-RU"/>
+              </a:p>
+            </c:txPr>
+            <c:dLblPos val="outEnd"/>
+            <c:showLegendKey val="0"/>
+            <c:showVal val="1"/>
+            <c:showCatName val="0"/>
+            <c:showSerName val="0"/>
+            <c:showPercent val="0"/>
+            <c:showBubbleSize val="0"/>
+            <c:showLeaderLines val="0"/>
+            <c:extLst>
+              <c:ext xmlns:c15="http://schemas.microsoft.com/office/drawing/2012/chart" uri="{CE6537A1-D6FC-4f65-9D91-7224C49458BB}">
+                <c15:showLeaderLines val="1"/>
+                <c15:leaderLines>
+                  <c:spPr>
+                    <a:ln w="9525" cap="flat" cmpd="sng" algn="ctr">
+                      <a:solidFill>
+                        <a:schemeClr val="tx1">
+                          <a:lumMod val="35000"/>
+                          <a:lumOff val="65000"/>
+                        </a:schemeClr>
+                      </a:solidFill>
+                      <a:round/>
+                    </a:ln>
+                    <a:effectLst/>
+                  </c:spPr>
+                </c15:leaderLines>
+              </c:ext>
+            </c:extLst>
+          </c:dLbls>
+          <c:cat>
+            <c:strRef>
+              <c:f>B_S_RULES!$A$50:$A$53</c:f>
+              <c:strCache>
+                <c:ptCount val="4"/>
+                <c:pt idx="0">
+                  <c:v>опт.</c:v>
+                </c:pt>
+                <c:pt idx="1">
+                  <c:v>bitset</c:v>
+                </c:pt>
+                <c:pt idx="2">
+                  <c:v>буфер.</c:v>
+                </c:pt>
+                <c:pt idx="3">
+                  <c:v>bitset буф.</c:v>
+                </c:pt>
+              </c:strCache>
+              <c:extLst/>
+            </c:strRef>
+          </c:cat>
+          <c:val>
+            <c:numRef>
+              <c:f>B_S_RULES!$B$50:$B$53</c:f>
+              <c:numCache>
+                <c:formatCode>0.000</c:formatCode>
+                <c:ptCount val="4"/>
+                <c:pt idx="0">
+                  <c:v>2.3150416418423569</c:v>
+                </c:pt>
+                <c:pt idx="1">
+                  <c:v>2.9660088654878303</c:v>
+                </c:pt>
+                <c:pt idx="2">
+                  <c:v>25.867065682802288</c:v>
+                </c:pt>
+                <c:pt idx="3">
+                  <c:v>24.981693519408754</c:v>
+                </c:pt>
+              </c:numCache>
+              <c:extLst/>
+            </c:numRef>
+          </c:val>
+          <c:extLst>
+            <c:ext xmlns:c16="http://schemas.microsoft.com/office/drawing/2014/chart" uri="{C3380CC4-5D6E-409C-BE32-E72D297353CC}">
+              <c16:uniqueId val="{00000004-B7EB-46FB-8364-CD5332838AE1}"/>
+            </c:ext>
+          </c:extLst>
+        </c:ser>
+        <c:ser>
+          <c:idx val="8"/>
+          <c:order val="7"/>
+          <c:tx>
+            <c:strRef>
+              <c:f>B_S_RULES!$J$1</c:f>
+              <c:strCache>
+                <c:ptCount val="1"/>
+                <c:pt idx="0">
+                  <c:v>99%</c:v>
+                </c:pt>
+              </c:strCache>
+            </c:strRef>
+          </c:tx>
+          <c:spPr>
+            <a:solidFill>
+              <a:srgbClr val="0066CC"/>
+            </a:solidFill>
+            <a:ln>
+              <a:noFill/>
+            </a:ln>
+            <a:effectLst/>
+          </c:spPr>
+          <c:invertIfNegative val="0"/>
+          <c:dLbls>
+            <c:numFmt formatCode="#,##0.0" sourceLinked="0"/>
+            <c:spPr>
+              <a:noFill/>
+              <a:ln>
+                <a:noFill/>
+              </a:ln>
+              <a:effectLst/>
+            </c:spPr>
+            <c:txPr>
+              <a:bodyPr rot="-5400000" spcFirstLastPara="1" vertOverflow="ellipsis" wrap="square" lIns="38100" tIns="19050" rIns="38100" bIns="19050" anchor="ctr" anchorCtr="1">
+                <a:spAutoFit/>
+              </a:bodyPr>
+              <a:lstStyle/>
+              <a:p>
+                <a:pPr>
+                  <a:defRPr sz="900" b="0" i="0" u="none" strike="noStrike" kern="1200" baseline="0">
+                    <a:solidFill>
+                      <a:schemeClr val="tx1">
+                        <a:lumMod val="75000"/>
+                        <a:lumOff val="25000"/>
+                      </a:schemeClr>
+                    </a:solidFill>
+                    <a:latin typeface="+mn-lt"/>
+                    <a:ea typeface="+mn-ea"/>
+                    <a:cs typeface="+mn-cs"/>
+                  </a:defRPr>
+                </a:pPr>
+                <a:endParaRPr lang="ru-RU"/>
+              </a:p>
+            </c:txPr>
+            <c:dLblPos val="outEnd"/>
+            <c:showLegendKey val="0"/>
+            <c:showVal val="1"/>
+            <c:showCatName val="0"/>
+            <c:showSerName val="0"/>
+            <c:showPercent val="0"/>
+            <c:showBubbleSize val="0"/>
+            <c:showLeaderLines val="0"/>
+            <c:extLst>
+              <c:ext xmlns:c15="http://schemas.microsoft.com/office/drawing/2012/chart" uri="{CE6537A1-D6FC-4f65-9D91-7224C49458BB}">
+                <c15:showLeaderLines val="1"/>
+                <c15:leaderLines>
+                  <c:spPr>
+                    <a:ln w="9525" cap="flat" cmpd="sng" algn="ctr">
+                      <a:solidFill>
+                        <a:schemeClr val="tx1">
+                          <a:lumMod val="35000"/>
+                          <a:lumOff val="65000"/>
+                        </a:schemeClr>
+                      </a:solidFill>
+                      <a:round/>
+                    </a:ln>
+                    <a:effectLst/>
+                  </c:spPr>
+                </c15:leaderLines>
+              </c:ext>
+            </c:extLst>
+          </c:dLbls>
+          <c:cat>
+            <c:strRef>
+              <c:f>B_S_RULES!$A$50:$A$53</c:f>
+              <c:strCache>
+                <c:ptCount val="4"/>
+                <c:pt idx="0">
+                  <c:v>опт.</c:v>
+                </c:pt>
+                <c:pt idx="1">
+                  <c:v>bitset</c:v>
+                </c:pt>
+                <c:pt idx="2">
+                  <c:v>буфер.</c:v>
+                </c:pt>
+                <c:pt idx="3">
+                  <c:v>bitset буф.</c:v>
+                </c:pt>
+              </c:strCache>
+              <c:extLst/>
+            </c:strRef>
+          </c:cat>
+          <c:val>
+            <c:numRef>
+              <c:f>B_S_RULES!$J$50:$J$53</c:f>
+              <c:numCache>
+                <c:formatCode>0.000</c:formatCode>
+                <c:ptCount val="4"/>
+                <c:pt idx="0">
+                  <c:v>1.8683726158334311</c:v>
+                </c:pt>
+                <c:pt idx="1">
+                  <c:v>2.6108690698414061</c:v>
+                </c:pt>
+                <c:pt idx="2">
+                  <c:v>20.561814512591035</c:v>
+                </c:pt>
+                <c:pt idx="3">
+                  <c:v>20.519700918724045</c:v>
+                </c:pt>
+              </c:numCache>
+              <c:extLst/>
+            </c:numRef>
+          </c:val>
+          <c:extLst>
+            <c:ext xmlns:c16="http://schemas.microsoft.com/office/drawing/2014/chart" uri="{C3380CC4-5D6E-409C-BE32-E72D297353CC}">
+              <c16:uniqueId val="{00000005-B7EB-46FB-8364-CD5332838AE1}"/>
+            </c:ext>
+          </c:extLst>
+        </c:ser>
+        <c:ser>
+          <c:idx val="10"/>
+          <c:order val="9"/>
+          <c:tx>
+            <c:strRef>
+              <c:f>B_S_RULES!$L$1</c:f>
+              <c:strCache>
+                <c:ptCount val="1"/>
+                <c:pt idx="0">
+                  <c:v>99.99%</c:v>
+                </c:pt>
+              </c:strCache>
+            </c:strRef>
+          </c:tx>
+          <c:spPr>
+            <a:solidFill>
+              <a:srgbClr val="669900"/>
+            </a:solidFill>
+            <a:ln>
+              <a:noFill/>
+            </a:ln>
+            <a:effectLst/>
+          </c:spPr>
+          <c:invertIfNegative val="0"/>
+          <c:dLbls>
+            <c:numFmt formatCode="#,##0.0" sourceLinked="0"/>
+            <c:spPr>
+              <a:noFill/>
+              <a:ln>
+                <a:noFill/>
+              </a:ln>
+              <a:effectLst/>
+            </c:spPr>
+            <c:txPr>
+              <a:bodyPr rot="-5400000" spcFirstLastPara="1" vertOverflow="ellipsis" wrap="square" lIns="38100" tIns="19050" rIns="38100" bIns="19050" anchor="ctr" anchorCtr="1">
+                <a:spAutoFit/>
+              </a:bodyPr>
+              <a:lstStyle/>
+              <a:p>
+                <a:pPr>
+                  <a:defRPr sz="900" b="0" i="0" u="none" strike="noStrike" kern="1200" baseline="0">
+                    <a:solidFill>
+                      <a:schemeClr val="tx1">
+                        <a:lumMod val="75000"/>
+                        <a:lumOff val="25000"/>
+                      </a:schemeClr>
+                    </a:solidFill>
+                    <a:latin typeface="+mn-lt"/>
+                    <a:ea typeface="+mn-ea"/>
+                    <a:cs typeface="+mn-cs"/>
+                  </a:defRPr>
+                </a:pPr>
+                <a:endParaRPr lang="ru-RU"/>
+              </a:p>
+            </c:txPr>
+            <c:dLblPos val="outEnd"/>
+            <c:showLegendKey val="0"/>
+            <c:showVal val="1"/>
+            <c:showCatName val="0"/>
+            <c:showSerName val="0"/>
+            <c:showPercent val="0"/>
+            <c:showBubbleSize val="0"/>
+            <c:showLeaderLines val="0"/>
+            <c:extLst>
+              <c:ext xmlns:c15="http://schemas.microsoft.com/office/drawing/2012/chart" uri="{CE6537A1-D6FC-4f65-9D91-7224C49458BB}">
+                <c15:showLeaderLines val="1"/>
+                <c15:leaderLines>
+                  <c:spPr>
+                    <a:ln w="9525" cap="flat" cmpd="sng" algn="ctr">
+                      <a:solidFill>
+                        <a:schemeClr val="tx1">
+                          <a:lumMod val="35000"/>
+                          <a:lumOff val="65000"/>
+                        </a:schemeClr>
+                      </a:solidFill>
+                      <a:round/>
+                    </a:ln>
+                    <a:effectLst/>
+                  </c:spPr>
+                </c15:leaderLines>
+              </c:ext>
+            </c:extLst>
+          </c:dLbls>
+          <c:cat>
+            <c:strRef>
+              <c:f>B_S_RULES!$A$50:$A$53</c:f>
+              <c:strCache>
+                <c:ptCount val="4"/>
+                <c:pt idx="0">
+                  <c:v>опт.</c:v>
+                </c:pt>
+                <c:pt idx="1">
+                  <c:v>bitset</c:v>
+                </c:pt>
+                <c:pt idx="2">
+                  <c:v>буфер.</c:v>
+                </c:pt>
+                <c:pt idx="3">
+                  <c:v>bitset буф.</c:v>
+                </c:pt>
+              </c:strCache>
+              <c:extLst/>
+            </c:strRef>
+          </c:cat>
+          <c:val>
+            <c:numRef>
+              <c:f>B_S_RULES!$L$50:$L$53</c:f>
+              <c:numCache>
+                <c:formatCode>0.000</c:formatCode>
+                <c:ptCount val="4"/>
+                <c:pt idx="0">
+                  <c:v>1.685532690332862</c:v>
+                </c:pt>
+                <c:pt idx="1">
+                  <c:v>2.4795772127093638</c:v>
+                </c:pt>
+                <c:pt idx="2">
+                  <c:v>13.376974326595972</c:v>
+                </c:pt>
+                <c:pt idx="3">
+                  <c:v>13.625931466511508</c:v>
+                </c:pt>
+              </c:numCache>
+              <c:extLst/>
+            </c:numRef>
+          </c:val>
+          <c:extLst>
+            <c:ext xmlns:c16="http://schemas.microsoft.com/office/drawing/2014/chart" uri="{C3380CC4-5D6E-409C-BE32-E72D297353CC}">
+              <c16:uniqueId val="{00000006-B7EB-46FB-8364-CD5332838AE1}"/>
+            </c:ext>
+          </c:extLst>
+        </c:ser>
+        <c:ser>
+          <c:idx val="3"/>
+          <c:order val="10"/>
+          <c:tx>
+            <c:strRef>
+              <c:f>B_S_RULES!$E$1</c:f>
+              <c:strCache>
+                <c:ptCount val="1"/>
+                <c:pt idx="0">
+                  <c:v>Макс</c:v>
+                </c:pt>
+              </c:strCache>
+            </c:strRef>
+          </c:tx>
+          <c:spPr>
+            <a:solidFill>
+              <a:srgbClr val="66FFFF"/>
+            </a:solidFill>
+            <a:ln>
+              <a:noFill/>
+            </a:ln>
+            <a:effectLst/>
+          </c:spPr>
+          <c:invertIfNegative val="0"/>
+          <c:dLbls>
+            <c:numFmt formatCode="#,##0.0" sourceLinked="0"/>
+            <c:spPr>
+              <a:noFill/>
+              <a:ln>
+                <a:noFill/>
+              </a:ln>
+              <a:effectLst/>
+            </c:spPr>
+            <c:txPr>
+              <a:bodyPr rot="-5400000" spcFirstLastPara="1" vertOverflow="ellipsis" wrap="square" lIns="38100" tIns="19050" rIns="38100" bIns="19050" anchor="ctr" anchorCtr="1">
+                <a:spAutoFit/>
+              </a:bodyPr>
+              <a:lstStyle/>
+              <a:p>
+                <a:pPr>
+                  <a:defRPr sz="900" b="0" i="0" u="none" strike="noStrike" kern="1200" baseline="0">
+                    <a:solidFill>
+                      <a:schemeClr val="tx1">
+                        <a:lumMod val="75000"/>
+                        <a:lumOff val="25000"/>
+                      </a:schemeClr>
+                    </a:solidFill>
+                    <a:latin typeface="+mn-lt"/>
+                    <a:ea typeface="+mn-ea"/>
+                    <a:cs typeface="+mn-cs"/>
+                  </a:defRPr>
+                </a:pPr>
+                <a:endParaRPr lang="ru-RU"/>
+              </a:p>
+            </c:txPr>
+            <c:dLblPos val="outEnd"/>
+            <c:showLegendKey val="0"/>
+            <c:showVal val="1"/>
+            <c:showCatName val="0"/>
+            <c:showSerName val="0"/>
+            <c:showPercent val="0"/>
+            <c:showBubbleSize val="0"/>
+            <c:showLeaderLines val="0"/>
+            <c:extLst>
+              <c:ext xmlns:c15="http://schemas.microsoft.com/office/drawing/2012/chart" uri="{CE6537A1-D6FC-4f65-9D91-7224C49458BB}">
+                <c15:showLeaderLines val="1"/>
+                <c15:leaderLines>
+                  <c:spPr>
+                    <a:ln w="9525" cap="flat" cmpd="sng" algn="ctr">
+                      <a:solidFill>
+                        <a:schemeClr val="tx1">
+                          <a:lumMod val="35000"/>
+                          <a:lumOff val="65000"/>
+                        </a:schemeClr>
+                      </a:solidFill>
+                      <a:round/>
+                    </a:ln>
+                    <a:effectLst/>
+                  </c:spPr>
+                </c15:leaderLines>
+              </c:ext>
+            </c:extLst>
+          </c:dLbls>
+          <c:cat>
+            <c:strRef>
+              <c:f>B_S_RULES!$A$50:$A$53</c:f>
+              <c:strCache>
+                <c:ptCount val="4"/>
+                <c:pt idx="0">
+                  <c:v>опт.</c:v>
+                </c:pt>
+                <c:pt idx="1">
+                  <c:v>bitset</c:v>
+                </c:pt>
+                <c:pt idx="2">
+                  <c:v>буфер.</c:v>
+                </c:pt>
+                <c:pt idx="3">
+                  <c:v>bitset буф.</c:v>
+                </c:pt>
+              </c:strCache>
+              <c:extLst/>
+            </c:strRef>
+          </c:cat>
+          <c:val>
+            <c:numRef>
+              <c:f>B_S_RULES!$E$50:$E$53</c:f>
+              <c:numCache>
+                <c:formatCode>0.000</c:formatCode>
+                <c:ptCount val="4"/>
+                <c:pt idx="0">
+                  <c:v>2.0475579631635967</c:v>
+                </c:pt>
+                <c:pt idx="1">
+                  <c:v>3.0790897123418004</c:v>
+                </c:pt>
+                <c:pt idx="2">
+                  <c:v>14.999174603174605</c:v>
+                </c:pt>
+                <c:pt idx="3">
+                  <c:v>15.557260454395783</c:v>
+                </c:pt>
+              </c:numCache>
+              <c:extLst/>
+            </c:numRef>
+          </c:val>
+          <c:extLst>
+            <c:ext xmlns:c16="http://schemas.microsoft.com/office/drawing/2014/chart" uri="{C3380CC4-5D6E-409C-BE32-E72D297353CC}">
+              <c16:uniqueId val="{00000007-B7EB-46FB-8364-CD5332838AE1}"/>
+            </c:ext>
+          </c:extLst>
+        </c:ser>
+        <c:dLbls>
+          <c:dLblPos val="outEnd"/>
+          <c:showLegendKey val="0"/>
+          <c:showVal val="1"/>
+          <c:showCatName val="0"/>
+          <c:showSerName val="0"/>
+          <c:showPercent val="0"/>
+          <c:showBubbleSize val="0"/>
+        </c:dLbls>
+        <c:gapWidth val="109"/>
+        <c:overlap val="-11"/>
+        <c:axId val="1127726992"/>
+        <c:axId val="1127726160"/>
+        <c:extLst>
+          <c:ext xmlns:c15="http://schemas.microsoft.com/office/drawing/2012/chart" uri="{02D57815-91ED-43cb-92C2-25804820EDAC}">
+            <c15:filteredBarSeries>
+              <c15:ser>
+                <c:idx val="5"/>
+                <c:order val="2"/>
+                <c:tx>
+                  <c:strRef>
+                    <c:extLst>
+                      <c:ext uri="{02D57815-91ED-43cb-92C2-25804820EDAC}">
+                        <c15:formulaRef>
+                          <c15:sqref>B_S_RULES!$G$1</c15:sqref>
+                        </c15:formulaRef>
+                      </c:ext>
+                    </c:extLst>
+                    <c:strCache>
+                      <c:ptCount val="1"/>
+                      <c:pt idx="0">
+                        <c:v>0.1%</c:v>
+                      </c:pt>
+                    </c:strCache>
+                  </c:strRef>
+                </c:tx>
+                <c:spPr>
+                  <a:solidFill>
+                    <a:schemeClr val="accent6"/>
+                  </a:solidFill>
+                  <a:ln>
+                    <a:noFill/>
+                  </a:ln>
+                  <a:effectLst/>
+                </c:spPr>
+                <c:invertIfNegative val="0"/>
+                <c:dLbls>
+                  <c:numFmt formatCode="#,##0.0" sourceLinked="0"/>
+                  <c:spPr>
+                    <a:noFill/>
+                    <a:ln>
+                      <a:noFill/>
+                    </a:ln>
+                    <a:effectLst/>
+                  </c:spPr>
+                  <c:txPr>
+                    <a:bodyPr rot="-5400000" spcFirstLastPara="1" vertOverflow="ellipsis" wrap="square" lIns="38100" tIns="19050" rIns="38100" bIns="19050" anchor="ctr" anchorCtr="1">
+                      <a:spAutoFit/>
+                    </a:bodyPr>
+                    <a:lstStyle/>
+                    <a:p>
+                      <a:pPr>
+                        <a:defRPr sz="900" b="0" i="0" u="none" strike="noStrike" kern="1200" baseline="0">
+                          <a:solidFill>
+                            <a:schemeClr val="tx1">
+                              <a:lumMod val="75000"/>
+                              <a:lumOff val="25000"/>
+                            </a:schemeClr>
+                          </a:solidFill>
+                          <a:latin typeface="+mn-lt"/>
+                          <a:ea typeface="+mn-ea"/>
+                          <a:cs typeface="+mn-cs"/>
+                        </a:defRPr>
+                      </a:pPr>
+                      <a:endParaRPr lang="ru-RU"/>
+                    </a:p>
+                  </c:txPr>
+                  <c:dLblPos val="outEnd"/>
+                  <c:showLegendKey val="0"/>
+                  <c:showVal val="1"/>
+                  <c:showCatName val="0"/>
+                  <c:showSerName val="0"/>
+                  <c:showPercent val="0"/>
+                  <c:showBubbleSize val="0"/>
+                  <c:showLeaderLines val="0"/>
+                  <c:extLst>
+                    <c:ext uri="{CE6537A1-D6FC-4f65-9D91-7224C49458BB}">
+                      <c15:showLeaderLines val="1"/>
+                      <c15:leaderLines>
+                        <c:spPr>
+                          <a:ln w="9525" cap="flat" cmpd="sng" algn="ctr">
+                            <a:solidFill>
+                              <a:schemeClr val="tx1">
+                                <a:lumMod val="35000"/>
+                                <a:lumOff val="65000"/>
+                              </a:schemeClr>
+                            </a:solidFill>
+                            <a:round/>
+                          </a:ln>
+                          <a:effectLst/>
+                        </c:spPr>
+                      </c15:leaderLines>
+                    </c:ext>
+                  </c:extLst>
+                </c:dLbls>
+                <c:cat>
+                  <c:strRef>
+                    <c:extLst>
+                      <c:ext uri="{02D57815-91ED-43cb-92C2-25804820EDAC}">
+                        <c15:formulaRef>
+                          <c15:sqref>B_S_RULES!$A$50:$A$53</c15:sqref>
+                        </c15:formulaRef>
+                      </c:ext>
+                    </c:extLst>
+                    <c:strCache>
+                      <c:ptCount val="4"/>
+                      <c:pt idx="0">
+                        <c:v>опт.</c:v>
+                      </c:pt>
+                      <c:pt idx="1">
+                        <c:v>bitset</c:v>
+                      </c:pt>
+                      <c:pt idx="2">
+                        <c:v>буфер.</c:v>
+                      </c:pt>
+                      <c:pt idx="3">
+                        <c:v>bitset буф.</c:v>
+                      </c:pt>
+                    </c:strCache>
+                  </c:strRef>
+                </c:cat>
+                <c:val>
+                  <c:numRef>
+                    <c:extLst>
+                      <c:ext uri="{02D57815-91ED-43cb-92C2-25804820EDAC}">
+                        <c15:formulaRef>
+                          <c15:sqref>B_S_RULES!$G$50:$G$53</c15:sqref>
+                        </c15:formulaRef>
+                      </c:ext>
+                    </c:extLst>
+                    <c:numCache>
+                      <c:formatCode>0.000</c:formatCode>
+                      <c:ptCount val="4"/>
+                      <c:pt idx="0">
+                        <c:v>2.3914689745769264</c:v>
+                      </c:pt>
+                      <c:pt idx="1">
+                        <c:v>3.0119708029197083</c:v>
+                      </c:pt>
+                      <c:pt idx="2">
+                        <c:v>26.847104749512042</c:v>
+                      </c:pt>
+                      <c:pt idx="3">
+                        <c:v>26.061473684210533</c:v>
+                      </c:pt>
+                    </c:numCache>
+                  </c:numRef>
+                </c:val>
+                <c:extLst>
+                  <c:ext xmlns:c16="http://schemas.microsoft.com/office/drawing/2014/chart" uri="{C3380CC4-5D6E-409C-BE32-E72D297353CC}">
+                    <c16:uniqueId val="{00000008-B7EB-46FB-8364-CD5332838AE1}"/>
+                  </c:ext>
+                </c:extLst>
+              </c15:ser>
+            </c15:filteredBarSeries>
+            <c15:filteredBarSeries>
+              <c15:ser>
+                <c:idx val="1"/>
+                <c:order val="3"/>
+                <c:tx>
+                  <c:strRef>
+                    <c:extLst xmlns:c15="http://schemas.microsoft.com/office/drawing/2012/chart">
+                      <c:ext xmlns:c15="http://schemas.microsoft.com/office/drawing/2012/chart" uri="{02D57815-91ED-43cb-92C2-25804820EDAC}">
+                        <c15:formulaRef>
+                          <c15:sqref>B_S_RULES!$C$1</c15:sqref>
+                        </c15:formulaRef>
+                      </c:ext>
+                    </c:extLst>
+                    <c:strCache>
+                      <c:ptCount val="1"/>
+                      <c:pt idx="0">
+                        <c:v>СтОткл</c:v>
+                      </c:pt>
+                    </c:strCache>
+                  </c:strRef>
+                </c:tx>
+                <c:spPr>
+                  <a:solidFill>
+                    <a:schemeClr val="accent2"/>
+                  </a:solidFill>
+                  <a:ln>
+                    <a:noFill/>
+                  </a:ln>
+                  <a:effectLst/>
+                </c:spPr>
+                <c:invertIfNegative val="0"/>
+                <c:dLbls>
+                  <c:spPr>
+                    <a:noFill/>
+                    <a:ln>
+                      <a:noFill/>
+                    </a:ln>
+                    <a:effectLst/>
+                  </c:spPr>
+                  <c:txPr>
+                    <a:bodyPr rot="0" spcFirstLastPara="1" vertOverflow="ellipsis" vert="horz" wrap="square" lIns="38100" tIns="19050" rIns="38100" bIns="19050" anchor="ctr" anchorCtr="1">
+                      <a:spAutoFit/>
+                    </a:bodyPr>
+                    <a:lstStyle/>
+                    <a:p>
+                      <a:pPr>
+                        <a:defRPr sz="900" b="0" i="0" u="none" strike="noStrike" kern="1200" baseline="0">
+                          <a:solidFill>
+                            <a:schemeClr val="tx1">
+                              <a:lumMod val="75000"/>
+                              <a:lumOff val="25000"/>
+                            </a:schemeClr>
+                          </a:solidFill>
+                          <a:latin typeface="+mn-lt"/>
+                          <a:ea typeface="+mn-ea"/>
+                          <a:cs typeface="+mn-cs"/>
+                        </a:defRPr>
+                      </a:pPr>
+                      <a:endParaRPr lang="ru-RU"/>
+                    </a:p>
+                  </c:txPr>
+                  <c:dLblPos val="outEnd"/>
+                  <c:showLegendKey val="0"/>
+                  <c:showVal val="1"/>
+                  <c:showCatName val="0"/>
+                  <c:showSerName val="0"/>
+                  <c:showPercent val="0"/>
+                  <c:showBubbleSize val="0"/>
+                  <c:showLeaderLines val="0"/>
+                  <c:extLst xmlns:c15="http://schemas.microsoft.com/office/drawing/2012/chart">
+                    <c:ext xmlns:c15="http://schemas.microsoft.com/office/drawing/2012/chart" uri="{CE6537A1-D6FC-4f65-9D91-7224C49458BB}">
+                      <c15:showLeaderLines val="1"/>
+                      <c15:leaderLines>
+                        <c:spPr>
+                          <a:ln w="9525" cap="flat" cmpd="sng" algn="ctr">
+                            <a:solidFill>
+                              <a:schemeClr val="tx1">
+                                <a:lumMod val="35000"/>
+                                <a:lumOff val="65000"/>
+                              </a:schemeClr>
+                            </a:solidFill>
+                            <a:round/>
+                          </a:ln>
+                          <a:effectLst/>
+                        </c:spPr>
+                      </c15:leaderLines>
+                    </c:ext>
+                  </c:extLst>
+                </c:dLbls>
+                <c:cat>
+                  <c:strRef>
+                    <c:extLst xmlns:c15="http://schemas.microsoft.com/office/drawing/2012/chart">
+                      <c:ext xmlns:c15="http://schemas.microsoft.com/office/drawing/2012/chart" uri="{02D57815-91ED-43cb-92C2-25804820EDAC}">
+                        <c15:formulaRef>
+                          <c15:sqref>B_S_RULES!$A$50:$A$53</c15:sqref>
+                        </c15:formulaRef>
+                      </c:ext>
+                    </c:extLst>
+                    <c:strCache>
+                      <c:ptCount val="4"/>
+                      <c:pt idx="0">
+                        <c:v>опт.</c:v>
+                      </c:pt>
+                      <c:pt idx="1">
+                        <c:v>bitset</c:v>
+                      </c:pt>
+                      <c:pt idx="2">
+                        <c:v>буфер.</c:v>
+                      </c:pt>
+                      <c:pt idx="3">
+                        <c:v>bitset буф.</c:v>
+                      </c:pt>
+                    </c:strCache>
+                  </c:strRef>
+                </c:cat>
+                <c:val>
+                  <c:numRef>
+                    <c:extLst xmlns:c15="http://schemas.microsoft.com/office/drawing/2012/chart">
+                      <c:ext xmlns:c15="http://schemas.microsoft.com/office/drawing/2012/chart" uri="{02D57815-91ED-43cb-92C2-25804820EDAC}">
+                        <c15:formulaRef>
+                          <c15:sqref>B_S_RULES!$C$50:$C$53</c15:sqref>
+                        </c15:formulaRef>
+                      </c:ext>
+                    </c:extLst>
+                    <c:numCache>
+                      <c:formatCode>0.000</c:formatCode>
+                      <c:ptCount val="4"/>
+                      <c:pt idx="0">
+                        <c:v>1.0499880555226089</c:v>
+                      </c:pt>
+                      <c:pt idx="1">
+                        <c:v>1.722272154326739</c:v>
+                      </c:pt>
+                      <c:pt idx="2">
+                        <c:v>11.153174575007984</c:v>
+                      </c:pt>
+                      <c:pt idx="3">
+                        <c:v>12.176488821728856</c:v>
+                      </c:pt>
+                    </c:numCache>
+                  </c:numRef>
+                </c:val>
+                <c:extLst xmlns:c15="http://schemas.microsoft.com/office/drawing/2012/chart">
+                  <c:ext xmlns:c16="http://schemas.microsoft.com/office/drawing/2014/chart" uri="{C3380CC4-5D6E-409C-BE32-E72D297353CC}">
+                    <c16:uniqueId val="{00000009-B7EB-46FB-8364-CD5332838AE1}"/>
+                  </c:ext>
+                </c:extLst>
+              </c15:ser>
+            </c15:filteredBarSeries>
+            <c15:filteredBarSeries>
+              <c15:ser>
+                <c:idx val="9"/>
+                <c:order val="8"/>
+                <c:tx>
+                  <c:strRef>
+                    <c:extLst xmlns:c15="http://schemas.microsoft.com/office/drawing/2012/chart">
+                      <c:ext xmlns:c15="http://schemas.microsoft.com/office/drawing/2012/chart" uri="{02D57815-91ED-43cb-92C2-25804820EDAC}">
+                        <c15:formulaRef>
+                          <c15:sqref>B_S_RULES!$K$1</c15:sqref>
+                        </c15:formulaRef>
+                      </c:ext>
+                    </c:extLst>
+                    <c:strCache>
+                      <c:ptCount val="1"/>
+                      <c:pt idx="0">
+                        <c:v>99.9%</c:v>
+                      </c:pt>
+                    </c:strCache>
+                  </c:strRef>
+                </c:tx>
+                <c:spPr>
+                  <a:solidFill>
+                    <a:schemeClr val="accent4">
+                      <a:lumMod val="60000"/>
+                    </a:schemeClr>
+                  </a:solidFill>
+                  <a:ln>
+                    <a:noFill/>
+                  </a:ln>
+                  <a:effectLst/>
+                </c:spPr>
+                <c:invertIfNegative val="0"/>
+                <c:dLbls>
+                  <c:numFmt formatCode="#,##0.0" sourceLinked="0"/>
+                  <c:spPr>
+                    <a:noFill/>
+                    <a:ln>
+                      <a:noFill/>
+                    </a:ln>
+                    <a:effectLst/>
+                  </c:spPr>
+                  <c:txPr>
+                    <a:bodyPr rot="-5400000" spcFirstLastPara="1" vertOverflow="ellipsis" wrap="square" lIns="38100" tIns="19050" rIns="38100" bIns="19050" anchor="ctr" anchorCtr="1">
+                      <a:spAutoFit/>
+                    </a:bodyPr>
+                    <a:lstStyle/>
+                    <a:p>
+                      <a:pPr>
+                        <a:defRPr sz="900" b="0" i="0" u="none" strike="noStrike" kern="1200" baseline="0">
+                          <a:solidFill>
+                            <a:schemeClr val="tx1">
+                              <a:lumMod val="75000"/>
+                              <a:lumOff val="25000"/>
+                            </a:schemeClr>
+                          </a:solidFill>
+                          <a:latin typeface="+mn-lt"/>
+                          <a:ea typeface="+mn-ea"/>
+                          <a:cs typeface="+mn-cs"/>
+                        </a:defRPr>
+                      </a:pPr>
+                      <a:endParaRPr lang="ru-RU"/>
+                    </a:p>
+                  </c:txPr>
+                  <c:dLblPos val="outEnd"/>
+                  <c:showLegendKey val="0"/>
+                  <c:showVal val="1"/>
+                  <c:showCatName val="0"/>
+                  <c:showSerName val="0"/>
+                  <c:showPercent val="0"/>
+                  <c:showBubbleSize val="0"/>
+                  <c:showLeaderLines val="0"/>
+                  <c:extLst xmlns:c15="http://schemas.microsoft.com/office/drawing/2012/chart">
+                    <c:ext xmlns:c15="http://schemas.microsoft.com/office/drawing/2012/chart" uri="{CE6537A1-D6FC-4f65-9D91-7224C49458BB}">
+                      <c15:showLeaderLines val="1"/>
+                      <c15:leaderLines>
+                        <c:spPr>
+                          <a:ln w="9525" cap="flat" cmpd="sng" algn="ctr">
+                            <a:solidFill>
+                              <a:schemeClr val="tx1">
+                                <a:lumMod val="35000"/>
+                                <a:lumOff val="65000"/>
+                              </a:schemeClr>
+                            </a:solidFill>
+                            <a:round/>
+                          </a:ln>
+                          <a:effectLst/>
+                        </c:spPr>
+                      </c15:leaderLines>
+                    </c:ext>
+                  </c:extLst>
+                </c:dLbls>
+                <c:cat>
+                  <c:strRef>
+                    <c:extLst xmlns:c15="http://schemas.microsoft.com/office/drawing/2012/chart">
+                      <c:ext xmlns:c15="http://schemas.microsoft.com/office/drawing/2012/chart" uri="{02D57815-91ED-43cb-92C2-25804820EDAC}">
+                        <c15:formulaRef>
+                          <c15:sqref>B_S_RULES!$A$50:$A$53</c15:sqref>
+                        </c15:formulaRef>
+                      </c:ext>
+                    </c:extLst>
+                    <c:strCache>
+                      <c:ptCount val="4"/>
+                      <c:pt idx="0">
+                        <c:v>опт.</c:v>
+                      </c:pt>
+                      <c:pt idx="1">
+                        <c:v>bitset</c:v>
+                      </c:pt>
+                      <c:pt idx="2">
+                        <c:v>буфер.</c:v>
+                      </c:pt>
+                      <c:pt idx="3">
+                        <c:v>bitset буф.</c:v>
+                      </c:pt>
+                    </c:strCache>
+                  </c:strRef>
+                </c:cat>
+                <c:val>
+                  <c:numRef>
+                    <c:extLst xmlns:c15="http://schemas.microsoft.com/office/drawing/2012/chart">
+                      <c:ext xmlns:c15="http://schemas.microsoft.com/office/drawing/2012/chart" uri="{02D57815-91ED-43cb-92C2-25804820EDAC}">
+                        <c15:formulaRef>
+                          <c15:sqref>B_S_RULES!$K$50:$K$53</c15:sqref>
+                        </c15:formulaRef>
+                      </c:ext>
+                    </c:extLst>
+                    <c:numCache>
+                      <c:formatCode>0.000</c:formatCode>
+                      <c:ptCount val="4"/>
+                      <c:pt idx="0">
+                        <c:v>1.5725739731087478</c:v>
+                      </c:pt>
+                      <c:pt idx="1">
+                        <c:v>2.4328429702753431</c:v>
+                      </c:pt>
+                      <c:pt idx="2">
+                        <c:v>14.713166467814226</c:v>
+                      </c:pt>
+                      <c:pt idx="3">
+                        <c:v>17.936321153966091</c:v>
+                      </c:pt>
+                    </c:numCache>
+                  </c:numRef>
+                </c:val>
+                <c:extLst xmlns:c15="http://schemas.microsoft.com/office/drawing/2012/chart">
+                  <c:ext xmlns:c16="http://schemas.microsoft.com/office/drawing/2014/chart" uri="{C3380CC4-5D6E-409C-BE32-E72D297353CC}">
+                    <c16:uniqueId val="{0000000A-B7EB-46FB-8364-CD5332838AE1}"/>
+                  </c:ext>
+                </c:extLst>
+              </c15:ser>
+            </c15:filteredBarSeries>
+          </c:ext>
+        </c:extLst>
+      </c:barChart>
+      <c:catAx>
+        <c:axId val="1127726992"/>
+        <c:scaling>
+          <c:orientation val="minMax"/>
+        </c:scaling>
+        <c:delete val="0"/>
+        <c:axPos val="b"/>
+        <c:title>
+          <c:tx>
+            <c:rich>
+              <a:bodyPr rot="0" spcFirstLastPara="1" vertOverflow="ellipsis" vert="horz" wrap="square" anchor="ctr" anchorCtr="1"/>
+              <a:lstStyle/>
+              <a:p>
+                <a:pPr>
+                  <a:defRPr sz="1000" b="0" i="0" u="none" strike="noStrike" kern="1200" baseline="0">
+                    <a:solidFill>
+                      <a:schemeClr val="tx1">
+                        <a:lumMod val="65000"/>
+                        <a:lumOff val="35000"/>
+                      </a:schemeClr>
+                    </a:solidFill>
+                    <a:latin typeface="+mn-lt"/>
+                    <a:ea typeface="+mn-ea"/>
+                    <a:cs typeface="+mn-cs"/>
+                  </a:defRPr>
+                </a:pPr>
+                <a:r>
+                  <a:rPr lang="ru-RU"/>
+                  <a:t>Название алгоритма</a:t>
+                </a:r>
+              </a:p>
+            </c:rich>
+          </c:tx>
+          <c:overlay val="0"/>
+          <c:spPr>
+            <a:noFill/>
+            <a:ln>
+              <a:noFill/>
+            </a:ln>
+            <a:effectLst/>
+          </c:spPr>
+          <c:txPr>
+            <a:bodyPr rot="0" spcFirstLastPara="1" vertOverflow="ellipsis" vert="horz" wrap="square" anchor="ctr" anchorCtr="1"/>
+            <a:lstStyle/>
+            <a:p>
+              <a:pPr>
+                <a:defRPr sz="1000" b="0" i="0" u="none" strike="noStrike" kern="1200" baseline="0">
+                  <a:solidFill>
+                    <a:schemeClr val="tx1">
+                      <a:lumMod val="65000"/>
+                      <a:lumOff val="35000"/>
+                    </a:schemeClr>
+                  </a:solidFill>
+                  <a:latin typeface="+mn-lt"/>
+                  <a:ea typeface="+mn-ea"/>
+                  <a:cs typeface="+mn-cs"/>
+                </a:defRPr>
+              </a:pPr>
+              <a:endParaRPr lang="ru-RU"/>
+            </a:p>
+          </c:txPr>
+        </c:title>
+        <c:numFmt formatCode="General" sourceLinked="1"/>
+        <c:majorTickMark val="none"/>
+        <c:minorTickMark val="none"/>
+        <c:tickLblPos val="nextTo"/>
+        <c:spPr>
+          <a:noFill/>
+          <a:ln w="9525" cap="flat" cmpd="sng" algn="ctr">
+            <a:solidFill>
+              <a:schemeClr val="tx1">
+                <a:lumMod val="15000"/>
+                <a:lumOff val="85000"/>
+              </a:schemeClr>
+            </a:solidFill>
+            <a:round/>
+          </a:ln>
+          <a:effectLst/>
+        </c:spPr>
+        <c:txPr>
+          <a:bodyPr rot="-60000000" spcFirstLastPara="1" vertOverflow="ellipsis" vert="horz" wrap="square" anchor="ctr" anchorCtr="1"/>
+          <a:lstStyle/>
+          <a:p>
+            <a:pPr>
+              <a:defRPr sz="900" b="0" i="0" u="none" strike="noStrike" kern="1200" baseline="0">
+                <a:solidFill>
+                  <a:schemeClr val="tx1">
+                    <a:lumMod val="65000"/>
+                    <a:lumOff val="35000"/>
+                  </a:schemeClr>
+                </a:solidFill>
+                <a:latin typeface="+mn-lt"/>
+                <a:ea typeface="+mn-ea"/>
+                <a:cs typeface="+mn-cs"/>
+              </a:defRPr>
+            </a:pPr>
+            <a:endParaRPr lang="ru-RU"/>
+          </a:p>
+        </c:txPr>
+        <c:crossAx val="1127726160"/>
+        <c:crosses val="autoZero"/>
+        <c:auto val="1"/>
+        <c:lblAlgn val="ctr"/>
+        <c:lblOffset val="100"/>
+        <c:noMultiLvlLbl val="0"/>
+      </c:catAx>
+      <c:valAx>
+        <c:axId val="1127726160"/>
+        <c:scaling>
+          <c:orientation val="minMax"/>
+        </c:scaling>
+        <c:delete val="0"/>
+        <c:axPos val="l"/>
+        <c:majorGridlines>
+          <c:spPr>
+            <a:ln w="9525" cap="flat" cmpd="sng" algn="ctr">
+              <a:solidFill>
+                <a:schemeClr val="tx1">
+                  <a:lumMod val="15000"/>
+                  <a:lumOff val="85000"/>
+                </a:schemeClr>
+              </a:solidFill>
+              <a:round/>
+            </a:ln>
+            <a:effectLst/>
+          </c:spPr>
+        </c:majorGridlines>
+        <c:title>
+          <c:tx>
+            <c:rich>
+              <a:bodyPr rot="-5400000" spcFirstLastPara="1" vertOverflow="ellipsis" vert="horz" wrap="square" anchor="ctr" anchorCtr="1"/>
+              <a:lstStyle/>
+              <a:p>
+                <a:pPr>
+                  <a:defRPr sz="1000" b="0" i="0" u="none" strike="noStrike" kern="1200" baseline="0">
+                    <a:solidFill>
+                      <a:schemeClr val="tx1">
+                        <a:lumMod val="65000"/>
+                        <a:lumOff val="35000"/>
+                      </a:schemeClr>
+                    </a:solidFill>
+                    <a:latin typeface="+mn-lt"/>
+                    <a:ea typeface="+mn-ea"/>
+                    <a:cs typeface="+mn-cs"/>
+                  </a:defRPr>
+                </a:pPr>
+                <a:r>
+                  <a:rPr lang="ru-RU" sz="1000" b="0" i="0" baseline="0" dirty="0">
+                    <a:effectLst/>
+                  </a:rPr>
+                  <a:t>Множитель, во сколько раз</a:t>
+                </a:r>
+              </a:p>
+            </c:rich>
+          </c:tx>
+          <c:overlay val="0"/>
+          <c:spPr>
+            <a:noFill/>
+            <a:ln>
+              <a:noFill/>
+            </a:ln>
+            <a:effectLst/>
+          </c:spPr>
+          <c:txPr>
+            <a:bodyPr rot="-5400000" spcFirstLastPara="1" vertOverflow="ellipsis" vert="horz" wrap="square" anchor="ctr" anchorCtr="1"/>
+            <a:lstStyle/>
+            <a:p>
+              <a:pPr>
+                <a:defRPr sz="1000" b="0" i="0" u="none" strike="noStrike" kern="1200" baseline="0">
+                  <a:solidFill>
+                    <a:schemeClr val="tx1">
+                      <a:lumMod val="65000"/>
+                      <a:lumOff val="35000"/>
+                    </a:schemeClr>
+                  </a:solidFill>
+                  <a:latin typeface="+mn-lt"/>
+                  <a:ea typeface="+mn-ea"/>
+                  <a:cs typeface="+mn-cs"/>
+                </a:defRPr>
+              </a:pPr>
+              <a:endParaRPr lang="ru-RU"/>
+            </a:p>
+          </c:txPr>
+        </c:title>
+        <c:numFmt formatCode="0" sourceLinked="0"/>
+        <c:majorTickMark val="none"/>
+        <c:minorTickMark val="none"/>
+        <c:tickLblPos val="nextTo"/>
+        <c:spPr>
+          <a:noFill/>
+          <a:ln>
+            <a:noFill/>
+          </a:ln>
+          <a:effectLst/>
+        </c:spPr>
+        <c:txPr>
+          <a:bodyPr rot="-60000000" spcFirstLastPara="1" vertOverflow="ellipsis" vert="horz" wrap="square" anchor="ctr" anchorCtr="1"/>
+          <a:lstStyle/>
+          <a:p>
+            <a:pPr>
+              <a:defRPr sz="900" b="0" i="0" u="none" strike="noStrike" kern="1200" baseline="0">
+                <a:solidFill>
+                  <a:schemeClr val="tx1">
+                    <a:lumMod val="65000"/>
+                    <a:lumOff val="35000"/>
+                  </a:schemeClr>
+                </a:solidFill>
+                <a:latin typeface="+mn-lt"/>
+                <a:ea typeface="+mn-ea"/>
+                <a:cs typeface="+mn-cs"/>
+              </a:defRPr>
+            </a:pPr>
+            <a:endParaRPr lang="ru-RU"/>
+          </a:p>
+        </c:txPr>
+        <c:crossAx val="1127726992"/>
+        <c:crosses val="autoZero"/>
+        <c:crossBetween val="between"/>
+      </c:valAx>
+      <c:spPr>
+        <a:noFill/>
+        <a:ln>
+          <a:noFill/>
+        </a:ln>
+        <a:effectLst/>
+      </c:spPr>
+    </c:plotArea>
+    <c:legend>
+      <c:legendPos val="t"/>
+      <c:overlay val="0"/>
+      <c:spPr>
+        <a:noFill/>
+        <a:ln>
+          <a:noFill/>
+        </a:ln>
+        <a:effectLst/>
+      </c:spPr>
+      <c:txPr>
+        <a:bodyPr rot="0" spcFirstLastPara="1" vertOverflow="ellipsis" vert="horz" wrap="square" anchor="ctr" anchorCtr="1"/>
+        <a:lstStyle/>
+        <a:p>
+          <a:pPr>
+            <a:defRPr sz="900" b="0" i="0" u="none" strike="noStrike" kern="1200" baseline="0">
+              <a:solidFill>
+                <a:schemeClr val="tx1">
+                  <a:lumMod val="65000"/>
+                  <a:lumOff val="35000"/>
+                </a:schemeClr>
+              </a:solidFill>
+              <a:latin typeface="+mn-lt"/>
+              <a:ea typeface="+mn-ea"/>
+              <a:cs typeface="+mn-cs"/>
+            </a:defRPr>
+          </a:pPr>
+          <a:endParaRPr lang="ru-RU"/>
+        </a:p>
+      </c:txPr>
+    </c:legend>
+    <c:plotVisOnly val="1"/>
+    <c:dispBlanksAs val="gap"/>
+    <c:extLst>
+      <c:ext xmlns:c16r3="http://schemas.microsoft.com/office/drawing/2017/03/chart" uri="{56B9EC1D-385E-4148-901F-78D8002777C0}">
+        <c16r3:dataDisplayOptions16>
+          <c16r3:dispNaAsBlank val="1"/>
+        </c16r3:dataDisplayOptions16>
+      </c:ext>
+    </c:extLst>
+    <c:showDLblsOverMax val="0"/>
+  </c:chart>
+  <c:spPr>
+    <a:noFill/>
+    <a:ln>
+      <a:noFill/>
+    </a:ln>
+    <a:effectLst/>
+  </c:spPr>
+  <c:txPr>
+    <a:bodyPr/>
+    <a:lstStyle/>
+    <a:p>
+      <a:pPr>
+        <a:defRPr/>
+      </a:pPr>
+      <a:endParaRPr lang="ru-RU"/>
+    </a:p>
+  </c:txPr>
+  <c:externalData r:id="rId3">
+    <c:autoUpdate val="0"/>
+  </c:externalData>
+</c:chartSpace>
+</file>
+
+<file path=ppt/charts/chart3.xml><?xml version="1.0" encoding="utf-8"?>
+<c:chartSpace xmlns:c="http://schemas.openxmlformats.org/drawingml/2006/chart" xmlns:a="http://schemas.openxmlformats.org/drawingml/2006/main" xmlns:r="http://schemas.openxmlformats.org/officeDocument/2006/relationships" xmlns:c16r2="http://schemas.microsoft.com/office/drawing/2015/06/chart">
+  <c:date1904 val="0"/>
+  <c:lang val="ru-RU"/>
+  <c:roundedCorners val="0"/>
+  <mc:AlternateContent xmlns:mc="http://schemas.openxmlformats.org/markup-compatibility/2006">
+    <mc:Choice xmlns:c14="http://schemas.microsoft.com/office/drawing/2007/8/2/chart" Requires="c14">
+      <c14:style val="102"/>
+    </mc:Choice>
+    <mc:Fallback>
+      <c:style val="2"/>
+    </mc:Fallback>
+  </mc:AlternateContent>
+  <c:chart>
+    <c:title>
+      <c:tx>
+        <c:rich>
+          <a:bodyPr rot="0" spcFirstLastPara="1" vertOverflow="ellipsis" vert="horz" wrap="square" anchor="ctr" anchorCtr="1"/>
+          <a:lstStyle/>
+          <a:p>
+            <a:pPr>
+              <a:defRPr sz="1400" b="0" i="0" u="none" strike="noStrike" kern="1200" spc="0" baseline="0">
+                <a:solidFill>
+                  <a:schemeClr val="tx1">
+                    <a:lumMod val="65000"/>
+                    <a:lumOff val="35000"/>
+                  </a:schemeClr>
+                </a:solidFill>
+                <a:latin typeface="+mn-lt"/>
+                <a:ea typeface="+mn-ea"/>
+                <a:cs typeface="+mn-cs"/>
+              </a:defRPr>
+            </a:pPr>
+            <a:r>
+              <a:rPr lang="ru-RU"/>
+              <a:t>Производительность</a:t>
+            </a:r>
+            <a:r>
+              <a:rPr lang="ru-RU" baseline="0"/>
+              <a:t> общих алгоритмов</a:t>
+            </a:r>
+            <a:endParaRPr lang="ru-RU"/>
+          </a:p>
+        </c:rich>
+      </c:tx>
+      <c:layout>
+        <c:manualLayout>
+          <c:xMode val="edge"/>
+          <c:yMode val="edge"/>
+          <c:x val="0.29418622272492673"/>
+          <c:y val="2.7777777777777776E-2"/>
+        </c:manualLayout>
+      </c:layout>
+      <c:overlay val="0"/>
+      <c:spPr>
+        <a:noFill/>
+        <a:ln>
+          <a:noFill/>
+        </a:ln>
+        <a:effectLst/>
+      </c:spPr>
+      <c:txPr>
+        <a:bodyPr rot="0" spcFirstLastPara="1" vertOverflow="ellipsis" vert="horz" wrap="square" anchor="ctr" anchorCtr="1"/>
+        <a:lstStyle/>
+        <a:p>
+          <a:pPr>
+            <a:defRPr sz="1400" b="0" i="0" u="none" strike="noStrike" kern="1200" spc="0" baseline="0">
+              <a:solidFill>
+                <a:schemeClr val="tx1">
+                  <a:lumMod val="65000"/>
+                  <a:lumOff val="35000"/>
+                </a:schemeClr>
+              </a:solidFill>
+              <a:latin typeface="+mn-lt"/>
+              <a:ea typeface="+mn-ea"/>
+              <a:cs typeface="+mn-cs"/>
+            </a:defRPr>
+          </a:pPr>
+          <a:endParaRPr lang="ru-RU"/>
+        </a:p>
+      </c:txPr>
+    </c:title>
+    <c:autoTitleDeleted val="0"/>
+    <c:plotArea>
+      <c:layout/>
+      <c:barChart>
+        <c:barDir val="col"/>
+        <c:grouping val="clustered"/>
+        <c:varyColors val="0"/>
+        <c:ser>
+          <c:idx val="0"/>
+          <c:order val="0"/>
+          <c:tx>
+            <c:v>Среднее время</c:v>
+          </c:tx>
+          <c:spPr>
+            <a:solidFill>
+              <a:srgbClr val="00B050"/>
+            </a:solidFill>
+            <a:ln>
+              <a:noFill/>
+            </a:ln>
+            <a:effectLst/>
+          </c:spPr>
+          <c:invertIfNegative val="0"/>
+          <c:dLbls>
+            <c:numFmt formatCode="#,##0" sourceLinked="0"/>
+            <c:spPr>
+              <a:noFill/>
+              <a:ln>
+                <a:noFill/>
+              </a:ln>
+              <a:effectLst/>
+            </c:spPr>
+            <c:txPr>
+              <a:bodyPr rot="-5400000" spcFirstLastPara="1" vertOverflow="ellipsis" wrap="square" lIns="38100" tIns="19050" rIns="38100" bIns="19050" anchor="ctr" anchorCtr="1">
+                <a:spAutoFit/>
+              </a:bodyPr>
+              <a:lstStyle/>
+              <a:p>
+                <a:pPr>
+                  <a:defRPr sz="900" b="0" i="0" u="none" strike="noStrike" kern="1200" baseline="0">
+                    <a:solidFill>
+                      <a:schemeClr val="tx1">
+                        <a:lumMod val="75000"/>
+                        <a:lumOff val="25000"/>
+                      </a:schemeClr>
+                    </a:solidFill>
+                    <a:latin typeface="+mn-lt"/>
+                    <a:ea typeface="+mn-ea"/>
+                    <a:cs typeface="+mn-cs"/>
+                  </a:defRPr>
+                </a:pPr>
+                <a:endParaRPr lang="ru-RU"/>
+              </a:p>
+            </c:txPr>
+            <c:dLblPos val="outEnd"/>
+            <c:showLegendKey val="0"/>
+            <c:showVal val="1"/>
+            <c:showCatName val="0"/>
+            <c:showSerName val="0"/>
+            <c:showPercent val="0"/>
+            <c:showBubbleSize val="0"/>
+            <c:showLeaderLines val="0"/>
+            <c:extLst>
+              <c:ext xmlns:c15="http://schemas.microsoft.com/office/drawing/2012/chart" uri="{CE6537A1-D6FC-4f65-9D91-7224C49458BB}">
+                <c15:showLeaderLines val="1"/>
+                <c15:leaderLines>
+                  <c:spPr>
+                    <a:ln w="9525" cap="flat" cmpd="sng" algn="ctr">
+                      <a:solidFill>
+                        <a:schemeClr val="tx1">
+                          <a:lumMod val="35000"/>
+                          <a:lumOff val="65000"/>
+                        </a:schemeClr>
+                      </a:solidFill>
+                      <a:round/>
+                    </a:ln>
+                    <a:effectLst/>
+                  </c:spPr>
+                </c15:leaderLines>
+              </c:ext>
+            </c:extLst>
+          </c:dLbls>
+          <c:cat>
+            <c:strRef>
+              <c:f>B_S_RULES!$A$75:$A$78</c:f>
+              <c:strCache>
+                <c:ptCount val="4"/>
+                <c:pt idx="0">
+                  <c:v>Базовый</c:v>
+                </c:pt>
+                <c:pt idx="1">
+                  <c:v>AVX+bitset</c:v>
+                </c:pt>
+                <c:pt idx="2">
+                  <c:v>Только AVX</c:v>
+                </c:pt>
+                <c:pt idx="3">
+                  <c:v>Только скалярный</c:v>
+                </c:pt>
+              </c:strCache>
+            </c:strRef>
+          </c:cat>
+          <c:val>
+            <c:numRef>
+              <c:f>B_S_RULES!$B$75:$B$78</c:f>
+              <c:numCache>
+                <c:formatCode>General</c:formatCode>
+                <c:ptCount val="4"/>
+                <c:pt idx="0">
+                  <c:v>831957.96100000001</c:v>
+                </c:pt>
+                <c:pt idx="1">
+                  <c:v>153136.18</c:v>
+                </c:pt>
+                <c:pt idx="2">
+                  <c:v>9580.3580000000002</c:v>
+                </c:pt>
+                <c:pt idx="3">
+                  <c:v>166728.14000000001</c:v>
+                </c:pt>
+              </c:numCache>
+            </c:numRef>
+          </c:val>
+          <c:extLst>
+            <c:ext xmlns:c16="http://schemas.microsoft.com/office/drawing/2014/chart" uri="{C3380CC4-5D6E-409C-BE32-E72D297353CC}">
+              <c16:uniqueId val="{00000000-C637-481B-9B8F-A891E0A2BD7D}"/>
+            </c:ext>
+          </c:extLst>
+        </c:ser>
+        <c:dLbls>
+          <c:dLblPos val="outEnd"/>
+          <c:showLegendKey val="0"/>
+          <c:showVal val="1"/>
+          <c:showCatName val="0"/>
+          <c:showSerName val="0"/>
+          <c:showPercent val="0"/>
+          <c:showBubbleSize val="0"/>
+        </c:dLbls>
+        <c:gapWidth val="219"/>
+        <c:axId val="165942735"/>
+        <c:axId val="165941487"/>
+      </c:barChart>
+      <c:lineChart>
+        <c:grouping val="standard"/>
+        <c:varyColors val="0"/>
+        <c:ser>
+          <c:idx val="1"/>
+          <c:order val="1"/>
+          <c:tx>
+            <c:v>Процент от базового</c:v>
+          </c:tx>
+          <c:spPr>
+            <a:ln w="28575" cap="rnd">
+              <a:solidFill>
+                <a:srgbClr val="FF0000"/>
+              </a:solidFill>
+              <a:round/>
+            </a:ln>
+            <a:effectLst/>
+          </c:spPr>
+          <c:marker>
+            <c:symbol val="none"/>
+          </c:marker>
+          <c:dLbls>
+            <c:dLbl>
+              <c:idx val="0"/>
+              <c:layout>
+                <c:manualLayout>
+                  <c:x val="2.2314222022116505E-2"/>
+                  <c:y val="-3.7037037037037077E-2"/>
+                </c:manualLayout>
+              </c:layout>
+              <c:showLegendKey val="0"/>
+              <c:showVal val="1"/>
+              <c:showCatName val="0"/>
+              <c:showSerName val="0"/>
+              <c:showPercent val="0"/>
+              <c:showBubbleSize val="0"/>
+              <c:extLst>
+                <c:ext xmlns:c15="http://schemas.microsoft.com/office/drawing/2012/chart" uri="{CE6537A1-D6FC-4f65-9D91-7224C49458BB}"/>
+                <c:ext xmlns:c16="http://schemas.microsoft.com/office/drawing/2014/chart" uri="{C3380CC4-5D6E-409C-BE32-E72D297353CC}">
+                  <c16:uniqueId val="{00000001-C637-481B-9B8F-A891E0A2BD7D}"/>
+                </c:ext>
+              </c:extLst>
+            </c:dLbl>
+            <c:dLbl>
+              <c:idx val="1"/>
+              <c:layout>
+                <c:manualLayout>
+                  <c:x val="8.3678332582937092E-3"/>
+                  <c:y val="-4.6296296296296294E-2"/>
+                </c:manualLayout>
+              </c:layout>
+              <c:showLegendKey val="0"/>
+              <c:showVal val="1"/>
+              <c:showCatName val="0"/>
+              <c:showSerName val="0"/>
+              <c:showPercent val="0"/>
+              <c:showBubbleSize val="0"/>
+              <c:extLst>
+                <c:ext xmlns:c15="http://schemas.microsoft.com/office/drawing/2012/chart" uri="{CE6537A1-D6FC-4f65-9D91-7224C49458BB}"/>
+                <c:ext xmlns:c16="http://schemas.microsoft.com/office/drawing/2014/chart" uri="{C3380CC4-5D6E-409C-BE32-E72D297353CC}">
+                  <c16:uniqueId val="{00000002-C637-481B-9B8F-A891E0A2BD7D}"/>
+                </c:ext>
+              </c:extLst>
+            </c:dLbl>
+            <c:dLbl>
+              <c:idx val="2"/>
+              <c:layout>
+                <c:manualLayout>
+                  <c:x val="2.7892777527645696E-3"/>
+                  <c:y val="-6.0185185185185272E-2"/>
+                </c:manualLayout>
+              </c:layout>
+              <c:showLegendKey val="0"/>
+              <c:showVal val="1"/>
+              <c:showCatName val="0"/>
+              <c:showSerName val="0"/>
+              <c:showPercent val="0"/>
+              <c:showBubbleSize val="0"/>
+              <c:extLst>
+                <c:ext xmlns:c15="http://schemas.microsoft.com/office/drawing/2012/chart" uri="{CE6537A1-D6FC-4f65-9D91-7224C49458BB}"/>
+                <c:ext xmlns:c16="http://schemas.microsoft.com/office/drawing/2014/chart" uri="{C3380CC4-5D6E-409C-BE32-E72D297353CC}">
+                  <c16:uniqueId val="{00000003-C637-481B-9B8F-A891E0A2BD7D}"/>
+                </c:ext>
+              </c:extLst>
+            </c:dLbl>
+            <c:dLbl>
+              <c:idx val="3"/>
+              <c:layout>
+                <c:manualLayout>
+                  <c:x val="2.7892777527646719E-3"/>
+                  <c:y val="-6.0185185185185182E-2"/>
+                </c:manualLayout>
+              </c:layout>
+              <c:showLegendKey val="0"/>
+              <c:showVal val="1"/>
+              <c:showCatName val="0"/>
+              <c:showSerName val="0"/>
+              <c:showPercent val="0"/>
+              <c:showBubbleSize val="0"/>
+              <c:extLst>
+                <c:ext xmlns:c15="http://schemas.microsoft.com/office/drawing/2012/chart" uri="{CE6537A1-D6FC-4f65-9D91-7224C49458BB}"/>
+                <c:ext xmlns:c16="http://schemas.microsoft.com/office/drawing/2014/chart" uri="{C3380CC4-5D6E-409C-BE32-E72D297353CC}">
+                  <c16:uniqueId val="{00000004-C637-481B-9B8F-A891E0A2BD7D}"/>
+                </c:ext>
+              </c:extLst>
+            </c:dLbl>
+            <c:spPr>
+              <a:noFill/>
+              <a:ln>
+                <a:noFill/>
+              </a:ln>
+              <a:effectLst/>
+            </c:spPr>
+            <c:txPr>
+              <a:bodyPr rot="0" spcFirstLastPara="1" vertOverflow="ellipsis" vert="horz" wrap="square" lIns="38100" tIns="19050" rIns="38100" bIns="19050" anchor="ctr" anchorCtr="1">
+                <a:spAutoFit/>
+              </a:bodyPr>
+              <a:lstStyle/>
+              <a:p>
+                <a:pPr>
+                  <a:defRPr sz="900" b="0" i="0" u="none" strike="noStrike" kern="1200" baseline="0">
+                    <a:solidFill>
+                      <a:schemeClr val="tx1">
+                        <a:lumMod val="75000"/>
+                        <a:lumOff val="25000"/>
+                      </a:schemeClr>
+                    </a:solidFill>
+                    <a:latin typeface="+mn-lt"/>
+                    <a:ea typeface="+mn-ea"/>
+                    <a:cs typeface="+mn-cs"/>
+                  </a:defRPr>
+                </a:pPr>
+                <a:endParaRPr lang="ru-RU"/>
+              </a:p>
+            </c:txPr>
+            <c:showLegendKey val="0"/>
+            <c:showVal val="1"/>
+            <c:showCatName val="0"/>
+            <c:showSerName val="0"/>
+            <c:showPercent val="0"/>
+            <c:showBubbleSize val="0"/>
+            <c:showLeaderLines val="0"/>
+            <c:extLst>
+              <c:ext xmlns:c15="http://schemas.microsoft.com/office/drawing/2012/chart" uri="{CE6537A1-D6FC-4f65-9D91-7224C49458BB}">
+                <c15:showLeaderLines val="1"/>
+                <c15:leaderLines>
+                  <c:spPr>
+                    <a:ln w="9525" cap="flat" cmpd="sng" algn="ctr">
+                      <a:solidFill>
+                        <a:schemeClr val="tx1">
+                          <a:lumMod val="35000"/>
+                          <a:lumOff val="65000"/>
+                        </a:schemeClr>
+                      </a:solidFill>
+                      <a:round/>
+                    </a:ln>
+                    <a:effectLst/>
+                  </c:spPr>
+                </c15:leaderLines>
+              </c:ext>
+            </c:extLst>
+          </c:dLbls>
+          <c:cat>
+            <c:strRef>
+              <c:f>B_S_RULES!$A$75:$A$78</c:f>
+              <c:strCache>
+                <c:ptCount val="4"/>
+                <c:pt idx="0">
+                  <c:v>Базовый</c:v>
+                </c:pt>
+                <c:pt idx="1">
+                  <c:v>AVX+bitset</c:v>
+                </c:pt>
+                <c:pt idx="2">
+                  <c:v>Только AVX</c:v>
+                </c:pt>
+                <c:pt idx="3">
+                  <c:v>Только скалярный</c:v>
+                </c:pt>
+              </c:strCache>
+            </c:strRef>
+          </c:cat>
+          <c:val>
+            <c:numRef>
+              <c:f>B_S_RULES!$D$75:$D$78</c:f>
+              <c:numCache>
+                <c:formatCode>0.00%</c:formatCode>
+                <c:ptCount val="4"/>
+                <c:pt idx="0">
+                  <c:v>1</c:v>
+                </c:pt>
+                <c:pt idx="1">
+                  <c:v>0.18406720913630392</c:v>
+                </c:pt>
+                <c:pt idx="2">
+                  <c:v>1.1515435213198231E-2</c:v>
+                </c:pt>
+                <c:pt idx="3">
+                  <c:v>0.20040452500700334</c:v>
+                </c:pt>
+              </c:numCache>
+            </c:numRef>
+          </c:val>
+          <c:smooth val="0"/>
+          <c:extLst>
+            <c:ext xmlns:c16="http://schemas.microsoft.com/office/drawing/2014/chart" uri="{C3380CC4-5D6E-409C-BE32-E72D297353CC}">
+              <c16:uniqueId val="{00000005-C637-481B-9B8F-A891E0A2BD7D}"/>
+            </c:ext>
+          </c:extLst>
+        </c:ser>
+        <c:dLbls>
+          <c:showLegendKey val="0"/>
+          <c:showVal val="1"/>
+          <c:showCatName val="0"/>
+          <c:showSerName val="0"/>
+          <c:showPercent val="0"/>
+          <c:showBubbleSize val="0"/>
+        </c:dLbls>
+        <c:marker val="1"/>
+        <c:smooth val="0"/>
+        <c:axId val="463574655"/>
+        <c:axId val="463573823"/>
+      </c:lineChart>
+      <c:catAx>
+        <c:axId val="165942735"/>
+        <c:scaling>
+          <c:orientation val="minMax"/>
+        </c:scaling>
+        <c:delete val="0"/>
+        <c:axPos val="b"/>
+        <c:title>
+          <c:tx>
+            <c:rich>
+              <a:bodyPr rot="0" spcFirstLastPara="1" vertOverflow="ellipsis" vert="horz" wrap="square" anchor="ctr" anchorCtr="1"/>
+              <a:lstStyle/>
+              <a:p>
+                <a:pPr>
+                  <a:defRPr sz="1000" b="0" i="0" u="none" strike="noStrike" kern="1200" baseline="0">
+                    <a:solidFill>
+                      <a:schemeClr val="tx1">
+                        <a:lumMod val="65000"/>
+                        <a:lumOff val="35000"/>
+                      </a:schemeClr>
+                    </a:solidFill>
+                    <a:latin typeface="+mn-lt"/>
+                    <a:ea typeface="+mn-ea"/>
+                    <a:cs typeface="+mn-cs"/>
+                  </a:defRPr>
+                </a:pPr>
+                <a:r>
+                  <a:rPr lang="ru-RU"/>
+                  <a:t>Название алгоритма</a:t>
+                </a:r>
+              </a:p>
+            </c:rich>
+          </c:tx>
+          <c:overlay val="0"/>
+          <c:spPr>
+            <a:noFill/>
+            <a:ln>
+              <a:noFill/>
+            </a:ln>
+            <a:effectLst/>
+          </c:spPr>
+          <c:txPr>
+            <a:bodyPr rot="0" spcFirstLastPara="1" vertOverflow="ellipsis" vert="horz" wrap="square" anchor="ctr" anchorCtr="1"/>
+            <a:lstStyle/>
+            <a:p>
+              <a:pPr>
+                <a:defRPr sz="1000" b="0" i="0" u="none" strike="noStrike" kern="1200" baseline="0">
+                  <a:solidFill>
+                    <a:schemeClr val="tx1">
+                      <a:lumMod val="65000"/>
+                      <a:lumOff val="35000"/>
+                    </a:schemeClr>
+                  </a:solidFill>
+                  <a:latin typeface="+mn-lt"/>
+                  <a:ea typeface="+mn-ea"/>
+                  <a:cs typeface="+mn-cs"/>
+                </a:defRPr>
+              </a:pPr>
+              <a:endParaRPr lang="ru-RU"/>
+            </a:p>
+          </c:txPr>
+        </c:title>
+        <c:numFmt formatCode="General" sourceLinked="1"/>
+        <c:majorTickMark val="none"/>
+        <c:minorTickMark val="none"/>
+        <c:tickLblPos val="nextTo"/>
+        <c:spPr>
+          <a:noFill/>
+          <a:ln w="9525" cap="flat" cmpd="sng" algn="ctr">
+            <a:solidFill>
+              <a:schemeClr val="tx1">
+                <a:lumMod val="15000"/>
+                <a:lumOff val="85000"/>
+              </a:schemeClr>
+            </a:solidFill>
+            <a:round/>
+          </a:ln>
+          <a:effectLst/>
+        </c:spPr>
+        <c:txPr>
+          <a:bodyPr rot="-60000000" spcFirstLastPara="1" vertOverflow="ellipsis" vert="horz" wrap="square" anchor="ctr" anchorCtr="1"/>
+          <a:lstStyle/>
+          <a:p>
+            <a:pPr>
+              <a:defRPr sz="900" b="0" i="0" u="none" strike="noStrike" kern="1200" baseline="0">
+                <a:solidFill>
+                  <a:schemeClr val="tx1">
+                    <a:lumMod val="65000"/>
+                    <a:lumOff val="35000"/>
+                  </a:schemeClr>
+                </a:solidFill>
+                <a:latin typeface="+mn-lt"/>
+                <a:ea typeface="+mn-ea"/>
+                <a:cs typeface="+mn-cs"/>
+              </a:defRPr>
+            </a:pPr>
+            <a:endParaRPr lang="ru-RU"/>
+          </a:p>
+        </c:txPr>
+        <c:crossAx val="165941487"/>
+        <c:crosses val="autoZero"/>
+        <c:auto val="1"/>
+        <c:lblAlgn val="ctr"/>
+        <c:lblOffset val="100"/>
+        <c:noMultiLvlLbl val="0"/>
+      </c:catAx>
+      <c:valAx>
+        <c:axId val="165941487"/>
+        <c:scaling>
+          <c:orientation val="minMax"/>
+        </c:scaling>
+        <c:delete val="0"/>
+        <c:axPos val="l"/>
+        <c:majorGridlines>
+          <c:spPr>
+            <a:ln w="9525" cap="flat" cmpd="sng" algn="ctr">
+              <a:solidFill>
+                <a:schemeClr val="tx1">
+                  <a:lumMod val="15000"/>
+                  <a:lumOff val="85000"/>
+                </a:schemeClr>
+              </a:solidFill>
+              <a:round/>
+            </a:ln>
+            <a:effectLst/>
+          </c:spPr>
+        </c:majorGridlines>
+        <c:title>
+          <c:tx>
+            <c:rich>
+              <a:bodyPr rot="-5400000" spcFirstLastPara="1" vertOverflow="ellipsis" vert="horz" wrap="square" anchor="ctr" anchorCtr="1"/>
+              <a:lstStyle/>
+              <a:p>
+                <a:pPr>
+                  <a:defRPr sz="1000" b="0" i="0" u="none" strike="noStrike" kern="1200" baseline="0">
+                    <a:solidFill>
+                      <a:schemeClr val="tx1">
+                        <a:lumMod val="65000"/>
+                        <a:lumOff val="35000"/>
+                      </a:schemeClr>
+                    </a:solidFill>
+                    <a:latin typeface="+mn-lt"/>
+                    <a:ea typeface="+mn-ea"/>
+                    <a:cs typeface="+mn-cs"/>
+                  </a:defRPr>
+                </a:pPr>
+                <a:r>
+                  <a:rPr lang="ru-RU"/>
+                  <a:t>Время</a:t>
+                </a:r>
+                <a:r>
+                  <a:rPr lang="ru-RU" baseline="0"/>
+                  <a:t> выполнения, мкс</a:t>
+                </a:r>
+                <a:endParaRPr lang="ru-RU"/>
+              </a:p>
+            </c:rich>
+          </c:tx>
+          <c:overlay val="0"/>
+          <c:spPr>
+            <a:noFill/>
+            <a:ln>
+              <a:noFill/>
+            </a:ln>
+            <a:effectLst/>
+          </c:spPr>
+          <c:txPr>
+            <a:bodyPr rot="-5400000" spcFirstLastPara="1" vertOverflow="ellipsis" vert="horz" wrap="square" anchor="ctr" anchorCtr="1"/>
+            <a:lstStyle/>
+            <a:p>
+              <a:pPr>
+                <a:defRPr sz="1000" b="0" i="0" u="none" strike="noStrike" kern="1200" baseline="0">
+                  <a:solidFill>
+                    <a:schemeClr val="tx1">
+                      <a:lumMod val="65000"/>
+                      <a:lumOff val="35000"/>
+                    </a:schemeClr>
+                  </a:solidFill>
+                  <a:latin typeface="+mn-lt"/>
+                  <a:ea typeface="+mn-ea"/>
+                  <a:cs typeface="+mn-cs"/>
+                </a:defRPr>
+              </a:pPr>
+              <a:endParaRPr lang="ru-RU"/>
+            </a:p>
+          </c:txPr>
+        </c:title>
+        <c:numFmt formatCode="General" sourceLinked="1"/>
+        <c:majorTickMark val="none"/>
+        <c:minorTickMark val="none"/>
+        <c:tickLblPos val="nextTo"/>
+        <c:spPr>
+          <a:noFill/>
+          <a:ln>
+            <a:noFill/>
+          </a:ln>
+          <a:effectLst/>
+        </c:spPr>
+        <c:txPr>
+          <a:bodyPr rot="-60000000" spcFirstLastPara="1" vertOverflow="ellipsis" vert="horz" wrap="square" anchor="ctr" anchorCtr="1"/>
+          <a:lstStyle/>
+          <a:p>
+            <a:pPr>
+              <a:defRPr sz="900" b="0" i="0" u="none" strike="noStrike" kern="1200" baseline="0">
+                <a:solidFill>
+                  <a:schemeClr val="tx1">
+                    <a:lumMod val="65000"/>
+                    <a:lumOff val="35000"/>
+                  </a:schemeClr>
+                </a:solidFill>
+                <a:latin typeface="+mn-lt"/>
+                <a:ea typeface="+mn-ea"/>
+                <a:cs typeface="+mn-cs"/>
+              </a:defRPr>
+            </a:pPr>
+            <a:endParaRPr lang="ru-RU"/>
+          </a:p>
+        </c:txPr>
+        <c:crossAx val="165942735"/>
+        <c:crosses val="autoZero"/>
+        <c:crossBetween val="between"/>
+      </c:valAx>
+      <c:valAx>
+        <c:axId val="463573823"/>
+        <c:scaling>
+          <c:orientation val="minMax"/>
+        </c:scaling>
+        <c:delete val="0"/>
+        <c:axPos val="r"/>
+        <c:numFmt formatCode="0%" sourceLinked="0"/>
+        <c:majorTickMark val="out"/>
+        <c:minorTickMark val="none"/>
+        <c:tickLblPos val="nextTo"/>
+        <c:spPr>
+          <a:noFill/>
+          <a:ln>
+            <a:noFill/>
+          </a:ln>
+          <a:effectLst/>
+        </c:spPr>
+        <c:txPr>
+          <a:bodyPr rot="-60000000" spcFirstLastPara="1" vertOverflow="ellipsis" vert="horz" wrap="square" anchor="ctr" anchorCtr="1"/>
+          <a:lstStyle/>
+          <a:p>
+            <a:pPr>
+              <a:defRPr sz="900" b="0" i="0" u="none" strike="noStrike" kern="1200" baseline="0">
+                <a:solidFill>
+                  <a:schemeClr val="tx1">
+                    <a:lumMod val="65000"/>
+                    <a:lumOff val="35000"/>
+                  </a:schemeClr>
+                </a:solidFill>
+                <a:latin typeface="+mn-lt"/>
+                <a:ea typeface="+mn-ea"/>
+                <a:cs typeface="+mn-cs"/>
+              </a:defRPr>
+            </a:pPr>
+            <a:endParaRPr lang="ru-RU"/>
+          </a:p>
+        </c:txPr>
+        <c:crossAx val="463574655"/>
+        <c:crosses val="max"/>
+        <c:crossBetween val="between"/>
+      </c:valAx>
+      <c:catAx>
+        <c:axId val="463574655"/>
+        <c:scaling>
+          <c:orientation val="minMax"/>
+        </c:scaling>
+        <c:delete val="1"/>
+        <c:axPos val="b"/>
+        <c:numFmt formatCode="General" sourceLinked="1"/>
+        <c:majorTickMark val="out"/>
+        <c:minorTickMark val="none"/>
+        <c:tickLblPos val="nextTo"/>
+        <c:crossAx val="463573823"/>
+        <c:crosses val="autoZero"/>
+        <c:auto val="1"/>
+        <c:lblAlgn val="ctr"/>
+        <c:lblOffset val="100"/>
+        <c:noMultiLvlLbl val="0"/>
+      </c:catAx>
+      <c:spPr>
+        <a:noFill/>
+        <a:ln>
+          <a:noFill/>
+        </a:ln>
+        <a:effectLst/>
+      </c:spPr>
+    </c:plotArea>
+    <c:legend>
+      <c:legendPos val="b"/>
+      <c:overlay val="0"/>
+      <c:spPr>
+        <a:noFill/>
+        <a:ln>
+          <a:noFill/>
+        </a:ln>
+        <a:effectLst/>
+      </c:spPr>
+      <c:txPr>
+        <a:bodyPr rot="0" spcFirstLastPara="1" vertOverflow="ellipsis" vert="horz" wrap="square" anchor="ctr" anchorCtr="1"/>
+        <a:lstStyle/>
+        <a:p>
+          <a:pPr>
+            <a:defRPr sz="900" b="0" i="0" u="none" strike="noStrike" kern="1200" baseline="0">
+              <a:solidFill>
+                <a:schemeClr val="tx1">
+                  <a:lumMod val="65000"/>
+                  <a:lumOff val="35000"/>
+                </a:schemeClr>
+              </a:solidFill>
+              <a:latin typeface="+mn-lt"/>
+              <a:ea typeface="+mn-ea"/>
+              <a:cs typeface="+mn-cs"/>
+            </a:defRPr>
+          </a:pPr>
+          <a:endParaRPr lang="ru-RU"/>
+        </a:p>
+      </c:txPr>
+    </c:legend>
+    <c:plotVisOnly val="1"/>
+    <c:dispBlanksAs val="gap"/>
+    <c:extLst>
+      <c:ext xmlns:c16r3="http://schemas.microsoft.com/office/drawing/2017/03/chart" uri="{56B9EC1D-385E-4148-901F-78D8002777C0}">
+        <c16r3:dataDisplayOptions16>
+          <c16r3:dispNaAsBlank val="1"/>
+        </c16r3:dataDisplayOptions16>
+      </c:ext>
+    </c:extLst>
+    <c:showDLblsOverMax val="0"/>
+  </c:chart>
+  <c:spPr>
+    <a:noFill/>
+    <a:ln>
+      <a:noFill/>
+    </a:ln>
+    <a:effectLst/>
+  </c:spPr>
+  <c:txPr>
+    <a:bodyPr/>
+    <a:lstStyle/>
+    <a:p>
+      <a:pPr>
+        <a:defRPr/>
+      </a:pPr>
+      <a:endParaRPr lang="ru-RU"/>
+    </a:p>
+  </c:txPr>
+  <c:externalData r:id="rId3">
+    <c:autoUpdate val="0"/>
+  </c:externalData>
+</c:chartSpace>
+</file>
+
+<file path=ppt/charts/colors1.xml><?xml version="1.0" encoding="utf-8"?>
+<cs:colorStyle xmlns:cs="http://schemas.microsoft.com/office/drawing/2012/chartStyle" xmlns:a="http://schemas.openxmlformats.org/drawingml/2006/main" meth="cycle" id="20">
+  <a:schemeClr val="dk1"/>
+  <cs:variation>
+    <a:tint val="88500"/>
+  </cs:variation>
+  <cs:variation>
+    <a:tint val="55000"/>
+  </cs:variation>
+  <cs:variation>
+    <a:tint val="75000"/>
+  </cs:variation>
+  <cs:variation>
+    <a:tint val="98500"/>
+  </cs:variation>
+  <cs:variation>
+    <a:tint val="30000"/>
+  </cs:variation>
+  <cs:variation>
+    <a:tint val="60000"/>
+  </cs:variation>
+  <cs:variation>
+    <a:tint val="80000"/>
+  </cs:variation>
+</cs:colorStyle>
+</file>
+
+<file path=ppt/charts/colors2.xml><?xml version="1.0" encoding="utf-8"?>
+<cs:colorStyle xmlns:cs="http://schemas.microsoft.com/office/drawing/2012/chartStyle" xmlns:a="http://schemas.openxmlformats.org/drawingml/2006/main" meth="cycle" id="10">
+  <a:schemeClr val="accent1"/>
+  <a:schemeClr val="accent2"/>
+  <a:schemeClr val="accent3"/>
+  <a:schemeClr val="accent4"/>
+  <a:schemeClr val="accent5"/>
+  <a:schemeClr val="accent6"/>
+  <cs:variation/>
+  <cs:variation>
+    <a:lumMod val="60000"/>
+  </cs:variation>
+  <cs:variation>
+    <a:lumMod val="80000"/>
+    <a:lumOff val="20000"/>
+  </cs:variation>
+  <cs:variation>
+    <a:lumMod val="80000"/>
+  </cs:variation>
+  <cs:variation>
+    <a:lumMod val="60000"/>
+    <a:lumOff val="40000"/>
+  </cs:variation>
+  <cs:variation>
+    <a:lumMod val="50000"/>
+  </cs:variation>
+  <cs:variation>
+    <a:lumMod val="70000"/>
+    <a:lumOff val="30000"/>
+  </cs:variation>
+  <cs:variation>
+    <a:lumMod val="70000"/>
+  </cs:variation>
+  <cs:variation>
+    <a:lumMod val="50000"/>
+    <a:lumOff val="50000"/>
+  </cs:variation>
+</cs:colorStyle>
+</file>
+
+<file path=ppt/charts/colors3.xml><?xml version="1.0" encoding="utf-8"?>
+<cs:colorStyle xmlns:cs="http://schemas.microsoft.com/office/drawing/2012/chartStyle" xmlns:a="http://schemas.openxmlformats.org/drawingml/2006/main" meth="cycle" id="10">
+  <a:schemeClr val="accent1"/>
+  <a:schemeClr val="accent2"/>
+  <a:schemeClr val="accent3"/>
+  <a:schemeClr val="accent4"/>
+  <a:schemeClr val="accent5"/>
+  <a:schemeClr val="accent6"/>
+  <cs:variation/>
+  <cs:variation>
+    <a:lumMod val="60000"/>
+  </cs:variation>
+  <cs:variation>
+    <a:lumMod val="80000"/>
+    <a:lumOff val="20000"/>
+  </cs:variation>
+  <cs:variation>
+    <a:lumMod val="80000"/>
+  </cs:variation>
+  <cs:variation>
+    <a:lumMod val="60000"/>
+    <a:lumOff val="40000"/>
+  </cs:variation>
+  <cs:variation>
+    <a:lumMod val="50000"/>
+  </cs:variation>
+  <cs:variation>
+    <a:lumMod val="70000"/>
+    <a:lumOff val="30000"/>
+  </cs:variation>
+  <cs:variation>
+    <a:lumMod val="70000"/>
+  </cs:variation>
+  <cs:variation>
+    <a:lumMod val="50000"/>
+    <a:lumOff val="50000"/>
+  </cs:variation>
+</cs:colorStyle>
+</file>
+
+<file path=ppt/charts/style1.xml><?xml version="1.0" encoding="utf-8"?>
+<cs:chartStyle xmlns:cs="http://schemas.microsoft.com/office/drawing/2012/chartStyle" xmlns:a="http://schemas.openxmlformats.org/drawingml/2006/main" id="201">
+  <cs:axisTitle>
+    <cs:lnRef idx="0"/>
+    <cs:fillRef idx="0"/>
+    <cs:effectRef idx="0"/>
+    <cs:fontRef idx="minor">
+      <a:schemeClr val="tx1">
+        <a:lumMod val="65000"/>
+        <a:lumOff val="35000"/>
+      </a:schemeClr>
+    </cs:fontRef>
+    <cs:defRPr sz="1000" kern="1200"/>
+  </cs:axisTitle>
+  <cs:categoryAxis>
+    <cs:lnRef idx="0"/>
+    <cs:fillRef idx="0"/>
+    <cs:effectRef idx="0"/>
+    <cs:fontRef idx="minor">
+      <a:schemeClr val="tx1">
+        <a:lumMod val="65000"/>
+        <a:lumOff val="35000"/>
+      </a:schemeClr>
+    </cs:fontRef>
+    <cs:spPr>
+      <a:ln w="9525" cap="flat" cmpd="sng" algn="ctr">
+        <a:solidFill>
+          <a:schemeClr val="tx1">
+            <a:lumMod val="15000"/>
+            <a:lumOff val="85000"/>
+          </a:schemeClr>
+        </a:solidFill>
+        <a:round/>
+      </a:ln>
+    </cs:spPr>
+    <cs:defRPr sz="900" kern="1200"/>
+  </cs:categoryAxis>
+  <cs:chartArea mods="allowNoFillOverride allowNoLineOverride">
+    <cs:lnRef idx="0"/>
+    <cs:fillRef idx="0"/>
+    <cs:effectRef idx="0"/>
+    <cs:fontRef idx="minor">
+      <a:schemeClr val="tx1"/>
+    </cs:fontRef>
+    <cs:spPr>
+      <a:solidFill>
+        <a:schemeClr val="bg1"/>
+      </a:solidFill>
+      <a:ln w="9525" cap="flat" cmpd="sng" algn="ctr">
+        <a:solidFill>
+          <a:schemeClr val="tx1">
+            <a:lumMod val="15000"/>
+            <a:lumOff val="85000"/>
+          </a:schemeClr>
+        </a:solidFill>
+        <a:round/>
+      </a:ln>
+    </cs:spPr>
+    <cs:defRPr sz="1000" kern="1200"/>
+  </cs:chartArea>
+  <cs:dataLabel>
+    <cs:lnRef idx="0"/>
+    <cs:fillRef idx="0"/>
+    <cs:effectRef idx="0"/>
+    <cs:fontRef idx="minor">
+      <a:schemeClr val="tx1">
+        <a:lumMod val="75000"/>
+        <a:lumOff val="25000"/>
+      </a:schemeClr>
+    </cs:fontRef>
+    <cs:defRPr sz="900" kern="1200"/>
+  </cs:dataLabel>
+  <cs:dataLabelCallout>
+    <cs:lnRef idx="0"/>
+    <cs:fillRef idx="0"/>
+    <cs:effectRef idx="0"/>
+    <cs:fontRef idx="minor">
+      <a:schemeClr val="dk1">
+        <a:lumMod val="65000"/>
+        <a:lumOff val="35000"/>
+      </a:schemeClr>
+    </cs:fontRef>
+    <cs:spPr>
+      <a:solidFill>
+        <a:schemeClr val="lt1"/>
+      </a:solidFill>
+      <a:ln>
+        <a:solidFill>
+          <a:schemeClr val="dk1">
+            <a:lumMod val="25000"/>
+            <a:lumOff val="75000"/>
+          </a:schemeClr>
+        </a:solidFill>
+      </a:ln>
+    </cs:spPr>
+    <cs:defRPr sz="900" kern="1200"/>
+    <cs:bodyPr rot="0" spcFirstLastPara="1" vertOverflow="clip" horzOverflow="clip" vert="horz" wrap="square" lIns="36576" tIns="18288" rIns="36576" bIns="18288" anchor="ctr" anchorCtr="1">
+      <a:spAutoFit/>
+    </cs:bodyPr>
+  </cs:dataLabelCallout>
+  <cs:dataPoint>
+    <cs:lnRef idx="0"/>
+    <cs:fillRef idx="1">
+      <cs:styleClr val="auto"/>
+    </cs:fillRef>
+    <cs:effectRef idx="0"/>
+    <cs:fontRef idx="minor">
+      <a:schemeClr val="tx1"/>
+    </cs:fontRef>
+  </cs:dataPoint>
+  <cs:dataPoint3D>
+    <cs:lnRef idx="0"/>
+    <cs:fillRef idx="1">
+      <cs:styleClr val="auto"/>
+    </cs:fillRef>
+    <cs:effectRef idx="0"/>
+    <cs:fontRef idx="minor">
+      <a:schemeClr val="tx1"/>
+    </cs:fontRef>
+  </cs:dataPoint3D>
+  <cs:dataPointLine>
+    <cs:lnRef idx="0">
+      <cs:styleClr val="auto"/>
+    </cs:lnRef>
+    <cs:fillRef idx="1"/>
+    <cs:effectRef idx="0"/>
+    <cs:fontRef idx="minor">
+      <a:schemeClr val="tx1"/>
+    </cs:fontRef>
+    <cs:spPr>
+      <a:ln w="28575" cap="rnd">
+        <a:solidFill>
+          <a:schemeClr val="phClr"/>
+        </a:solidFill>
+        <a:round/>
+      </a:ln>
+    </cs:spPr>
+  </cs:dataPointLine>
+  <cs:dataPointMarker>
+    <cs:lnRef idx="0">
+      <cs:styleClr val="auto"/>
+    </cs:lnRef>
+    <cs:fillRef idx="1">
+      <cs:styleClr val="auto"/>
+    </cs:fillRef>
+    <cs:effectRef idx="0"/>
+    <cs:fontRef idx="minor">
+      <a:schemeClr val="tx1"/>
+    </cs:fontRef>
+    <cs:spPr>
+      <a:ln w="9525">
+        <a:solidFill>
+          <a:schemeClr val="phClr"/>
+        </a:solidFill>
+      </a:ln>
+    </cs:spPr>
+  </cs:dataPointMarker>
+  <cs:dataPointMarkerLayout symbol="circle" size="5"/>
+  <cs:dataPointWireframe>
+    <cs:lnRef idx="0">
+      <cs:styleClr val="auto"/>
+    </cs:lnRef>
+    <cs:fillRef idx="1"/>
+    <cs:effectRef idx="0"/>
+    <cs:fontRef idx="minor">
+      <a:schemeClr val="tx1"/>
+    </cs:fontRef>
+    <cs:spPr>
+      <a:ln w="9525" cap="rnd">
+        <a:solidFill>
+          <a:schemeClr val="phClr"/>
+        </a:solidFill>
+        <a:round/>
+      </a:ln>
+    </cs:spPr>
+  </cs:dataPointWireframe>
+  <cs:dataTable>
+    <cs:lnRef idx="0"/>
+    <cs:fillRef idx="0"/>
+    <cs:effectRef idx="0"/>
+    <cs:fontRef idx="minor">
+      <a:schemeClr val="tx1">
+        <a:lumMod val="65000"/>
+        <a:lumOff val="35000"/>
+      </a:schemeClr>
+    </cs:fontRef>
+    <cs:spPr>
+      <a:noFill/>
+      <a:ln w="9525" cap="flat" cmpd="sng" algn="ctr">
+        <a:solidFill>
+          <a:schemeClr val="tx1">
+            <a:lumMod val="15000"/>
+            <a:lumOff val="85000"/>
+          </a:schemeClr>
+        </a:solidFill>
+        <a:round/>
+      </a:ln>
+    </cs:spPr>
+    <cs:defRPr sz="900" kern="1200"/>
+  </cs:dataTable>
+  <cs:downBar>
+    <cs:lnRef idx="0"/>
+    <cs:fillRef idx="0"/>
+    <cs:effectRef idx="0"/>
+    <cs:fontRef idx="minor">
+      <a:schemeClr val="dk1"/>
+    </cs:fontRef>
+    <cs:spPr>
+      <a:solidFill>
+        <a:schemeClr val="dk1">
+          <a:lumMod val="65000"/>
+          <a:lumOff val="35000"/>
+        </a:schemeClr>
+      </a:solidFill>
+      <a:ln w="9525">
+        <a:solidFill>
+          <a:schemeClr val="tx1">
+            <a:lumMod val="65000"/>
+            <a:lumOff val="35000"/>
+          </a:schemeClr>
+        </a:solidFill>
+      </a:ln>
+    </cs:spPr>
+  </cs:downBar>
+  <cs:dropLine>
+    <cs:lnRef idx="0"/>
+    <cs:fillRef idx="0"/>
+    <cs:effectRef idx="0"/>
+    <cs:fontRef idx="minor">
+      <a:schemeClr val="tx1"/>
+    </cs:fontRef>
+    <cs:spPr>
+      <a:ln w="9525" cap="flat" cmpd="sng" algn="ctr">
+        <a:solidFill>
+          <a:schemeClr val="tx1">
+            <a:lumMod val="35000"/>
+            <a:lumOff val="65000"/>
+          </a:schemeClr>
+        </a:solidFill>
+        <a:round/>
+      </a:ln>
+    </cs:spPr>
+  </cs:dropLine>
+  <cs:errorBar>
+    <cs:lnRef idx="0"/>
+    <cs:fillRef idx="0"/>
+    <cs:effectRef idx="0"/>
+    <cs:fontRef idx="minor">
+      <a:schemeClr val="tx1"/>
+    </cs:fontRef>
+    <cs:spPr>
+      <a:ln w="9525" cap="flat" cmpd="sng" algn="ctr">
+        <a:solidFill>
+          <a:schemeClr val="tx1">
+            <a:lumMod val="65000"/>
+            <a:lumOff val="35000"/>
+          </a:schemeClr>
+        </a:solidFill>
+        <a:round/>
+      </a:ln>
+    </cs:spPr>
+  </cs:errorBar>
+  <cs:floor>
+    <cs:lnRef idx="0"/>
+    <cs:fillRef idx="0"/>
+    <cs:effectRef idx="0"/>
+    <cs:fontRef idx="minor">
+      <a:schemeClr val="tx1"/>
+    </cs:fontRef>
+    <cs:spPr>
+      <a:noFill/>
+      <a:ln>
+        <a:noFill/>
+      </a:ln>
+    </cs:spPr>
+  </cs:floor>
+  <cs:gridlineMajor>
+    <cs:lnRef idx="0"/>
+    <cs:fillRef idx="0"/>
+    <cs:effectRef idx="0"/>
+    <cs:fontRef idx="minor">
+      <a:schemeClr val="tx1"/>
+    </cs:fontRef>
+    <cs:spPr>
+      <a:ln w="9525" cap="flat" cmpd="sng" algn="ctr">
+        <a:solidFill>
+          <a:schemeClr val="tx1">
+            <a:lumMod val="15000"/>
+            <a:lumOff val="85000"/>
+          </a:schemeClr>
+        </a:solidFill>
+        <a:round/>
+      </a:ln>
+    </cs:spPr>
+  </cs:gridlineMajor>
+  <cs:gridlineMinor>
+    <cs:lnRef idx="0"/>
+    <cs:fillRef idx="0"/>
+    <cs:effectRef idx="0"/>
+    <cs:fontRef idx="minor">
+      <a:schemeClr val="tx1"/>
+    </cs:fontRef>
+    <cs:spPr>
+      <a:ln w="9525" cap="flat" cmpd="sng" algn="ctr">
+        <a:solidFill>
+          <a:schemeClr val="tx1">
+            <a:lumMod val="5000"/>
+            <a:lumOff val="95000"/>
+          </a:schemeClr>
+        </a:solidFill>
+        <a:round/>
+      </a:ln>
+    </cs:spPr>
+  </cs:gridlineMinor>
+  <cs:hiLoLine>
+    <cs:lnRef idx="0"/>
+    <cs:fillRef idx="0"/>
+    <cs:effectRef idx="0"/>
+    <cs:fontRef idx="minor">
+      <a:schemeClr val="tx1"/>
+    </cs:fontRef>
+    <cs:spPr>
+      <a:ln w="9525" cap="flat" cmpd="sng" algn="ctr">
+        <a:solidFill>
+          <a:schemeClr val="tx1">
+            <a:lumMod val="75000"/>
+            <a:lumOff val="25000"/>
+          </a:schemeClr>
+        </a:solidFill>
+        <a:round/>
+      </a:ln>
+    </cs:spPr>
+  </cs:hiLoLine>
+  <cs:leaderLine>
+    <cs:lnRef idx="0"/>
+    <cs:fillRef idx="0"/>
+    <cs:effectRef idx="0"/>
+    <cs:fontRef idx="minor">
+      <a:schemeClr val="tx1"/>
+    </cs:fontRef>
+    <cs:spPr>
+      <a:ln w="9525" cap="flat" cmpd="sng" algn="ctr">
+        <a:solidFill>
+          <a:schemeClr val="tx1">
+            <a:lumMod val="35000"/>
+            <a:lumOff val="65000"/>
+          </a:schemeClr>
+        </a:solidFill>
+        <a:round/>
+      </a:ln>
+    </cs:spPr>
+  </cs:leaderLine>
+  <cs:legend>
+    <cs:lnRef idx="0"/>
+    <cs:fillRef idx="0"/>
+    <cs:effectRef idx="0"/>
+    <cs:fontRef idx="minor">
+      <a:schemeClr val="tx1">
+        <a:lumMod val="65000"/>
+        <a:lumOff val="35000"/>
+      </a:schemeClr>
+    </cs:fontRef>
+    <cs:defRPr sz="900" kern="1200"/>
+  </cs:legend>
+  <cs:plotArea mods="allowNoFillOverride allowNoLineOverride">
+    <cs:lnRef idx="0"/>
+    <cs:fillRef idx="0"/>
+    <cs:effectRef idx="0"/>
+    <cs:fontRef idx="minor">
+      <a:schemeClr val="tx1"/>
+    </cs:fontRef>
+  </cs:plotArea>
+  <cs:plotArea3D mods="allowNoFillOverride allowNoLineOverride">
+    <cs:lnRef idx="0"/>
+    <cs:fillRef idx="0"/>
+    <cs:effectRef idx="0"/>
+    <cs:fontRef idx="minor">
+      <a:schemeClr val="tx1"/>
+    </cs:fontRef>
+  </cs:plotArea3D>
+  <cs:seriesAxis>
+    <cs:lnRef idx="0"/>
+    <cs:fillRef idx="0"/>
+    <cs:effectRef idx="0"/>
+    <cs:fontRef idx="minor">
+      <a:schemeClr val="tx1">
+        <a:lumMod val="65000"/>
+        <a:lumOff val="35000"/>
+      </a:schemeClr>
+    </cs:fontRef>
+    <cs:defRPr sz="900" kern="1200"/>
+  </cs:seriesAxis>
+  <cs:seriesLine>
+    <cs:lnRef idx="0"/>
+    <cs:fillRef idx="0"/>
+    <cs:effectRef idx="0"/>
+    <cs:fontRef idx="minor">
+      <a:schemeClr val="tx1"/>
+    </cs:fontRef>
+    <cs:spPr>
+      <a:ln w="9525" cap="flat" cmpd="sng" algn="ctr">
+        <a:solidFill>
+          <a:schemeClr val="tx1">
+            <a:lumMod val="35000"/>
+            <a:lumOff val="65000"/>
+          </a:schemeClr>
+        </a:solidFill>
+        <a:round/>
+      </a:ln>
+    </cs:spPr>
+  </cs:seriesLine>
+  <cs:title>
+    <cs:lnRef idx="0"/>
+    <cs:fillRef idx="0"/>
+    <cs:effectRef idx="0"/>
+    <cs:fontRef idx="minor">
+      <a:schemeClr val="tx1">
+        <a:lumMod val="65000"/>
+        <a:lumOff val="35000"/>
+      </a:schemeClr>
+    </cs:fontRef>
+    <cs:defRPr sz="1400" b="0" kern="1200" spc="0" baseline="0"/>
+  </cs:title>
+  <cs:trendline>
+    <cs:lnRef idx="0">
+      <cs:styleClr val="auto"/>
+    </cs:lnRef>
+    <cs:fillRef idx="0"/>
+    <cs:effectRef idx="0"/>
+    <cs:fontRef idx="minor">
+      <a:schemeClr val="tx1"/>
+    </cs:fontRef>
+    <cs:spPr>
+      <a:ln w="19050" cap="rnd">
+        <a:solidFill>
+          <a:schemeClr val="phClr"/>
+        </a:solidFill>
+        <a:prstDash val="sysDot"/>
+      </a:ln>
+    </cs:spPr>
+  </cs:trendline>
+  <cs:trendlineLabel>
+    <cs:lnRef idx="0"/>
+    <cs:fillRef idx="0"/>
+    <cs:effectRef idx="0"/>
+    <cs:fontRef idx="minor">
+      <a:schemeClr val="tx1">
+        <a:lumMod val="65000"/>
+        <a:lumOff val="35000"/>
+      </a:schemeClr>
+    </cs:fontRef>
+    <cs:defRPr sz="900" kern="1200"/>
+  </cs:trendlineLabel>
+  <cs:upBar>
+    <cs:lnRef idx="0"/>
+    <cs:fillRef idx="0"/>
+    <cs:effectRef idx="0"/>
+    <cs:fontRef idx="minor">
+      <a:schemeClr val="dk1"/>
+    </cs:fontRef>
+    <cs:spPr>
+      <a:solidFill>
+        <a:schemeClr val="lt1"/>
+      </a:solidFill>
+      <a:ln w="9525">
+        <a:solidFill>
+          <a:schemeClr val="tx1">
+            <a:lumMod val="15000"/>
+            <a:lumOff val="85000"/>
+          </a:schemeClr>
+        </a:solidFill>
+      </a:ln>
+    </cs:spPr>
+  </cs:upBar>
+  <cs:valueAxis>
+    <cs:lnRef idx="0"/>
+    <cs:fillRef idx="0"/>
+    <cs:effectRef idx="0"/>
+    <cs:fontRef idx="minor">
+      <a:schemeClr val="tx1">
+        <a:lumMod val="65000"/>
+        <a:lumOff val="35000"/>
+      </a:schemeClr>
+    </cs:fontRef>
+    <cs:defRPr sz="900" kern="1200"/>
+  </cs:valueAxis>
+  <cs:wall>
+    <cs:lnRef idx="0"/>
+    <cs:fillRef idx="0"/>
+    <cs:effectRef idx="0"/>
+    <cs:fontRef idx="minor">
+      <a:schemeClr val="tx1"/>
+    </cs:fontRef>
+    <cs:spPr>
+      <a:noFill/>
+      <a:ln>
+        <a:noFill/>
+      </a:ln>
+    </cs:spPr>
+  </cs:wall>
+</cs:chartStyle>
+</file>
+
+<file path=ppt/charts/style2.xml><?xml version="1.0" encoding="utf-8"?>
+<cs:chartStyle xmlns:cs="http://schemas.microsoft.com/office/drawing/2012/chartStyle" xmlns:a="http://schemas.openxmlformats.org/drawingml/2006/main" id="201">
+  <cs:axisTitle>
+    <cs:lnRef idx="0"/>
+    <cs:fillRef idx="0"/>
+    <cs:effectRef idx="0"/>
+    <cs:fontRef idx="minor">
+      <a:schemeClr val="tx1">
+        <a:lumMod val="65000"/>
+        <a:lumOff val="35000"/>
+      </a:schemeClr>
+    </cs:fontRef>
+    <cs:defRPr sz="1000" kern="1200"/>
+  </cs:axisTitle>
+  <cs:categoryAxis>
+    <cs:lnRef idx="0"/>
+    <cs:fillRef idx="0"/>
+    <cs:effectRef idx="0"/>
+    <cs:fontRef idx="minor">
+      <a:schemeClr val="tx1">
+        <a:lumMod val="65000"/>
+        <a:lumOff val="35000"/>
+      </a:schemeClr>
+    </cs:fontRef>
+    <cs:spPr>
+      <a:ln w="9525" cap="flat" cmpd="sng" algn="ctr">
+        <a:solidFill>
+          <a:schemeClr val="tx1">
+            <a:lumMod val="15000"/>
+            <a:lumOff val="85000"/>
+          </a:schemeClr>
+        </a:solidFill>
+        <a:round/>
+      </a:ln>
+    </cs:spPr>
+    <cs:defRPr sz="900" kern="1200"/>
+  </cs:categoryAxis>
+  <cs:chartArea mods="allowNoFillOverride allowNoLineOverride">
+    <cs:lnRef idx="0"/>
+    <cs:fillRef idx="0"/>
+    <cs:effectRef idx="0"/>
+    <cs:fontRef idx="minor">
+      <a:schemeClr val="tx1"/>
+    </cs:fontRef>
+    <cs:spPr>
+      <a:solidFill>
+        <a:schemeClr val="bg1"/>
+      </a:solidFill>
+      <a:ln w="9525" cap="flat" cmpd="sng" algn="ctr">
+        <a:solidFill>
+          <a:schemeClr val="tx1">
+            <a:lumMod val="15000"/>
+            <a:lumOff val="85000"/>
+          </a:schemeClr>
+        </a:solidFill>
+        <a:round/>
+      </a:ln>
+    </cs:spPr>
+    <cs:defRPr sz="1000" kern="1200"/>
+  </cs:chartArea>
+  <cs:dataLabel>
+    <cs:lnRef idx="0"/>
+    <cs:fillRef idx="0"/>
+    <cs:effectRef idx="0"/>
+    <cs:fontRef idx="minor">
+      <a:schemeClr val="tx1">
+        <a:lumMod val="75000"/>
+        <a:lumOff val="25000"/>
+      </a:schemeClr>
+    </cs:fontRef>
+    <cs:defRPr sz="900" kern="1200"/>
+  </cs:dataLabel>
+  <cs:dataLabelCallout>
+    <cs:lnRef idx="0"/>
+    <cs:fillRef idx="0"/>
+    <cs:effectRef idx="0"/>
+    <cs:fontRef idx="minor">
+      <a:schemeClr val="dk1">
+        <a:lumMod val="65000"/>
+        <a:lumOff val="35000"/>
+      </a:schemeClr>
+    </cs:fontRef>
+    <cs:spPr>
+      <a:solidFill>
+        <a:schemeClr val="lt1"/>
+      </a:solidFill>
+      <a:ln>
+        <a:solidFill>
+          <a:schemeClr val="dk1">
+            <a:lumMod val="25000"/>
+            <a:lumOff val="75000"/>
+          </a:schemeClr>
+        </a:solidFill>
+      </a:ln>
+    </cs:spPr>
+    <cs:defRPr sz="900" kern="1200"/>
+    <cs:bodyPr rot="0" spcFirstLastPara="1" vertOverflow="clip" horzOverflow="clip" vert="horz" wrap="square" lIns="36576" tIns="18288" rIns="36576" bIns="18288" anchor="ctr" anchorCtr="1">
+      <a:spAutoFit/>
+    </cs:bodyPr>
+  </cs:dataLabelCallout>
+  <cs:dataPoint>
+    <cs:lnRef idx="0"/>
+    <cs:fillRef idx="1">
+      <cs:styleClr val="auto"/>
+    </cs:fillRef>
+    <cs:effectRef idx="0"/>
+    <cs:fontRef idx="minor">
+      <a:schemeClr val="tx1"/>
+    </cs:fontRef>
+  </cs:dataPoint>
+  <cs:dataPoint3D>
+    <cs:lnRef idx="0"/>
+    <cs:fillRef idx="1">
+      <cs:styleClr val="auto"/>
+    </cs:fillRef>
+    <cs:effectRef idx="0"/>
+    <cs:fontRef idx="minor">
+      <a:schemeClr val="tx1"/>
+    </cs:fontRef>
+  </cs:dataPoint3D>
+  <cs:dataPointLine>
+    <cs:lnRef idx="0">
+      <cs:styleClr val="auto"/>
+    </cs:lnRef>
+    <cs:fillRef idx="1"/>
+    <cs:effectRef idx="0"/>
+    <cs:fontRef idx="minor">
+      <a:schemeClr val="tx1"/>
+    </cs:fontRef>
+    <cs:spPr>
+      <a:ln w="28575" cap="rnd">
+        <a:solidFill>
+          <a:schemeClr val="phClr"/>
+        </a:solidFill>
+        <a:round/>
+      </a:ln>
+    </cs:spPr>
+  </cs:dataPointLine>
+  <cs:dataPointMarker>
+    <cs:lnRef idx="0">
+      <cs:styleClr val="auto"/>
+    </cs:lnRef>
+    <cs:fillRef idx="1">
+      <cs:styleClr val="auto"/>
+    </cs:fillRef>
+    <cs:effectRef idx="0"/>
+    <cs:fontRef idx="minor">
+      <a:schemeClr val="tx1"/>
+    </cs:fontRef>
+    <cs:spPr>
+      <a:ln w="9525">
+        <a:solidFill>
+          <a:schemeClr val="phClr"/>
+        </a:solidFill>
+      </a:ln>
+    </cs:spPr>
+  </cs:dataPointMarker>
+  <cs:dataPointMarkerLayout symbol="circle" size="5"/>
+  <cs:dataPointWireframe>
+    <cs:lnRef idx="0">
+      <cs:styleClr val="auto"/>
+    </cs:lnRef>
+    <cs:fillRef idx="1"/>
+    <cs:effectRef idx="0"/>
+    <cs:fontRef idx="minor">
+      <a:schemeClr val="tx1"/>
+    </cs:fontRef>
+    <cs:spPr>
+      <a:ln w="9525" cap="rnd">
+        <a:solidFill>
+          <a:schemeClr val="phClr"/>
+        </a:solidFill>
+        <a:round/>
+      </a:ln>
+    </cs:spPr>
+  </cs:dataPointWireframe>
+  <cs:dataTable>
+    <cs:lnRef idx="0"/>
+    <cs:fillRef idx="0"/>
+    <cs:effectRef idx="0"/>
+    <cs:fontRef idx="minor">
+      <a:schemeClr val="tx1">
+        <a:lumMod val="65000"/>
+        <a:lumOff val="35000"/>
+      </a:schemeClr>
+    </cs:fontRef>
+    <cs:spPr>
+      <a:noFill/>
+      <a:ln w="9525" cap="flat" cmpd="sng" algn="ctr">
+        <a:solidFill>
+          <a:schemeClr val="tx1">
+            <a:lumMod val="15000"/>
+            <a:lumOff val="85000"/>
+          </a:schemeClr>
+        </a:solidFill>
+        <a:round/>
+      </a:ln>
+    </cs:spPr>
+    <cs:defRPr sz="900" kern="1200"/>
+  </cs:dataTable>
+  <cs:downBar>
+    <cs:lnRef idx="0"/>
+    <cs:fillRef idx="0"/>
+    <cs:effectRef idx="0"/>
+    <cs:fontRef idx="minor">
+      <a:schemeClr val="dk1"/>
+    </cs:fontRef>
+    <cs:spPr>
+      <a:solidFill>
+        <a:schemeClr val="dk1">
+          <a:lumMod val="65000"/>
+          <a:lumOff val="35000"/>
+        </a:schemeClr>
+      </a:solidFill>
+      <a:ln w="9525">
+        <a:solidFill>
+          <a:schemeClr val="tx1">
+            <a:lumMod val="65000"/>
+            <a:lumOff val="35000"/>
+          </a:schemeClr>
+        </a:solidFill>
+      </a:ln>
+    </cs:spPr>
+  </cs:downBar>
+  <cs:dropLine>
+    <cs:lnRef idx="0"/>
+    <cs:fillRef idx="0"/>
+    <cs:effectRef idx="0"/>
+    <cs:fontRef idx="minor">
+      <a:schemeClr val="tx1"/>
+    </cs:fontRef>
+    <cs:spPr>
+      <a:ln w="9525" cap="flat" cmpd="sng" algn="ctr">
+        <a:solidFill>
+          <a:schemeClr val="tx1">
+            <a:lumMod val="35000"/>
+            <a:lumOff val="65000"/>
+          </a:schemeClr>
+        </a:solidFill>
+        <a:round/>
+      </a:ln>
+    </cs:spPr>
+  </cs:dropLine>
+  <cs:errorBar>
+    <cs:lnRef idx="0"/>
+    <cs:fillRef idx="0"/>
+    <cs:effectRef idx="0"/>
+    <cs:fontRef idx="minor">
+      <a:schemeClr val="tx1"/>
+    </cs:fontRef>
+    <cs:spPr>
+      <a:ln w="9525" cap="flat" cmpd="sng" algn="ctr">
+        <a:solidFill>
+          <a:schemeClr val="tx1">
+            <a:lumMod val="65000"/>
+            <a:lumOff val="35000"/>
+          </a:schemeClr>
+        </a:solidFill>
+        <a:round/>
+      </a:ln>
+    </cs:spPr>
+  </cs:errorBar>
+  <cs:floor>
+    <cs:lnRef idx="0"/>
+    <cs:fillRef idx="0"/>
+    <cs:effectRef idx="0"/>
+    <cs:fontRef idx="minor">
+      <a:schemeClr val="tx1"/>
+    </cs:fontRef>
+    <cs:spPr>
+      <a:noFill/>
+      <a:ln>
+        <a:noFill/>
+      </a:ln>
+    </cs:spPr>
+  </cs:floor>
+  <cs:gridlineMajor>
+    <cs:lnRef idx="0"/>
+    <cs:fillRef idx="0"/>
+    <cs:effectRef idx="0"/>
+    <cs:fontRef idx="minor">
+      <a:schemeClr val="tx1"/>
+    </cs:fontRef>
+    <cs:spPr>
+      <a:ln w="9525" cap="flat" cmpd="sng" algn="ctr">
+        <a:solidFill>
+          <a:schemeClr val="tx1">
+            <a:lumMod val="15000"/>
+            <a:lumOff val="85000"/>
+          </a:schemeClr>
+        </a:solidFill>
+        <a:round/>
+      </a:ln>
+    </cs:spPr>
+  </cs:gridlineMajor>
+  <cs:gridlineMinor>
+    <cs:lnRef idx="0"/>
+    <cs:fillRef idx="0"/>
+    <cs:effectRef idx="0"/>
+    <cs:fontRef idx="minor">
+      <a:schemeClr val="tx1"/>
+    </cs:fontRef>
+    <cs:spPr>
+      <a:ln w="9525" cap="flat" cmpd="sng" algn="ctr">
+        <a:solidFill>
+          <a:schemeClr val="tx1">
+            <a:lumMod val="5000"/>
+            <a:lumOff val="95000"/>
+          </a:schemeClr>
+        </a:solidFill>
+        <a:round/>
+      </a:ln>
+    </cs:spPr>
+  </cs:gridlineMinor>
+  <cs:hiLoLine>
+    <cs:lnRef idx="0"/>
+    <cs:fillRef idx="0"/>
+    <cs:effectRef idx="0"/>
+    <cs:fontRef idx="minor">
+      <a:schemeClr val="tx1"/>
+    </cs:fontRef>
+    <cs:spPr>
+      <a:ln w="9525" cap="flat" cmpd="sng" algn="ctr">
+        <a:solidFill>
+          <a:schemeClr val="tx1">
+            <a:lumMod val="75000"/>
+            <a:lumOff val="25000"/>
+          </a:schemeClr>
+        </a:solidFill>
+        <a:round/>
+      </a:ln>
+    </cs:spPr>
+  </cs:hiLoLine>
+  <cs:leaderLine>
+    <cs:lnRef idx="0"/>
+    <cs:fillRef idx="0"/>
+    <cs:effectRef idx="0"/>
+    <cs:fontRef idx="minor">
+      <a:schemeClr val="tx1"/>
+    </cs:fontRef>
+    <cs:spPr>
+      <a:ln w="9525" cap="flat" cmpd="sng" algn="ctr">
+        <a:solidFill>
+          <a:schemeClr val="tx1">
+            <a:lumMod val="35000"/>
+            <a:lumOff val="65000"/>
+          </a:schemeClr>
+        </a:solidFill>
+        <a:round/>
+      </a:ln>
+    </cs:spPr>
+  </cs:leaderLine>
+  <cs:legend>
+    <cs:lnRef idx="0"/>
+    <cs:fillRef idx="0"/>
+    <cs:effectRef idx="0"/>
+    <cs:fontRef idx="minor">
+      <a:schemeClr val="tx1">
+        <a:lumMod val="65000"/>
+        <a:lumOff val="35000"/>
+      </a:schemeClr>
+    </cs:fontRef>
+    <cs:defRPr sz="900" kern="1200"/>
+  </cs:legend>
+  <cs:plotArea mods="allowNoFillOverride allowNoLineOverride">
+    <cs:lnRef idx="0"/>
+    <cs:fillRef idx="0"/>
+    <cs:effectRef idx="0"/>
+    <cs:fontRef idx="minor">
+      <a:schemeClr val="tx1"/>
+    </cs:fontRef>
+  </cs:plotArea>
+  <cs:plotArea3D mods="allowNoFillOverride allowNoLineOverride">
+    <cs:lnRef idx="0"/>
+    <cs:fillRef idx="0"/>
+    <cs:effectRef idx="0"/>
+    <cs:fontRef idx="minor">
+      <a:schemeClr val="tx1"/>
+    </cs:fontRef>
+  </cs:plotArea3D>
+  <cs:seriesAxis>
+    <cs:lnRef idx="0"/>
+    <cs:fillRef idx="0"/>
+    <cs:effectRef idx="0"/>
+    <cs:fontRef idx="minor">
+      <a:schemeClr val="tx1">
+        <a:lumMod val="65000"/>
+        <a:lumOff val="35000"/>
+      </a:schemeClr>
+    </cs:fontRef>
+    <cs:defRPr sz="900" kern="1200"/>
+  </cs:seriesAxis>
+  <cs:seriesLine>
+    <cs:lnRef idx="0"/>
+    <cs:fillRef idx="0"/>
+    <cs:effectRef idx="0"/>
+    <cs:fontRef idx="minor">
+      <a:schemeClr val="tx1"/>
+    </cs:fontRef>
+    <cs:spPr>
+      <a:ln w="9525" cap="flat" cmpd="sng" algn="ctr">
+        <a:solidFill>
+          <a:schemeClr val="tx1">
+            <a:lumMod val="35000"/>
+            <a:lumOff val="65000"/>
+          </a:schemeClr>
+        </a:solidFill>
+        <a:round/>
+      </a:ln>
+    </cs:spPr>
+  </cs:seriesLine>
+  <cs:title>
+    <cs:lnRef idx="0"/>
+    <cs:fillRef idx="0"/>
+    <cs:effectRef idx="0"/>
+    <cs:fontRef idx="minor">
+      <a:schemeClr val="tx1">
+        <a:lumMod val="65000"/>
+        <a:lumOff val="35000"/>
+      </a:schemeClr>
+    </cs:fontRef>
+    <cs:defRPr sz="1400" b="0" kern="1200" spc="0" baseline="0"/>
+  </cs:title>
+  <cs:trendline>
+    <cs:lnRef idx="0">
+      <cs:styleClr val="auto"/>
+    </cs:lnRef>
+    <cs:fillRef idx="0"/>
+    <cs:effectRef idx="0"/>
+    <cs:fontRef idx="minor">
+      <a:schemeClr val="tx1"/>
+    </cs:fontRef>
+    <cs:spPr>
+      <a:ln w="19050" cap="rnd">
+        <a:solidFill>
+          <a:schemeClr val="phClr"/>
+        </a:solidFill>
+        <a:prstDash val="sysDot"/>
+      </a:ln>
+    </cs:spPr>
+  </cs:trendline>
+  <cs:trendlineLabel>
+    <cs:lnRef idx="0"/>
+    <cs:fillRef idx="0"/>
+    <cs:effectRef idx="0"/>
+    <cs:fontRef idx="minor">
+      <a:schemeClr val="tx1">
+        <a:lumMod val="65000"/>
+        <a:lumOff val="35000"/>
+      </a:schemeClr>
+    </cs:fontRef>
+    <cs:defRPr sz="900" kern="1200"/>
+  </cs:trendlineLabel>
+  <cs:upBar>
+    <cs:lnRef idx="0"/>
+    <cs:fillRef idx="0"/>
+    <cs:effectRef idx="0"/>
+    <cs:fontRef idx="minor">
+      <a:schemeClr val="dk1"/>
+    </cs:fontRef>
+    <cs:spPr>
+      <a:solidFill>
+        <a:schemeClr val="lt1"/>
+      </a:solidFill>
+      <a:ln w="9525">
+        <a:solidFill>
+          <a:schemeClr val="tx1">
+            <a:lumMod val="15000"/>
+            <a:lumOff val="85000"/>
+          </a:schemeClr>
+        </a:solidFill>
+      </a:ln>
+    </cs:spPr>
+  </cs:upBar>
+  <cs:valueAxis>
+    <cs:lnRef idx="0"/>
+    <cs:fillRef idx="0"/>
+    <cs:effectRef idx="0"/>
+    <cs:fontRef idx="minor">
+      <a:schemeClr val="tx1">
+        <a:lumMod val="65000"/>
+        <a:lumOff val="35000"/>
+      </a:schemeClr>
+    </cs:fontRef>
+    <cs:defRPr sz="900" kern="1200"/>
+  </cs:valueAxis>
+  <cs:wall>
+    <cs:lnRef idx="0"/>
+    <cs:fillRef idx="0"/>
+    <cs:effectRef idx="0"/>
+    <cs:fontRef idx="minor">
+      <a:schemeClr val="tx1"/>
+    </cs:fontRef>
+    <cs:spPr>
+      <a:noFill/>
+      <a:ln>
+        <a:noFill/>
+      </a:ln>
+    </cs:spPr>
+  </cs:wall>
+</cs:chartStyle>
+</file>
+
+<file path=ppt/charts/style3.xml><?xml version="1.0" encoding="utf-8"?>
+<cs:chartStyle xmlns:cs="http://schemas.microsoft.com/office/drawing/2012/chartStyle" xmlns:a="http://schemas.openxmlformats.org/drawingml/2006/main" id="201">
+  <cs:axisTitle>
+    <cs:lnRef idx="0"/>
+    <cs:fillRef idx="0"/>
+    <cs:effectRef idx="0"/>
+    <cs:fontRef idx="minor">
+      <a:schemeClr val="tx1">
+        <a:lumMod val="65000"/>
+        <a:lumOff val="35000"/>
+      </a:schemeClr>
+    </cs:fontRef>
+    <cs:defRPr sz="1000" kern="1200"/>
+  </cs:axisTitle>
+  <cs:categoryAxis>
+    <cs:lnRef idx="0"/>
+    <cs:fillRef idx="0"/>
+    <cs:effectRef idx="0"/>
+    <cs:fontRef idx="minor">
+      <a:schemeClr val="tx1">
+        <a:lumMod val="65000"/>
+        <a:lumOff val="35000"/>
+      </a:schemeClr>
+    </cs:fontRef>
+    <cs:spPr>
+      <a:ln w="9525" cap="flat" cmpd="sng" algn="ctr">
+        <a:solidFill>
+          <a:schemeClr val="tx1">
+            <a:lumMod val="15000"/>
+            <a:lumOff val="85000"/>
+          </a:schemeClr>
+        </a:solidFill>
+        <a:round/>
+      </a:ln>
+    </cs:spPr>
+    <cs:defRPr sz="900" kern="1200"/>
+  </cs:categoryAxis>
+  <cs:chartArea mods="allowNoFillOverride allowNoLineOverride">
+    <cs:lnRef idx="0"/>
+    <cs:fillRef idx="0"/>
+    <cs:effectRef idx="0"/>
+    <cs:fontRef idx="minor">
+      <a:schemeClr val="tx1"/>
+    </cs:fontRef>
+    <cs:spPr>
+      <a:solidFill>
+        <a:schemeClr val="bg1"/>
+      </a:solidFill>
+      <a:ln w="9525" cap="flat" cmpd="sng" algn="ctr">
+        <a:solidFill>
+          <a:schemeClr val="tx1">
+            <a:lumMod val="15000"/>
+            <a:lumOff val="85000"/>
+          </a:schemeClr>
+        </a:solidFill>
+        <a:round/>
+      </a:ln>
+    </cs:spPr>
+    <cs:defRPr sz="1000" kern="1200"/>
+  </cs:chartArea>
+  <cs:dataLabel>
+    <cs:lnRef idx="0"/>
+    <cs:fillRef idx="0"/>
+    <cs:effectRef idx="0"/>
+    <cs:fontRef idx="minor">
+      <a:schemeClr val="tx1">
+        <a:lumMod val="75000"/>
+        <a:lumOff val="25000"/>
+      </a:schemeClr>
+    </cs:fontRef>
+    <cs:defRPr sz="900" kern="1200"/>
+  </cs:dataLabel>
+  <cs:dataLabelCallout>
+    <cs:lnRef idx="0"/>
+    <cs:fillRef idx="0"/>
+    <cs:effectRef idx="0"/>
+    <cs:fontRef idx="minor">
+      <a:schemeClr val="dk1">
+        <a:lumMod val="65000"/>
+        <a:lumOff val="35000"/>
+      </a:schemeClr>
+    </cs:fontRef>
+    <cs:spPr>
+      <a:solidFill>
+        <a:schemeClr val="lt1"/>
+      </a:solidFill>
+      <a:ln>
+        <a:solidFill>
+          <a:schemeClr val="dk1">
+            <a:lumMod val="25000"/>
+            <a:lumOff val="75000"/>
+          </a:schemeClr>
+        </a:solidFill>
+      </a:ln>
+    </cs:spPr>
+    <cs:defRPr sz="900" kern="1200"/>
+    <cs:bodyPr rot="0" spcFirstLastPara="1" vertOverflow="clip" horzOverflow="clip" vert="horz" wrap="square" lIns="36576" tIns="18288" rIns="36576" bIns="18288" anchor="ctr" anchorCtr="1">
+      <a:spAutoFit/>
+    </cs:bodyPr>
+  </cs:dataLabelCallout>
+  <cs:dataPoint>
+    <cs:lnRef idx="0"/>
+    <cs:fillRef idx="1">
+      <cs:styleClr val="auto"/>
+    </cs:fillRef>
+    <cs:effectRef idx="0"/>
+    <cs:fontRef idx="minor">
+      <a:schemeClr val="tx1"/>
+    </cs:fontRef>
+  </cs:dataPoint>
+  <cs:dataPoint3D>
+    <cs:lnRef idx="0"/>
+    <cs:fillRef idx="1">
+      <cs:styleClr val="auto"/>
+    </cs:fillRef>
+    <cs:effectRef idx="0"/>
+    <cs:fontRef idx="minor">
+      <a:schemeClr val="tx1"/>
+    </cs:fontRef>
+  </cs:dataPoint3D>
+  <cs:dataPointLine>
+    <cs:lnRef idx="0">
+      <cs:styleClr val="auto"/>
+    </cs:lnRef>
+    <cs:fillRef idx="1"/>
+    <cs:effectRef idx="0"/>
+    <cs:fontRef idx="minor">
+      <a:schemeClr val="tx1"/>
+    </cs:fontRef>
+    <cs:spPr>
+      <a:ln w="28575" cap="rnd">
+        <a:solidFill>
+          <a:schemeClr val="phClr"/>
+        </a:solidFill>
+        <a:round/>
+      </a:ln>
+    </cs:spPr>
+  </cs:dataPointLine>
+  <cs:dataPointMarker>
+    <cs:lnRef idx="0">
+      <cs:styleClr val="auto"/>
+    </cs:lnRef>
+    <cs:fillRef idx="1">
+      <cs:styleClr val="auto"/>
+    </cs:fillRef>
+    <cs:effectRef idx="0"/>
+    <cs:fontRef idx="minor">
+      <a:schemeClr val="tx1"/>
+    </cs:fontRef>
+    <cs:spPr>
+      <a:ln w="9525">
+        <a:solidFill>
+          <a:schemeClr val="phClr"/>
+        </a:solidFill>
+      </a:ln>
+    </cs:spPr>
+  </cs:dataPointMarker>
+  <cs:dataPointMarkerLayout symbol="circle" size="5"/>
+  <cs:dataPointWireframe>
+    <cs:lnRef idx="0">
+      <cs:styleClr val="auto"/>
+    </cs:lnRef>
+    <cs:fillRef idx="1"/>
+    <cs:effectRef idx="0"/>
+    <cs:fontRef idx="minor">
+      <a:schemeClr val="tx1"/>
+    </cs:fontRef>
+    <cs:spPr>
+      <a:ln w="9525" cap="rnd">
+        <a:solidFill>
+          <a:schemeClr val="phClr"/>
+        </a:solidFill>
+        <a:round/>
+      </a:ln>
+    </cs:spPr>
+  </cs:dataPointWireframe>
+  <cs:dataTable>
+    <cs:lnRef idx="0"/>
+    <cs:fillRef idx="0"/>
+    <cs:effectRef idx="0"/>
+    <cs:fontRef idx="minor">
+      <a:schemeClr val="tx1">
+        <a:lumMod val="65000"/>
+        <a:lumOff val="35000"/>
+      </a:schemeClr>
+    </cs:fontRef>
+    <cs:spPr>
+      <a:noFill/>
+      <a:ln w="9525" cap="flat" cmpd="sng" algn="ctr">
+        <a:solidFill>
+          <a:schemeClr val="tx1">
+            <a:lumMod val="15000"/>
+            <a:lumOff val="85000"/>
+          </a:schemeClr>
+        </a:solidFill>
+        <a:round/>
+      </a:ln>
+    </cs:spPr>
+    <cs:defRPr sz="900" kern="1200"/>
+  </cs:dataTable>
+  <cs:downBar>
+    <cs:lnRef idx="0"/>
+    <cs:fillRef idx="0"/>
+    <cs:effectRef idx="0"/>
+    <cs:fontRef idx="minor">
+      <a:schemeClr val="dk1"/>
+    </cs:fontRef>
+    <cs:spPr>
+      <a:solidFill>
+        <a:schemeClr val="dk1">
+          <a:lumMod val="65000"/>
+          <a:lumOff val="35000"/>
+        </a:schemeClr>
+      </a:solidFill>
+      <a:ln w="9525">
+        <a:solidFill>
+          <a:schemeClr val="tx1">
+            <a:lumMod val="65000"/>
+            <a:lumOff val="35000"/>
+          </a:schemeClr>
+        </a:solidFill>
+      </a:ln>
+    </cs:spPr>
+  </cs:downBar>
+  <cs:dropLine>
+    <cs:lnRef idx="0"/>
+    <cs:fillRef idx="0"/>
+    <cs:effectRef idx="0"/>
+    <cs:fontRef idx="minor">
+      <a:schemeClr val="tx1"/>
+    </cs:fontRef>
+    <cs:spPr>
+      <a:ln w="9525" cap="flat" cmpd="sng" algn="ctr">
+        <a:solidFill>
+          <a:schemeClr val="tx1">
+            <a:lumMod val="35000"/>
+            <a:lumOff val="65000"/>
+          </a:schemeClr>
+        </a:solidFill>
+        <a:round/>
+      </a:ln>
+    </cs:spPr>
+  </cs:dropLine>
+  <cs:errorBar>
+    <cs:lnRef idx="0"/>
+    <cs:fillRef idx="0"/>
+    <cs:effectRef idx="0"/>
+    <cs:fontRef idx="minor">
+      <a:schemeClr val="tx1"/>
+    </cs:fontRef>
+    <cs:spPr>
+      <a:ln w="9525" cap="flat" cmpd="sng" algn="ctr">
+        <a:solidFill>
+          <a:schemeClr val="tx1">
+            <a:lumMod val="65000"/>
+            <a:lumOff val="35000"/>
+          </a:schemeClr>
+        </a:solidFill>
+        <a:round/>
+      </a:ln>
+    </cs:spPr>
+  </cs:errorBar>
+  <cs:floor>
+    <cs:lnRef idx="0"/>
+    <cs:fillRef idx="0"/>
+    <cs:effectRef idx="0"/>
+    <cs:fontRef idx="minor">
+      <a:schemeClr val="tx1"/>
+    </cs:fontRef>
+    <cs:spPr>
+      <a:noFill/>
+      <a:ln>
+        <a:noFill/>
+      </a:ln>
+    </cs:spPr>
+  </cs:floor>
+  <cs:gridlineMajor>
+    <cs:lnRef idx="0"/>
+    <cs:fillRef idx="0"/>
+    <cs:effectRef idx="0"/>
+    <cs:fontRef idx="minor">
+      <a:schemeClr val="tx1"/>
+    </cs:fontRef>
+    <cs:spPr>
+      <a:ln w="9525" cap="flat" cmpd="sng" algn="ctr">
+        <a:solidFill>
+          <a:schemeClr val="tx1">
+            <a:lumMod val="15000"/>
+            <a:lumOff val="85000"/>
+          </a:schemeClr>
+        </a:solidFill>
+        <a:round/>
+      </a:ln>
+    </cs:spPr>
+  </cs:gridlineMajor>
+  <cs:gridlineMinor>
+    <cs:lnRef idx="0"/>
+    <cs:fillRef idx="0"/>
+    <cs:effectRef idx="0"/>
+    <cs:fontRef idx="minor">
+      <a:schemeClr val="tx1"/>
+    </cs:fontRef>
+    <cs:spPr>
+      <a:ln w="9525" cap="flat" cmpd="sng" algn="ctr">
+        <a:solidFill>
+          <a:schemeClr val="tx1">
+            <a:lumMod val="5000"/>
+            <a:lumOff val="95000"/>
+          </a:schemeClr>
+        </a:solidFill>
+        <a:round/>
+      </a:ln>
+    </cs:spPr>
+  </cs:gridlineMinor>
+  <cs:hiLoLine>
+    <cs:lnRef idx="0"/>
+    <cs:fillRef idx="0"/>
+    <cs:effectRef idx="0"/>
+    <cs:fontRef idx="minor">
+      <a:schemeClr val="tx1"/>
+    </cs:fontRef>
+    <cs:spPr>
+      <a:ln w="9525" cap="flat" cmpd="sng" algn="ctr">
+        <a:solidFill>
+          <a:schemeClr val="tx1">
+            <a:lumMod val="75000"/>
+            <a:lumOff val="25000"/>
+          </a:schemeClr>
+        </a:solidFill>
+        <a:round/>
+      </a:ln>
+    </cs:spPr>
+  </cs:hiLoLine>
+  <cs:leaderLine>
+    <cs:lnRef idx="0"/>
+    <cs:fillRef idx="0"/>
+    <cs:effectRef idx="0"/>
+    <cs:fontRef idx="minor">
+      <a:schemeClr val="tx1"/>
+    </cs:fontRef>
+    <cs:spPr>
+      <a:ln w="9525" cap="flat" cmpd="sng" algn="ctr">
+        <a:solidFill>
+          <a:schemeClr val="tx1">
+            <a:lumMod val="35000"/>
+            <a:lumOff val="65000"/>
+          </a:schemeClr>
+        </a:solidFill>
+        <a:round/>
+      </a:ln>
+    </cs:spPr>
+  </cs:leaderLine>
+  <cs:legend>
+    <cs:lnRef idx="0"/>
+    <cs:fillRef idx="0"/>
+    <cs:effectRef idx="0"/>
+    <cs:fontRef idx="minor">
+      <a:schemeClr val="tx1">
+        <a:lumMod val="65000"/>
+        <a:lumOff val="35000"/>
+      </a:schemeClr>
+    </cs:fontRef>
+    <cs:defRPr sz="900" kern="1200"/>
+  </cs:legend>
+  <cs:plotArea mods="allowNoFillOverride allowNoLineOverride">
+    <cs:lnRef idx="0"/>
+    <cs:fillRef idx="0"/>
+    <cs:effectRef idx="0"/>
+    <cs:fontRef idx="minor">
+      <a:schemeClr val="tx1"/>
+    </cs:fontRef>
+  </cs:plotArea>
+  <cs:plotArea3D mods="allowNoFillOverride allowNoLineOverride">
+    <cs:lnRef idx="0"/>
+    <cs:fillRef idx="0"/>
+    <cs:effectRef idx="0"/>
+    <cs:fontRef idx="minor">
+      <a:schemeClr val="tx1"/>
+    </cs:fontRef>
+  </cs:plotArea3D>
+  <cs:seriesAxis>
+    <cs:lnRef idx="0"/>
+    <cs:fillRef idx="0"/>
+    <cs:effectRef idx="0"/>
+    <cs:fontRef idx="minor">
+      <a:schemeClr val="tx1">
+        <a:lumMod val="65000"/>
+        <a:lumOff val="35000"/>
+      </a:schemeClr>
+    </cs:fontRef>
+    <cs:defRPr sz="900" kern="1200"/>
+  </cs:seriesAxis>
+  <cs:seriesLine>
+    <cs:lnRef idx="0"/>
+    <cs:fillRef idx="0"/>
+    <cs:effectRef idx="0"/>
+    <cs:fontRef idx="minor">
+      <a:schemeClr val="tx1"/>
+    </cs:fontRef>
+    <cs:spPr>
+      <a:ln w="9525" cap="flat" cmpd="sng" algn="ctr">
+        <a:solidFill>
+          <a:schemeClr val="tx1">
+            <a:lumMod val="35000"/>
+            <a:lumOff val="65000"/>
+          </a:schemeClr>
+        </a:solidFill>
+        <a:round/>
+      </a:ln>
+    </cs:spPr>
+  </cs:seriesLine>
+  <cs:title>
+    <cs:lnRef idx="0"/>
+    <cs:fillRef idx="0"/>
+    <cs:effectRef idx="0"/>
+    <cs:fontRef idx="minor">
+      <a:schemeClr val="tx1">
+        <a:lumMod val="65000"/>
+        <a:lumOff val="35000"/>
+      </a:schemeClr>
+    </cs:fontRef>
+    <cs:defRPr sz="1400" b="0" kern="1200" spc="0" baseline="0"/>
+  </cs:title>
+  <cs:trendline>
+    <cs:lnRef idx="0">
+      <cs:styleClr val="auto"/>
+    </cs:lnRef>
+    <cs:fillRef idx="0"/>
+    <cs:effectRef idx="0"/>
+    <cs:fontRef idx="minor">
+      <a:schemeClr val="tx1"/>
+    </cs:fontRef>
+    <cs:spPr>
+      <a:ln w="19050" cap="rnd">
+        <a:solidFill>
+          <a:schemeClr val="phClr"/>
+        </a:solidFill>
+        <a:prstDash val="sysDot"/>
+      </a:ln>
+    </cs:spPr>
+  </cs:trendline>
+  <cs:trendlineLabel>
+    <cs:lnRef idx="0"/>
+    <cs:fillRef idx="0"/>
+    <cs:effectRef idx="0"/>
+    <cs:fontRef idx="minor">
+      <a:schemeClr val="tx1">
+        <a:lumMod val="65000"/>
+        <a:lumOff val="35000"/>
+      </a:schemeClr>
+    </cs:fontRef>
+    <cs:defRPr sz="900" kern="1200"/>
+  </cs:trendlineLabel>
+  <cs:upBar>
+    <cs:lnRef idx="0"/>
+    <cs:fillRef idx="0"/>
+    <cs:effectRef idx="0"/>
+    <cs:fontRef idx="minor">
+      <a:schemeClr val="dk1"/>
+    </cs:fontRef>
+    <cs:spPr>
+      <a:solidFill>
+        <a:schemeClr val="lt1"/>
+      </a:solidFill>
+      <a:ln w="9525">
+        <a:solidFill>
+          <a:schemeClr val="tx1">
+            <a:lumMod val="15000"/>
+            <a:lumOff val="85000"/>
+          </a:schemeClr>
+        </a:solidFill>
+      </a:ln>
+    </cs:spPr>
+  </cs:upBar>
+  <cs:valueAxis>
+    <cs:lnRef idx="0"/>
+    <cs:fillRef idx="0"/>
+    <cs:effectRef idx="0"/>
+    <cs:fontRef idx="minor">
+      <a:schemeClr val="tx1">
+        <a:lumMod val="65000"/>
+        <a:lumOff val="35000"/>
+      </a:schemeClr>
+    </cs:fontRef>
+    <cs:defRPr sz="900" kern="1200"/>
+  </cs:valueAxis>
+  <cs:wall>
+    <cs:lnRef idx="0"/>
+    <cs:fillRef idx="0"/>
+    <cs:effectRef idx="0"/>
+    <cs:fontRef idx="minor">
+      <a:schemeClr val="tx1"/>
+    </cs:fontRef>
+    <cs:spPr>
+      <a:noFill/>
+      <a:ln>
+        <a:noFill/>
+      </a:ln>
+    </cs:spPr>
+  </cs:wall>
+</cs:chartStyle>
 </file>
 
 <file path=ppt/notesMasters/notesMaster1.xml><?xml version="1.0" encoding="utf-8"?>
@@ -9269,8 +15439,8 @@
         </p:nvSpPr>
         <p:spPr bwMode="auto">
           <a:xfrm>
-            <a:off x="188536" y="1779662"/>
-            <a:ext cx="6027017" cy="357790"/>
+            <a:off x="81611" y="1429168"/>
+            <a:ext cx="3951416" cy="2569486"/>
           </a:xfrm>
           <a:prstGeom prst="rect">
             <a:avLst/>
@@ -9287,17 +15457,111 @@
               <a:defRPr/>
             </a:pPr>
             <a:r>
-              <a:rPr lang="en-US" sz="1800" dirty="0">
+              <a:rPr lang="ru-RU" sz="2400" dirty="0">
                 <a:latin typeface="Times New Roman" panose="02020603050405020304" pitchFamily="18" charset="0"/>
-                <a:ea typeface="AMDRTG"/>
                 <a:cs typeface="Times New Roman" panose="02020603050405020304" pitchFamily="18" charset="0"/>
               </a:rPr>
-              <a:t>Text</a:t>
+              <a:t>Собрав в общие алгоритмы декомпозированные задачи, реализовано 4 алгоритма</a:t>
+            </a:r>
+            <a:r>
+              <a:rPr lang="en-US" sz="2400" dirty="0">
+                <a:latin typeface="Times New Roman" panose="02020603050405020304" pitchFamily="18" charset="0"/>
+                <a:cs typeface="Times New Roman" panose="02020603050405020304" pitchFamily="18" charset="0"/>
+              </a:rPr>
+              <a:t>:</a:t>
+            </a:r>
+          </a:p>
+          <a:p>
+            <a:pPr marL="457200" indent="-457200">
+              <a:buFont typeface="+mj-lt"/>
+              <a:buAutoNum type="arabicParenR"/>
+              <a:defRPr/>
+            </a:pPr>
+            <a:r>
+              <a:rPr lang="ru-RU" sz="2400" dirty="0">
+                <a:latin typeface="Times New Roman" panose="02020603050405020304" pitchFamily="18" charset="0"/>
+                <a:cs typeface="Times New Roman" panose="02020603050405020304" pitchFamily="18" charset="0"/>
+              </a:rPr>
+              <a:t>Базовый</a:t>
+            </a:r>
+          </a:p>
+          <a:p>
+            <a:pPr marL="457200" indent="-457200">
+              <a:buFont typeface="+mj-lt"/>
+              <a:buAutoNum type="arabicParenR"/>
+              <a:defRPr/>
+            </a:pPr>
+            <a:r>
+              <a:rPr lang="en-US" sz="2400" dirty="0">
+                <a:latin typeface="Times New Roman" panose="02020603050405020304" pitchFamily="18" charset="0"/>
+                <a:cs typeface="Times New Roman" panose="02020603050405020304" pitchFamily="18" charset="0"/>
+              </a:rPr>
+              <a:t>AVX</a:t>
+            </a:r>
+            <a:r>
+              <a:rPr lang="ru-RU" sz="2400" dirty="0">
+                <a:latin typeface="Times New Roman" panose="02020603050405020304" pitchFamily="18" charset="0"/>
+                <a:cs typeface="Times New Roman" panose="02020603050405020304" pitchFamily="18" charset="0"/>
+              </a:rPr>
+              <a:t> с исп.</a:t>
+            </a:r>
+            <a:r>
+              <a:rPr lang="en-US" sz="2400" dirty="0">
+                <a:latin typeface="Times New Roman" panose="02020603050405020304" pitchFamily="18" charset="0"/>
+                <a:cs typeface="Times New Roman" panose="02020603050405020304" pitchFamily="18" charset="0"/>
+              </a:rPr>
+              <a:t> </a:t>
+            </a:r>
+            <a:r>
+              <a:rPr lang="en-US" sz="2400" dirty="0" err="1">
+                <a:latin typeface="Times New Roman" panose="02020603050405020304" pitchFamily="18" charset="0"/>
+                <a:cs typeface="Times New Roman" panose="02020603050405020304" pitchFamily="18" charset="0"/>
+              </a:rPr>
+              <a:t>bitset</a:t>
+            </a:r>
+            <a:endParaRPr lang="en-US" sz="2400" dirty="0">
+              <a:latin typeface="Times New Roman" panose="02020603050405020304" pitchFamily="18" charset="0"/>
+              <a:cs typeface="Times New Roman" panose="02020603050405020304" pitchFamily="18" charset="0"/>
+            </a:endParaRPr>
+          </a:p>
+          <a:p>
+            <a:pPr marL="457200" indent="-457200">
+              <a:buFont typeface="+mj-lt"/>
+              <a:buAutoNum type="arabicParenR"/>
+              <a:defRPr/>
+            </a:pPr>
+            <a:r>
+              <a:rPr lang="ru-RU" sz="2400" dirty="0">
+                <a:latin typeface="Times New Roman" panose="02020603050405020304" pitchFamily="18" charset="0"/>
+                <a:cs typeface="Times New Roman" panose="02020603050405020304" pitchFamily="18" charset="0"/>
+              </a:rPr>
+              <a:t>Только </a:t>
+            </a:r>
+            <a:r>
+              <a:rPr lang="en-US" sz="2400" dirty="0">
+                <a:latin typeface="Times New Roman" panose="02020603050405020304" pitchFamily="18" charset="0"/>
+                <a:cs typeface="Times New Roman" panose="02020603050405020304" pitchFamily="18" charset="0"/>
+              </a:rPr>
+              <a:t>AVX</a:t>
             </a:r>
             <a:endParaRPr lang="ru-RU" sz="2400" dirty="0">
               <a:latin typeface="Times New Roman" panose="02020603050405020304" pitchFamily="18" charset="0"/>
               <a:cs typeface="Times New Roman" panose="02020603050405020304" pitchFamily="18" charset="0"/>
             </a:endParaRPr>
+          </a:p>
+          <a:p>
+            <a:pPr marL="457200" indent="-457200">
+              <a:buFont typeface="+mj-lt"/>
+              <a:buAutoNum type="arabicParenR"/>
+              <a:defRPr/>
+            </a:pPr>
+            <a:r>
+              <a:rPr lang="ru-RU" sz="2400" dirty="0">
+                <a:latin typeface="Times New Roman" panose="02020603050405020304" pitchFamily="18" charset="0"/>
+                <a:cs typeface="Times New Roman" panose="02020603050405020304" pitchFamily="18" charset="0"/>
+              </a:rPr>
+              <a:t>Только скалярный</a:t>
+            </a:r>
           </a:p>
         </p:txBody>
       </p:sp>
@@ -10212,6 +16476,36 @@
           </p:txBody>
         </p:sp>
       </p:grpSp>
+      <p:graphicFrame>
+        <p:nvGraphicFramePr>
+          <p:cNvPr id="15" name="Диаграмма 14">
+            <a:extLst>
+              <a:ext uri="{FF2B5EF4-FFF2-40B4-BE49-F238E27FC236}">
+                <a16:creationId xmlns:a16="http://schemas.microsoft.com/office/drawing/2014/main" id="{C04C1FFD-EAA0-40CA-BFE9-5D28C0D621BA}"/>
+              </a:ext>
+            </a:extLst>
+          </p:cNvPr>
+          <p:cNvGraphicFramePr>
+            <a:graphicFrameLocks/>
+          </p:cNvGraphicFramePr>
+          <p:nvPr>
+            <p:extLst>
+              <p:ext uri="{D42A27DB-BD31-4B8C-83A1-F6EECF244321}">
+                <p14:modId xmlns:p14="http://schemas.microsoft.com/office/powerpoint/2010/main" val="3062860844"/>
+              </p:ext>
+            </p:extLst>
+          </p:nvPr>
+        </p:nvGraphicFramePr>
+        <p:xfrm>
+          <a:off x="4081066" y="1384671"/>
+          <a:ext cx="4985198" cy="3127600"/>
+        </p:xfrm>
+        <a:graphic>
+          <a:graphicData uri="http://schemas.openxmlformats.org/drawingml/2006/chart">
+            <c:chart xmlns:c="http://schemas.openxmlformats.org/drawingml/2006/chart" xmlns:r="http://schemas.openxmlformats.org/officeDocument/2006/relationships" r:id="rId3"/>
+          </a:graphicData>
+        </a:graphic>
+      </p:graphicFrame>
     </p:spTree>
     <p:extLst>
       <p:ext uri="{BB962C8B-B14F-4D97-AF65-F5344CB8AC3E}">
@@ -10245,6 +16539,53 @@
           <a:chExt cx="0" cy="0"/>
         </a:xfrm>
       </p:grpSpPr>
+      <p:pic>
+        <p:nvPicPr>
+          <p:cNvPr id="1028" name="Picture 4">
+            <a:extLst>
+              <a:ext uri="{FF2B5EF4-FFF2-40B4-BE49-F238E27FC236}">
+                <a16:creationId xmlns:a16="http://schemas.microsoft.com/office/drawing/2014/main" id="{3DC567FA-CEC2-494C-8454-9F184ED950B2}"/>
+              </a:ext>
+            </a:extLst>
+          </p:cNvPr>
+          <p:cNvPicPr>
+            <a:picLocks noChangeAspect="1" noChangeArrowheads="1" noCrop="1"/>
+          </p:cNvPicPr>
+          <p:nvPr/>
+        </p:nvPicPr>
+        <p:blipFill>
+          <a:blip r:embed="rId3">
+            <a:extLst>
+              <a:ext uri="{28A0092B-C50C-407E-A947-70E740481C1C}">
+                <a14:useLocalDpi xmlns:a14="http://schemas.microsoft.com/office/drawing/2010/main" val="0"/>
+              </a:ext>
+            </a:extLst>
+          </a:blip>
+          <a:srcRect/>
+          <a:stretch>
+            <a:fillRect/>
+          </a:stretch>
+        </p:blipFill>
+        <p:spPr bwMode="auto">
+          <a:xfrm>
+            <a:off x="4521483" y="849878"/>
+            <a:ext cx="4515013" cy="3384376"/>
+          </a:xfrm>
+          <a:prstGeom prst="rect">
+            <a:avLst/>
+          </a:prstGeom>
+          <a:noFill/>
+          <a:extLst>
+            <a:ext uri="{909E8E84-426E-40DD-AFC4-6F175D3DCCD1}">
+              <a14:hiddenFill xmlns:a14="http://schemas.microsoft.com/office/drawing/2010/main">
+                <a:solidFill>
+                  <a:srgbClr val="FFFFFF"/>
+                </a:solidFill>
+              </a14:hiddenFill>
+            </a:ext>
+          </a:extLst>
+        </p:spPr>
+      </p:pic>
       <p:sp>
         <p:nvSpPr>
           <p:cNvPr id="114284416" name="Google Shape;794;p40"/>
@@ -10303,8 +16644,8 @@
         </p:nvSpPr>
         <p:spPr bwMode="auto">
           <a:xfrm>
-            <a:off x="107504" y="1270779"/>
-            <a:ext cx="7128792" cy="3510192"/>
+            <a:off x="107504" y="1270778"/>
+            <a:ext cx="4824536" cy="3228256"/>
           </a:xfrm>
           <a:prstGeom prst="rect">
             <a:avLst/>
@@ -10317,116 +16658,18 @@
           </a:bodyPr>
           <a:lstStyle/>
           <a:p>
-            <a:pPr indent="450215" algn="just">
+            <a:pPr algn="just">
               <a:lnSpc>
                 <a:spcPct val="150000"/>
               </a:lnSpc>
             </a:pPr>
             <a:r>
-              <a:rPr lang="ru-RU" sz="1200" dirty="0">
+              <a:rPr lang="ru-RU" sz="1800" dirty="0">
                 <a:effectLst/>
                 <a:latin typeface="Times New Roman" panose="02020603050405020304" pitchFamily="18" charset="0"/>
                 <a:ea typeface="Times New Roman" panose="02020603050405020304" pitchFamily="18" charset="0"/>
               </a:rPr>
-              <a:t>Возникает потребность в разработке специализированной динамической библиотеки на C++, ориентированной исключительно на максимальную производительность вычислений клеточных автоматов.</a:t>
-            </a:r>
-          </a:p>
-          <a:p>
-            <a:pPr indent="450215" algn="just">
-              <a:lnSpc>
-                <a:spcPct val="150000"/>
-              </a:lnSpc>
-            </a:pPr>
-            <a:r>
-              <a:rPr lang="ru-RU" sz="1200" dirty="0">
-                <a:effectLst/>
-                <a:latin typeface="Times New Roman" panose="02020603050405020304" pitchFamily="18" charset="0"/>
-                <a:ea typeface="Times New Roman" panose="02020603050405020304" pitchFamily="18" charset="0"/>
-              </a:rPr>
-              <a:t>Актуальность темы обусловлена следующими факторами:</a:t>
-            </a:r>
-          </a:p>
-          <a:p>
-            <a:pPr marL="342900" lvl="0" indent="-342900" algn="just">
-              <a:lnSpc>
-                <a:spcPct val="150000"/>
-              </a:lnSpc>
-              <a:buFont typeface="Symbol" panose="05050102010706020507" pitchFamily="18" charset="2"/>
-              <a:buChar char=""/>
-            </a:pPr>
-            <a:r>
-              <a:rPr lang="ru-RU" sz="1200" dirty="0">
-                <a:effectLst/>
-                <a:latin typeface="Times New Roman" panose="02020603050405020304" pitchFamily="18" charset="0"/>
-                <a:ea typeface="Times New Roman" panose="02020603050405020304" pitchFamily="18" charset="0"/>
-              </a:rPr>
-              <a:t>практическая ценность. Создание универсального модуля, который разработчики смогут подключать к своим проектам (играм, симуляторам) как «черный ящик», получая высокую скорость работы «из коробки»;</a:t>
-            </a:r>
-          </a:p>
-          <a:p>
-            <a:pPr marL="342900" lvl="0" indent="-342900" algn="just">
-              <a:lnSpc>
-                <a:spcPct val="150000"/>
-              </a:lnSpc>
-              <a:buFont typeface="Symbol" panose="05050102010706020507" pitchFamily="18" charset="2"/>
-              <a:buChar char=""/>
-            </a:pPr>
-            <a:r>
-              <a:rPr lang="ru-RU" sz="1200" dirty="0">
-                <a:effectLst/>
-                <a:latin typeface="Times New Roman" panose="02020603050405020304" pitchFamily="18" charset="0"/>
-                <a:ea typeface="Times New Roman" panose="02020603050405020304" pitchFamily="18" charset="0"/>
-              </a:rPr>
-              <a:t>технологическая новизна. Применение современных стандартов C++ 20/23, включая концепты (</a:t>
-            </a:r>
-            <a:r>
-              <a:rPr lang="ru-RU" sz="1200" dirty="0" err="1">
-                <a:effectLst/>
-                <a:latin typeface="Times New Roman" panose="02020603050405020304" pitchFamily="18" charset="0"/>
-                <a:ea typeface="Times New Roman" panose="02020603050405020304" pitchFamily="18" charset="0"/>
-              </a:rPr>
-              <a:t>concepts</a:t>
-            </a:r>
-            <a:r>
-              <a:rPr lang="ru-RU" sz="1200" dirty="0">
-                <a:effectLst/>
-                <a:latin typeface="Times New Roman" panose="02020603050405020304" pitchFamily="18" charset="0"/>
-                <a:ea typeface="Times New Roman" panose="02020603050405020304" pitchFamily="18" charset="0"/>
-              </a:rPr>
-              <a:t>) для </a:t>
-            </a:r>
-            <a:r>
-              <a:rPr lang="ru-RU" sz="1200" dirty="0" err="1">
-                <a:effectLst/>
-                <a:latin typeface="Times New Roman" panose="02020603050405020304" pitchFamily="18" charset="0"/>
-                <a:ea typeface="Times New Roman" panose="02020603050405020304" pitchFamily="18" charset="0"/>
-              </a:rPr>
-              <a:t>типобезопасности</a:t>
-            </a:r>
-            <a:r>
-              <a:rPr lang="ru-RU" sz="1200" dirty="0">
-                <a:effectLst/>
-                <a:latin typeface="Times New Roman" panose="02020603050405020304" pitchFamily="18" charset="0"/>
-                <a:ea typeface="Times New Roman" panose="02020603050405020304" pitchFamily="18" charset="0"/>
-              </a:rPr>
-              <a:t> и модули для структуры кода, в сочетании с ручной оптимизацией через SIMD-инструкции;</a:t>
-            </a:r>
-          </a:p>
-          <a:p>
-            <a:pPr marL="342900" lvl="0" indent="-342900" algn="just">
-              <a:lnSpc>
-                <a:spcPct val="150000"/>
-              </a:lnSpc>
-              <a:buFont typeface="Symbol" panose="05050102010706020507" pitchFamily="18" charset="2"/>
-              <a:buChar char=""/>
-            </a:pPr>
-            <a:r>
-              <a:rPr lang="ru-RU" sz="1200" dirty="0">
-                <a:effectLst/>
-                <a:latin typeface="Times New Roman" panose="02020603050405020304" pitchFamily="18" charset="0"/>
-                <a:ea typeface="Times New Roman" panose="02020603050405020304" pitchFamily="18" charset="0"/>
-              </a:rPr>
-              <a:t>решение проблемы интеграции. Предоставление готового бинарного артефакта (DLL), что упрощает взаимодействие между компонентами системы, написанными на разных языках или компилируемыми разными компиляторами;</a:t>
+              <a:t>Клеточные автоматы – эффективный способ моделирования различных процессов в физике, химии, социологии. Возникает потребность в специализированной высокопроизводительной динамической библиотеки, ориентированной исключительно на максимальную производительность вычислений клеточных автоматов.</a:t>
             </a:r>
           </a:p>
         </p:txBody>
@@ -11427,7 +17670,7 @@
         <p:push dir="u"/>
       </p:transition>
     </mc:Choice>
-    <mc:Fallback xmlns:w="http://schemas.openxmlformats.org/wordprocessingml/2006/main" xmlns:m="http://schemas.openxmlformats.org/officeDocument/2006/math" xmlns="">
+    <mc:Fallback xmlns="" xmlns:m="http://schemas.openxmlformats.org/officeDocument/2006/math" xmlns:w="http://schemas.openxmlformats.org/wordprocessingml/2006/main">
       <p:transition spd="med" advClick="1">
         <p:push dir="u"/>
       </p:transition>
@@ -11511,8 +17754,8 @@
         </p:nvSpPr>
         <p:spPr bwMode="auto">
           <a:xfrm>
-            <a:off x="450648" y="1875874"/>
-            <a:ext cx="6223013" cy="2033698"/>
+            <a:off x="264044" y="1261676"/>
+            <a:ext cx="6223013" cy="2249077"/>
           </a:xfrm>
           <a:prstGeom prst="rect">
             <a:avLst/>
@@ -11525,19 +17768,152 @@
           </a:bodyPr>
           <a:lstStyle/>
           <a:p>
-            <a:pPr indent="450215" algn="just">
+            <a:pPr marL="342900" indent="-342900" algn="just">
               <a:lnSpc>
                 <a:spcPct val="150000"/>
               </a:lnSpc>
+              <a:buFont typeface="+mj-lt"/>
+              <a:buAutoNum type="arabicParenR"/>
             </a:pPr>
             <a:r>
-              <a:rPr lang="ru-RU" sz="1800" dirty="0">
+              <a:rPr lang="ru-RU" sz="2000" dirty="0">
+                <a:latin typeface="Times New Roman" panose="02020603050405020304" pitchFamily="18" charset="0"/>
+                <a:ea typeface="Times New Roman" panose="02020603050405020304" pitchFamily="18" charset="0"/>
+              </a:rPr>
+              <a:t>Выяснить, к</a:t>
+            </a:r>
+            <a:r>
+              <a:rPr lang="ru-RU" sz="2000" dirty="0">
                 <a:effectLst/>
                 <a:latin typeface="Times New Roman" panose="02020603050405020304" pitchFamily="18" charset="0"/>
                 <a:ea typeface="Times New Roman" panose="02020603050405020304" pitchFamily="18" charset="0"/>
               </a:rPr>
-              <a:t>проектирование архитектуры и программная реализация высокопроизводительной библиотеки на языке C++ для моделирования клеточных автоматов, обеспечивающей эффективное использование аппаратных ресурсов процессора и удобный интерфейс интеграции.</a:t>
+              <a:t>акие особенности современных</a:t>
             </a:r>
+            <a:r>
+              <a:rPr lang="en-US" sz="2000" dirty="0">
+                <a:effectLst/>
+                <a:latin typeface="Times New Roman" panose="02020603050405020304" pitchFamily="18" charset="0"/>
+                <a:ea typeface="Times New Roman" panose="02020603050405020304" pitchFamily="18" charset="0"/>
+              </a:rPr>
+              <a:t> CPU</a:t>
+            </a:r>
+            <a:r>
+              <a:rPr lang="ru-RU" sz="2000" dirty="0">
+                <a:effectLst/>
+                <a:latin typeface="Times New Roman" panose="02020603050405020304" pitchFamily="18" charset="0"/>
+                <a:ea typeface="Times New Roman" panose="02020603050405020304" pitchFamily="18" charset="0"/>
+              </a:rPr>
+              <a:t> нужно использовать</a:t>
+            </a:r>
+            <a:r>
+              <a:rPr lang="en-US" sz="2000" dirty="0">
+                <a:effectLst/>
+                <a:latin typeface="Times New Roman" panose="02020603050405020304" pitchFamily="18" charset="0"/>
+                <a:ea typeface="Times New Roman" panose="02020603050405020304" pitchFamily="18" charset="0"/>
+              </a:rPr>
+              <a:t>;</a:t>
+            </a:r>
+          </a:p>
+          <a:p>
+            <a:pPr marL="342900" indent="-342900" algn="just">
+              <a:lnSpc>
+                <a:spcPct val="150000"/>
+              </a:lnSpc>
+              <a:buFont typeface="+mj-lt"/>
+              <a:buAutoNum type="arabicParenR"/>
+            </a:pPr>
+            <a:r>
+              <a:rPr lang="ru-RU" sz="2000" dirty="0">
+                <a:effectLst/>
+                <a:latin typeface="Times New Roman" panose="02020603050405020304" pitchFamily="18" charset="0"/>
+                <a:ea typeface="Times New Roman" panose="02020603050405020304" pitchFamily="18" charset="0"/>
+              </a:rPr>
+              <a:t>Спроектировать архитектуру</a:t>
+            </a:r>
+            <a:r>
+              <a:rPr lang="en-US" sz="2000" dirty="0">
+                <a:effectLst/>
+                <a:latin typeface="Times New Roman" panose="02020603050405020304" pitchFamily="18" charset="0"/>
+                <a:ea typeface="Times New Roman" panose="02020603050405020304" pitchFamily="18" charset="0"/>
+              </a:rPr>
+              <a:t>;</a:t>
+            </a:r>
+            <a:endParaRPr lang="en-US" sz="2000" dirty="0">
+              <a:latin typeface="Times New Roman" panose="02020603050405020304" pitchFamily="18" charset="0"/>
+              <a:ea typeface="Times New Roman" panose="02020603050405020304" pitchFamily="18" charset="0"/>
+            </a:endParaRPr>
+          </a:p>
+          <a:p>
+            <a:pPr marL="342900" indent="-342900" algn="just">
+              <a:lnSpc>
+                <a:spcPct val="150000"/>
+              </a:lnSpc>
+              <a:buFont typeface="+mj-lt"/>
+              <a:buAutoNum type="arabicParenR"/>
+            </a:pPr>
+            <a:r>
+              <a:rPr lang="ru-RU" sz="2000" dirty="0">
+                <a:effectLst/>
+                <a:latin typeface="Times New Roman" panose="02020603050405020304" pitchFamily="18" charset="0"/>
+                <a:ea typeface="Times New Roman" panose="02020603050405020304" pitchFamily="18" charset="0"/>
+              </a:rPr>
+              <a:t>Реализовать</a:t>
+            </a:r>
+            <a:r>
+              <a:rPr lang="en-US" sz="2000" dirty="0">
+                <a:effectLst/>
+                <a:latin typeface="Times New Roman" panose="02020603050405020304" pitchFamily="18" charset="0"/>
+                <a:ea typeface="Times New Roman" panose="02020603050405020304" pitchFamily="18" charset="0"/>
+              </a:rPr>
+              <a:t> </a:t>
+            </a:r>
+            <a:r>
+              <a:rPr lang="ru-RU" sz="2000" dirty="0">
+                <a:effectLst/>
+                <a:latin typeface="Times New Roman" panose="02020603050405020304" pitchFamily="18" charset="0"/>
+                <a:ea typeface="Times New Roman" panose="02020603050405020304" pitchFamily="18" charset="0"/>
+              </a:rPr>
+              <a:t>алгоритмы</a:t>
+            </a:r>
+            <a:r>
+              <a:rPr lang="en-US" sz="2000" dirty="0">
+                <a:effectLst/>
+                <a:latin typeface="Times New Roman" panose="02020603050405020304" pitchFamily="18" charset="0"/>
+                <a:ea typeface="Times New Roman" panose="02020603050405020304" pitchFamily="18" charset="0"/>
+              </a:rPr>
+              <a:t>;</a:t>
+            </a:r>
+          </a:p>
+          <a:p>
+            <a:pPr marL="342900" indent="-342900" algn="just">
+              <a:lnSpc>
+                <a:spcPct val="150000"/>
+              </a:lnSpc>
+              <a:buFont typeface="+mj-lt"/>
+              <a:buAutoNum type="arabicParenR"/>
+            </a:pPr>
+            <a:r>
+              <a:rPr lang="ru-RU" sz="2000" dirty="0">
+                <a:effectLst/>
+                <a:latin typeface="Times New Roman" panose="02020603050405020304" pitchFamily="18" charset="0"/>
+                <a:ea typeface="Times New Roman" panose="02020603050405020304" pitchFamily="18" charset="0"/>
+              </a:rPr>
+              <a:t>Реализовать библиотеку</a:t>
+            </a:r>
+            <a:r>
+              <a:rPr lang="en-US" sz="2000" dirty="0">
+                <a:effectLst/>
+                <a:latin typeface="Times New Roman" panose="02020603050405020304" pitchFamily="18" charset="0"/>
+                <a:ea typeface="Times New Roman" panose="02020603050405020304" pitchFamily="18" charset="0"/>
+              </a:rPr>
+              <a:t>;</a:t>
+            </a:r>
+            <a:endParaRPr lang="ru-RU" sz="2000" dirty="0">
+              <a:effectLst/>
+              <a:latin typeface="Times New Roman" panose="02020603050405020304" pitchFamily="18" charset="0"/>
+              <a:ea typeface="Times New Roman" panose="02020603050405020304" pitchFamily="18" charset="0"/>
+            </a:endParaRPr>
           </a:p>
         </p:txBody>
       </p:sp>
@@ -13757,7 +20133,7 @@
         <p:push dir="u"/>
       </p:transition>
     </mc:Choice>
-    <mc:Fallback xmlns:w="http://schemas.openxmlformats.org/wordprocessingml/2006/main" xmlns:m="http://schemas.openxmlformats.org/officeDocument/2006/math" xmlns="">
+    <mc:Fallback xmlns="" xmlns:m="http://schemas.openxmlformats.org/officeDocument/2006/math" xmlns:w="http://schemas.openxmlformats.org/wordprocessingml/2006/main">
       <p:transition spd="med" advClick="1">
         <p:push dir="u"/>
       </p:transition>
@@ -13783,6 +20159,34 @@
           <a:chExt cx="0" cy="0"/>
         </a:xfrm>
       </p:grpSpPr>
+      <p:pic>
+        <p:nvPicPr>
+          <p:cNvPr id="15" name="Рисунок 14">
+            <a:extLst>
+              <a:ext uri="{FF2B5EF4-FFF2-40B4-BE49-F238E27FC236}">
+                <a16:creationId xmlns:a16="http://schemas.microsoft.com/office/drawing/2014/main" id="{A298C9FD-09BB-4CAC-8992-5583C6B73126}"/>
+              </a:ext>
+            </a:extLst>
+          </p:cNvPr>
+          <p:cNvPicPr/>
+          <p:nvPr/>
+        </p:nvPicPr>
+        <p:blipFill>
+          <a:blip r:embed="rId3"/>
+          <a:stretch>
+            <a:fillRect/>
+          </a:stretch>
+        </p:blipFill>
+        <p:spPr>
+          <a:xfrm>
+            <a:off x="5018653" y="850909"/>
+            <a:ext cx="3835300" cy="3672876"/>
+          </a:xfrm>
+          <a:prstGeom prst="rect">
+            <a:avLst/>
+          </a:prstGeom>
+        </p:spPr>
+      </p:pic>
       <p:sp>
         <p:nvSpPr>
           <p:cNvPr id="1446956684" name="Google Shape;794;p40"/>
@@ -13842,8 +20246,8 @@
         </p:nvSpPr>
         <p:spPr bwMode="auto">
           <a:xfrm>
-            <a:off x="153265" y="1271808"/>
-            <a:ext cx="4839174" cy="387222"/>
+            <a:off x="179479" y="1788362"/>
+            <a:ext cx="4839174" cy="1566776"/>
           </a:xfrm>
           <a:prstGeom prst="rect">
             <a:avLst/>
@@ -13860,12 +20264,67 @@
               <a:defRPr/>
             </a:pPr>
             <a:r>
+              <a:rPr lang="ru-RU" sz="2000" dirty="0">
+                <a:latin typeface="Times New Roman" panose="02020603050405020304" pitchFamily="18" charset="0"/>
+                <a:cs typeface="Times New Roman" panose="02020603050405020304" pitchFamily="18" charset="0"/>
+              </a:rPr>
+              <a:t>Представляет собой три уровня</a:t>
+            </a:r>
+            <a:r>
               <a:rPr lang="en-US" sz="2000" dirty="0">
                 <a:latin typeface="Times New Roman" panose="02020603050405020304" pitchFamily="18" charset="0"/>
-                <a:ea typeface="AMDRTG"/>
                 <a:cs typeface="Times New Roman" panose="02020603050405020304" pitchFamily="18" charset="0"/>
               </a:rPr>
-              <a:t>Text</a:t>
+              <a:t>:</a:t>
+            </a:r>
+          </a:p>
+          <a:p>
+            <a:pPr marL="457200" indent="-457200">
+              <a:buFont typeface="+mj-lt"/>
+              <a:buAutoNum type="arabicParenR"/>
+              <a:defRPr/>
+            </a:pPr>
+            <a:r>
+              <a:rPr lang="ru-RU" sz="2000" dirty="0">
+                <a:latin typeface="Times New Roman" panose="02020603050405020304" pitchFamily="18" charset="0"/>
+                <a:cs typeface="Times New Roman" panose="02020603050405020304" pitchFamily="18" charset="0"/>
+              </a:rPr>
+              <a:t>Доступ к функциям</a:t>
+            </a:r>
+            <a:r>
+              <a:rPr lang="en-US" sz="2000" dirty="0">
+                <a:latin typeface="Times New Roman" panose="02020603050405020304" pitchFamily="18" charset="0"/>
+                <a:cs typeface="Times New Roman" panose="02020603050405020304" pitchFamily="18" charset="0"/>
+              </a:rPr>
+              <a:t>;</a:t>
+            </a:r>
+          </a:p>
+          <a:p>
+            <a:pPr marL="457200" indent="-457200">
+              <a:buFont typeface="+mj-lt"/>
+              <a:buAutoNum type="arabicParenR"/>
+              <a:defRPr/>
+            </a:pPr>
+            <a:r>
+              <a:rPr lang="ru-RU" sz="2000" dirty="0">
+                <a:latin typeface="Times New Roman" panose="02020603050405020304" pitchFamily="18" charset="0"/>
+                <a:cs typeface="Times New Roman" panose="02020603050405020304" pitchFamily="18" charset="0"/>
+              </a:rPr>
+              <a:t>Внутренний, управление вызовами</a:t>
+            </a:r>
+          </a:p>
+          <a:p>
+            <a:pPr marL="457200" indent="-457200">
+              <a:buFont typeface="+mj-lt"/>
+              <a:buAutoNum type="arabicParenR"/>
+              <a:defRPr/>
+            </a:pPr>
+            <a:r>
+              <a:rPr lang="ru-RU" sz="2000" dirty="0">
+                <a:latin typeface="Times New Roman" panose="02020603050405020304" pitchFamily="18" charset="0"/>
+                <a:cs typeface="Times New Roman" panose="02020603050405020304" pitchFamily="18" charset="0"/>
+              </a:rPr>
+              <a:t>Скрытый, аппаратно-зависимые реализации</a:t>
             </a:r>
             <a:endParaRPr sz="2000" dirty="0">
               <a:latin typeface="Times New Roman" panose="02020603050405020304" pitchFamily="18" charset="0"/>
@@ -14835,34 +21294,6 @@
           </p:txBody>
         </p:sp>
       </p:grpSp>
-      <p:pic>
-        <p:nvPicPr>
-          <p:cNvPr id="15" name="Рисунок 14">
-            <a:extLst>
-              <a:ext uri="{FF2B5EF4-FFF2-40B4-BE49-F238E27FC236}">
-                <a16:creationId xmlns:a16="http://schemas.microsoft.com/office/drawing/2014/main" id="{A298C9FD-09BB-4CAC-8992-5583C6B73126}"/>
-              </a:ext>
-            </a:extLst>
-          </p:cNvPr>
-          <p:cNvPicPr/>
-          <p:nvPr/>
-        </p:nvPicPr>
-        <p:blipFill>
-          <a:blip r:embed="rId3"/>
-          <a:stretch>
-            <a:fillRect/>
-          </a:stretch>
-        </p:blipFill>
-        <p:spPr>
-          <a:xfrm>
-            <a:off x="5051017" y="1208984"/>
-            <a:ext cx="3835300" cy="3672876"/>
-          </a:xfrm>
-          <a:prstGeom prst="rect">
-            <a:avLst/>
-          </a:prstGeom>
-        </p:spPr>
-      </p:pic>
     </p:spTree>
     <p:extLst>
       <p:ext uri="{BB962C8B-B14F-4D97-AF65-F5344CB8AC3E}">
@@ -16023,6 +22454,210 @@
           </p:txBody>
         </p:sp>
       </p:grpSp>
+      <p:grpSp>
+        <p:nvGrpSpPr>
+          <p:cNvPr id="5" name="Группа 4">
+            <a:extLst>
+              <a:ext uri="{FF2B5EF4-FFF2-40B4-BE49-F238E27FC236}">
+                <a16:creationId xmlns:a16="http://schemas.microsoft.com/office/drawing/2014/main" id="{D2569147-10C9-45CC-8D29-ABECA672ED56}"/>
+              </a:ext>
+            </a:extLst>
+          </p:cNvPr>
+          <p:cNvGrpSpPr/>
+          <p:nvPr/>
+        </p:nvGrpSpPr>
+        <p:grpSpPr>
+          <a:xfrm>
+            <a:off x="5883647" y="483518"/>
+            <a:ext cx="3038122" cy="1927860"/>
+            <a:chOff x="6084168" y="699542"/>
+            <a:chExt cx="2736304" cy="1711836"/>
+          </a:xfrm>
+        </p:grpSpPr>
+        <p:pic>
+          <p:nvPicPr>
+            <p:cNvPr id="2050" name="Picture 2">
+              <a:extLst>
+                <a:ext uri="{FF2B5EF4-FFF2-40B4-BE49-F238E27FC236}">
+                  <a16:creationId xmlns:a16="http://schemas.microsoft.com/office/drawing/2014/main" id="{C26D1E3E-1A11-4CD6-A2FB-CCFEC08F7E76}"/>
+                </a:ext>
+              </a:extLst>
+            </p:cNvPr>
+            <p:cNvPicPr>
+              <a:picLocks noChangeAspect="1" noChangeArrowheads="1"/>
+            </p:cNvPicPr>
+            <p:nvPr/>
+          </p:nvPicPr>
+          <p:blipFill rotWithShape="1">
+            <a:blip r:embed="rId3">
+              <a:extLst>
+                <a:ext uri="{28A0092B-C50C-407E-A947-70E740481C1C}">
+                  <a14:useLocalDpi xmlns:a14="http://schemas.microsoft.com/office/drawing/2010/main" val="0"/>
+                </a:ext>
+              </a:extLst>
+            </a:blip>
+            <a:srcRect l="11906" t="11167" r="12497" b="13233"/>
+            <a:stretch/>
+          </p:blipFill>
+          <p:spPr bwMode="auto">
+            <a:xfrm>
+              <a:off x="6804248" y="699542"/>
+              <a:ext cx="1296144" cy="1296144"/>
+            </a:xfrm>
+            <a:prstGeom prst="rect">
+              <a:avLst/>
+            </a:prstGeom>
+            <a:noFill/>
+            <a:extLst>
+              <a:ext uri="{909E8E84-426E-40DD-AFC4-6F175D3DCCD1}">
+                <a14:hiddenFill xmlns:a14="http://schemas.microsoft.com/office/drawing/2010/main">
+                  <a:solidFill>
+                    <a:srgbClr val="FFFFFF"/>
+                  </a:solidFill>
+                </a14:hiddenFill>
+              </a:ext>
+            </a:extLst>
+          </p:spPr>
+        </p:pic>
+        <p:sp>
+          <p:nvSpPr>
+            <p:cNvPr id="2" name="TextBox 1">
+              <a:extLst>
+                <a:ext uri="{FF2B5EF4-FFF2-40B4-BE49-F238E27FC236}">
+                  <a16:creationId xmlns:a16="http://schemas.microsoft.com/office/drawing/2014/main" id="{2813992C-F594-4628-9C81-1AF341F6681E}"/>
+                </a:ext>
+              </a:extLst>
+            </p:cNvPr>
+            <p:cNvSpPr txBox="1"/>
+            <p:nvPr/>
+          </p:nvSpPr>
+          <p:spPr>
+            <a:xfrm>
+              <a:off x="6084168" y="2103601"/>
+              <a:ext cx="2736304" cy="307777"/>
+            </a:xfrm>
+            <a:prstGeom prst="rect">
+              <a:avLst/>
+            </a:prstGeom>
+            <a:noFill/>
+          </p:spPr>
+          <p:txBody>
+            <a:bodyPr wrap="square" rtlCol="0">
+              <a:spAutoFit/>
+            </a:bodyPr>
+            <a:lstStyle/>
+            <a:p>
+              <a:pPr algn="ctr"/>
+              <a:r>
+                <a:rPr lang="ru-RU" dirty="0"/>
+                <a:t>Рисунок 1 – Окрестность Мура</a:t>
+              </a:r>
+            </a:p>
+          </p:txBody>
+        </p:sp>
+      </p:grpSp>
+      <p:grpSp>
+        <p:nvGrpSpPr>
+          <p:cNvPr id="4" name="Группа 3">
+            <a:extLst>
+              <a:ext uri="{FF2B5EF4-FFF2-40B4-BE49-F238E27FC236}">
+                <a16:creationId xmlns:a16="http://schemas.microsoft.com/office/drawing/2014/main" id="{DC3221EB-2339-4F4F-9B59-882B782613FA}"/>
+              </a:ext>
+            </a:extLst>
+          </p:cNvPr>
+          <p:cNvGrpSpPr/>
+          <p:nvPr/>
+        </p:nvGrpSpPr>
+        <p:grpSpPr>
+          <a:xfrm>
+            <a:off x="5919100" y="2643759"/>
+            <a:ext cx="2967217" cy="2090351"/>
+            <a:chOff x="6156176" y="2631661"/>
+            <a:chExt cx="2592288" cy="1841074"/>
+          </a:xfrm>
+        </p:grpSpPr>
+        <p:pic>
+          <p:nvPicPr>
+            <p:cNvPr id="2052" name="Picture 4">
+              <a:extLst>
+                <a:ext uri="{FF2B5EF4-FFF2-40B4-BE49-F238E27FC236}">
+                  <a16:creationId xmlns:a16="http://schemas.microsoft.com/office/drawing/2014/main" id="{99FBC3B8-5B4B-47E1-8CDD-C24846B49AC2}"/>
+                </a:ext>
+              </a:extLst>
+            </p:cNvPr>
+            <p:cNvPicPr>
+              <a:picLocks noChangeAspect="1" noChangeArrowheads="1"/>
+            </p:cNvPicPr>
+            <p:nvPr/>
+          </p:nvPicPr>
+          <p:blipFill rotWithShape="1">
+            <a:blip r:embed="rId4">
+              <a:extLst>
+                <a:ext uri="{28A0092B-C50C-407E-A947-70E740481C1C}">
+                  <a14:useLocalDpi xmlns:a14="http://schemas.microsoft.com/office/drawing/2010/main" val="0"/>
+                </a:ext>
+              </a:extLst>
+            </a:blip>
+            <a:srcRect l="12600" t="11168" r="11801" b="13234"/>
+            <a:stretch/>
+          </p:blipFill>
+          <p:spPr bwMode="auto">
+            <a:xfrm>
+              <a:off x="6804248" y="2631661"/>
+              <a:ext cx="1296144" cy="1296144"/>
+            </a:xfrm>
+            <a:prstGeom prst="rect">
+              <a:avLst/>
+            </a:prstGeom>
+            <a:noFill/>
+            <a:extLst>
+              <a:ext uri="{909E8E84-426E-40DD-AFC4-6F175D3DCCD1}">
+                <a14:hiddenFill xmlns:a14="http://schemas.microsoft.com/office/drawing/2010/main">
+                  <a:solidFill>
+                    <a:srgbClr val="FFFFFF"/>
+                  </a:solidFill>
+                </a14:hiddenFill>
+              </a:ext>
+            </a:extLst>
+          </p:spPr>
+        </p:pic>
+        <p:sp>
+          <p:nvSpPr>
+            <p:cNvPr id="19" name="TextBox 18">
+              <a:extLst>
+                <a:ext uri="{FF2B5EF4-FFF2-40B4-BE49-F238E27FC236}">
+                  <a16:creationId xmlns:a16="http://schemas.microsoft.com/office/drawing/2014/main" id="{B9AB6642-FA26-49B1-B33C-57900AEE2102}"/>
+                </a:ext>
+              </a:extLst>
+            </p:cNvPr>
+            <p:cNvSpPr txBox="1"/>
+            <p:nvPr/>
+          </p:nvSpPr>
+          <p:spPr>
+            <a:xfrm>
+              <a:off x="6156176" y="4011910"/>
+              <a:ext cx="2592288" cy="460825"/>
+            </a:xfrm>
+            <a:prstGeom prst="rect">
+              <a:avLst/>
+            </a:prstGeom>
+            <a:noFill/>
+          </p:spPr>
+          <p:txBody>
+            <a:bodyPr wrap="square" rtlCol="0">
+              <a:spAutoFit/>
+            </a:bodyPr>
+            <a:lstStyle/>
+            <a:p>
+              <a:pPr algn="ctr"/>
+              <a:r>
+                <a:rPr lang="ru-RU" dirty="0"/>
+                <a:t>Рисунок 2 – Окрестность фон Неймана</a:t>
+              </a:r>
+            </a:p>
+          </p:txBody>
+        </p:sp>
+      </p:grpSp>
     </p:spTree>
     <p:extLst>
       <p:ext uri="{BB962C8B-B14F-4D97-AF65-F5344CB8AC3E}">
@@ -16131,8 +22766,8 @@
         </p:nvSpPr>
         <p:spPr bwMode="auto">
           <a:xfrm>
-            <a:off x="188536" y="1779662"/>
-            <a:ext cx="6027017" cy="357790"/>
+            <a:off x="263120" y="1817825"/>
+            <a:ext cx="4743504" cy="1507849"/>
           </a:xfrm>
           <a:prstGeom prst="rect">
             <a:avLst/>
@@ -16149,17 +22784,45 @@
               <a:defRPr/>
             </a:pPr>
             <a:r>
-              <a:rPr lang="en-US" sz="1800" dirty="0">
+              <a:rPr lang="en-US" sz="2400" dirty="0">
                 <a:latin typeface="Times New Roman" panose="02020603050405020304" pitchFamily="18" charset="0"/>
-                <a:ea typeface="AMDRTG"/>
                 <a:cs typeface="Times New Roman" panose="02020603050405020304" pitchFamily="18" charset="0"/>
               </a:rPr>
-              <a:t>Text</a:t>
+              <a:t>SISD –</a:t>
             </a:r>
-            <a:endParaRPr lang="ru-RU" sz="2400" dirty="0">
-              <a:latin typeface="Times New Roman" panose="02020603050405020304" pitchFamily="18" charset="0"/>
-              <a:cs typeface="Times New Roman" panose="02020603050405020304" pitchFamily="18" charset="0"/>
-            </a:endParaRPr>
+            <a:r>
+              <a:rPr lang="ru-RU" sz="2400" dirty="0">
+                <a:latin typeface="Times New Roman" panose="02020603050405020304" pitchFamily="18" charset="0"/>
+                <a:cs typeface="Times New Roman" panose="02020603050405020304" pitchFamily="18" charset="0"/>
+              </a:rPr>
+              <a:t> обработка единицы данных одной инструкцией</a:t>
+            </a:r>
+            <a:r>
+              <a:rPr lang="en-US" sz="2400" dirty="0">
+                <a:latin typeface="Times New Roman" panose="02020603050405020304" pitchFamily="18" charset="0"/>
+                <a:cs typeface="Times New Roman" panose="02020603050405020304" pitchFamily="18" charset="0"/>
+              </a:rPr>
+              <a:t>.</a:t>
+            </a:r>
+          </a:p>
+          <a:p>
+            <a:pPr>
+              <a:defRPr/>
+            </a:pPr>
+            <a:r>
+              <a:rPr lang="en-US" sz="2400" dirty="0">
+                <a:latin typeface="Times New Roman" panose="02020603050405020304" pitchFamily="18" charset="0"/>
+                <a:cs typeface="Times New Roman" panose="02020603050405020304" pitchFamily="18" charset="0"/>
+              </a:rPr>
+              <a:t>SIMD –</a:t>
+            </a:r>
+            <a:r>
+              <a:rPr lang="ru-RU" sz="2400" dirty="0">
+                <a:latin typeface="Times New Roman" panose="02020603050405020304" pitchFamily="18" charset="0"/>
+                <a:cs typeface="Times New Roman" panose="02020603050405020304" pitchFamily="18" charset="0"/>
+              </a:rPr>
+              <a:t> обработка массива данных одной инструкцией.</a:t>
+            </a:r>
           </a:p>
         </p:txBody>
       </p:sp>
@@ -17108,6 +23771,53 @@
           </p:txBody>
         </p:sp>
       </p:grpSp>
+      <p:pic>
+        <p:nvPicPr>
+          <p:cNvPr id="3074" name="Picture 2">
+            <a:extLst>
+              <a:ext uri="{FF2B5EF4-FFF2-40B4-BE49-F238E27FC236}">
+                <a16:creationId xmlns:a16="http://schemas.microsoft.com/office/drawing/2014/main" id="{FABCBAD7-196D-4B13-926E-D0D41B0149DD}"/>
+              </a:ext>
+            </a:extLst>
+          </p:cNvPr>
+          <p:cNvPicPr>
+            <a:picLocks noChangeAspect="1" noChangeArrowheads="1"/>
+          </p:cNvPicPr>
+          <p:nvPr/>
+        </p:nvPicPr>
+        <p:blipFill>
+          <a:blip r:embed="rId3">
+            <a:extLst>
+              <a:ext uri="{28A0092B-C50C-407E-A947-70E740481C1C}">
+                <a14:useLocalDpi xmlns:a14="http://schemas.microsoft.com/office/drawing/2010/main" val="0"/>
+              </a:ext>
+            </a:extLst>
+          </a:blip>
+          <a:srcRect/>
+          <a:stretch>
+            <a:fillRect/>
+          </a:stretch>
+        </p:blipFill>
+        <p:spPr bwMode="auto">
+          <a:xfrm>
+            <a:off x="5220072" y="1268323"/>
+            <a:ext cx="3601591" cy="1944661"/>
+          </a:xfrm>
+          <a:prstGeom prst="rect">
+            <a:avLst/>
+          </a:prstGeom>
+          <a:noFill/>
+          <a:extLst>
+            <a:ext uri="{909E8E84-426E-40DD-AFC4-6F175D3DCCD1}">
+              <a14:hiddenFill xmlns:a14="http://schemas.microsoft.com/office/drawing/2010/main">
+                <a:solidFill>
+                  <a:srgbClr val="FFFFFF"/>
+                </a:solidFill>
+              </a14:hiddenFill>
+            </a:ext>
+          </a:extLst>
+        </p:spPr>
+      </p:pic>
     </p:spTree>
   </p:cSld>
   <p:clrMapOvr>
@@ -17119,7 +23829,7 @@
         <p:push dir="u"/>
       </p:transition>
     </mc:Choice>
-    <mc:Fallback xmlns:w="http://schemas.openxmlformats.org/wordprocessingml/2006/main" xmlns:m="http://schemas.openxmlformats.org/officeDocument/2006/math" xmlns="">
+    <mc:Fallback xmlns="" xmlns:m="http://schemas.openxmlformats.org/officeDocument/2006/math" xmlns:w="http://schemas.openxmlformats.org/wordprocessingml/2006/main">
       <p:transition spd="med" advClick="1">
         <p:push dir="u"/>
       </p:transition>
@@ -17204,8 +23914,8 @@
         </p:nvSpPr>
         <p:spPr bwMode="auto">
           <a:xfrm>
-            <a:off x="188536" y="1779662"/>
-            <a:ext cx="6027017" cy="357790"/>
+            <a:off x="123718" y="1275606"/>
+            <a:ext cx="3469107" cy="2923364"/>
           </a:xfrm>
           <a:prstGeom prst="rect">
             <a:avLst/>
@@ -17222,12 +23932,104 @@
               <a:defRPr/>
             </a:pPr>
             <a:r>
-              <a:rPr lang="en-US" sz="1800" dirty="0">
+              <a:rPr lang="ru-RU" sz="2400" dirty="0">
                 <a:latin typeface="Times New Roman" panose="02020603050405020304" pitchFamily="18" charset="0"/>
                 <a:ea typeface="AMDRTG"/>
                 <a:cs typeface="Times New Roman" panose="02020603050405020304" pitchFamily="18" charset="0"/>
               </a:rPr>
-              <a:t>Text</a:t>
+              <a:t>Было разработано 6 алгоритмов</a:t>
+            </a:r>
+            <a:r>
+              <a:rPr lang="en-US" sz="2400" dirty="0">
+                <a:latin typeface="Times New Roman" panose="02020603050405020304" pitchFamily="18" charset="0"/>
+                <a:ea typeface="AMDRTG"/>
+                <a:cs typeface="Times New Roman" panose="02020603050405020304" pitchFamily="18" charset="0"/>
+              </a:rPr>
+              <a:t>:</a:t>
+            </a:r>
+          </a:p>
+          <a:p>
+            <a:pPr marL="285750" indent="-285750">
+              <a:buFont typeface="Arial" panose="020B0604020202020204" pitchFamily="34" charset="0"/>
+              <a:buChar char="•"/>
+              <a:defRPr/>
+            </a:pPr>
+            <a:r>
+              <a:rPr lang="ru-RU" sz="2400" dirty="0">
+                <a:latin typeface="Times New Roman" panose="02020603050405020304" pitchFamily="18" charset="0"/>
+                <a:cs typeface="Times New Roman" panose="02020603050405020304" pitchFamily="18" charset="0"/>
+              </a:rPr>
+              <a:t>Наивный</a:t>
+            </a:r>
+          </a:p>
+          <a:p>
+            <a:pPr marL="285750" indent="-285750">
+              <a:buFont typeface="Arial" panose="020B0604020202020204" pitchFamily="34" charset="0"/>
+              <a:buChar char="•"/>
+              <a:defRPr/>
+            </a:pPr>
+            <a:r>
+              <a:rPr lang="ru-RU" sz="2400" dirty="0">
+                <a:latin typeface="Times New Roman" panose="02020603050405020304" pitchFamily="18" charset="0"/>
+                <a:cs typeface="Times New Roman" panose="02020603050405020304" pitchFamily="18" charset="0"/>
+              </a:rPr>
+              <a:t>Скалярный</a:t>
+            </a:r>
+          </a:p>
+          <a:p>
+            <a:pPr marL="285750" indent="-285750">
+              <a:buFont typeface="Arial" panose="020B0604020202020204" pitchFamily="34" charset="0"/>
+              <a:buChar char="•"/>
+              <a:defRPr/>
+            </a:pPr>
+            <a:r>
+              <a:rPr lang="ru-RU" sz="2400" dirty="0">
+                <a:latin typeface="Times New Roman" panose="02020603050405020304" pitchFamily="18" charset="0"/>
+                <a:cs typeface="Times New Roman" panose="02020603050405020304" pitchFamily="18" charset="0"/>
+              </a:rPr>
+              <a:t>Скалярный опт.</a:t>
+            </a:r>
+          </a:p>
+          <a:p>
+            <a:pPr marL="285750" indent="-285750">
+              <a:buFont typeface="Arial" panose="020B0604020202020204" pitchFamily="34" charset="0"/>
+              <a:buChar char="•"/>
+              <a:defRPr/>
+            </a:pPr>
+            <a:r>
+              <a:rPr lang="en-US" sz="2400" dirty="0">
+                <a:latin typeface="Times New Roman" panose="02020603050405020304" pitchFamily="18" charset="0"/>
+                <a:cs typeface="Times New Roman" panose="02020603050405020304" pitchFamily="18" charset="0"/>
+              </a:rPr>
+              <a:t>SSE</a:t>
+            </a:r>
+          </a:p>
+          <a:p>
+            <a:pPr marL="285750" indent="-285750">
+              <a:buFont typeface="Arial" panose="020B0604020202020204" pitchFamily="34" charset="0"/>
+              <a:buChar char="•"/>
+              <a:defRPr/>
+            </a:pPr>
+            <a:r>
+              <a:rPr lang="en-US" sz="2400" dirty="0">
+                <a:latin typeface="Times New Roman" panose="02020603050405020304" pitchFamily="18" charset="0"/>
+                <a:cs typeface="Times New Roman" panose="02020603050405020304" pitchFamily="18" charset="0"/>
+              </a:rPr>
+              <a:t>SSE 2</a:t>
+            </a:r>
+          </a:p>
+          <a:p>
+            <a:pPr marL="285750" indent="-285750">
+              <a:buFont typeface="Arial" panose="020B0604020202020204" pitchFamily="34" charset="0"/>
+              <a:buChar char="•"/>
+              <a:defRPr/>
+            </a:pPr>
+            <a:r>
+              <a:rPr lang="en-US" sz="2400" dirty="0">
+                <a:latin typeface="Times New Roman" panose="02020603050405020304" pitchFamily="18" charset="0"/>
+                <a:cs typeface="Times New Roman" panose="02020603050405020304" pitchFamily="18" charset="0"/>
+              </a:rPr>
+              <a:t>AVX</a:t>
             </a:r>
             <a:endParaRPr lang="ru-RU" sz="2400" dirty="0">
               <a:latin typeface="Times New Roman" panose="02020603050405020304" pitchFamily="18" charset="0"/>
@@ -18173,6 +24975,34 @@
           </p:txBody>
         </p:sp>
       </p:grpSp>
+      <p:graphicFrame>
+        <p:nvGraphicFramePr>
+          <p:cNvPr id="15" name="Диаграмма 14">
+            <a:extLst>
+              <a:ext uri="{FF2B5EF4-FFF2-40B4-BE49-F238E27FC236}">
+                <a16:creationId xmlns:a16="http://schemas.microsoft.com/office/drawing/2014/main" id="{FCA60812-F9E5-4E55-97DE-D3D2C32D8A49}"/>
+              </a:ext>
+            </a:extLst>
+          </p:cNvPr>
+          <p:cNvGraphicFramePr/>
+          <p:nvPr>
+            <p:extLst>
+              <p:ext uri="{D42A27DB-BD31-4B8C-83A1-F6EECF244321}">
+                <p14:modId xmlns:p14="http://schemas.microsoft.com/office/powerpoint/2010/main" val="3048513946"/>
+              </p:ext>
+            </p:extLst>
+          </p:nvPr>
+        </p:nvGraphicFramePr>
+        <p:xfrm>
+          <a:off x="3478451" y="1275606"/>
+          <a:ext cx="5243830" cy="3600400"/>
+        </p:xfrm>
+        <a:graphic>
+          <a:graphicData uri="http://schemas.openxmlformats.org/drawingml/2006/chart">
+            <c:chart xmlns:c="http://schemas.openxmlformats.org/drawingml/2006/chart" xmlns:r="http://schemas.openxmlformats.org/officeDocument/2006/relationships" r:id="rId3"/>
+          </a:graphicData>
+        </a:graphic>
+      </p:graphicFrame>
     </p:spTree>
     <p:extLst>
       <p:ext uri="{BB962C8B-B14F-4D97-AF65-F5344CB8AC3E}">
@@ -18289,8 +25119,8 @@
         </p:nvSpPr>
         <p:spPr bwMode="auto">
           <a:xfrm>
-            <a:off x="188536" y="1779662"/>
-            <a:ext cx="6027017" cy="357790"/>
+            <a:off x="179513" y="1523390"/>
+            <a:ext cx="2880320" cy="3277820"/>
           </a:xfrm>
           <a:prstGeom prst="rect">
             <a:avLst/>
@@ -18307,12 +25137,189 @@
               <a:defRPr/>
             </a:pPr>
             <a:r>
+              <a:rPr lang="ru-RU" sz="1800" dirty="0">
+                <a:latin typeface="Times New Roman" panose="02020603050405020304" pitchFamily="18" charset="0"/>
+                <a:cs typeface="Times New Roman" panose="02020603050405020304" pitchFamily="18" charset="0"/>
+              </a:rPr>
+              <a:t>Было разработано 7 алгоритмов</a:t>
+            </a:r>
+            <a:r>
               <a:rPr lang="en-US" sz="1800" dirty="0">
                 <a:latin typeface="Times New Roman" panose="02020603050405020304" pitchFamily="18" charset="0"/>
-                <a:ea typeface="AMDRTG"/>
                 <a:cs typeface="Times New Roman" panose="02020603050405020304" pitchFamily="18" charset="0"/>
               </a:rPr>
-              <a:t>Text</a:t>
+              <a:t>:</a:t>
+            </a:r>
+          </a:p>
+          <a:p>
+            <a:pPr marL="285750" indent="-285750">
+              <a:buFont typeface="Arial" panose="020B0604020202020204" pitchFamily="34" charset="0"/>
+              <a:buChar char="•"/>
+              <a:defRPr/>
+            </a:pPr>
+            <a:r>
+              <a:rPr lang="ru-RU" sz="1800" dirty="0">
+                <a:latin typeface="Times New Roman" panose="02020603050405020304" pitchFamily="18" charset="0"/>
+                <a:cs typeface="Times New Roman" panose="02020603050405020304" pitchFamily="18" charset="0"/>
+              </a:rPr>
+              <a:t>Наивный</a:t>
+            </a:r>
+          </a:p>
+          <a:p>
+            <a:pPr marL="285750" indent="-285750">
+              <a:buFont typeface="Arial" panose="020B0604020202020204" pitchFamily="34" charset="0"/>
+              <a:buChar char="•"/>
+              <a:defRPr/>
+            </a:pPr>
+            <a:r>
+              <a:rPr lang="ru-RU" sz="1800" dirty="0">
+                <a:latin typeface="Times New Roman" panose="02020603050405020304" pitchFamily="18" charset="0"/>
+                <a:cs typeface="Times New Roman" panose="02020603050405020304" pitchFamily="18" charset="0"/>
+              </a:rPr>
+              <a:t>Оптимизированный</a:t>
+            </a:r>
+          </a:p>
+          <a:p>
+            <a:pPr marL="285750" indent="-285750">
+              <a:buFont typeface="Arial" panose="020B0604020202020204" pitchFamily="34" charset="0"/>
+              <a:buChar char="•"/>
+              <a:defRPr/>
+            </a:pPr>
+            <a:r>
+              <a:rPr lang="ru-RU" sz="1800" dirty="0">
+                <a:latin typeface="Times New Roman" panose="02020603050405020304" pitchFamily="18" charset="0"/>
+                <a:cs typeface="Times New Roman" panose="02020603050405020304" pitchFamily="18" charset="0"/>
+              </a:rPr>
+              <a:t>С исп.</a:t>
+            </a:r>
+            <a:r>
+              <a:rPr lang="en-US" sz="1800" dirty="0">
+                <a:latin typeface="Times New Roman" panose="02020603050405020304" pitchFamily="18" charset="0"/>
+                <a:cs typeface="Times New Roman" panose="02020603050405020304" pitchFamily="18" charset="0"/>
+              </a:rPr>
+              <a:t> </a:t>
+            </a:r>
+            <a:r>
+              <a:rPr lang="en-US" sz="1800" dirty="0" err="1">
+                <a:latin typeface="Times New Roman" panose="02020603050405020304" pitchFamily="18" charset="0"/>
+                <a:cs typeface="Times New Roman" panose="02020603050405020304" pitchFamily="18" charset="0"/>
+              </a:rPr>
+              <a:t>bitset</a:t>
+            </a:r>
+            <a:endParaRPr lang="en-US" sz="1800" dirty="0">
+              <a:latin typeface="Times New Roman" panose="02020603050405020304" pitchFamily="18" charset="0"/>
+              <a:cs typeface="Times New Roman" panose="02020603050405020304" pitchFamily="18" charset="0"/>
+            </a:endParaRPr>
+          </a:p>
+          <a:p>
+            <a:pPr marL="285750" indent="-285750">
+              <a:buFont typeface="Arial" panose="020B0604020202020204" pitchFamily="34" charset="0"/>
+              <a:buChar char="•"/>
+              <a:defRPr/>
+            </a:pPr>
+            <a:r>
+              <a:rPr lang="ru-RU" sz="1800" dirty="0">
+                <a:latin typeface="Times New Roman" panose="02020603050405020304" pitchFamily="18" charset="0"/>
+                <a:cs typeface="Times New Roman" panose="02020603050405020304" pitchFamily="18" charset="0"/>
+              </a:rPr>
+              <a:t>С исп. буфера</a:t>
+            </a:r>
+          </a:p>
+          <a:p>
+            <a:pPr marL="285750" indent="-285750">
+              <a:buFont typeface="Arial" panose="020B0604020202020204" pitchFamily="34" charset="0"/>
+              <a:buChar char="•"/>
+              <a:defRPr/>
+            </a:pPr>
+            <a:r>
+              <a:rPr lang="ru-RU" sz="1800" dirty="0">
+                <a:latin typeface="Times New Roman" panose="02020603050405020304" pitchFamily="18" charset="0"/>
+                <a:cs typeface="Times New Roman" panose="02020603050405020304" pitchFamily="18" charset="0"/>
+              </a:rPr>
+              <a:t>С исп. буфера и</a:t>
+            </a:r>
+            <a:r>
+              <a:rPr lang="en-US" sz="1800" dirty="0">
+                <a:latin typeface="Times New Roman" panose="02020603050405020304" pitchFamily="18" charset="0"/>
+                <a:cs typeface="Times New Roman" panose="02020603050405020304" pitchFamily="18" charset="0"/>
+              </a:rPr>
+              <a:t> </a:t>
+            </a:r>
+            <a:r>
+              <a:rPr lang="en-US" sz="1800" dirty="0" err="1">
+                <a:latin typeface="Times New Roman" panose="02020603050405020304" pitchFamily="18" charset="0"/>
+                <a:cs typeface="Times New Roman" panose="02020603050405020304" pitchFamily="18" charset="0"/>
+              </a:rPr>
+              <a:t>bitset</a:t>
+            </a:r>
+            <a:endParaRPr lang="ru-RU" sz="1800" dirty="0">
+              <a:latin typeface="Times New Roman" panose="02020603050405020304" pitchFamily="18" charset="0"/>
+              <a:cs typeface="Times New Roman" panose="02020603050405020304" pitchFamily="18" charset="0"/>
+            </a:endParaRPr>
+          </a:p>
+          <a:p>
+            <a:pPr marL="285750" indent="-285750">
+              <a:buFont typeface="Arial" panose="020B0604020202020204" pitchFamily="34" charset="0"/>
+              <a:buChar char="•"/>
+              <a:defRPr/>
+            </a:pPr>
+            <a:r>
+              <a:rPr lang="en-US" sz="1800" dirty="0">
+                <a:latin typeface="Times New Roman" panose="02020603050405020304" pitchFamily="18" charset="0"/>
+                <a:cs typeface="Times New Roman" panose="02020603050405020304" pitchFamily="18" charset="0"/>
+              </a:rPr>
+              <a:t>SSE</a:t>
+            </a:r>
+          </a:p>
+          <a:p>
+            <a:pPr marL="285750" indent="-285750">
+              <a:buFont typeface="Arial" panose="020B0604020202020204" pitchFamily="34" charset="0"/>
+              <a:buChar char="•"/>
+              <a:defRPr/>
+            </a:pPr>
+            <a:r>
+              <a:rPr lang="en-US" sz="1800" dirty="0">
+                <a:latin typeface="Times New Roman" panose="02020603050405020304" pitchFamily="18" charset="0"/>
+                <a:cs typeface="Times New Roman" panose="02020603050405020304" pitchFamily="18" charset="0"/>
+              </a:rPr>
+              <a:t>AVX</a:t>
+            </a:r>
+            <a:endParaRPr lang="ru-RU" sz="1800" dirty="0">
+              <a:latin typeface="Times New Roman" panose="02020603050405020304" pitchFamily="18" charset="0"/>
+              <a:cs typeface="Times New Roman" panose="02020603050405020304" pitchFamily="18" charset="0"/>
+            </a:endParaRPr>
+          </a:p>
+          <a:p>
+            <a:pPr>
+              <a:defRPr/>
+            </a:pPr>
+            <a:r>
+              <a:rPr lang="en-US" sz="1800" dirty="0">
+                <a:latin typeface="Times New Roman" panose="02020603050405020304" pitchFamily="18" charset="0"/>
+                <a:cs typeface="Times New Roman" panose="02020603050405020304" pitchFamily="18" charset="0"/>
+              </a:rPr>
+              <a:t>SSE</a:t>
+            </a:r>
+            <a:r>
+              <a:rPr lang="ru-RU" sz="1800" dirty="0">
+                <a:latin typeface="Times New Roman" panose="02020603050405020304" pitchFamily="18" charset="0"/>
+                <a:cs typeface="Times New Roman" panose="02020603050405020304" pitchFamily="18" charset="0"/>
+              </a:rPr>
+              <a:t> и </a:t>
+            </a:r>
+            <a:r>
+              <a:rPr lang="en-US" sz="1800" dirty="0">
+                <a:latin typeface="Times New Roman" panose="02020603050405020304" pitchFamily="18" charset="0"/>
+                <a:cs typeface="Times New Roman" panose="02020603050405020304" pitchFamily="18" charset="0"/>
+              </a:rPr>
+              <a:t>AVX</a:t>
+            </a:r>
+            <a:r>
+              <a:rPr lang="ru-RU" sz="1800" dirty="0">
+                <a:latin typeface="Times New Roman" panose="02020603050405020304" pitchFamily="18" charset="0"/>
+                <a:cs typeface="Times New Roman" panose="02020603050405020304" pitchFamily="18" charset="0"/>
+              </a:rPr>
+              <a:t> не вошли из-за низкой скорости в бенчмарке</a:t>
             </a:r>
             <a:endParaRPr lang="ru-RU" sz="2400" dirty="0">
               <a:latin typeface="Times New Roman" panose="02020603050405020304" pitchFamily="18" charset="0"/>
@@ -19250,6 +26257,34 @@
           </p:txBody>
         </p:sp>
       </p:grpSp>
+      <p:graphicFrame>
+        <p:nvGraphicFramePr>
+          <p:cNvPr id="15" name="Диаграмма 14">
+            <a:extLst>
+              <a:ext uri="{FF2B5EF4-FFF2-40B4-BE49-F238E27FC236}">
+                <a16:creationId xmlns:a16="http://schemas.microsoft.com/office/drawing/2014/main" id="{973217CF-09C5-4C63-B754-BD3DE0D8C139}"/>
+              </a:ext>
+            </a:extLst>
+          </p:cNvPr>
+          <p:cNvGraphicFramePr/>
+          <p:nvPr>
+            <p:extLst>
+              <p:ext uri="{D42A27DB-BD31-4B8C-83A1-F6EECF244321}">
+                <p14:modId xmlns:p14="http://schemas.microsoft.com/office/powerpoint/2010/main" val="1743847346"/>
+              </p:ext>
+            </p:extLst>
+          </p:nvPr>
+        </p:nvGraphicFramePr>
+        <p:xfrm>
+          <a:off x="2987824" y="1343302"/>
+          <a:ext cx="5924550" cy="3532704"/>
+        </p:xfrm>
+        <a:graphic>
+          <a:graphicData uri="http://schemas.openxmlformats.org/drawingml/2006/chart">
+            <c:chart xmlns:c="http://schemas.openxmlformats.org/drawingml/2006/chart" xmlns:r="http://schemas.openxmlformats.org/officeDocument/2006/relationships" r:id="rId3"/>
+          </a:graphicData>
+        </a:graphic>
+      </p:graphicFrame>
     </p:spTree>
     <p:extLst>
       <p:ext uri="{BB962C8B-B14F-4D97-AF65-F5344CB8AC3E}">

--- a/ВКР/ВКР.pptx
+++ b/ВКР/ВКР.pptx
@@ -273,7 +273,7 @@
 
 <file path=ppt/commentAuthors.xml><?xml version="1.0" encoding="utf-8"?>
 <p:cmAuthorLst xmlns:a="http://schemas.openxmlformats.org/drawingml/2006/main" xmlns:r="http://schemas.openxmlformats.org/officeDocument/2006/relationships" xmlns:p="http://schemas.openxmlformats.org/presentationml/2006/main">
-  <p:cmAuthor id="1" name="Baka" initials="B" lastIdx="1" clrIdx="0">
+  <p:cmAuthor id="1" name="Baka" initials="B" lastIdx="3" clrIdx="0">
     <p:extLst>
       <p:ext uri="{19B8F6BF-5375-455C-9EA6-DF929625EA0E}">
         <p15:presenceInfo xmlns:p15="http://schemas.microsoft.com/office/powerpoint/2012/main" userId="Baka" providerId="None"/>
@@ -7072,6 +7072,96 @@
               <a:buNone/>
               <a:defRPr/>
             </a:pPr>
+            <a:r>
+              <a:rPr lang="ru-RU" dirty="0">
+                <a:latin typeface="Abadi" panose="020B0604020104020204" pitchFamily="34" charset="0"/>
+              </a:rPr>
+              <a:t>Собрав назад декомпозированные задачи в алгоритмы, я получил 4 общих реализации. Если принять базовую реализацию за 100</a:t>
+            </a:r>
+            <a:r>
+              <a:rPr lang="en-US" dirty="0">
+                <a:latin typeface="Abadi" panose="020B0604020104020204" pitchFamily="34" charset="0"/>
+              </a:rPr>
+              <a:t>%</a:t>
+            </a:r>
+            <a:r>
+              <a:rPr lang="ru-RU" dirty="0">
+                <a:latin typeface="Abadi" panose="020B0604020104020204" pitchFamily="34" charset="0"/>
+              </a:rPr>
+              <a:t>, то использование </a:t>
+            </a:r>
+            <a:r>
+              <a:rPr lang="en-US" dirty="0">
+                <a:latin typeface="Abadi" panose="020B0604020104020204" pitchFamily="34" charset="0"/>
+              </a:rPr>
+              <a:t>AVX</a:t>
+            </a:r>
+            <a:r>
+              <a:rPr lang="ru-RU" dirty="0">
+                <a:latin typeface="Abadi" panose="020B0604020104020204" pitchFamily="34" charset="0"/>
+              </a:rPr>
+              <a:t> для поиска сумм, а </a:t>
+            </a:r>
+            <a:r>
+              <a:rPr lang="en-US" dirty="0" err="1">
+                <a:latin typeface="Abadi" panose="020B0604020104020204" pitchFamily="34" charset="0"/>
+              </a:rPr>
+              <a:t>bitset</a:t>
+            </a:r>
+            <a:r>
+              <a:rPr lang="ru-RU" dirty="0">
+                <a:latin typeface="Abadi" panose="020B0604020104020204" pitchFamily="34" charset="0"/>
+              </a:rPr>
+              <a:t> для применения правил, то получится что они займут всего 18,4</a:t>
+            </a:r>
+            <a:r>
+              <a:rPr lang="en-US" dirty="0">
+                <a:latin typeface="Abadi" panose="020B0604020104020204" pitchFamily="34" charset="0"/>
+              </a:rPr>
+              <a:t>%</a:t>
+            </a:r>
+            <a:r>
+              <a:rPr lang="ru-RU" dirty="0">
+                <a:latin typeface="Abadi" panose="020B0604020104020204" pitchFamily="34" charset="0"/>
+              </a:rPr>
+              <a:t> времени выполнения. Использование </a:t>
+            </a:r>
+            <a:r>
+              <a:rPr lang="en-US" dirty="0">
+                <a:latin typeface="Abadi" panose="020B0604020104020204" pitchFamily="34" charset="0"/>
+              </a:rPr>
+              <a:t>AVX</a:t>
+            </a:r>
+            <a:r>
+              <a:rPr lang="ru-RU" dirty="0">
+                <a:latin typeface="Abadi" panose="020B0604020104020204" pitchFamily="34" charset="0"/>
+              </a:rPr>
+              <a:t> и для суммирования и для применения правил ещё сильнее повышает производительность – он занимает всего 1,2</a:t>
+            </a:r>
+            <a:r>
+              <a:rPr lang="en-US" dirty="0">
+                <a:latin typeface="Abadi" panose="020B0604020104020204" pitchFamily="34" charset="0"/>
+              </a:rPr>
+              <a:t>%</a:t>
+            </a:r>
+            <a:r>
+              <a:rPr lang="ru-RU" dirty="0">
+                <a:latin typeface="Abadi" panose="020B0604020104020204" pitchFamily="34" charset="0"/>
+              </a:rPr>
+              <a:t> времени.  Использование только самых оптимизированных скалярных алгоритмов занимает 20</a:t>
+            </a:r>
+            <a:r>
+              <a:rPr lang="en-US" dirty="0">
+                <a:latin typeface="Abadi" panose="020B0604020104020204" pitchFamily="34" charset="0"/>
+              </a:rPr>
+              <a:t>%</a:t>
+            </a:r>
+            <a:r>
+              <a:rPr lang="ru-RU" dirty="0">
+                <a:latin typeface="Abadi" panose="020B0604020104020204" pitchFamily="34" charset="0"/>
+              </a:rPr>
+              <a:t>, что тоже неплохо, так как повышает производительность в 5 раз</a:t>
+            </a:r>
             <a:endParaRPr dirty="0">
               <a:latin typeface="Abadi" panose="020B0604020104020204" pitchFamily="34" charset="0"/>
             </a:endParaRPr>
@@ -7184,6 +7274,72 @@
               <a:buNone/>
               <a:defRPr/>
             </a:pPr>
+            <a:r>
+              <a:rPr lang="ru-RU" dirty="0">
+                <a:latin typeface="Abadi" panose="020B0604020104020204" pitchFamily="34" charset="0"/>
+              </a:rPr>
+              <a:t>Клеточные автоматы – мощный инструмент для моделирования различных процессов в различных областях науки</a:t>
+            </a:r>
+            <a:r>
+              <a:rPr lang="en-US" dirty="0">
+                <a:latin typeface="Abadi" panose="020B0604020104020204" pitchFamily="34" charset="0"/>
+              </a:rPr>
+              <a:t>:</a:t>
+            </a:r>
+            <a:r>
+              <a:rPr lang="ru-RU" dirty="0">
+                <a:latin typeface="Abadi" panose="020B0604020104020204" pitchFamily="34" charset="0"/>
+              </a:rPr>
+              <a:t> от физики и химии, до социологии</a:t>
+            </a:r>
+          </a:p>
+          <a:p>
+            <a:pPr marL="0" lvl="0" indent="0" algn="l">
+              <a:spcBef>
+                <a:spcPts val="0"/>
+              </a:spcBef>
+              <a:spcAft>
+                <a:spcPts val="0"/>
+              </a:spcAft>
+              <a:buNone/>
+              <a:defRPr/>
+            </a:pPr>
+            <a:r>
+              <a:rPr lang="ru-RU" dirty="0">
+                <a:latin typeface="Abadi" panose="020B0604020104020204" pitchFamily="34" charset="0"/>
+              </a:rPr>
+              <a:t>Но нет простых и мощных программных продуктов, которые бы позволили легко встроить клеточный автомат в свою программу для использовании в научных вычислениях, или в игры (например, для процедурной генерации, фоновых тем, головоломок и т.п.).</a:t>
+            </a:r>
+          </a:p>
+          <a:p>
+            <a:pPr marL="0" lvl="0" indent="0" algn="l">
+              <a:spcBef>
+                <a:spcPts val="0"/>
+              </a:spcBef>
+              <a:spcAft>
+                <a:spcPts val="0"/>
+              </a:spcAft>
+              <a:buNone/>
+              <a:defRPr/>
+            </a:pPr>
+            <a:r>
+              <a:rPr lang="ru-RU" dirty="0">
+                <a:latin typeface="Abadi" panose="020B0604020104020204" pitchFamily="34" charset="0"/>
+              </a:rPr>
+              <a:t>На рисунке изображена </a:t>
+            </a:r>
+            <a:r>
+              <a:rPr lang="ru-RU" dirty="0" err="1">
+                <a:latin typeface="Abadi" panose="020B0604020104020204" pitchFamily="34" charset="0"/>
+              </a:rPr>
+              <a:t>гифка</a:t>
+            </a:r>
+            <a:r>
+              <a:rPr lang="ru-RU" dirty="0">
+                <a:latin typeface="Abadi" panose="020B0604020104020204" pitchFamily="34" charset="0"/>
+              </a:rPr>
+              <a:t> с хоть и довольно простым, но моделированием лесных пожаров</a:t>
+            </a:r>
             <a:endParaRPr dirty="0">
               <a:latin typeface="Abadi" panose="020B0604020104020204" pitchFamily="34" charset="0"/>
             </a:endParaRPr>
@@ -7291,6 +7447,123 @@
               <a:buNone/>
               <a:defRPr/>
             </a:pPr>
+            <a:r>
+              <a:rPr lang="ru-RU" dirty="0">
+                <a:latin typeface="Abadi" panose="020B0604020104020204" pitchFamily="34" charset="0"/>
+              </a:rPr>
+              <a:t>Целью ВКР является разработка высокопроизводительной библиотеки для моделирования клеточных автоматов</a:t>
+            </a:r>
+          </a:p>
+          <a:p>
+            <a:pPr marL="0" lvl="0" indent="0" algn="l">
+              <a:spcBef>
+                <a:spcPts val="0"/>
+              </a:spcBef>
+              <a:spcAft>
+                <a:spcPts val="0"/>
+              </a:spcAft>
+              <a:buNone/>
+              <a:defRPr/>
+            </a:pPr>
+            <a:r>
+              <a:rPr lang="ru-RU" dirty="0">
+                <a:latin typeface="Abadi" panose="020B0604020104020204" pitchFamily="34" charset="0"/>
+              </a:rPr>
+              <a:t>Для этого были поставлены следующие задачи:</a:t>
+            </a:r>
+          </a:p>
+          <a:p>
+            <a:pPr marL="228600" lvl="0" indent="-228600" algn="l">
+              <a:spcBef>
+                <a:spcPts val="0"/>
+              </a:spcBef>
+              <a:spcAft>
+                <a:spcPts val="0"/>
+              </a:spcAft>
+              <a:buAutoNum type="arabicParenR"/>
+              <a:defRPr/>
+            </a:pPr>
+            <a:r>
+              <a:rPr lang="ru-RU" dirty="0">
+                <a:latin typeface="Abadi" panose="020B0604020104020204" pitchFamily="34" charset="0"/>
+              </a:rPr>
+              <a:t>Узнать, какие особенности современных процессоров позволяют добиться максимальной производительности (правильное расположение данных, использование предсказателя ветвлений, </a:t>
+            </a:r>
+            <a:r>
+              <a:rPr lang="ru-RU" dirty="0" err="1">
+                <a:latin typeface="Abadi" panose="020B0604020104020204" pitchFamily="34" charset="0"/>
+              </a:rPr>
+              <a:t>предвыборщика</a:t>
+            </a:r>
+            <a:r>
+              <a:rPr lang="ru-RU" dirty="0">
+                <a:latin typeface="Abadi" panose="020B0604020104020204" pitchFamily="34" charset="0"/>
+              </a:rPr>
+              <a:t> данных, правильная упаковка данных, SIMD, SISD и так далее)</a:t>
+            </a:r>
+          </a:p>
+          <a:p>
+            <a:pPr marL="0" lvl="0" indent="0" algn="l">
+              <a:spcBef>
+                <a:spcPts val="0"/>
+              </a:spcBef>
+              <a:spcAft>
+                <a:spcPts val="0"/>
+              </a:spcAft>
+              <a:buNone/>
+              <a:defRPr/>
+            </a:pPr>
+            <a:r>
+              <a:rPr lang="ru-RU" dirty="0">
+                <a:latin typeface="Abadi" panose="020B0604020104020204" pitchFamily="34" charset="0"/>
+              </a:rPr>
+              <a:t>2) Спроектировать архитектуру для удобства использования другими языками через ABI с соглашением вызовов </a:t>
+            </a:r>
+            <a:r>
+              <a:rPr lang="ru-RU" dirty="0" err="1">
+                <a:latin typeface="Abadi" panose="020B0604020104020204" pitchFamily="34" charset="0"/>
+              </a:rPr>
+              <a:t>cdecl</a:t>
+            </a:r>
+            <a:endParaRPr lang="ru-RU" dirty="0">
+              <a:latin typeface="Abadi" panose="020B0604020104020204" pitchFamily="34" charset="0"/>
+            </a:endParaRPr>
+          </a:p>
+          <a:p>
+            <a:pPr marL="0" lvl="0" indent="0" algn="l">
+              <a:spcBef>
+                <a:spcPts val="0"/>
+              </a:spcBef>
+              <a:spcAft>
+                <a:spcPts val="0"/>
+              </a:spcAft>
+              <a:buNone/>
+              <a:defRPr/>
+            </a:pPr>
+            <a:r>
+              <a:rPr lang="ru-RU" dirty="0">
+                <a:latin typeface="Abadi" panose="020B0604020104020204" pitchFamily="34" charset="0"/>
+              </a:rPr>
+              <a:t>3) на основе полученных данных с пункта 1 реализовать различные алгоритмы, сравнить их производительность и взять самое лучшее из них</a:t>
+            </a:r>
+          </a:p>
+          <a:p>
+            <a:pPr marL="0" lvl="0" indent="0" algn="l">
+              <a:spcBef>
+                <a:spcPts val="0"/>
+              </a:spcBef>
+              <a:spcAft>
+                <a:spcPts val="0"/>
+              </a:spcAft>
+              <a:buNone/>
+              <a:defRPr/>
+            </a:pPr>
+            <a:r>
+              <a:rPr lang="ru-RU" dirty="0">
+                <a:latin typeface="Abadi" panose="020B0604020104020204" pitchFamily="34" charset="0"/>
+              </a:rPr>
+              <a:t>4) на основе предыдущих пунктов реализовать конечную библиотеку</a:t>
+            </a:r>
             <a:endParaRPr dirty="0">
               <a:latin typeface="Abadi" panose="020B0604020104020204" pitchFamily="34" charset="0"/>
             </a:endParaRPr>
@@ -7403,6 +7676,108 @@
               <a:buNone/>
               <a:defRPr/>
             </a:pPr>
+            <a:r>
+              <a:rPr lang="ru-RU" dirty="0">
+                <a:latin typeface="Abadi" panose="020B0604020104020204" pitchFamily="34" charset="0"/>
+              </a:rPr>
+              <a:t>В качестве языка программирования был выбран </a:t>
+            </a:r>
+            <a:r>
+              <a:rPr lang="en-US" dirty="0">
+                <a:latin typeface="Abadi" panose="020B0604020104020204" pitchFamily="34" charset="0"/>
+              </a:rPr>
+              <a:t>C++23</a:t>
+            </a:r>
+            <a:r>
+              <a:rPr lang="ru-RU" dirty="0">
+                <a:latin typeface="Abadi" panose="020B0604020104020204" pitchFamily="34" charset="0"/>
+              </a:rPr>
+              <a:t>., который позволяет писать быстрый код</a:t>
+            </a:r>
+          </a:p>
+          <a:p>
+            <a:pPr marL="0" lvl="0" indent="0" algn="l">
+              <a:spcBef>
+                <a:spcPts val="0"/>
+              </a:spcBef>
+              <a:spcAft>
+                <a:spcPts val="0"/>
+              </a:spcAft>
+              <a:buNone/>
+              <a:defRPr/>
+            </a:pPr>
+            <a:r>
+              <a:rPr lang="ru-RU" dirty="0">
+                <a:latin typeface="Abadi" panose="020B0604020104020204" pitchFamily="34" charset="0"/>
+              </a:rPr>
+              <a:t>Выбранной </a:t>
+            </a:r>
+            <a:r>
+              <a:rPr lang="en-US" dirty="0">
+                <a:latin typeface="Abadi" panose="020B0604020104020204" pitchFamily="34" charset="0"/>
+              </a:rPr>
+              <a:t>IDE</a:t>
+            </a:r>
+            <a:r>
+              <a:rPr lang="ru-RU" dirty="0">
+                <a:latin typeface="Abadi" panose="020B0604020104020204" pitchFamily="34" charset="0"/>
+              </a:rPr>
+              <a:t> стала </a:t>
+            </a:r>
+            <a:r>
+              <a:rPr lang="en-US" dirty="0">
+                <a:latin typeface="Abadi" panose="020B0604020104020204" pitchFamily="34" charset="0"/>
+              </a:rPr>
+              <a:t>VS2026</a:t>
+            </a:r>
+            <a:r>
+              <a:rPr lang="ru-RU" dirty="0">
+                <a:latin typeface="Abadi" panose="020B0604020104020204" pitchFamily="34" charset="0"/>
+              </a:rPr>
+              <a:t> с только-только вышедшей полноценной поддержкой 23-его стандарта</a:t>
+            </a:r>
+          </a:p>
+          <a:p>
+            <a:pPr marL="0" lvl="0" indent="0" algn="l">
+              <a:spcBef>
+                <a:spcPts val="0"/>
+              </a:spcBef>
+              <a:spcAft>
+                <a:spcPts val="0"/>
+              </a:spcAft>
+              <a:buNone/>
+              <a:defRPr/>
+            </a:pPr>
+            <a:r>
+              <a:rPr lang="ru-RU" dirty="0">
+                <a:latin typeface="Abadi" panose="020B0604020104020204" pitchFamily="34" charset="0"/>
+              </a:rPr>
+              <a:t>Деплой был на </a:t>
+            </a:r>
+            <a:r>
+              <a:rPr lang="en-US" dirty="0">
+                <a:latin typeface="Abadi" panose="020B0604020104020204" pitchFamily="34" charset="0"/>
+              </a:rPr>
+              <a:t>Windows 11</a:t>
+            </a:r>
+            <a:r>
+              <a:rPr lang="ru-RU" dirty="0">
+                <a:latin typeface="Abadi" panose="020B0604020104020204" pitchFamily="34" charset="0"/>
+              </a:rPr>
+              <a:t>, но нет никаких ограничений на использование и в более старых версиях </a:t>
+            </a:r>
+            <a:r>
+              <a:rPr lang="en-US" dirty="0">
+                <a:latin typeface="Abadi" panose="020B0604020104020204" pitchFamily="34" charset="0"/>
+              </a:rPr>
+              <a:t>Windows</a:t>
+            </a:r>
+            <a:r>
+              <a:rPr lang="ru-RU" dirty="0">
+                <a:latin typeface="Abadi" panose="020B0604020104020204" pitchFamily="34" charset="0"/>
+              </a:rPr>
+              <a:t>, главное, чтобы они были 64-ёх битными</a:t>
+            </a:r>
             <a:endParaRPr dirty="0">
               <a:latin typeface="Abadi" panose="020B0604020104020204" pitchFamily="34" charset="0"/>
             </a:endParaRPr>
@@ -7510,9 +7885,138 @@
               <a:buNone/>
               <a:defRPr/>
             </a:pPr>
-            <a:endParaRPr dirty="0">
-              <a:latin typeface="Abadi" panose="020B0604020104020204" pitchFamily="34" charset="0"/>
-            </a:endParaRPr>
+            <a:r>
+              <a:rPr lang="ru-RU" dirty="0">
+                <a:latin typeface="Abadi" panose="020B0604020104020204" pitchFamily="34" charset="0"/>
+              </a:rPr>
+              <a:t>Главной особенностью библиотеки стал автоматический выбор бэкенда, то есть реализации ядра (алгоритмов). Если публичный интерфейс отвечает только за набор предоставляемых во вне функций,</a:t>
+            </a:r>
+          </a:p>
+          <a:p>
+            <a:pPr marL="0" lvl="0" indent="0" algn="l">
+              <a:spcBef>
+                <a:spcPts val="0"/>
+              </a:spcBef>
+              <a:spcAft>
+                <a:spcPts val="0"/>
+              </a:spcAft>
+              <a:buNone/>
+              <a:defRPr/>
+            </a:pPr>
+            <a:r>
+              <a:rPr lang="ru-RU" dirty="0">
+                <a:latin typeface="Abadi" panose="020B0604020104020204" pitchFamily="34" charset="0"/>
+              </a:rPr>
+              <a:t>то уровень диспетчеризации отвечает за выбор правильного </a:t>
+            </a:r>
+            <a:r>
+              <a:rPr lang="ru-RU" dirty="0" err="1">
+                <a:latin typeface="Abadi" panose="020B0604020104020204" pitchFamily="34" charset="0"/>
+              </a:rPr>
+              <a:t>бекэнда</a:t>
+            </a:r>
+            <a:r>
+              <a:rPr lang="ru-RU" dirty="0">
+                <a:latin typeface="Abadi" panose="020B0604020104020204" pitchFamily="34" charset="0"/>
+              </a:rPr>
+              <a:t>.</a:t>
+            </a:r>
+          </a:p>
+          <a:p>
+            <a:pPr marL="0" lvl="0" indent="0" algn="l">
+              <a:spcBef>
+                <a:spcPts val="0"/>
+              </a:spcBef>
+              <a:spcAft>
+                <a:spcPts val="0"/>
+              </a:spcAft>
+              <a:buNone/>
+              <a:defRPr/>
+            </a:pPr>
+            <a:r>
+              <a:rPr lang="ru-RU" dirty="0">
+                <a:latin typeface="Abadi" panose="020B0604020104020204" pitchFamily="34" charset="0"/>
+              </a:rPr>
+              <a:t>Бэкенд отвечает за саму реализацию алгоритмов</a:t>
+            </a:r>
+            <a:r>
+              <a:rPr lang="en-US" dirty="0">
+                <a:latin typeface="Abadi" panose="020B0604020104020204" pitchFamily="34" charset="0"/>
+              </a:rPr>
+              <a:t>:</a:t>
+            </a:r>
+            <a:r>
+              <a:rPr lang="ru-RU" dirty="0">
+                <a:latin typeface="Abadi" panose="020B0604020104020204" pitchFamily="34" charset="0"/>
+              </a:rPr>
+              <a:t> есть поддержка </a:t>
+            </a:r>
+            <a:r>
+              <a:rPr lang="en-US" dirty="0">
+                <a:latin typeface="Abadi" panose="020B0604020104020204" pitchFamily="34" charset="0"/>
+              </a:rPr>
+              <a:t>AVX</a:t>
+            </a:r>
+            <a:r>
+              <a:rPr lang="ru-RU" dirty="0">
+                <a:latin typeface="Abadi" panose="020B0604020104020204" pitchFamily="34" charset="0"/>
+              </a:rPr>
+              <a:t> – значит используем его. Нет </a:t>
+            </a:r>
+            <a:r>
+              <a:rPr lang="en-US" dirty="0">
+                <a:latin typeface="Abadi" panose="020B0604020104020204" pitchFamily="34" charset="0"/>
+              </a:rPr>
+              <a:t>AVX</a:t>
+            </a:r>
+            <a:r>
+              <a:rPr lang="ru-RU" dirty="0">
+                <a:latin typeface="Abadi" panose="020B0604020104020204" pitchFamily="34" charset="0"/>
+              </a:rPr>
+              <a:t>, но есть </a:t>
+            </a:r>
+            <a:r>
+              <a:rPr lang="en-US" dirty="0">
+                <a:latin typeface="Abadi" panose="020B0604020104020204" pitchFamily="34" charset="0"/>
+              </a:rPr>
+              <a:t>SSE? – </a:t>
+            </a:r>
+            <a:r>
+              <a:rPr lang="ru-RU" dirty="0">
+                <a:latin typeface="Abadi" panose="020B0604020104020204" pitchFamily="34" charset="0"/>
+              </a:rPr>
+              <a:t>значит </a:t>
+            </a:r>
+            <a:r>
+              <a:rPr lang="en-US" dirty="0">
+                <a:latin typeface="Abadi" panose="020B0604020104020204" pitchFamily="34" charset="0"/>
+              </a:rPr>
+              <a:t>SSE</a:t>
+            </a:r>
+            <a:r>
+              <a:rPr lang="ru-RU" dirty="0">
+                <a:latin typeface="Abadi" panose="020B0604020104020204" pitchFamily="34" charset="0"/>
+              </a:rPr>
+              <a:t>. Если нет и этого, то используем скалярную реализацию,</a:t>
+            </a:r>
+          </a:p>
+          <a:p>
+            <a:pPr marL="0" lvl="0" indent="0" algn="l">
+              <a:spcBef>
+                <a:spcPts val="0"/>
+              </a:spcBef>
+              <a:spcAft>
+                <a:spcPts val="0"/>
+              </a:spcAft>
+              <a:buNone/>
+              <a:defRPr/>
+            </a:pPr>
+            <a:r>
+              <a:rPr lang="ru-RU" dirty="0">
+                <a:latin typeface="Abadi" panose="020B0604020104020204" pitchFamily="34" charset="0"/>
+              </a:rPr>
+              <a:t>которая запустится на любом процессоре</a:t>
+            </a:r>
           </a:p>
         </p:txBody>
       </p:sp>
@@ -7622,6 +8126,102 @@
               <a:buNone/>
               <a:defRPr/>
             </a:pPr>
+            <a:r>
+              <a:rPr lang="ru-RU" dirty="0">
+                <a:latin typeface="Abadi" panose="020B0604020104020204" pitchFamily="34" charset="0"/>
+              </a:rPr>
+              <a:t>Итерация клеточного автомата легко поддаётся декомпозиции. Первым делом ищем сумму соседей по нужной окрестности (Мура</a:t>
+            </a:r>
+            <a:r>
+              <a:rPr lang="en-US" dirty="0">
+                <a:latin typeface="Abadi" panose="020B0604020104020204" pitchFamily="34" charset="0"/>
+              </a:rPr>
+              <a:t> [</a:t>
+            </a:r>
+            <a:r>
+              <a:rPr lang="ru-RU" dirty="0">
+                <a:latin typeface="Abadi" panose="020B0604020104020204" pitchFamily="34" charset="0"/>
+              </a:rPr>
+              <a:t>взгляните на рисунок 1</a:t>
+            </a:r>
+            <a:r>
+              <a:rPr lang="en-US" dirty="0">
+                <a:latin typeface="Abadi" panose="020B0604020104020204" pitchFamily="34" charset="0"/>
+              </a:rPr>
+              <a:t>]</a:t>
+            </a:r>
+            <a:r>
+              <a:rPr lang="ru-RU" dirty="0">
+                <a:latin typeface="Abadi" panose="020B0604020104020204" pitchFamily="34" charset="0"/>
+              </a:rPr>
+              <a:t> или фон Неймана</a:t>
+            </a:r>
+            <a:r>
+              <a:rPr lang="en-US" dirty="0">
+                <a:latin typeface="Abadi" panose="020B0604020104020204" pitchFamily="34" charset="0"/>
+              </a:rPr>
+              <a:t> [</a:t>
+            </a:r>
+            <a:r>
+              <a:rPr lang="ru-RU" dirty="0">
+                <a:latin typeface="Abadi" panose="020B0604020104020204" pitchFamily="34" charset="0"/>
+              </a:rPr>
+              <a:t>представлено на рисунке 2</a:t>
+            </a:r>
+            <a:r>
+              <a:rPr lang="en-US" dirty="0">
+                <a:latin typeface="Abadi" panose="020B0604020104020204" pitchFamily="34" charset="0"/>
+              </a:rPr>
+              <a:t>]</a:t>
+            </a:r>
+            <a:r>
+              <a:rPr lang="ru-RU" dirty="0">
+                <a:latin typeface="Abadi" panose="020B0604020104020204" pitchFamily="34" charset="0"/>
+              </a:rPr>
+              <a:t>), а затем в зависимости от этой суммы и состояния этой клетки применяются правила </a:t>
+            </a:r>
+            <a:r>
+              <a:rPr lang="en-US" dirty="0">
+                <a:latin typeface="Abadi" panose="020B0604020104020204" pitchFamily="34" charset="0"/>
+              </a:rPr>
+              <a:t>B</a:t>
+            </a:r>
+            <a:r>
+              <a:rPr lang="ru-RU" dirty="0">
+                <a:latin typeface="Abadi" panose="020B0604020104020204" pitchFamily="34" charset="0"/>
+              </a:rPr>
+              <a:t> и </a:t>
+            </a:r>
+            <a:r>
+              <a:rPr lang="en-US" dirty="0">
+                <a:latin typeface="Abadi" panose="020B0604020104020204" pitchFamily="34" charset="0"/>
+              </a:rPr>
+              <a:t>S</a:t>
+            </a:r>
+            <a:r>
+              <a:rPr lang="ru-RU" dirty="0">
+                <a:latin typeface="Abadi" panose="020B0604020104020204" pitchFamily="34" charset="0"/>
+              </a:rPr>
+              <a:t>, для определения состояния клетки на следующий ход.</a:t>
+            </a:r>
+          </a:p>
+          <a:p>
+            <a:pPr marL="0" lvl="0" indent="0" algn="l">
+              <a:spcBef>
+                <a:spcPts val="0"/>
+              </a:spcBef>
+              <a:spcAft>
+                <a:spcPts val="0"/>
+              </a:spcAft>
+              <a:buNone/>
+              <a:defRPr/>
+            </a:pPr>
+            <a:r>
+              <a:rPr lang="ru-RU" dirty="0">
+                <a:latin typeface="Abadi" panose="020B0604020104020204" pitchFamily="34" charset="0"/>
+              </a:rPr>
+              <a:t>Если разбить на две отдельные операции, можно разрабатывать и оптимизировать отдельные куски программы (то есть эти самые операции), что должно упростить разработку и время на тестирование</a:t>
+            </a:r>
             <a:endParaRPr dirty="0">
               <a:latin typeface="Abadi" panose="020B0604020104020204" pitchFamily="34" charset="0"/>
             </a:endParaRPr>
@@ -7734,6 +8334,144 @@
               <a:buNone/>
               <a:defRPr/>
             </a:pPr>
+            <a:r>
+              <a:rPr lang="ru-RU" dirty="0">
+                <a:latin typeface="Abadi" panose="020B0604020104020204" pitchFamily="34" charset="0"/>
+              </a:rPr>
+              <a:t>Если заходит дело про оптимизацию времени выполнения, не стоит пропускать разницу между </a:t>
+            </a:r>
+            <a:r>
+              <a:rPr lang="en-US" dirty="0">
+                <a:latin typeface="Abadi" panose="020B0604020104020204" pitchFamily="34" charset="0"/>
+              </a:rPr>
+              <a:t>SISD</a:t>
+            </a:r>
+            <a:r>
+              <a:rPr lang="ru-RU" dirty="0">
+                <a:latin typeface="Abadi" panose="020B0604020104020204" pitchFamily="34" charset="0"/>
+              </a:rPr>
+              <a:t> и </a:t>
+            </a:r>
+            <a:r>
+              <a:rPr lang="en-US" dirty="0">
+                <a:latin typeface="Abadi" panose="020B0604020104020204" pitchFamily="34" charset="0"/>
+              </a:rPr>
+              <a:t>SIMD</a:t>
+            </a:r>
+            <a:r>
+              <a:rPr lang="ru-RU" dirty="0">
+                <a:latin typeface="Abadi" panose="020B0604020104020204" pitchFamily="34" charset="0"/>
+              </a:rPr>
+              <a:t>.</a:t>
+            </a:r>
+          </a:p>
+          <a:p>
+            <a:pPr marL="0" lvl="0" indent="0" algn="l">
+              <a:spcBef>
+                <a:spcPts val="0"/>
+              </a:spcBef>
+              <a:spcAft>
+                <a:spcPts val="0"/>
+              </a:spcAft>
+              <a:buNone/>
+              <a:defRPr/>
+            </a:pPr>
+            <a:r>
+              <a:rPr lang="en-US" dirty="0">
+                <a:latin typeface="Abadi" panose="020B0604020104020204" pitchFamily="34" charset="0"/>
+              </a:rPr>
+              <a:t>SISD</a:t>
+            </a:r>
+            <a:r>
+              <a:rPr lang="ru-RU" dirty="0">
+                <a:latin typeface="Abadi" panose="020B0604020104020204" pitchFamily="34" charset="0"/>
+              </a:rPr>
+              <a:t> – это привычные нам операции, которые мы пишем в коде</a:t>
+            </a:r>
+            <a:r>
+              <a:rPr lang="en-US" dirty="0">
+                <a:latin typeface="Abadi" panose="020B0604020104020204" pitchFamily="34" charset="0"/>
+              </a:rPr>
+              <a:t>:</a:t>
+            </a:r>
+            <a:r>
+              <a:rPr lang="ru-RU" dirty="0">
+                <a:latin typeface="Abadi" panose="020B0604020104020204" pitchFamily="34" charset="0"/>
+              </a:rPr>
+              <a:t> прибавить к одному числу другое, поменять значение в массиве по конкретному индексу на другое</a:t>
+            </a:r>
+          </a:p>
+          <a:p>
+            <a:pPr marL="0" lvl="0" indent="0" algn="l">
+              <a:spcBef>
+                <a:spcPts val="0"/>
+              </a:spcBef>
+              <a:spcAft>
+                <a:spcPts val="0"/>
+              </a:spcAft>
+              <a:buNone/>
+              <a:defRPr/>
+            </a:pPr>
+            <a:r>
+              <a:rPr lang="ru-RU" dirty="0">
+                <a:latin typeface="Abadi" panose="020B0604020104020204" pitchFamily="34" charset="0"/>
+              </a:rPr>
+              <a:t>Но </a:t>
+            </a:r>
+            <a:r>
+              <a:rPr lang="en-US" dirty="0">
+                <a:latin typeface="Abadi" panose="020B0604020104020204" pitchFamily="34" charset="0"/>
+              </a:rPr>
+              <a:t>SISD</a:t>
+            </a:r>
+            <a:r>
+              <a:rPr lang="ru-RU" dirty="0">
+                <a:latin typeface="Abadi" panose="020B0604020104020204" pitchFamily="34" charset="0"/>
+              </a:rPr>
+              <a:t> не позволяет использовать главное преимущество современных процессоров – векторизацию</a:t>
+            </a:r>
+          </a:p>
+          <a:p>
+            <a:pPr marL="0" lvl="0" indent="0" algn="l">
+              <a:spcBef>
+                <a:spcPts val="0"/>
+              </a:spcBef>
+              <a:spcAft>
+                <a:spcPts val="0"/>
+              </a:spcAft>
+              <a:buNone/>
+              <a:defRPr/>
+            </a:pPr>
+            <a:r>
+              <a:rPr lang="en-US" dirty="0">
+                <a:latin typeface="Abadi" panose="020B0604020104020204" pitchFamily="34" charset="0"/>
+              </a:rPr>
+              <a:t>SIMD</a:t>
+            </a:r>
+            <a:r>
+              <a:rPr lang="ru-RU" dirty="0">
+                <a:latin typeface="Abadi" panose="020B0604020104020204" pitchFamily="34" charset="0"/>
+              </a:rPr>
+              <a:t> же работает иначе, он оперирует блоками данных и применяет к ним инструкцию. Привычное «прибавить к одному числу другое» превращается в «к каждому элементу блока данных прибавить другой блок данных» и т.д.</a:t>
+            </a:r>
+          </a:p>
+          <a:p>
+            <a:pPr marL="0" lvl="0" indent="0" algn="l">
+              <a:spcBef>
+                <a:spcPts val="0"/>
+              </a:spcBef>
+              <a:spcAft>
+                <a:spcPts val="0"/>
+              </a:spcAft>
+              <a:buNone/>
+              <a:defRPr/>
+            </a:pPr>
+            <a:r>
+              <a:rPr lang="ru-RU" dirty="0">
+                <a:latin typeface="Abadi" panose="020B0604020104020204" pitchFamily="34" charset="0"/>
+              </a:rPr>
+              <a:t>Это позволяет кратно повысить производительность, ценой повышения сложности кода</a:t>
+            </a:r>
             <a:endParaRPr dirty="0">
               <a:latin typeface="Abadi" panose="020B0604020104020204" pitchFamily="34" charset="0"/>
             </a:endParaRPr>
@@ -7841,6 +8579,36 @@
               <a:buNone/>
               <a:defRPr/>
             </a:pPr>
+            <a:r>
+              <a:rPr lang="ru-RU" dirty="0">
+                <a:latin typeface="Abadi" panose="020B0604020104020204" pitchFamily="34" charset="0"/>
+              </a:rPr>
+              <a:t>Вспоминая про декомпозицию</a:t>
+            </a:r>
+            <a:r>
+              <a:rPr lang="en-US" dirty="0">
+                <a:latin typeface="Abadi" panose="020B0604020104020204" pitchFamily="34" charset="0"/>
+              </a:rPr>
+              <a:t>:</a:t>
+            </a:r>
+            <a:r>
+              <a:rPr lang="ru-RU" dirty="0">
+                <a:latin typeface="Abadi" panose="020B0604020104020204" pitchFamily="34" charset="0"/>
+              </a:rPr>
+              <a:t> было разработано 6 различных алгоритмов для поиска сумм в окрестности Мура, а так же был разработан собственный бенчмарк. Замерялось время выполнения 1000 итераций по массивам 4096*4096 элементов. Он замерял такие параметры, как</a:t>
+            </a:r>
+            <a:r>
+              <a:rPr lang="en-US" dirty="0">
+                <a:latin typeface="Abadi" panose="020B0604020104020204" pitchFamily="34" charset="0"/>
+              </a:rPr>
+              <a:t>:</a:t>
+            </a:r>
+            <a:r>
+              <a:rPr lang="ru-RU" dirty="0">
+                <a:latin typeface="Abadi" panose="020B0604020104020204" pitchFamily="34" charset="0"/>
+              </a:rPr>
+              <a:t> Минимальное, Среднее, Максимальное время выполнения, а так же перцентили времени. На гистограмме отображено преимущество во времени выполнения разработанных алгоритмов перед самым простым и наивным</a:t>
+            </a:r>
             <a:endParaRPr dirty="0">
               <a:latin typeface="Abadi" panose="020B0604020104020204" pitchFamily="34" charset="0"/>
             </a:endParaRPr>
@@ -7953,6 +8721,84 @@
               <a:buNone/>
               <a:defRPr/>
             </a:pPr>
+            <a:r>
+              <a:rPr lang="ru-RU" dirty="0">
+                <a:latin typeface="Abadi" panose="020B0604020104020204" pitchFamily="34" charset="0"/>
+              </a:rPr>
+              <a:t>Для применения правил </a:t>
+            </a:r>
+            <a:r>
+              <a:rPr lang="en-US" dirty="0">
+                <a:latin typeface="Abadi" panose="020B0604020104020204" pitchFamily="34" charset="0"/>
+              </a:rPr>
+              <a:t>B</a:t>
+            </a:r>
+            <a:r>
+              <a:rPr lang="ru-RU" dirty="0">
+                <a:latin typeface="Abadi" panose="020B0604020104020204" pitchFamily="34" charset="0"/>
+              </a:rPr>
+              <a:t> и </a:t>
+            </a:r>
+            <a:r>
+              <a:rPr lang="en-US" dirty="0">
+                <a:latin typeface="Abadi" panose="020B0604020104020204" pitchFamily="34" charset="0"/>
+              </a:rPr>
+              <a:t>S</a:t>
+            </a:r>
+            <a:r>
+              <a:rPr lang="ru-RU" dirty="0">
+                <a:latin typeface="Abadi" panose="020B0604020104020204" pitchFamily="34" charset="0"/>
+              </a:rPr>
+              <a:t> были разработаны уже 7 алгоритмов. Сравнительная гистограмма так же представлена на экране. Отмечу, что </a:t>
+            </a:r>
+            <a:r>
+              <a:rPr lang="en-US" dirty="0">
+                <a:latin typeface="Abadi" panose="020B0604020104020204" pitchFamily="34" charset="0"/>
+              </a:rPr>
+              <a:t>SSE</a:t>
+            </a:r>
+            <a:r>
+              <a:rPr lang="ru-RU" dirty="0">
+                <a:latin typeface="Abadi" panose="020B0604020104020204" pitchFamily="34" charset="0"/>
+              </a:rPr>
+              <a:t> и </a:t>
+            </a:r>
+            <a:r>
+              <a:rPr lang="en-US" dirty="0">
+                <a:latin typeface="Abadi" panose="020B0604020104020204" pitchFamily="34" charset="0"/>
+              </a:rPr>
+              <a:t>AVX</a:t>
+            </a:r>
+            <a:r>
+              <a:rPr lang="ru-RU" dirty="0">
+                <a:latin typeface="Abadi" panose="020B0604020104020204" pitchFamily="34" charset="0"/>
+              </a:rPr>
+              <a:t> из-за своей низкой производительности </a:t>
+            </a:r>
+            <a:r>
+              <a:rPr lang="ru-RU" sz="1200" b="1" dirty="0">
+                <a:latin typeface="Abadi" panose="020B0604020104020204" pitchFamily="34" charset="0"/>
+              </a:rPr>
+              <a:t>именно</a:t>
+            </a:r>
+            <a:r>
+              <a:rPr lang="ru-RU" dirty="0">
+                <a:latin typeface="Abadi" panose="020B0604020104020204" pitchFamily="34" charset="0"/>
+              </a:rPr>
+              <a:t> в бенчмарке</a:t>
+            </a:r>
+            <a:r>
+              <a:rPr lang="en-US" dirty="0">
+                <a:latin typeface="Abadi" panose="020B0604020104020204" pitchFamily="34" charset="0"/>
+              </a:rPr>
+              <a:t> </a:t>
+            </a:r>
+            <a:r>
+              <a:rPr lang="ru-RU" dirty="0">
+                <a:latin typeface="Abadi" panose="020B0604020104020204" pitchFamily="34" charset="0"/>
+              </a:rPr>
+              <a:t>не вошли в гистограмму</a:t>
+            </a:r>
             <a:endParaRPr dirty="0">
               <a:latin typeface="Abadi" panose="020B0604020104020204" pitchFamily="34" charset="0"/>
             </a:endParaRPr>
@@ -16669,7 +17515,22 @@
                 <a:latin typeface="Times New Roman" panose="02020603050405020304" pitchFamily="18" charset="0"/>
                 <a:ea typeface="Times New Roman" panose="02020603050405020304" pitchFamily="18" charset="0"/>
               </a:rPr>
-              <a:t>Клеточные автоматы – эффективный способ моделирования различных процессов в физике, химии, социологии. Возникает потребность в специализированной высокопроизводительной динамической библиотеки, ориентированной исключительно на максимальную производительность вычислений клеточных автоматов.</a:t>
+              <a:t>Клеточные автоматы – мощный инструмент для моделирования различных процессов в физике, химии, социологии и т.п. </a:t>
+            </a:r>
+          </a:p>
+          <a:p>
+            <a:pPr algn="just">
+              <a:lnSpc>
+                <a:spcPct val="150000"/>
+              </a:lnSpc>
+            </a:pPr>
+            <a:r>
+              <a:rPr lang="ru-RU" sz="1800" dirty="0">
+                <a:effectLst/>
+                <a:latin typeface="Times New Roman" panose="02020603050405020304" pitchFamily="18" charset="0"/>
+                <a:ea typeface="Times New Roman" panose="02020603050405020304" pitchFamily="18" charset="0"/>
+              </a:rPr>
+              <a:t>Но нет высокопроизводительных решений в удобной обёртке, например - динамической библиотеки, ориентированной исключительно на максимальную производительность вычислений клеточных автоматов.</a:t>
             </a:r>
           </a:p>
         </p:txBody>
@@ -17709,7 +18570,7 @@
         <p:spPr bwMode="auto">
           <a:xfrm>
             <a:off x="107504" y="428979"/>
-            <a:ext cx="3285262" cy="841799"/>
+            <a:ext cx="1296144" cy="841799"/>
           </a:xfrm>
           <a:prstGeom prst="rect">
             <a:avLst/>
@@ -17737,7 +18598,7 @@
                 <a:ea typeface="Federov2"/>
                 <a:cs typeface="Times New Roman" panose="02020603050405020304" pitchFamily="18" charset="0"/>
               </a:rPr>
-              <a:t>Цель и задачи</a:t>
+              <a:t>Цель</a:t>
             </a:r>
             <a:endParaRPr sz="3600" b="1" dirty="0">
               <a:latin typeface="Times New Roman" panose="02020603050405020304" pitchFamily="18" charset="0"/>
@@ -17754,8 +18615,8 @@
         </p:nvSpPr>
         <p:spPr bwMode="auto">
           <a:xfrm>
-            <a:off x="264044" y="1261676"/>
-            <a:ext cx="6223013" cy="2249077"/>
+            <a:off x="179512" y="2473037"/>
+            <a:ext cx="8640960" cy="1806713"/>
           </a:xfrm>
           <a:prstGeom prst="rect">
             <a:avLst/>
@@ -17768,7 +18629,7 @@
           </a:bodyPr>
           <a:lstStyle/>
           <a:p>
-            <a:pPr marL="342900" indent="-342900" algn="just">
+            <a:pPr indent="-342900" algn="just">
               <a:lnSpc>
                 <a:spcPct val="150000"/>
               </a:lnSpc>
@@ -18894,6 +19755,337 @@
           </p:txBody>
         </p:sp>
       </p:grpSp>
+      <p:sp>
+        <p:nvSpPr>
+          <p:cNvPr id="15" name="TextBox 14">
+            <a:extLst>
+              <a:ext uri="{FF2B5EF4-FFF2-40B4-BE49-F238E27FC236}">
+                <a16:creationId xmlns:a16="http://schemas.microsoft.com/office/drawing/2014/main" id="{83738070-53B0-43B6-AF06-1D5F9E14E8B2}"/>
+              </a:ext>
+            </a:extLst>
+          </p:cNvPr>
+          <p:cNvSpPr txBox="1"/>
+          <p:nvPr/>
+        </p:nvSpPr>
+        <p:spPr bwMode="auto">
+          <a:xfrm>
+            <a:off x="208801" y="1119459"/>
+            <a:ext cx="6223013" cy="921984"/>
+          </a:xfrm>
+          <a:prstGeom prst="rect">
+            <a:avLst/>
+          </a:prstGeom>
+          <a:noFill/>
+        </p:spPr>
+        <p:txBody>
+          <a:bodyPr vertOverflow="overflow" horzOverflow="overflow" vert="horz" wrap="square" lIns="91440" tIns="45720" rIns="91440" bIns="45720" numCol="1" spcCol="0" rtlCol="0" fromWordArt="0" anchor="t" anchorCtr="0" forceAA="0" compatLnSpc="0">
+            <a:spAutoFit/>
+          </a:bodyPr>
+          <a:lstStyle/>
+          <a:p>
+            <a:pPr algn="just">
+              <a:lnSpc>
+                <a:spcPct val="150000"/>
+              </a:lnSpc>
+            </a:pPr>
+            <a:r>
+              <a:rPr lang="ru-RU" sz="2000" dirty="0">
+                <a:latin typeface="Times New Roman" panose="02020603050405020304" pitchFamily="18" charset="0"/>
+                <a:ea typeface="Times New Roman" panose="02020603050405020304" pitchFamily="18" charset="0"/>
+              </a:rPr>
+              <a:t>Разработать высокопроизводительную библиотеку для моделирования клеточных автоматов</a:t>
+            </a:r>
+            <a:endParaRPr lang="ru-RU" sz="2000" dirty="0">
+              <a:effectLst/>
+              <a:latin typeface="Times New Roman" panose="02020603050405020304" pitchFamily="18" charset="0"/>
+              <a:ea typeface="Times New Roman" panose="02020603050405020304" pitchFamily="18" charset="0"/>
+            </a:endParaRPr>
+          </a:p>
+        </p:txBody>
+      </p:sp>
+      <p:sp>
+        <p:nvSpPr>
+          <p:cNvPr id="16" name="Google Shape;794;p40">
+            <a:extLst>
+              <a:ext uri="{FF2B5EF4-FFF2-40B4-BE49-F238E27FC236}">
+                <a16:creationId xmlns:a16="http://schemas.microsoft.com/office/drawing/2014/main" id="{88A68FDA-35BF-416D-B9F8-CA895324D953}"/>
+              </a:ext>
+            </a:extLst>
+          </p:cNvPr>
+          <p:cNvSpPr txBox="1">
+            <a:spLocks/>
+          </p:cNvSpPr>
+          <p:nvPr/>
+        </p:nvSpPr>
+        <p:spPr bwMode="auto">
+          <a:xfrm>
+            <a:off x="107504" y="1836341"/>
+            <a:ext cx="1719808" cy="841799"/>
+          </a:xfrm>
+          <a:prstGeom prst="rect">
+            <a:avLst/>
+          </a:prstGeom>
+          <a:noFill/>
+          <a:ln>
+            <a:noFill/>
+          </a:ln>
+        </p:spPr>
+        <p:txBody>
+          <a:bodyPr spcFirstLastPara="1" wrap="square" lIns="91423" tIns="91423" rIns="91423" bIns="91423" anchor="ctr" anchorCtr="0">
+            <a:noAutofit/>
+          </a:bodyPr>
+          <a:lstStyle>
+            <a:defPPr marR="0" lvl="0" algn="l">
+              <a:lnSpc>
+                <a:spcPct val="100000"/>
+              </a:lnSpc>
+              <a:spcBef>
+                <a:spcPts val="0"/>
+              </a:spcBef>
+              <a:spcAft>
+                <a:spcPts val="0"/>
+              </a:spcAft>
+            </a:defPPr>
+            <a:lvl1pPr marR="0" lvl="0" algn="ctr">
+              <a:lnSpc>
+                <a:spcPct val="100000"/>
+              </a:lnSpc>
+              <a:spcBef>
+                <a:spcPts val="0"/>
+              </a:spcBef>
+              <a:spcAft>
+                <a:spcPts val="0"/>
+              </a:spcAft>
+              <a:buClr>
+                <a:schemeClr val="dk1"/>
+              </a:buClr>
+              <a:buSzPts val="3600"/>
+              <a:buFont typeface="Chakra Petch Medium"/>
+              <a:buNone/>
+              <a:defRPr sz="3500" b="0" i="0" u="none" strike="noStrike" cap="none">
+                <a:solidFill>
+                  <a:schemeClr val="dk1"/>
+                </a:solidFill>
+                <a:latin typeface="Times New Roman" panose="02020603050405020304" pitchFamily="18" charset="0"/>
+                <a:ea typeface="Chakra Petch Medium"/>
+                <a:cs typeface="Times New Roman" panose="02020603050405020304" pitchFamily="18" charset="0"/>
+              </a:defRPr>
+            </a:lvl1pPr>
+            <a:lvl2pPr marR="0" lvl="1" algn="ctr">
+              <a:lnSpc>
+                <a:spcPct val="100000"/>
+              </a:lnSpc>
+              <a:spcBef>
+                <a:spcPts val="0"/>
+              </a:spcBef>
+              <a:spcAft>
+                <a:spcPts val="0"/>
+              </a:spcAft>
+              <a:buClr>
+                <a:schemeClr val="dk1"/>
+              </a:buClr>
+              <a:buSzPts val="3600"/>
+              <a:buFont typeface="Chakra Petch Medium"/>
+              <a:buNone/>
+              <a:defRPr sz="3600" b="0" i="0" u="none" strike="noStrike" cap="none">
+                <a:solidFill>
+                  <a:schemeClr val="dk1"/>
+                </a:solidFill>
+                <a:latin typeface="Chakra Petch Medium"/>
+                <a:ea typeface="Chakra Petch Medium"/>
+                <a:cs typeface="Chakra Petch Medium"/>
+              </a:defRPr>
+            </a:lvl2pPr>
+            <a:lvl3pPr marR="0" lvl="2" algn="ctr">
+              <a:lnSpc>
+                <a:spcPct val="100000"/>
+              </a:lnSpc>
+              <a:spcBef>
+                <a:spcPts val="0"/>
+              </a:spcBef>
+              <a:spcAft>
+                <a:spcPts val="0"/>
+              </a:spcAft>
+              <a:buClr>
+                <a:schemeClr val="dk1"/>
+              </a:buClr>
+              <a:buSzPts val="3600"/>
+              <a:buFont typeface="Chakra Petch Medium"/>
+              <a:buNone/>
+              <a:defRPr sz="3600" b="0" i="0" u="none" strike="noStrike" cap="none">
+                <a:solidFill>
+                  <a:schemeClr val="dk1"/>
+                </a:solidFill>
+                <a:latin typeface="Chakra Petch Medium"/>
+                <a:ea typeface="Chakra Petch Medium"/>
+                <a:cs typeface="Chakra Petch Medium"/>
+              </a:defRPr>
+            </a:lvl3pPr>
+            <a:lvl4pPr marR="0" lvl="3" algn="ctr">
+              <a:lnSpc>
+                <a:spcPct val="100000"/>
+              </a:lnSpc>
+              <a:spcBef>
+                <a:spcPts val="0"/>
+              </a:spcBef>
+              <a:spcAft>
+                <a:spcPts val="0"/>
+              </a:spcAft>
+              <a:buClr>
+                <a:schemeClr val="dk1"/>
+              </a:buClr>
+              <a:buSzPts val="3600"/>
+              <a:buFont typeface="Chakra Petch Medium"/>
+              <a:buNone/>
+              <a:defRPr sz="3600" b="0" i="0" u="none" strike="noStrike" cap="none">
+                <a:solidFill>
+                  <a:schemeClr val="dk1"/>
+                </a:solidFill>
+                <a:latin typeface="Chakra Petch Medium"/>
+                <a:ea typeface="Chakra Petch Medium"/>
+                <a:cs typeface="Chakra Petch Medium"/>
+              </a:defRPr>
+            </a:lvl4pPr>
+            <a:lvl5pPr marR="0" lvl="4" algn="ctr">
+              <a:lnSpc>
+                <a:spcPct val="100000"/>
+              </a:lnSpc>
+              <a:spcBef>
+                <a:spcPts val="0"/>
+              </a:spcBef>
+              <a:spcAft>
+                <a:spcPts val="0"/>
+              </a:spcAft>
+              <a:buClr>
+                <a:schemeClr val="dk1"/>
+              </a:buClr>
+              <a:buSzPts val="3600"/>
+              <a:buFont typeface="Chakra Petch Medium"/>
+              <a:buNone/>
+              <a:defRPr sz="3600" b="0" i="0" u="none" strike="noStrike" cap="none">
+                <a:solidFill>
+                  <a:schemeClr val="dk1"/>
+                </a:solidFill>
+                <a:latin typeface="Chakra Petch Medium"/>
+                <a:ea typeface="Chakra Petch Medium"/>
+                <a:cs typeface="Chakra Petch Medium"/>
+              </a:defRPr>
+            </a:lvl5pPr>
+            <a:lvl6pPr marR="0" lvl="5" algn="ctr">
+              <a:lnSpc>
+                <a:spcPct val="100000"/>
+              </a:lnSpc>
+              <a:spcBef>
+                <a:spcPts val="0"/>
+              </a:spcBef>
+              <a:spcAft>
+                <a:spcPts val="0"/>
+              </a:spcAft>
+              <a:buClr>
+                <a:schemeClr val="dk1"/>
+              </a:buClr>
+              <a:buSzPts val="3600"/>
+              <a:buFont typeface="Chakra Petch Medium"/>
+              <a:buNone/>
+              <a:defRPr sz="3600" b="0" i="0" u="none" strike="noStrike" cap="none">
+                <a:solidFill>
+                  <a:schemeClr val="dk1"/>
+                </a:solidFill>
+                <a:latin typeface="Chakra Petch Medium"/>
+                <a:ea typeface="Chakra Petch Medium"/>
+                <a:cs typeface="Chakra Petch Medium"/>
+              </a:defRPr>
+            </a:lvl6pPr>
+            <a:lvl7pPr marR="0" lvl="6" algn="ctr">
+              <a:lnSpc>
+                <a:spcPct val="100000"/>
+              </a:lnSpc>
+              <a:spcBef>
+                <a:spcPts val="0"/>
+              </a:spcBef>
+              <a:spcAft>
+                <a:spcPts val="0"/>
+              </a:spcAft>
+              <a:buClr>
+                <a:schemeClr val="dk1"/>
+              </a:buClr>
+              <a:buSzPts val="3600"/>
+              <a:buFont typeface="Chakra Petch Medium"/>
+              <a:buNone/>
+              <a:defRPr sz="3600" b="0" i="0" u="none" strike="noStrike" cap="none">
+                <a:solidFill>
+                  <a:schemeClr val="dk1"/>
+                </a:solidFill>
+                <a:latin typeface="Chakra Petch Medium"/>
+                <a:ea typeface="Chakra Petch Medium"/>
+                <a:cs typeface="Chakra Petch Medium"/>
+              </a:defRPr>
+            </a:lvl7pPr>
+            <a:lvl8pPr marR="0" lvl="7" algn="ctr">
+              <a:lnSpc>
+                <a:spcPct val="100000"/>
+              </a:lnSpc>
+              <a:spcBef>
+                <a:spcPts val="0"/>
+              </a:spcBef>
+              <a:spcAft>
+                <a:spcPts val="0"/>
+              </a:spcAft>
+              <a:buClr>
+                <a:schemeClr val="dk1"/>
+              </a:buClr>
+              <a:buSzPts val="3600"/>
+              <a:buFont typeface="Chakra Petch Medium"/>
+              <a:buNone/>
+              <a:defRPr sz="3600" b="0" i="0" u="none" strike="noStrike" cap="none">
+                <a:solidFill>
+                  <a:schemeClr val="dk1"/>
+                </a:solidFill>
+                <a:latin typeface="Chakra Petch Medium"/>
+                <a:ea typeface="Chakra Petch Medium"/>
+                <a:cs typeface="Chakra Petch Medium"/>
+              </a:defRPr>
+            </a:lvl8pPr>
+            <a:lvl9pPr marR="0" lvl="8" algn="ctr">
+              <a:lnSpc>
+                <a:spcPct val="100000"/>
+              </a:lnSpc>
+              <a:spcBef>
+                <a:spcPts val="0"/>
+              </a:spcBef>
+              <a:spcAft>
+                <a:spcPts val="0"/>
+              </a:spcAft>
+              <a:buClr>
+                <a:schemeClr val="dk1"/>
+              </a:buClr>
+              <a:buSzPts val="3600"/>
+              <a:buFont typeface="Chakra Petch Medium"/>
+              <a:buNone/>
+              <a:defRPr sz="3600" b="0" i="0" u="none" strike="noStrike" cap="none">
+                <a:solidFill>
+                  <a:schemeClr val="dk1"/>
+                </a:solidFill>
+                <a:latin typeface="Chakra Petch Medium"/>
+                <a:ea typeface="Chakra Petch Medium"/>
+                <a:cs typeface="Chakra Petch Medium"/>
+              </a:defRPr>
+            </a:lvl9pPr>
+          </a:lstStyle>
+          <a:p>
+            <a:pPr algn="l">
+              <a:defRPr/>
+            </a:pPr>
+            <a:r>
+              <a:rPr lang="ru-RU" sz="3600" b="1" dirty="0">
+                <a:ea typeface="Federov2"/>
+              </a:rPr>
+              <a:t>Задачи</a:t>
+            </a:r>
+            <a:endParaRPr lang="ru-RU" sz="3600" b="1" dirty="0"/>
+          </a:p>
+        </p:txBody>
+      </p:sp>
     </p:spTree>
     <p:extLst>
       <p:ext uri="{BB962C8B-B14F-4D97-AF65-F5344CB8AC3E}">
@@ -20179,8 +21371,8 @@
         </p:blipFill>
         <p:spPr>
           <a:xfrm>
-            <a:off x="5018653" y="850909"/>
-            <a:ext cx="3835300" cy="3672876"/>
+            <a:off x="4389848" y="440068"/>
+            <a:ext cx="4672093" cy="4474231"/>
           </a:xfrm>
           <a:prstGeom prst="rect">
             <a:avLst/>
@@ -20199,8 +21391,8 @@
         </p:nvSpPr>
         <p:spPr bwMode="auto">
           <a:xfrm>
-            <a:off x="82059" y="430010"/>
-            <a:ext cx="5774069" cy="841799"/>
+            <a:off x="82059" y="344788"/>
+            <a:ext cx="5774069" cy="705627"/>
           </a:xfrm>
           <a:prstGeom prst="rect">
             <a:avLst/>
@@ -20223,14 +21415,14 @@
               <a:defRPr/>
             </a:pPr>
             <a:r>
-              <a:rPr lang="ru-RU" sz="3600" b="1" dirty="0">
+              <a:rPr lang="ru-RU" sz="3200" b="1" dirty="0">
                 <a:latin typeface="Times New Roman" panose="02020603050405020304" pitchFamily="18" charset="0"/>
                 <a:ea typeface="AMDRTG"/>
                 <a:cs typeface="Times New Roman" panose="02020603050405020304" pitchFamily="18" charset="0"/>
               </a:rPr>
               <a:t>Архитектура библиотеки</a:t>
             </a:r>
-            <a:endParaRPr sz="3600" b="1" dirty="0">
+            <a:endParaRPr sz="3200" b="1" dirty="0">
               <a:latin typeface="Times New Roman" panose="02020603050405020304" pitchFamily="18" charset="0"/>
               <a:ea typeface="AMDRTG"/>
               <a:cs typeface="Times New Roman" panose="02020603050405020304" pitchFamily="18" charset="0"/>
@@ -20246,8 +21438,8 @@
         </p:nvSpPr>
         <p:spPr bwMode="auto">
           <a:xfrm>
-            <a:off x="179479" y="1788362"/>
-            <a:ext cx="4839174" cy="1566776"/>
+            <a:off x="179479" y="1660763"/>
+            <a:ext cx="4839174" cy="2249077"/>
           </a:xfrm>
           <a:prstGeom prst="rect">
             <a:avLst/>
@@ -20261,6 +21453,9 @@
           <a:lstStyle/>
           <a:p>
             <a:pPr>
+              <a:lnSpc>
+                <a:spcPct val="150000"/>
+              </a:lnSpc>
               <a:defRPr/>
             </a:pPr>
             <a:r>
@@ -20280,6 +21475,9 @@
           </a:p>
           <a:p>
             <a:pPr marL="457200" indent="-457200">
+              <a:lnSpc>
+                <a:spcPct val="150000"/>
+              </a:lnSpc>
               <a:buFont typeface="+mj-lt"/>
               <a:buAutoNum type="arabicParenR"/>
               <a:defRPr/>
@@ -20301,6 +21499,9 @@
           </a:p>
           <a:p>
             <a:pPr marL="457200" indent="-457200">
+              <a:lnSpc>
+                <a:spcPct val="150000"/>
+              </a:lnSpc>
               <a:buFont typeface="+mj-lt"/>
               <a:buAutoNum type="arabicParenR"/>
               <a:defRPr/>
@@ -20315,6 +21516,9 @@
           </a:p>
           <a:p>
             <a:pPr marL="457200" indent="-457200">
+              <a:lnSpc>
+                <a:spcPct val="150000"/>
+              </a:lnSpc>
               <a:buFont typeface="+mj-lt"/>
               <a:buAutoNum type="arabicParenR"/>
               <a:defRPr/>
@@ -21445,7 +22649,7 @@
             </a:r>
           </a:p>
           <a:p>
-            <a:pPr marL="457200" indent="-457200">
+            <a:pPr indent="-450000">
               <a:lnSpc>
                 <a:spcPct val="150000"/>
               </a:lnSpc>
@@ -22766,8 +23970,8 @@
         </p:nvSpPr>
         <p:spPr bwMode="auto">
           <a:xfrm>
-            <a:off x="263120" y="1817825"/>
-            <a:ext cx="4743504" cy="1507849"/>
+            <a:off x="238091" y="1496936"/>
+            <a:ext cx="4743504" cy="2149627"/>
           </a:xfrm>
           <a:prstGeom prst="rect">
             <a:avLst/>
@@ -22781,6 +23985,9 @@
           <a:lstStyle/>
           <a:p>
             <a:pPr>
+              <a:lnSpc>
+                <a:spcPct val="150000"/>
+              </a:lnSpc>
               <a:defRPr/>
             </a:pPr>
             <a:r>
@@ -22807,6 +24014,9 @@
           </a:p>
           <a:p>
             <a:pPr>
+              <a:lnSpc>
+                <a:spcPct val="150000"/>
+              </a:lnSpc>
               <a:defRPr/>
             </a:pPr>
             <a:r>
@@ -23800,7 +25010,7 @@
         </p:blipFill>
         <p:spPr bwMode="auto">
           <a:xfrm>
-            <a:off x="5220072" y="1268323"/>
+            <a:off x="5220072" y="1599418"/>
             <a:ext cx="3601591" cy="1944661"/>
           </a:xfrm>
           <a:prstGeom prst="rect">

--- a/ВКР/ВКР.pptx
+++ b/ВКР/ВКР.pptx
@@ -5,7 +5,7 @@
     <p:sldMasterId id="2147483648" r:id="rId1"/>
   </p:sldMasterIdLst>
   <p:notesMasterIdLst>
-    <p:notesMasterId r:id="rId12"/>
+    <p:notesMasterId r:id="rId13"/>
   </p:notesMasterIdLst>
   <p:sldIdLst>
     <p:sldId id="256" r:id="rId2"/>
@@ -18,18 +18,19 @@
     <p:sldId id="274" r:id="rId9"/>
     <p:sldId id="276" r:id="rId10"/>
     <p:sldId id="277" r:id="rId11"/>
+    <p:sldId id="279" r:id="rId12"/>
   </p:sldIdLst>
   <p:sldSz cx="9144000" cy="5143500" type="screen16x9"/>
   <p:notesSz cx="6858000" cy="9144000"/>
   <p:embeddedFontLst>
     <p:embeddedFont>
-      <p:font typeface="Abadi" panose="020B0604020104020204" pitchFamily="34" charset="0"/>
-      <p:regular r:id="rId13"/>
+      <p:font typeface="Abadi" panose="020B0604020202020204" charset="0"/>
+      <p:regular r:id="rId14"/>
     </p:embeddedFont>
     <p:embeddedFont>
-      <p:font typeface="Fira Code" panose="020B0809050000020004" pitchFamily="49" charset="0"/>
-      <p:regular r:id="rId14"/>
-      <p:bold r:id="rId15"/>
+      <p:font typeface="Fira Code" panose="020B0604020202020204" charset="0"/>
+      <p:regular r:id="rId15"/>
+      <p:bold r:id="rId16"/>
     </p:embeddedFont>
   </p:embeddedFontLst>
   <p:defaultTextStyle>
@@ -17368,6 +17369,128 @@
 </p:sld>
 </file>
 
+<file path=ppt/slides/slide11.xml><?xml version="1.0" encoding="utf-8"?>
+<p:sld xmlns:a="http://schemas.openxmlformats.org/drawingml/2006/main" xmlns:r="http://schemas.openxmlformats.org/officeDocument/2006/relationships" xmlns:p="http://schemas.openxmlformats.org/presentationml/2006/main">
+  <p:cSld>
+    <p:spTree>
+      <p:nvGrpSpPr>
+        <p:cNvPr id="1" name=""/>
+        <p:cNvGrpSpPr/>
+        <p:nvPr/>
+      </p:nvGrpSpPr>
+      <p:grpSpPr>
+        <a:xfrm>
+          <a:off x="0" y="0"/>
+          <a:ext cx="0" cy="0"/>
+          <a:chOff x="0" y="0"/>
+          <a:chExt cx="0" cy="0"/>
+        </a:xfrm>
+      </p:grpSpPr>
+      <p:sp>
+        <p:nvSpPr>
+          <p:cNvPr id="2" name="Заголовок 1">
+            <a:extLst>
+              <a:ext uri="{FF2B5EF4-FFF2-40B4-BE49-F238E27FC236}">
+                <a16:creationId xmlns:a16="http://schemas.microsoft.com/office/drawing/2014/main" id="{C3FAC5DB-B97C-46F5-8AAD-AD45D01FDB3D}"/>
+              </a:ext>
+            </a:extLst>
+          </p:cNvPr>
+          <p:cNvSpPr>
+            <a:spLocks noGrp="1"/>
+          </p:cNvSpPr>
+          <p:nvPr>
+            <p:ph type="title"/>
+          </p:nvPr>
+        </p:nvSpPr>
+        <p:spPr/>
+        <p:txBody>
+          <a:bodyPr/>
+          <a:lstStyle/>
+          <a:p>
+            <a:endParaRPr lang="ru-RU"/>
+          </a:p>
+        </p:txBody>
+      </p:sp>
+      <p:sp>
+        <p:nvSpPr>
+          <p:cNvPr id="3" name="Заголовок 2">
+            <a:extLst>
+              <a:ext uri="{FF2B5EF4-FFF2-40B4-BE49-F238E27FC236}">
+                <a16:creationId xmlns:a16="http://schemas.microsoft.com/office/drawing/2014/main" id="{6CF357C3-E7BD-4858-B917-146EBF49F2A0}"/>
+              </a:ext>
+            </a:extLst>
+          </p:cNvPr>
+          <p:cNvSpPr>
+            <a:spLocks noGrp="1"/>
+          </p:cNvSpPr>
+          <p:nvPr>
+            <p:ph type="title" idx="2"/>
+          </p:nvPr>
+        </p:nvSpPr>
+        <p:spPr>
+          <a:xfrm>
+            <a:off x="2915816" y="1522988"/>
+            <a:ext cx="4023647" cy="841800"/>
+          </a:xfrm>
+        </p:spPr>
+        <p:txBody>
+          <a:bodyPr/>
+          <a:lstStyle/>
+          <a:p>
+            <a:r>
+              <a:rPr lang="ru-RU" dirty="0" err="1"/>
+              <a:t>Спаси</a:t>
+            </a:r>
+            <a:r>
+              <a:rPr lang="ru-RU" strike="sngStrike" dirty="0" err="1"/>
+              <a:t>те</a:t>
+            </a:r>
+            <a:r>
+              <a:rPr lang="ru-RU" dirty="0" err="1"/>
+              <a:t>бо</a:t>
+            </a:r>
+            <a:endParaRPr lang="ru-RU" dirty="0"/>
+          </a:p>
+        </p:txBody>
+      </p:sp>
+      <p:sp>
+        <p:nvSpPr>
+          <p:cNvPr id="4" name="Подзаголовок 3">
+            <a:extLst>
+              <a:ext uri="{FF2B5EF4-FFF2-40B4-BE49-F238E27FC236}">
+                <a16:creationId xmlns:a16="http://schemas.microsoft.com/office/drawing/2014/main" id="{CD1A1BCA-9EF7-4690-BB2D-B6FB5D849427}"/>
+              </a:ext>
+            </a:extLst>
+          </p:cNvPr>
+          <p:cNvSpPr>
+            <a:spLocks noGrp="1"/>
+          </p:cNvSpPr>
+          <p:nvPr>
+            <p:ph type="subTitle" idx="1"/>
+          </p:nvPr>
+        </p:nvSpPr>
+        <p:spPr/>
+        <p:txBody>
+          <a:bodyPr/>
+          <a:lstStyle/>
+          <a:p>
+            <a:endParaRPr lang="ru-RU"/>
+          </a:p>
+        </p:txBody>
+      </p:sp>
+    </p:spTree>
+    <p:extLst>
+      <p:ext uri="{BB962C8B-B14F-4D97-AF65-F5344CB8AC3E}">
+        <p14:creationId xmlns:p14="http://schemas.microsoft.com/office/powerpoint/2010/main" val="70085573"/>
+      </p:ext>
+    </p:extLst>
+  </p:cSld>
+  <p:clrMapOvr>
+    <a:masterClrMapping/>
+  </p:clrMapOvr>
+</p:sld>
+</file>
+
 <file path=ppt/slides/slide2.xml><?xml version="1.0" encoding="utf-8"?>
 <p:sld xmlns:a="http://schemas.openxmlformats.org/drawingml/2006/main" xmlns:r="http://schemas.openxmlformats.org/officeDocument/2006/relationships" xmlns:p="http://schemas.openxmlformats.org/presentationml/2006/main" showMasterPhAnim="0">
   <p:cSld>
@@ -17491,7 +17614,7 @@
         <p:spPr bwMode="auto">
           <a:xfrm>
             <a:off x="107504" y="1270778"/>
-            <a:ext cx="4824536" cy="3228256"/>
+            <a:ext cx="4824536" cy="3626442"/>
           </a:xfrm>
           <a:prstGeom prst="rect">
             <a:avLst/>
@@ -17530,7 +17653,22 @@
                 <a:latin typeface="Times New Roman" panose="02020603050405020304" pitchFamily="18" charset="0"/>
                 <a:ea typeface="Times New Roman" panose="02020603050405020304" pitchFamily="18" charset="0"/>
               </a:rPr>
-              <a:t>Но нет высокопроизводительных решений в удобной обёртке, например - динамической библиотеки, ориентированной исключительно на максимальную производительность вычислений клеточных автоматов.</a:t>
+              <a:t>Но </a:t>
+            </a:r>
+            <a:r>
+              <a:rPr lang="ru-RU" sz="1800" dirty="0">
+                <a:latin typeface="Times New Roman" panose="02020603050405020304" pitchFamily="18" charset="0"/>
+                <a:ea typeface="Times New Roman" panose="02020603050405020304" pitchFamily="18" charset="0"/>
+              </a:rPr>
+              <a:t>есть проблема отсутствия</a:t>
+            </a:r>
+            <a:r>
+              <a:rPr lang="ru-RU" sz="1800" dirty="0">
+                <a:effectLst/>
+                <a:latin typeface="Times New Roman" panose="02020603050405020304" pitchFamily="18" charset="0"/>
+                <a:ea typeface="Times New Roman" panose="02020603050405020304" pitchFamily="18" charset="0"/>
+              </a:rPr>
+              <a:t> высокопроизводительных решений в удобной обёртке, например - динамической библиотеки, ориентированной исключительно на максимальную производительность вычислений клеточных автоматов.</a:t>
             </a:r>
           </a:p>
         </p:txBody>
@@ -18531,7 +18669,7 @@
         <p:push dir="u"/>
       </p:transition>
     </mc:Choice>
-    <mc:Fallback xmlns="" xmlns:m="http://schemas.openxmlformats.org/officeDocument/2006/math" xmlns:w="http://schemas.openxmlformats.org/wordprocessingml/2006/main">
+    <mc:Fallback xmlns:w="http://schemas.openxmlformats.org/wordprocessingml/2006/main" xmlns:m="http://schemas.openxmlformats.org/officeDocument/2006/math" xmlns="">
       <p:transition spd="med" advClick="1">
         <p:push dir="u"/>
       </p:transition>
@@ -21325,7 +21463,7 @@
         <p:push dir="u"/>
       </p:transition>
     </mc:Choice>
-    <mc:Fallback xmlns="" xmlns:m="http://schemas.openxmlformats.org/officeDocument/2006/math" xmlns:w="http://schemas.openxmlformats.org/wordprocessingml/2006/main">
+    <mc:Fallback xmlns:w="http://schemas.openxmlformats.org/wordprocessingml/2006/main" xmlns:m="http://schemas.openxmlformats.org/officeDocument/2006/math" xmlns="">
       <p:transition spd="med" advClick="1">
         <p:push dir="u"/>
       </p:transition>
@@ -25039,7 +25177,7 @@
         <p:push dir="u"/>
       </p:transition>
     </mc:Choice>
-    <mc:Fallback xmlns="" xmlns:m="http://schemas.openxmlformats.org/officeDocument/2006/math" xmlns:w="http://schemas.openxmlformats.org/wordprocessingml/2006/main">
+    <mc:Fallback xmlns:w="http://schemas.openxmlformats.org/wordprocessingml/2006/main" xmlns:m="http://schemas.openxmlformats.org/officeDocument/2006/math" xmlns="">
       <p:transition spd="med" advClick="1">
         <p:push dir="u"/>
       </p:transition>

--- a/ВКР/ВКР.pptx
+++ b/ВКР/ВКР.pptx
@@ -24,11 +24,11 @@
   <p:notesSz cx="6858000" cy="9144000"/>
   <p:embeddedFontLst>
     <p:embeddedFont>
-      <p:font typeface="Abadi" panose="020B0604020202020204" charset="0"/>
+      <p:font typeface="Abadi" panose="020B0604020104020204" pitchFamily="34" charset="0"/>
       <p:regular r:id="rId14"/>
     </p:embeddedFont>
     <p:embeddedFont>
-      <p:font typeface="Fira Code" panose="020B0604020202020204" charset="0"/>
+      <p:font typeface="Fira Code" panose="020B0809050000020004" pitchFamily="49" charset="0"/>
       <p:regular r:id="rId15"/>
       <p:bold r:id="rId16"/>
     </p:embeddedFont>
@@ -17402,35 +17402,10 @@
             <p:ph type="title"/>
           </p:nvPr>
         </p:nvSpPr>
-        <p:spPr/>
-        <p:txBody>
-          <a:bodyPr/>
-          <a:lstStyle/>
-          <a:p>
-            <a:endParaRPr lang="ru-RU"/>
-          </a:p>
-        </p:txBody>
-      </p:sp>
-      <p:sp>
-        <p:nvSpPr>
-          <p:cNvPr id="3" name="Заголовок 2">
-            <a:extLst>
-              <a:ext uri="{FF2B5EF4-FFF2-40B4-BE49-F238E27FC236}">
-                <a16:creationId xmlns:a16="http://schemas.microsoft.com/office/drawing/2014/main" id="{6CF357C3-E7BD-4858-B917-146EBF49F2A0}"/>
-              </a:ext>
-            </a:extLst>
-          </p:cNvPr>
-          <p:cNvSpPr>
-            <a:spLocks noGrp="1"/>
-          </p:cNvSpPr>
-          <p:nvPr>
-            <p:ph type="title" idx="2"/>
-          </p:nvPr>
-        </p:nvSpPr>
         <p:spPr>
           <a:xfrm>
-            <a:off x="2915816" y="1522988"/>
-            <a:ext cx="4023647" cy="841800"/>
+            <a:off x="972085" y="2139702"/>
+            <a:ext cx="7199829" cy="1656184"/>
           </a:xfrm>
         </p:spPr>
         <p:txBody>
@@ -17438,43 +17413,13 @@
           <a:lstStyle/>
           <a:p>
             <a:r>
-              <a:rPr lang="ru-RU" dirty="0" err="1"/>
-              <a:t>Спаси</a:t>
+              <a:rPr lang="ru-RU" sz="6000" dirty="0"/>
+              <a:t>Спасибо за внимание</a:t>
             </a:r>
-            <a:r>
-              <a:rPr lang="ru-RU" strike="sngStrike" dirty="0" err="1"/>
-              <a:t>те</a:t>
-            </a:r>
-            <a:r>
-              <a:rPr lang="ru-RU" dirty="0" err="1"/>
-              <a:t>бо</a:t>
-            </a:r>
-            <a:endParaRPr lang="ru-RU" dirty="0"/>
-          </a:p>
-        </p:txBody>
-      </p:sp>
-      <p:sp>
-        <p:nvSpPr>
-          <p:cNvPr id="4" name="Подзаголовок 3">
-            <a:extLst>
-              <a:ext uri="{FF2B5EF4-FFF2-40B4-BE49-F238E27FC236}">
-                <a16:creationId xmlns:a16="http://schemas.microsoft.com/office/drawing/2014/main" id="{CD1A1BCA-9EF7-4690-BB2D-B6FB5D849427}"/>
-              </a:ext>
-            </a:extLst>
-          </p:cNvPr>
-          <p:cNvSpPr>
-            <a:spLocks noGrp="1"/>
-          </p:cNvSpPr>
-          <p:nvPr>
-            <p:ph type="subTitle" idx="1"/>
-          </p:nvPr>
-        </p:nvSpPr>
-        <p:spPr/>
-        <p:txBody>
-          <a:bodyPr/>
-          <a:lstStyle/>
-          <a:p>
-            <a:endParaRPr lang="ru-RU"/>
+            <a:br>
+              <a:rPr lang="ru-RU" sz="6000" dirty="0"/>
+            </a:br>
+            <a:endParaRPr lang="ru-RU" sz="6000" dirty="0"/>
           </a:p>
         </p:txBody>
       </p:sp>
@@ -18669,7 +18614,7 @@
         <p:push dir="u"/>
       </p:transition>
     </mc:Choice>
-    <mc:Fallback xmlns:w="http://schemas.openxmlformats.org/wordprocessingml/2006/main" xmlns:m="http://schemas.openxmlformats.org/officeDocument/2006/math" xmlns="">
+    <mc:Fallback xmlns="" xmlns:m="http://schemas.openxmlformats.org/officeDocument/2006/math" xmlns:w="http://schemas.openxmlformats.org/wordprocessingml/2006/main">
       <p:transition spd="med" advClick="1">
         <p:push dir="u"/>
       </p:transition>
@@ -21463,7 +21408,7 @@
         <p:push dir="u"/>
       </p:transition>
     </mc:Choice>
-    <mc:Fallback xmlns:w="http://schemas.openxmlformats.org/wordprocessingml/2006/main" xmlns:m="http://schemas.openxmlformats.org/officeDocument/2006/math" xmlns="">
+    <mc:Fallback xmlns="" xmlns:m="http://schemas.openxmlformats.org/officeDocument/2006/math" xmlns:w="http://schemas.openxmlformats.org/wordprocessingml/2006/main">
       <p:transition spd="med" advClick="1">
         <p:push dir="u"/>
       </p:transition>
@@ -25177,7 +25122,7 @@
         <p:push dir="u"/>
       </p:transition>
     </mc:Choice>
-    <mc:Fallback xmlns:w="http://schemas.openxmlformats.org/wordprocessingml/2006/main" xmlns:m="http://schemas.openxmlformats.org/officeDocument/2006/math" xmlns="">
+    <mc:Fallback xmlns="" xmlns:m="http://schemas.openxmlformats.org/officeDocument/2006/math" xmlns:w="http://schemas.openxmlformats.org/wordprocessingml/2006/main">
       <p:transition spd="med" advClick="1">
         <p:push dir="u"/>
       </p:transition>

--- a/ВКР/ВКР.pptx
+++ b/ВКР/ВКР.pptx
@@ -17404,8 +17404,8 @@
         </p:nvSpPr>
         <p:spPr>
           <a:xfrm>
-            <a:off x="972085" y="2139702"/>
-            <a:ext cx="7199829" cy="1656184"/>
+            <a:off x="2700034" y="555526"/>
+            <a:ext cx="3743931" cy="1368152"/>
           </a:xfrm>
         </p:spPr>
         <p:txBody>
@@ -17413,13 +17413,109 @@
           <a:lstStyle/>
           <a:p>
             <a:r>
-              <a:rPr lang="ru-RU" sz="6000" dirty="0"/>
-              <a:t>Спасибо за внимание</a:t>
+              <a:rPr lang="ru-RU" sz="3600" dirty="0"/>
+              <a:t>Заключение</a:t>
             </a:r>
             <a:br>
               <a:rPr lang="ru-RU" sz="6000" dirty="0"/>
             </a:br>
             <a:endParaRPr lang="ru-RU" sz="6000" dirty="0"/>
+          </a:p>
+        </p:txBody>
+      </p:sp>
+      <p:sp>
+        <p:nvSpPr>
+          <p:cNvPr id="3" name="TextBox 2">
+            <a:extLst>
+              <a:ext uri="{FF2B5EF4-FFF2-40B4-BE49-F238E27FC236}">
+                <a16:creationId xmlns:a16="http://schemas.microsoft.com/office/drawing/2014/main" id="{20F0E6CA-74A2-4238-93E4-271D6FA41A5B}"/>
+              </a:ext>
+            </a:extLst>
+          </p:cNvPr>
+          <p:cNvSpPr txBox="1"/>
+          <p:nvPr/>
+        </p:nvSpPr>
+        <p:spPr bwMode="auto">
+          <a:xfrm>
+            <a:off x="251520" y="1227675"/>
+            <a:ext cx="8496944" cy="2680477"/>
+          </a:xfrm>
+          <a:prstGeom prst="rect">
+            <a:avLst/>
+          </a:prstGeom>
+          <a:noFill/>
+        </p:spPr>
+        <p:txBody>
+          <a:bodyPr vertOverflow="overflow" horzOverflow="overflow" vert="horz" wrap="square" lIns="91440" tIns="45720" rIns="91440" bIns="45720" numCol="1" spcCol="0" rtlCol="0" fromWordArt="0" anchor="t" anchorCtr="0" forceAA="0" compatLnSpc="0">
+            <a:spAutoFit/>
+          </a:bodyPr>
+          <a:lstStyle/>
+          <a:p>
+            <a:pPr>
+              <a:lnSpc>
+                <a:spcPct val="150000"/>
+              </a:lnSpc>
+              <a:defRPr/>
+            </a:pPr>
+            <a:r>
+              <a:rPr lang="ru-RU" sz="2400" dirty="0">
+                <a:latin typeface="Times New Roman" panose="02020603050405020304" pitchFamily="18" charset="0"/>
+                <a:cs typeface="Times New Roman" panose="02020603050405020304" pitchFamily="18" charset="0"/>
+              </a:rPr>
+              <a:t>Поставленная цель достигнута</a:t>
+            </a:r>
+            <a:r>
+              <a:rPr lang="en-US" sz="2400" dirty="0">
+                <a:latin typeface="Times New Roman" panose="02020603050405020304" pitchFamily="18" charset="0"/>
+                <a:cs typeface="Times New Roman" panose="02020603050405020304" pitchFamily="18" charset="0"/>
+              </a:rPr>
+              <a:t>;</a:t>
+            </a:r>
+            <a:endParaRPr lang="ru-RU" sz="2400" dirty="0">
+              <a:latin typeface="Times New Roman" panose="02020603050405020304" pitchFamily="18" charset="0"/>
+              <a:cs typeface="Times New Roman" panose="02020603050405020304" pitchFamily="18" charset="0"/>
+            </a:endParaRPr>
+          </a:p>
+          <a:p>
+            <a:pPr>
+              <a:lnSpc>
+                <a:spcPct val="150000"/>
+              </a:lnSpc>
+              <a:defRPr/>
+            </a:pPr>
+            <a:r>
+              <a:rPr lang="ru-RU" sz="2400" dirty="0">
+                <a:latin typeface="Times New Roman" panose="02020603050405020304" pitchFamily="18" charset="0"/>
+                <a:cs typeface="Times New Roman" panose="02020603050405020304" pitchFamily="18" charset="0"/>
+              </a:rPr>
+              <a:t>Итоговая производительность библиотеки оказалась выше базовой реализации в 86 раз</a:t>
+            </a:r>
+            <a:r>
+              <a:rPr lang="en-US" sz="2400" dirty="0">
+                <a:latin typeface="Times New Roman" panose="02020603050405020304" pitchFamily="18" charset="0"/>
+                <a:cs typeface="Times New Roman" panose="02020603050405020304" pitchFamily="18" charset="0"/>
+              </a:rPr>
+              <a:t>;</a:t>
+            </a:r>
+            <a:endParaRPr lang="ru-RU" sz="2400" dirty="0">
+              <a:latin typeface="Times New Roman" panose="02020603050405020304" pitchFamily="18" charset="0"/>
+              <a:cs typeface="Times New Roman" panose="02020603050405020304" pitchFamily="18" charset="0"/>
+            </a:endParaRPr>
+          </a:p>
+          <a:p>
+            <a:pPr>
+              <a:lnSpc>
+                <a:spcPct val="150000"/>
+              </a:lnSpc>
+              <a:defRPr/>
+            </a:pPr>
+            <a:r>
+              <a:rPr lang="ru-RU" sz="2400" dirty="0">
+                <a:latin typeface="Times New Roman" panose="02020603050405020304" pitchFamily="18" charset="0"/>
+                <a:cs typeface="Times New Roman" panose="02020603050405020304" pitchFamily="18" charset="0"/>
+              </a:rPr>
+              <a:t>Обеспечены высокопроизводительные вычисления благодаря библиотеке.</a:t>
+            </a:r>
           </a:p>
         </p:txBody>
       </p:sp>
@@ -17453,53 +17549,6 @@
           <a:chExt cx="0" cy="0"/>
         </a:xfrm>
       </p:grpSpPr>
-      <p:pic>
-        <p:nvPicPr>
-          <p:cNvPr id="1028" name="Picture 4">
-            <a:extLst>
-              <a:ext uri="{FF2B5EF4-FFF2-40B4-BE49-F238E27FC236}">
-                <a16:creationId xmlns:a16="http://schemas.microsoft.com/office/drawing/2014/main" id="{3DC567FA-CEC2-494C-8454-9F184ED950B2}"/>
-              </a:ext>
-            </a:extLst>
-          </p:cNvPr>
-          <p:cNvPicPr>
-            <a:picLocks noChangeAspect="1" noChangeArrowheads="1" noCrop="1"/>
-          </p:cNvPicPr>
-          <p:nvPr/>
-        </p:nvPicPr>
-        <p:blipFill>
-          <a:blip r:embed="rId3">
-            <a:extLst>
-              <a:ext uri="{28A0092B-C50C-407E-A947-70E740481C1C}">
-                <a14:useLocalDpi xmlns:a14="http://schemas.microsoft.com/office/drawing/2010/main" val="0"/>
-              </a:ext>
-            </a:extLst>
-          </a:blip>
-          <a:srcRect/>
-          <a:stretch>
-            <a:fillRect/>
-          </a:stretch>
-        </p:blipFill>
-        <p:spPr bwMode="auto">
-          <a:xfrm>
-            <a:off x="4521483" y="849878"/>
-            <a:ext cx="4515013" cy="3384376"/>
-          </a:xfrm>
-          <a:prstGeom prst="rect">
-            <a:avLst/>
-          </a:prstGeom>
-          <a:noFill/>
-          <a:extLst>
-            <a:ext uri="{909E8E84-426E-40DD-AFC4-6F175D3DCCD1}">
-              <a14:hiddenFill xmlns:a14="http://schemas.microsoft.com/office/drawing/2010/main">
-                <a:solidFill>
-                  <a:srgbClr val="FFFFFF"/>
-                </a:solidFill>
-              </a14:hiddenFill>
-            </a:ext>
-          </a:extLst>
-        </p:spPr>
-      </p:pic>
       <p:sp>
         <p:nvSpPr>
           <p:cNvPr id="114284416" name="Google Shape;794;p40"/>
@@ -17558,8 +17607,8 @@
         </p:nvSpPr>
         <p:spPr bwMode="auto">
           <a:xfrm>
-            <a:off x="107504" y="1270778"/>
-            <a:ext cx="4824536" cy="3626442"/>
+            <a:off x="114946" y="1156715"/>
+            <a:ext cx="8928992" cy="2830070"/>
           </a:xfrm>
           <a:prstGeom prst="rect">
             <a:avLst/>
@@ -17583,8 +17632,51 @@
                 <a:latin typeface="Times New Roman" panose="02020603050405020304" pitchFamily="18" charset="0"/>
                 <a:ea typeface="Times New Roman" panose="02020603050405020304" pitchFamily="18" charset="0"/>
               </a:rPr>
-              <a:t>Клеточные автоматы – мощный инструмент для моделирования различных процессов в физике, химии, социологии и т.п. </a:t>
+              <a:t>Клеточные автоматы – мощный инструмент для моделирования различных процессов в физике, химии, социологии</a:t>
             </a:r>
+            <a:r>
+              <a:rPr lang="ru-RU" sz="1800" dirty="0">
+                <a:latin typeface="Times New Roman" panose="02020603050405020304" pitchFamily="18" charset="0"/>
+                <a:ea typeface="Times New Roman" panose="02020603050405020304" pitchFamily="18" charset="0"/>
+              </a:rPr>
+              <a:t>, научных вычислениях и играх</a:t>
+            </a:r>
+            <a:r>
+              <a:rPr lang="ru-RU" sz="1800" dirty="0">
+                <a:effectLst/>
+                <a:latin typeface="Times New Roman" panose="02020603050405020304" pitchFamily="18" charset="0"/>
+                <a:ea typeface="Times New Roman" panose="02020603050405020304" pitchFamily="18" charset="0"/>
+              </a:rPr>
+              <a:t>. </a:t>
+            </a:r>
+            <a:endParaRPr lang="en-US" sz="1800" dirty="0">
+              <a:effectLst/>
+              <a:latin typeface="Times New Roman" panose="02020603050405020304" pitchFamily="18" charset="0"/>
+              <a:ea typeface="Times New Roman" panose="02020603050405020304" pitchFamily="18" charset="0"/>
+            </a:endParaRPr>
+          </a:p>
+          <a:p>
+            <a:pPr algn="just">
+              <a:lnSpc>
+                <a:spcPct val="150000"/>
+              </a:lnSpc>
+            </a:pPr>
+            <a:endParaRPr lang="en-US" sz="1800" dirty="0">
+              <a:latin typeface="Times New Roman" panose="02020603050405020304" pitchFamily="18" charset="0"/>
+              <a:ea typeface="Times New Roman" panose="02020603050405020304" pitchFamily="18" charset="0"/>
+            </a:endParaRPr>
+          </a:p>
+          <a:p>
+            <a:pPr algn="just">
+              <a:lnSpc>
+                <a:spcPct val="150000"/>
+              </a:lnSpc>
+            </a:pPr>
+            <a:endParaRPr lang="ru-RU" sz="1800" dirty="0">
+              <a:effectLst/>
+              <a:latin typeface="Times New Roman" panose="02020603050405020304" pitchFamily="18" charset="0"/>
+              <a:ea typeface="Times New Roman" panose="02020603050405020304" pitchFamily="18" charset="0"/>
+            </a:endParaRPr>
           </a:p>
           <a:p>
             <a:pPr algn="just">
@@ -17613,7 +17705,7 @@
                 <a:latin typeface="Times New Roman" panose="02020603050405020304" pitchFamily="18" charset="0"/>
                 <a:ea typeface="Times New Roman" panose="02020603050405020304" pitchFamily="18" charset="0"/>
               </a:rPr>
-              <a:t> высокопроизводительных решений в удобной обёртке, например - динамической библиотеки, ориентированной исключительно на максимальную производительность вычислений клеточных автоматов.</a:t>
+              <a:t> высокопроизводительных решений в удобной обёртке, например, динамической библиотеки, ориентированной исключительно на максимальную производительность вычислений клеточных автоматов.</a:t>
             </a:r>
           </a:p>
         </p:txBody>
@@ -18614,7 +18706,7 @@
         <p:push dir="u"/>
       </p:transition>
     </mc:Choice>
-    <mc:Fallback xmlns="" xmlns:m="http://schemas.openxmlformats.org/officeDocument/2006/math" xmlns:w="http://schemas.openxmlformats.org/wordprocessingml/2006/main">
+    <mc:Fallback xmlns:w="http://schemas.openxmlformats.org/wordprocessingml/2006/main" xmlns:m="http://schemas.openxmlformats.org/officeDocument/2006/math" xmlns="">
       <p:transition spd="med" advClick="1">
         <p:push dir="u"/>
       </p:transition>
@@ -19853,7 +19945,7 @@
         <p:spPr bwMode="auto">
           <a:xfrm>
             <a:off x="208801" y="1119459"/>
-            <a:ext cx="6223013" cy="921984"/>
+            <a:ext cx="6235407" cy="921984"/>
           </a:xfrm>
           <a:prstGeom prst="rect">
             <a:avLst/>
@@ -20261,7 +20353,7 @@
         </p:nvSpPr>
         <p:spPr bwMode="auto">
           <a:xfrm>
-            <a:off x="153263" y="1271808"/>
+            <a:off x="104204" y="1635646"/>
             <a:ext cx="5774069" cy="2249077"/>
           </a:xfrm>
           <a:prstGeom prst="rect">
@@ -21408,7 +21500,7 @@
         <p:push dir="u"/>
       </p:transition>
     </mc:Choice>
-    <mc:Fallback xmlns="" xmlns:m="http://schemas.openxmlformats.org/officeDocument/2006/math" xmlns:w="http://schemas.openxmlformats.org/wordprocessingml/2006/main">
+    <mc:Fallback xmlns:w="http://schemas.openxmlformats.org/wordprocessingml/2006/main" xmlns:m="http://schemas.openxmlformats.org/officeDocument/2006/math" xmlns="">
       <p:transition spd="med" advClick="1">
         <p:push dir="u"/>
       </p:transition>
@@ -25122,7 +25214,7 @@
         <p:push dir="u"/>
       </p:transition>
     </mc:Choice>
-    <mc:Fallback xmlns="" xmlns:m="http://schemas.openxmlformats.org/officeDocument/2006/math" xmlns:w="http://schemas.openxmlformats.org/wordprocessingml/2006/main">
+    <mc:Fallback xmlns:w="http://schemas.openxmlformats.org/wordprocessingml/2006/main" xmlns:m="http://schemas.openxmlformats.org/officeDocument/2006/math" xmlns="">
       <p:transition spd="med" advClick="1">
         <p:push dir="u"/>
       </p:transition>

--- a/ВКР/ВКР.pptx
+++ b/ВКР/ВКР.pptx
@@ -4080,8 +4080,8 @@
         <c:manualLayout>
           <c:xMode val="edge"/>
           <c:yMode val="edge"/>
-          <c:x val="0.29418622272492673"/>
-          <c:y val="2.7777777777777776E-2"/>
+          <c:x val="0.28700490535630979"/>
+          <c:y val="2.2770104556602559E-3"/>
         </c:manualLayout>
       </c:layout>
       <c:overlay val="0"/>
@@ -4238,7 +4238,7 @@
           </c:val>
           <c:extLst>
             <c:ext xmlns:c16="http://schemas.microsoft.com/office/drawing/2014/chart" uri="{C3380CC4-5D6E-409C-BE32-E72D297353CC}">
-              <c16:uniqueId val="{00000000-C637-481B-9B8F-A891E0A2BD7D}"/>
+              <c16:uniqueId val="{00000000-B02C-4845-BA21-DBC7586FC196}"/>
             </c:ext>
           </c:extLst>
         </c:ser>
@@ -4294,7 +4294,7 @@
               <c:extLst>
                 <c:ext xmlns:c15="http://schemas.microsoft.com/office/drawing/2012/chart" uri="{CE6537A1-D6FC-4f65-9D91-7224C49458BB}"/>
                 <c:ext xmlns:c16="http://schemas.microsoft.com/office/drawing/2014/chart" uri="{C3380CC4-5D6E-409C-BE32-E72D297353CC}">
-                  <c16:uniqueId val="{00000001-C637-481B-9B8F-A891E0A2BD7D}"/>
+                  <c16:uniqueId val="{00000001-B02C-4845-BA21-DBC7586FC196}"/>
                 </c:ext>
               </c:extLst>
             </c:dLbl>
@@ -4315,7 +4315,7 @@
               <c:extLst>
                 <c:ext xmlns:c15="http://schemas.microsoft.com/office/drawing/2012/chart" uri="{CE6537A1-D6FC-4f65-9D91-7224C49458BB}"/>
                 <c:ext xmlns:c16="http://schemas.microsoft.com/office/drawing/2014/chart" uri="{C3380CC4-5D6E-409C-BE32-E72D297353CC}">
-                  <c16:uniqueId val="{00000002-C637-481B-9B8F-A891E0A2BD7D}"/>
+                  <c16:uniqueId val="{00000002-B02C-4845-BA21-DBC7586FC196}"/>
                 </c:ext>
               </c:extLst>
             </c:dLbl>
@@ -4336,7 +4336,7 @@
               <c:extLst>
                 <c:ext xmlns:c15="http://schemas.microsoft.com/office/drawing/2012/chart" uri="{CE6537A1-D6FC-4f65-9D91-7224C49458BB}"/>
                 <c:ext xmlns:c16="http://schemas.microsoft.com/office/drawing/2014/chart" uri="{C3380CC4-5D6E-409C-BE32-E72D297353CC}">
-                  <c16:uniqueId val="{00000003-C637-481B-9B8F-A891E0A2BD7D}"/>
+                  <c16:uniqueId val="{00000003-B02C-4845-BA21-DBC7586FC196}"/>
                 </c:ext>
               </c:extLst>
             </c:dLbl>
@@ -4357,7 +4357,7 @@
               <c:extLst>
                 <c:ext xmlns:c15="http://schemas.microsoft.com/office/drawing/2012/chart" uri="{CE6537A1-D6FC-4f65-9D91-7224C49458BB}"/>
                 <c:ext xmlns:c16="http://schemas.microsoft.com/office/drawing/2014/chart" uri="{C3380CC4-5D6E-409C-BE32-E72D297353CC}">
-                  <c16:uniqueId val="{00000004-C637-481B-9B8F-A891E0A2BD7D}"/>
+                  <c16:uniqueId val="{00000004-B02C-4845-BA21-DBC7586FC196}"/>
                 </c:ext>
               </c:extLst>
             </c:dLbl>
@@ -4461,7 +4461,7 @@
           <c:smooth val="0"/>
           <c:extLst>
             <c:ext xmlns:c16="http://schemas.microsoft.com/office/drawing/2014/chart" uri="{C3380CC4-5D6E-409C-BE32-E72D297353CC}">
-              <c16:uniqueId val="{00000005-C637-481B-9B8F-A891E0A2BD7D}"/>
+              <c16:uniqueId val="{00000005-B02C-4845-BA21-DBC7586FC196}"/>
             </c:ext>
           </c:extLst>
         </c:ser>
@@ -4588,6 +4588,8 @@
         <c:axId val="165941487"/>
         <c:scaling>
           <c:orientation val="minMax"/>
+          <c:max val="831958"/>
+          <c:min val="0"/>
         </c:scaling>
         <c:delete val="0"/>
         <c:axPos val="l"/>
@@ -4704,9 +4706,25 @@
         <c:axId val="463573823"/>
         <c:scaling>
           <c:orientation val="minMax"/>
+          <c:max val="1"/>
+          <c:min val="0"/>
         </c:scaling>
         <c:delete val="0"/>
         <c:axPos val="r"/>
+        <c:majorGridlines>
+          <c:spPr>
+            <a:ln w="12700" cap="flat" cmpd="sng" algn="ctr">
+              <a:solidFill>
+                <a:srgbClr val="FF0000">
+                  <a:alpha val="30000"/>
+                </a:srgbClr>
+              </a:solidFill>
+              <a:prstDash val="dash"/>
+              <a:round/>
+            </a:ln>
+            <a:effectLst/>
+          </c:spPr>
+        </c:majorGridlines>
         <c:numFmt formatCode="0%" sourceLinked="0"/>
         <c:majorTickMark val="out"/>
         <c:minorTickMark val="none"/>
@@ -4741,6 +4759,7 @@
         <c:crossAx val="463574655"/>
         <c:crosses val="max"/>
         <c:crossBetween val="between"/>
+        <c:majorUnit val="0.2"/>
       </c:valAx>
       <c:catAx>
         <c:axId val="463574655"/>
@@ -17325,27 +17344,25 @@
       </p:grpSp>
       <p:graphicFrame>
         <p:nvGraphicFramePr>
-          <p:cNvPr id="15" name="Диаграмма 14">
+          <p:cNvPr id="16" name="Диаграмма 15">
             <a:extLst>
               <a:ext uri="{FF2B5EF4-FFF2-40B4-BE49-F238E27FC236}">
                 <a16:creationId xmlns:a16="http://schemas.microsoft.com/office/drawing/2014/main" id="{C04C1FFD-EAA0-40CA-BFE9-5D28C0D621BA}"/>
               </a:ext>
             </a:extLst>
           </p:cNvPr>
-          <p:cNvGraphicFramePr>
-            <a:graphicFrameLocks/>
-          </p:cNvGraphicFramePr>
+          <p:cNvGraphicFramePr/>
           <p:nvPr>
             <p:extLst>
               <p:ext uri="{D42A27DB-BD31-4B8C-83A1-F6EECF244321}">
-                <p14:modId xmlns:p14="http://schemas.microsoft.com/office/powerpoint/2010/main" val="3062860844"/>
+                <p14:modId xmlns:p14="http://schemas.microsoft.com/office/powerpoint/2010/main" val="3809502444"/>
               </p:ext>
             </p:extLst>
           </p:nvPr>
         </p:nvGraphicFramePr>
         <p:xfrm>
-          <a:off x="4081066" y="1384671"/>
-          <a:ext cx="4985198" cy="3127600"/>
+          <a:off x="3765279" y="1059582"/>
+          <a:ext cx="5305425" cy="3486150"/>
         </p:xfrm>
         <a:graphic>
           <a:graphicData uri="http://schemas.openxmlformats.org/drawingml/2006/chart">
@@ -17437,8 +17454,8 @@
         </p:nvSpPr>
         <p:spPr bwMode="auto">
           <a:xfrm>
-            <a:off x="251520" y="1227675"/>
-            <a:ext cx="8496944" cy="2680477"/>
+            <a:off x="323527" y="1762362"/>
+            <a:ext cx="8496944" cy="1618776"/>
           </a:xfrm>
           <a:prstGeom prst="rect">
             <a:avLst/>
@@ -17462,59 +17479,21 @@
                 <a:latin typeface="Times New Roman" panose="02020603050405020304" pitchFamily="18" charset="0"/>
                 <a:cs typeface="Times New Roman" panose="02020603050405020304" pitchFamily="18" charset="0"/>
               </a:rPr>
-              <a:t>Поставленная цель достигнута</a:t>
+              <a:t>Обеспечены высокопроизводительные вычисления благодаря динамической библиотеке на </a:t>
             </a:r>
             <a:r>
               <a:rPr lang="en-US" sz="2400" dirty="0">
                 <a:latin typeface="Times New Roman" panose="02020603050405020304" pitchFamily="18" charset="0"/>
                 <a:cs typeface="Times New Roman" panose="02020603050405020304" pitchFamily="18" charset="0"/>
               </a:rPr>
-              <a:t>;</a:t>
+              <a:t>C++</a:t>
             </a:r>
-            <a:endParaRPr lang="ru-RU" sz="2400" dirty="0">
-              <a:latin typeface="Times New Roman" panose="02020603050405020304" pitchFamily="18" charset="0"/>
-              <a:cs typeface="Times New Roman" panose="02020603050405020304" pitchFamily="18" charset="0"/>
-            </a:endParaRPr>
-          </a:p>
-          <a:p>
-            <a:pPr>
-              <a:lnSpc>
-                <a:spcPct val="150000"/>
-              </a:lnSpc>
-              <a:defRPr/>
-            </a:pPr>
             <a:r>
               <a:rPr lang="ru-RU" sz="2400" dirty="0">
                 <a:latin typeface="Times New Roman" panose="02020603050405020304" pitchFamily="18" charset="0"/>
                 <a:cs typeface="Times New Roman" panose="02020603050405020304" pitchFamily="18" charset="0"/>
               </a:rPr>
-              <a:t>Итоговая производительность библиотеки оказалась выше базовой реализации в 86 раз</a:t>
-            </a:r>
-            <a:r>
-              <a:rPr lang="en-US" sz="2400" dirty="0">
-                <a:latin typeface="Times New Roman" panose="02020603050405020304" pitchFamily="18" charset="0"/>
-                <a:cs typeface="Times New Roman" panose="02020603050405020304" pitchFamily="18" charset="0"/>
-              </a:rPr>
-              <a:t>;</a:t>
-            </a:r>
-            <a:endParaRPr lang="ru-RU" sz="2400" dirty="0">
-              <a:latin typeface="Times New Roman" panose="02020603050405020304" pitchFamily="18" charset="0"/>
-              <a:cs typeface="Times New Roman" panose="02020603050405020304" pitchFamily="18" charset="0"/>
-            </a:endParaRPr>
-          </a:p>
-          <a:p>
-            <a:pPr>
-              <a:lnSpc>
-                <a:spcPct val="150000"/>
-              </a:lnSpc>
-              <a:defRPr/>
-            </a:pPr>
-            <a:r>
-              <a:rPr lang="ru-RU" sz="2400" dirty="0">
-                <a:latin typeface="Times New Roman" panose="02020603050405020304" pitchFamily="18" charset="0"/>
-                <a:cs typeface="Times New Roman" panose="02020603050405020304" pitchFamily="18" charset="0"/>
-              </a:rPr>
-              <a:t>Обеспечены высокопроизводительные вычисления благодаря библиотеке.</a:t>
+              <a:t>, которая позволила уменьшить время выполнения в 86 раз.</a:t>
             </a:r>
           </a:p>
         </p:txBody>
@@ -18706,7 +18685,7 @@
         <p:push dir="u"/>
       </p:transition>
     </mc:Choice>
-    <mc:Fallback xmlns:w="http://schemas.openxmlformats.org/wordprocessingml/2006/main" xmlns:m="http://schemas.openxmlformats.org/officeDocument/2006/math" xmlns="">
+    <mc:Fallback xmlns="" xmlns:m="http://schemas.openxmlformats.org/officeDocument/2006/math" xmlns:w="http://schemas.openxmlformats.org/wordprocessingml/2006/main">
       <p:transition spd="med" advClick="1">
         <p:push dir="u"/>
       </p:transition>
@@ -21429,66 +21408,6 @@
           </p:txBody>
         </p:sp>
       </p:grpSp>
-      <p:pic>
-        <p:nvPicPr>
-          <p:cNvPr id="5" name="Рисунок 4">
-            <a:extLst>
-              <a:ext uri="{FF2B5EF4-FFF2-40B4-BE49-F238E27FC236}">
-                <a16:creationId xmlns:a16="http://schemas.microsoft.com/office/drawing/2014/main" id="{532BB6DC-D362-4554-A40A-A9A98771F442}"/>
-              </a:ext>
-            </a:extLst>
-          </p:cNvPr>
-          <p:cNvPicPr>
-            <a:picLocks noChangeAspect="1"/>
-          </p:cNvPicPr>
-          <p:nvPr/>
-        </p:nvPicPr>
-        <p:blipFill>
-          <a:blip r:embed="rId3"/>
-          <a:stretch>
-            <a:fillRect/>
-          </a:stretch>
-        </p:blipFill>
-        <p:spPr>
-          <a:xfrm>
-            <a:off x="6660232" y="572926"/>
-            <a:ext cx="1515852" cy="1707654"/>
-          </a:xfrm>
-          <a:prstGeom prst="rect">
-            <a:avLst/>
-          </a:prstGeom>
-        </p:spPr>
-      </p:pic>
-      <p:pic>
-        <p:nvPicPr>
-          <p:cNvPr id="8" name="Рисунок 7">
-            <a:extLst>
-              <a:ext uri="{FF2B5EF4-FFF2-40B4-BE49-F238E27FC236}">
-                <a16:creationId xmlns:a16="http://schemas.microsoft.com/office/drawing/2014/main" id="{BA2841FA-320A-46A1-B9EF-2F2800854426}"/>
-              </a:ext>
-            </a:extLst>
-          </p:cNvPr>
-          <p:cNvPicPr>
-            <a:picLocks noChangeAspect="1"/>
-          </p:cNvPicPr>
-          <p:nvPr/>
-        </p:nvPicPr>
-        <p:blipFill>
-          <a:blip r:embed="rId4"/>
-          <a:stretch>
-            <a:fillRect/>
-          </a:stretch>
-        </p:blipFill>
-        <p:spPr>
-          <a:xfrm>
-            <a:off x="5508104" y="2571750"/>
-            <a:ext cx="2173645" cy="1995686"/>
-          </a:xfrm>
-          <a:prstGeom prst="rect">
-            <a:avLst/>
-          </a:prstGeom>
-        </p:spPr>
-      </p:pic>
     </p:spTree>
   </p:cSld>
   <p:clrMapOvr>
@@ -21500,7 +21419,7 @@
         <p:push dir="u"/>
       </p:transition>
     </mc:Choice>
-    <mc:Fallback xmlns:w="http://schemas.openxmlformats.org/wordprocessingml/2006/main" xmlns:m="http://schemas.openxmlformats.org/officeDocument/2006/math" xmlns="">
+    <mc:Fallback xmlns="" xmlns:m="http://schemas.openxmlformats.org/officeDocument/2006/math" xmlns:w="http://schemas.openxmlformats.org/wordprocessingml/2006/main">
       <p:transition spd="med" advClick="1">
         <p:push dir="u"/>
       </p:transition>
@@ -25214,7 +25133,7 @@
         <p:push dir="u"/>
       </p:transition>
     </mc:Choice>
-    <mc:Fallback xmlns:w="http://schemas.openxmlformats.org/wordprocessingml/2006/main" xmlns:m="http://schemas.openxmlformats.org/officeDocument/2006/math" xmlns="">
+    <mc:Fallback xmlns="" xmlns:m="http://schemas.openxmlformats.org/officeDocument/2006/math" xmlns:w="http://schemas.openxmlformats.org/wordprocessingml/2006/main">
       <p:transition spd="med" advClick="1">
         <p:push dir="u"/>
       </p:transition>

--- a/ВКР/ВКР.pptx
+++ b/ВКР/ВКР.pptx
@@ -4323,8 +4323,8 @@
               <c:idx val="2"/>
               <c:layout>
                 <c:manualLayout>
-                  <c:x val="2.7892777527645696E-3"/>
-                  <c:y val="-6.0185185185185272E-2"/>
+                  <c:x val="1.2364325195436746E-2"/>
+                  <c:y val="-7.1114266454398251E-2"/>
                 </c:manualLayout>
               </c:layout>
               <c:showLegendKey val="0"/>
@@ -17355,7 +17355,7 @@
           <p:nvPr>
             <p:extLst>
               <p:ext uri="{D42A27DB-BD31-4B8C-83A1-F6EECF244321}">
-                <p14:modId xmlns:p14="http://schemas.microsoft.com/office/powerpoint/2010/main" val="3809502444"/>
+                <p14:modId xmlns:p14="http://schemas.microsoft.com/office/powerpoint/2010/main" val="1854584483"/>
               </p:ext>
             </p:extLst>
           </p:nvPr>
@@ -17454,8 +17454,8 @@
         </p:nvSpPr>
         <p:spPr bwMode="auto">
           <a:xfrm>
-            <a:off x="323527" y="1762362"/>
-            <a:ext cx="8496944" cy="1618776"/>
+            <a:off x="395536" y="1762362"/>
+            <a:ext cx="8352929" cy="1618776"/>
           </a:xfrm>
           <a:prstGeom prst="rect">
             <a:avLst/>
@@ -17479,21 +17479,7 @@
                 <a:latin typeface="Times New Roman" panose="02020603050405020304" pitchFamily="18" charset="0"/>
                 <a:cs typeface="Times New Roman" panose="02020603050405020304" pitchFamily="18" charset="0"/>
               </a:rPr>
-              <a:t>Обеспечены высокопроизводительные вычисления благодаря динамической библиотеке на </a:t>
-            </a:r>
-            <a:r>
-              <a:rPr lang="en-US" sz="2400" dirty="0">
-                <a:latin typeface="Times New Roman" panose="02020603050405020304" pitchFamily="18" charset="0"/>
-                <a:cs typeface="Times New Roman" panose="02020603050405020304" pitchFamily="18" charset="0"/>
-              </a:rPr>
-              <a:t>C++</a:t>
-            </a:r>
-            <a:r>
-              <a:rPr lang="ru-RU" sz="2400" dirty="0">
-                <a:latin typeface="Times New Roman" panose="02020603050405020304" pitchFamily="18" charset="0"/>
-                <a:cs typeface="Times New Roman" panose="02020603050405020304" pitchFamily="18" charset="0"/>
-              </a:rPr>
-              <a:t>, которая позволила уменьшить время выполнения в 86 раз.</a:t>
+              <a:t>Динамическая библиотека на C++ позволила достичь ускорение в 86 раз, что обеспечило высокую производительность вычислений клеточных автоматов.</a:t>
             </a:r>
           </a:p>
         </p:txBody>
@@ -17586,7 +17572,7 @@
         </p:nvSpPr>
         <p:spPr bwMode="auto">
           <a:xfrm>
-            <a:off x="114946" y="1156715"/>
+            <a:off x="107504" y="1156715"/>
             <a:ext cx="8928992" cy="2830070"/>
           </a:xfrm>
           <a:prstGeom prst="rect">
@@ -18685,7 +18671,7 @@
         <p:push dir="u"/>
       </p:transition>
     </mc:Choice>
-    <mc:Fallback xmlns="" xmlns:m="http://schemas.openxmlformats.org/officeDocument/2006/math" xmlns:w="http://schemas.openxmlformats.org/wordprocessingml/2006/main">
+    <mc:Fallback xmlns:w="http://schemas.openxmlformats.org/wordprocessingml/2006/main" xmlns:m="http://schemas.openxmlformats.org/officeDocument/2006/math" xmlns="">
       <p:transition spd="med" advClick="1">
         <p:push dir="u"/>
       </p:transition>
@@ -21419,7 +21405,7 @@
         <p:push dir="u"/>
       </p:transition>
     </mc:Choice>
-    <mc:Fallback xmlns="" xmlns:m="http://schemas.openxmlformats.org/officeDocument/2006/math" xmlns:w="http://schemas.openxmlformats.org/wordprocessingml/2006/main">
+    <mc:Fallback xmlns:w="http://schemas.openxmlformats.org/wordprocessingml/2006/main" xmlns:m="http://schemas.openxmlformats.org/officeDocument/2006/math" xmlns="">
       <p:transition spd="med" advClick="1">
         <p:push dir="u"/>
       </p:transition>
@@ -22783,14 +22769,7 @@
                 <a:latin typeface="Times New Roman" panose="02020603050405020304" pitchFamily="18" charset="0"/>
                 <a:cs typeface="Times New Roman" panose="02020603050405020304" pitchFamily="18" charset="0"/>
               </a:rPr>
-              <a:t> для соответствующей клетке согласно количеству соседей</a:t>
-            </a:r>
-            <a:r>
-              <a:rPr lang="en-US" sz="2000" dirty="0">
-                <a:latin typeface="Times New Roman" panose="02020603050405020304" pitchFamily="18" charset="0"/>
-                <a:cs typeface="Times New Roman" panose="02020603050405020304" pitchFamily="18" charset="0"/>
-              </a:rPr>
-              <a:t>;</a:t>
+              <a:t> для соответствующей клетки согласно количеству соседей.</a:t>
             </a:r>
             <a:endParaRPr sz="2000" dirty="0">
               <a:latin typeface="Times New Roman" panose="02020603050405020304" pitchFamily="18" charset="0"/>
@@ -25133,7 +25112,7 @@
         <p:push dir="u"/>
       </p:transition>
     </mc:Choice>
-    <mc:Fallback xmlns="" xmlns:m="http://schemas.openxmlformats.org/officeDocument/2006/math" xmlns:w="http://schemas.openxmlformats.org/wordprocessingml/2006/main">
+    <mc:Fallback xmlns:w="http://schemas.openxmlformats.org/wordprocessingml/2006/main" xmlns:m="http://schemas.openxmlformats.org/officeDocument/2006/math" xmlns="">
       <p:transition spd="med" advClick="1">
         <p:push dir="u"/>
       </p:transition>
